--- a/tradicional/INFORME_TRADICIONAL.pptx
+++ b/tradicional/INFORME_TRADICIONAL.pptx
@@ -4,16 +4,16 @@
   <p:sldMasterIdLst>
     <p:sldMasterId id="2147483648" r:id="rId1"/>
   </p:sldMasterIdLst>
+  <p:notesMasterIdLst>
+    <p:notesMasterId r:id="rId5"/>
+  </p:notesMasterIdLst>
   <p:sldIdLst>
     <p:sldId id="256" r:id="rId2"/>
     <p:sldId id="257" r:id="rId3"/>
     <p:sldId id="258" r:id="rId4"/>
   </p:sldIdLst>
-  <p:notesMasterIdLst>
-    <p:notesMasterId r:id="rId5"/>
-  </p:notesMasterIdLst>
-  <p:sldSz cx="12191695" cy="6858000"/>
-  <p:notesSz cx="6858000" cy="12191695"/>
+  <p:sldSz cx="12192000" cy="6858000"/>
+  <p:notesSz cx="6858000" cy="12192000"/>
   <p:defaultTextStyle>
     <a:lvl1pPr marL="0" algn="l" defTabSz="914400" rtl="0" eaLnBrk="1" latinLnBrk="0" hangingPunct="1">
       <a:defRPr sz="1800" kern="1200">
@@ -106,6 +106,11 @@
       </a:defRPr>
     </a:lvl9pPr>
   </p:defaultTextStyle>
+  <p:extLst>
+    <p:ext uri="{EFAFB233-063F-42B5-8137-9DF3F51BA10A}">
+      <p15:sldGuideLst xmlns:p15="http://schemas.microsoft.com/office/powerpoint/2012/main"/>
+    </p:ext>
+  </p:extLst>
 </p:presentation>
 </file>
 
@@ -131,234 +136,10 @@
           <a:chExt cx="0" cy="0"/>
         </a:xfrm>
       </p:grpSpPr>
-      <p:sp>
-        <p:nvSpPr>
-          <p:cNvPr id="2" name="Header Placeholder 1"/>
-          <p:cNvSpPr>
-            <a:spLocks noGrp="1"/>
-          </p:cNvSpPr>
-          <p:nvPr>
-            <p:ph type="hdr" sz="quarter"/>
-          </p:nvPr>
-        </p:nvSpPr>
-        <p:spPr>
-          <a:xfrm>
-            <a:off x="0" y="0"/>
-            <a:ext cx="2971800" cy="458788"/>
-          </a:xfrm>
-          <a:prstGeom prst="rect">
-            <a:avLst/>
-          </a:prstGeom>
-        </p:spPr>
-        <p:txBody>
-          <a:bodyPr vert="horz" lIns="91440" tIns="45720" rIns="91440" bIns="45720" rtlCol="0"/>
-          <a:lstStyle>
-            <a:lvl1pPr algn="l">
-              <a:defRPr sz="1200"/>
-            </a:lvl1pPr>
-          </a:lstStyle>
-          <a:p>
-            <a:endParaRPr lang="en-US"/>
-          </a:p>
-        </p:txBody>
-      </p:sp>
-      <p:sp>
-        <p:nvSpPr>
-          <p:cNvPr id="3" name="Date Placeholder 2"/>
-          <p:cNvSpPr>
-            <a:spLocks noGrp="1"/>
-          </p:cNvSpPr>
-          <p:nvPr>
-            <p:ph type="dt" idx="1"/>
-          </p:nvPr>
-        </p:nvSpPr>
-        <p:spPr>
-          <a:xfrm>
-            <a:off x="3884613" y="0"/>
-            <a:ext cx="2971800" cy="458788"/>
-          </a:xfrm>
-          <a:prstGeom prst="rect">
-            <a:avLst/>
-          </a:prstGeom>
-        </p:spPr>
-        <p:txBody>
-          <a:bodyPr vert="horz" lIns="91440" tIns="45720" rIns="91440" bIns="45720" rtlCol="0"/>
-          <a:lstStyle>
-            <a:lvl1pPr algn="r">
-              <a:defRPr sz="1200"/>
-            </a:lvl1pPr>
-          </a:lstStyle>
-          <a:p>
-            <a:fld id="{5282F153-3F37-0F45-9E97-73ACFA13230C}" type="datetimeFigureOut">
-              <a:rPr lang="en-US"/>
-              <a:t>7/23/19</a:t>
-            </a:fld>
-            <a:endParaRPr lang="en-US"/>
-          </a:p>
-        </p:txBody>
-      </p:sp>
-      <p:sp>
-        <p:nvSpPr>
-          <p:cNvPr id="4" name="Slide Image Placeholder 3"/>
-          <p:cNvSpPr>
-            <a:spLocks noGrp="1" noRot="1" noChangeAspect="1"/>
-          </p:cNvSpPr>
-          <p:nvPr>
-            <p:ph type="sldImg" idx="2"/>
-          </p:nvPr>
-        </p:nvSpPr>
-        <p:spPr>
-          <a:xfrm>
-            <a:off x="685800" y="1143000"/>
-            <a:ext cx="5486400" cy="3086100"/>
-          </a:xfrm>
-          <a:prstGeom prst="rect">
-            <a:avLst/>
-          </a:prstGeom>
-          <a:noFill/>
-          <a:ln w="12700">
-            <a:solidFill>
-              <a:prstClr val="black"/>
-            </a:solidFill>
-          </a:ln>
-        </p:spPr>
-        <p:txBody>
-          <a:bodyPr vert="horz" lIns="91440" tIns="45720" rIns="91440" bIns="45720" rtlCol="0" anchor="ctr"/>
-          <a:lstStyle/>
-          <a:p>
-            <a:endParaRPr lang="en-US"/>
-          </a:p>
-        </p:txBody>
-      </p:sp>
-      <p:sp>
-        <p:nvSpPr>
-          <p:cNvPr id="5" name="Notes Placeholder 4"/>
-          <p:cNvSpPr>
-            <a:spLocks noGrp="1"/>
-          </p:cNvSpPr>
-          <p:nvPr>
-            <p:ph type="body" sz="quarter" idx="3"/>
-          </p:nvPr>
-        </p:nvSpPr>
-        <p:spPr>
-          <a:xfrm>
-            <a:off x="685800" y="4400550"/>
-            <a:ext cx="5486400" cy="3600450"/>
-          </a:xfrm>
-          <a:prstGeom prst="rect">
-            <a:avLst/>
-          </a:prstGeom>
-        </p:spPr>
-        <p:txBody>
-          <a:bodyPr vert="horz" lIns="91440" tIns="45720" rIns="91440" bIns="45720" rtlCol="0"/>
-          <a:lstStyle/>
-          <a:p>
-            <a:pPr lvl="0"/>
-            <a:r>
-              <a:rPr lang="en-US"/>
-              <a:t>Click to edit Master text styles</a:t>
-            </a:r>
-          </a:p>
-          <a:p>
-            <a:pPr lvl="1"/>
-            <a:r>
-              <a:rPr lang="en-US"/>
-              <a:t>Second level</a:t>
-            </a:r>
-          </a:p>
-          <a:p>
-            <a:pPr lvl="2"/>
-            <a:r>
-              <a:rPr lang="en-US"/>
-              <a:t>Third level</a:t>
-            </a:r>
-          </a:p>
-          <a:p>
-            <a:pPr lvl="3"/>
-            <a:r>
-              <a:rPr lang="en-US"/>
-              <a:t>Fourth level</a:t>
-            </a:r>
-          </a:p>
-          <a:p>
-            <a:pPr lvl="4"/>
-            <a:r>
-              <a:rPr lang="en-US"/>
-              <a:t>Fifth level</a:t>
-            </a:r>
-          </a:p>
-        </p:txBody>
-      </p:sp>
-      <p:sp>
-        <p:nvSpPr>
-          <p:cNvPr id="6" name="Footer Placeholder 5"/>
-          <p:cNvSpPr>
-            <a:spLocks noGrp="1"/>
-          </p:cNvSpPr>
-          <p:nvPr>
-            <p:ph type="ftr" sz="quarter" idx="4"/>
-          </p:nvPr>
-        </p:nvSpPr>
-        <p:spPr>
-          <a:xfrm>
-            <a:off x="0" y="8685213"/>
-            <a:ext cx="2971800" cy="458787"/>
-          </a:xfrm>
-          <a:prstGeom prst="rect">
-            <a:avLst/>
-          </a:prstGeom>
-        </p:spPr>
-        <p:txBody>
-          <a:bodyPr vert="horz" lIns="91440" tIns="45720" rIns="91440" bIns="45720" rtlCol="0" anchor="b"/>
-          <a:lstStyle>
-            <a:lvl1pPr algn="l">
-              <a:defRPr sz="1200"/>
-            </a:lvl1pPr>
-          </a:lstStyle>
-          <a:p>
-            <a:endParaRPr lang="en-US"/>
-          </a:p>
-        </p:txBody>
-      </p:sp>
-      <p:sp>
-        <p:nvSpPr>
-          <p:cNvPr id="7" name="Slide Number Placeholder 6"/>
-          <p:cNvSpPr>
-            <a:spLocks noGrp="1"/>
-          </p:cNvSpPr>
-          <p:nvPr>
-            <p:ph type="sldNum" sz="quarter" idx="5"/>
-          </p:nvPr>
-        </p:nvSpPr>
-        <p:spPr>
-          <a:xfrm>
-            <a:off x="3884613" y="8685213"/>
-            <a:ext cx="2971800" cy="458787"/>
-          </a:xfrm>
-          <a:prstGeom prst="rect">
-            <a:avLst/>
-          </a:prstGeom>
-        </p:spPr>
-        <p:txBody>
-          <a:bodyPr vert="horz" lIns="91440" tIns="45720" rIns="91440" bIns="45720" rtlCol="0" anchor="b"/>
-          <a:lstStyle>
-            <a:lvl1pPr algn="r">
-              <a:defRPr sz="1200"/>
-            </a:lvl1pPr>
-          </a:lstStyle>
-          <a:p>
-            <a:fld id="{CE5E9CC1-C706-0F49-92D6-E571CC5EEA8F}" type="slidenum">
-              <a:rPr lang="en-US"/>
-              <a:t>‹#›</a:t>
-            </a:fld>
-            <a:endParaRPr lang="en-US"/>
-          </a:p>
-        </p:txBody>
-      </p:sp>
     </p:spTree>
     <p:extLst>
       <p:ext uri="{BB962C8B-B14F-4D97-AF65-F5344CB8AC3E}">
-        <p14:creationId xmlns:p14="http://schemas.microsoft.com/office/powerpoint/2010/main" val="1024086991"/>
+        <p14:creationId xmlns:p14="http://schemas.microsoft.com/office/powerpoint/2010/main" val="2592517362"/>
       </p:ext>
     </p:extLst>
   </p:cSld>
@@ -502,10 +283,6 @@
           <a:bodyPr/>
           <a:lstStyle/>
           <a:p>
-            <a:r>
-              <a:rPr lang="en-US" dirty="0"/>
-              <a:t/>
-            </a:r>
             <a:endParaRPr lang="en-US" dirty="0"/>
           </a:p>
         </p:txBody>
@@ -590,10 +367,6 @@
           <a:bodyPr/>
           <a:lstStyle/>
           <a:p>
-            <a:r>
-              <a:rPr lang="en-US" dirty="0"/>
-              <a:t/>
-            </a:r>
             <a:endParaRPr lang="en-US" dirty="0"/>
           </a:p>
         </p:txBody>
@@ -678,10 +451,6 @@
           <a:bodyPr/>
           <a:lstStyle/>
           <a:p>
-            <a:r>
-              <a:rPr lang="en-US" dirty="0"/>
-              <a:t/>
-            </a:r>
             <a:endParaRPr lang="en-US" dirty="0"/>
           </a:p>
         </p:txBody>
@@ -755,6 +524,11 @@
 <file path=ppt/slideMasters/slideMaster1.xml><?xml version="1.0" encoding="utf-8"?>
 <p:sldMaster xmlns:a="http://schemas.openxmlformats.org/drawingml/2006/main" xmlns:r="http://schemas.openxmlformats.org/officeDocument/2006/relationships" xmlns:p="http://schemas.openxmlformats.org/presentationml/2006/main">
   <p:cSld>
+    <p:bg>
+      <p:bgRef idx="1001">
+        <a:schemeClr val="bg1"/>
+      </p:bgRef>
+    </p:bg>
     <p:spTree>
       <p:nvGrpSpPr>
         <p:cNvPr id="1" name=""/>
@@ -1048,14 +822,14 @@
       </p:grpSpPr>
       <p:pic>
         <p:nvPicPr>
-          <p:cNvPr id="2" name="Image 0" descr="C:\01_Repositorios\02_CRM\02_Informe_Semetral\dash\tradicional\ppt_slides\sk_00_main.png">    </p:cNvPr>
+          <p:cNvPr id="2" name="Image 0" descr="C:\01_Repositorios\02_CRM\02_Informe_Semetral\dash\tradicional\ppt_slides\sk_00_main.png"/>
           <p:cNvPicPr>
             <a:picLocks noChangeAspect="1"/>
           </p:cNvPicPr>
           <p:nvPr/>
         </p:nvPicPr>
         <p:blipFill>
-          <a:blip r:embed="rId1"/>
+          <a:blip r:embed="rId3"/>
           <a:stretch>
             <a:fillRect/>
           </a:stretch>
@@ -1091,7 +865,7 @@
           <a:bodyPr wrap="square" lIns="0" tIns="0" rIns="0" bIns="0" rtlCol="0" anchor="t"/>
           <a:lstStyle/>
           <a:p>
-            <a:pPr algn="l" indent="0" marL="0">
+            <a:pPr marL="0" indent="0" algn="l">
               <a:buNone/>
             </a:pPr>
             <a:r>
@@ -1130,7 +904,7 @@
           <a:bodyPr wrap="square" lIns="0" tIns="0" rIns="0" bIns="0" rtlCol="0" anchor="t"/>
           <a:lstStyle/>
           <a:p>
-            <a:pPr algn="l" indent="0" marL="0">
+            <a:pPr marL="0" indent="0" algn="l">
               <a:buNone/>
             </a:pPr>
             <a:r>
@@ -1169,7 +943,7 @@
           <a:bodyPr wrap="square" lIns="0" tIns="0" rIns="0" bIns="0" rtlCol="0" anchor="t"/>
           <a:lstStyle/>
           <a:p>
-            <a:pPr algn="l" indent="0" marL="0">
+            <a:pPr marL="0" indent="0" algn="l">
               <a:buNone/>
             </a:pPr>
             <a:r>
@@ -1208,7 +982,7 @@
           <a:bodyPr wrap="square" lIns="0" tIns="0" rIns="0" bIns="0" rtlCol="0" anchor="t"/>
           <a:lstStyle/>
           <a:p>
-            <a:pPr algn="l" indent="0" marL="0">
+            <a:pPr marL="0" indent="0" algn="l">
               <a:buNone/>
             </a:pPr>
             <a:r>
@@ -1247,7 +1021,7 @@
           <a:bodyPr wrap="square" lIns="0" tIns="0" rIns="0" bIns="0" rtlCol="0" anchor="t"/>
           <a:lstStyle/>
           <a:p>
-            <a:pPr algn="l" indent="0" marL="0">
+            <a:pPr marL="0" indent="0" algn="l">
               <a:buNone/>
             </a:pPr>
             <a:r>
@@ -1286,7 +1060,7 @@
           <a:bodyPr wrap="square" lIns="0" tIns="0" rIns="0" bIns="0" rtlCol="0" anchor="t"/>
           <a:lstStyle/>
           <a:p>
-            <a:pPr algn="l" indent="0" marL="0">
+            <a:pPr marL="0" indent="0" algn="l">
               <a:buNone/>
             </a:pPr>
             <a:r>
@@ -1325,7 +1099,7 @@
           <a:bodyPr wrap="square" lIns="0" tIns="0" rIns="0" bIns="0" rtlCol="0" anchor="t"/>
           <a:lstStyle/>
           <a:p>
-            <a:pPr algn="l" indent="0" marL="0">
+            <a:pPr marL="0" indent="0" algn="l">
               <a:buNone/>
             </a:pPr>
             <a:r>
@@ -1364,7 +1138,7 @@
           <a:bodyPr wrap="square" lIns="0" tIns="0" rIns="0" bIns="0" rtlCol="0" anchor="t"/>
           <a:lstStyle/>
           <a:p>
-            <a:pPr algn="l" indent="0" marL="0">
+            <a:pPr marL="0" indent="0" algn="l">
               <a:buNone/>
             </a:pPr>
             <a:r>
@@ -1403,7 +1177,7 @@
           <a:bodyPr wrap="square" lIns="0" tIns="0" rIns="0" bIns="0" rtlCol="0" anchor="t"/>
           <a:lstStyle/>
           <a:p>
-            <a:pPr algn="l" indent="0" marL="0">
+            <a:pPr marL="0" indent="0" algn="l">
               <a:buNone/>
             </a:pPr>
             <a:r>
@@ -1442,7 +1216,7 @@
           <a:bodyPr wrap="square" lIns="0" tIns="0" rIns="0" bIns="0" rtlCol="0" anchor="t"/>
           <a:lstStyle/>
           <a:p>
-            <a:pPr algn="l" indent="0" marL="0">
+            <a:pPr marL="0" indent="0" algn="l">
               <a:buNone/>
             </a:pPr>
             <a:r>
@@ -1468,7 +1242,7 @@
         </p:nvSpPr>
         <p:spPr>
           <a:xfrm>
-            <a:off x="2639713" y="2364135"/>
+            <a:off x="2639713" y="2321005"/>
             <a:ext cx="1951371" cy="133350"/>
           </a:xfrm>
           <a:prstGeom prst="rect">
@@ -1481,7 +1255,7 @@
           <a:bodyPr wrap="square" lIns="0" tIns="114300" rIns="114300" bIns="0" rtlCol="0" anchor="ctr"/>
           <a:lstStyle/>
           <a:p>
-            <a:pPr algn="r" indent="0" marL="0">
+            <a:pPr marL="0" indent="0" algn="r">
               <a:buNone/>
             </a:pPr>
             <a:r>
@@ -1507,7 +1281,7 @@
         </p:nvSpPr>
         <p:spPr>
           <a:xfrm>
-            <a:off x="4552513" y="2364135"/>
+            <a:off x="4552513" y="2321005"/>
             <a:ext cx="1324265" cy="133350"/>
           </a:xfrm>
           <a:prstGeom prst="rect">
@@ -1520,7 +1294,7 @@
           <a:bodyPr wrap="square" lIns="0" tIns="114300" rIns="114300" bIns="0" rtlCol="0" anchor="ctr"/>
           <a:lstStyle/>
           <a:p>
-            <a:pPr algn="r" indent="0" marL="0">
+            <a:pPr marL="0" indent="0" algn="r">
               <a:buNone/>
             </a:pPr>
             <a:r>
@@ -1559,7 +1333,7 @@
           <a:bodyPr wrap="square" lIns="0" tIns="114300" rIns="114300" bIns="0" rtlCol="0" anchor="ctr"/>
           <a:lstStyle/>
           <a:p>
-            <a:pPr algn="l" indent="0" marL="0">
+            <a:pPr marL="0" indent="0" algn="l">
               <a:buNone/>
             </a:pPr>
             <a:r>
@@ -1585,7 +1359,7 @@
         </p:nvSpPr>
         <p:spPr>
           <a:xfrm>
-            <a:off x="1905424" y="2364135"/>
+            <a:off x="1905424" y="2321005"/>
             <a:ext cx="791125" cy="133350"/>
           </a:xfrm>
           <a:prstGeom prst="rect">
@@ -1598,7 +1372,7 @@
           <a:bodyPr wrap="square" lIns="0" tIns="114300" rIns="114300" bIns="0" rtlCol="0" anchor="ctr"/>
           <a:lstStyle/>
           <a:p>
-            <a:pPr algn="r" indent="0" marL="0">
+            <a:pPr marL="0" indent="0" algn="r">
               <a:buNone/>
             </a:pPr>
             <a:r>
@@ -1637,7 +1411,7 @@
           <a:bodyPr wrap="square" lIns="0" tIns="0" rIns="0" bIns="0" rtlCol="0" anchor="t"/>
           <a:lstStyle/>
           <a:p>
-            <a:pPr algn="l" indent="0" marL="0">
+            <a:pPr marL="0" indent="0" algn="l">
               <a:buNone/>
             </a:pPr>
             <a:r>
@@ -1663,7 +1437,7 @@
         </p:nvSpPr>
         <p:spPr>
           <a:xfrm>
-            <a:off x="723882" y="2364135"/>
+            <a:off x="723882" y="2321005"/>
             <a:ext cx="1240722" cy="133350"/>
           </a:xfrm>
           <a:prstGeom prst="rect">
@@ -1676,7 +1450,7 @@
           <a:bodyPr wrap="square" lIns="0" tIns="114300" rIns="114300" bIns="0" rtlCol="0" anchor="ctr"/>
           <a:lstStyle/>
           <a:p>
-            <a:pPr algn="l" indent="0" marL="0">
+            <a:pPr marL="0" indent="0" algn="l">
               <a:buNone/>
             </a:pPr>
             <a:r>
@@ -1715,7 +1489,7 @@
           <a:bodyPr wrap="square" lIns="0" tIns="114300" rIns="114300" bIns="0" rtlCol="0" anchor="ctr"/>
           <a:lstStyle/>
           <a:p>
-            <a:pPr algn="l" indent="0" marL="0">
+            <a:pPr marL="0" indent="0" algn="l">
               <a:buNone/>
             </a:pPr>
             <a:r>
@@ -1754,7 +1528,7 @@
           <a:bodyPr wrap="square" lIns="0" tIns="114300" rIns="114300" bIns="0" rtlCol="0" anchor="ctr"/>
           <a:lstStyle/>
           <a:p>
-            <a:pPr algn="l" indent="0" marL="0">
+            <a:pPr marL="0" indent="0" algn="l">
               <a:buNone/>
             </a:pPr>
             <a:r>
@@ -1793,7 +1567,7 @@
           <a:bodyPr wrap="square" lIns="0" tIns="114300" rIns="114300" bIns="0" rtlCol="0" anchor="ctr"/>
           <a:lstStyle/>
           <a:p>
-            <a:pPr algn="l" indent="0" marL="0">
+            <a:pPr marL="0" indent="0" algn="l">
               <a:buNone/>
             </a:pPr>
             <a:r>
@@ -1832,7 +1606,7 @@
           <a:bodyPr wrap="square" lIns="0" tIns="114300" rIns="114300" bIns="0" rtlCol="0" anchor="ctr"/>
           <a:lstStyle/>
           <a:p>
-            <a:pPr algn="r" indent="0" marL="0">
+            <a:pPr marL="0" indent="0" algn="r">
               <a:buNone/>
             </a:pPr>
             <a:r>
@@ -1871,7 +1645,7 @@
           <a:bodyPr wrap="square" lIns="0" tIns="114300" rIns="114300" bIns="0" rtlCol="0" anchor="ctr"/>
           <a:lstStyle/>
           <a:p>
-            <a:pPr algn="l" indent="0" marL="0">
+            <a:pPr marL="0" indent="0" algn="l">
               <a:buNone/>
             </a:pPr>
             <a:r>
@@ -1910,7 +1684,7 @@
           <a:bodyPr wrap="square" lIns="0" tIns="114300" rIns="114300" bIns="0" rtlCol="0" anchor="ctr"/>
           <a:lstStyle/>
           <a:p>
-            <a:pPr algn="l" indent="0" marL="0">
+            <a:pPr marL="0" indent="0" algn="l">
               <a:buNone/>
             </a:pPr>
             <a:r>
@@ -1949,7 +1723,7 @@
           <a:bodyPr wrap="square" lIns="0" tIns="114300" rIns="114300" bIns="0" rtlCol="0" anchor="ctr"/>
           <a:lstStyle/>
           <a:p>
-            <a:pPr algn="l" indent="0" marL="0">
+            <a:pPr marL="0" indent="0" algn="l">
               <a:buNone/>
             </a:pPr>
             <a:r>
@@ -1988,7 +1762,7 @@
           <a:bodyPr wrap="square" lIns="0" tIns="114300" rIns="114300" bIns="0" rtlCol="0" anchor="ctr"/>
           <a:lstStyle/>
           <a:p>
-            <a:pPr algn="l" indent="0" marL="0">
+            <a:pPr marL="0" indent="0" algn="l">
               <a:buNone/>
             </a:pPr>
             <a:r>
@@ -2027,7 +1801,7 @@
           <a:bodyPr wrap="square" lIns="0" tIns="114300" rIns="114300" bIns="0" rtlCol="0" anchor="ctr"/>
           <a:lstStyle/>
           <a:p>
-            <a:pPr algn="l" indent="0" marL="0">
+            <a:pPr marL="0" indent="0" algn="l">
               <a:buNone/>
             </a:pPr>
             <a:r>
@@ -2066,7 +1840,7 @@
           <a:bodyPr wrap="square" lIns="0" tIns="114300" rIns="114300" bIns="0" rtlCol="0" anchor="ctr"/>
           <a:lstStyle/>
           <a:p>
-            <a:pPr algn="r" indent="0" marL="0">
+            <a:pPr marL="0" indent="0" algn="r">
               <a:buNone/>
             </a:pPr>
             <a:r>
@@ -2105,7 +1879,7 @@
           <a:bodyPr wrap="square" lIns="0" tIns="114300" rIns="114300" bIns="0" rtlCol="0" anchor="ctr"/>
           <a:lstStyle/>
           <a:p>
-            <a:pPr algn="r" indent="0" marL="0">
+            <a:pPr marL="0" indent="0" algn="r">
               <a:buNone/>
             </a:pPr>
             <a:r>
@@ -2144,7 +1918,7 @@
           <a:bodyPr wrap="square" lIns="0" tIns="114300" rIns="114300" bIns="0" rtlCol="0" anchor="ctr"/>
           <a:lstStyle/>
           <a:p>
-            <a:pPr algn="r" indent="0" marL="0">
+            <a:pPr marL="0" indent="0" algn="r">
               <a:buNone/>
             </a:pPr>
             <a:r>
@@ -2183,7 +1957,7 @@
           <a:bodyPr wrap="square" lIns="0" tIns="0" rIns="0" bIns="0" rtlCol="0" anchor="t"/>
           <a:lstStyle/>
           <a:p>
-            <a:pPr algn="l" indent="0" marL="0">
+            <a:pPr marL="0" indent="0" algn="l">
               <a:buNone/>
             </a:pPr>
             <a:r>
@@ -2209,7 +1983,7 @@
         </p:nvSpPr>
         <p:spPr>
           <a:xfrm>
-            <a:off x="6440849" y="2354610"/>
+            <a:off x="6396399" y="2354610"/>
             <a:ext cx="274320" cy="128016"/>
           </a:xfrm>
           <a:prstGeom prst="rect">
@@ -2222,7 +1996,7 @@
           <a:bodyPr wrap="square" lIns="0" tIns="0" rIns="0" bIns="0" rtlCol="0" anchor="t"/>
           <a:lstStyle/>
           <a:p>
-            <a:pPr algn="r" indent="0" marL="0">
+            <a:pPr marL="0" indent="0" algn="r">
               <a:buNone/>
             </a:pPr>
             <a:r>
@@ -2248,7 +2022,7 @@
         </p:nvSpPr>
         <p:spPr>
           <a:xfrm>
-            <a:off x="6443373" y="2583210"/>
+            <a:off x="6398923" y="2583210"/>
             <a:ext cx="274320" cy="128016"/>
           </a:xfrm>
           <a:prstGeom prst="rect">
@@ -2261,7 +2035,7 @@
           <a:bodyPr wrap="square" lIns="0" tIns="0" rIns="0" bIns="0" rtlCol="0" anchor="t"/>
           <a:lstStyle/>
           <a:p>
-            <a:pPr algn="r" indent="0" marL="0">
+            <a:pPr marL="0" indent="0" algn="r">
               <a:buNone/>
             </a:pPr>
             <a:r>
@@ -2287,7 +2061,7 @@
         </p:nvSpPr>
         <p:spPr>
           <a:xfrm>
-            <a:off x="6438798" y="2811810"/>
+            <a:off x="6394348" y="2811810"/>
             <a:ext cx="274320" cy="128016"/>
           </a:xfrm>
           <a:prstGeom prst="rect">
@@ -2300,7 +2074,7 @@
           <a:bodyPr wrap="square" lIns="0" tIns="0" rIns="0" bIns="0" rtlCol="0" anchor="t"/>
           <a:lstStyle/>
           <a:p>
-            <a:pPr algn="r" indent="0" marL="0">
+            <a:pPr marL="0" indent="0" algn="r">
               <a:buNone/>
             </a:pPr>
             <a:r>
@@ -2339,7 +2113,7 @@
           <a:bodyPr wrap="square" lIns="0" tIns="0" rIns="0" bIns="0" rtlCol="0" anchor="t"/>
           <a:lstStyle/>
           <a:p>
-            <a:pPr algn="r" indent="0" marL="0">
+            <a:pPr marL="0" indent="0" algn="r">
               <a:buNone/>
             </a:pPr>
             <a:r>
@@ -2365,7 +2139,7 @@
         </p:nvSpPr>
         <p:spPr>
           <a:xfrm>
-            <a:off x="6452207" y="3040410"/>
+            <a:off x="6407757" y="3040410"/>
             <a:ext cx="274320" cy="128016"/>
           </a:xfrm>
           <a:prstGeom prst="rect">
@@ -2378,7 +2152,7 @@
           <a:bodyPr wrap="square" lIns="0" tIns="0" rIns="0" bIns="0" rtlCol="0" anchor="t"/>
           <a:lstStyle/>
           <a:p>
-            <a:pPr algn="r" indent="0" marL="0">
+            <a:pPr marL="0" indent="0" algn="r">
               <a:buNone/>
             </a:pPr>
             <a:r>
@@ -2404,7 +2178,7 @@
         </p:nvSpPr>
         <p:spPr>
           <a:xfrm>
-            <a:off x="6423811" y="3269010"/>
+            <a:off x="6379361" y="3269010"/>
             <a:ext cx="274320" cy="128016"/>
           </a:xfrm>
           <a:prstGeom prst="rect">
@@ -2417,7 +2191,7 @@
           <a:bodyPr wrap="square" lIns="0" tIns="0" rIns="0" bIns="0" rtlCol="0" anchor="t"/>
           <a:lstStyle/>
           <a:p>
-            <a:pPr algn="r" indent="0" marL="0">
+            <a:pPr marL="0" indent="0" algn="r">
               <a:buNone/>
             </a:pPr>
             <a:r>
@@ -2443,7 +2217,7 @@
         </p:nvSpPr>
         <p:spPr>
           <a:xfrm>
-            <a:off x="6450787" y="3497610"/>
+            <a:off x="6406337" y="3497610"/>
             <a:ext cx="274320" cy="128016"/>
           </a:xfrm>
           <a:prstGeom prst="rect">
@@ -2456,7 +2230,7 @@
           <a:bodyPr wrap="square" lIns="0" tIns="0" rIns="0" bIns="0" rtlCol="0" anchor="t"/>
           <a:lstStyle/>
           <a:p>
-            <a:pPr algn="r" indent="0" marL="0">
+            <a:pPr marL="0" indent="0" algn="r">
               <a:buNone/>
             </a:pPr>
             <a:r>
@@ -2482,7 +2256,7 @@
         </p:nvSpPr>
         <p:spPr>
           <a:xfrm>
-            <a:off x="6480918" y="3726210"/>
+            <a:off x="6436468" y="3726210"/>
             <a:ext cx="274320" cy="128016"/>
           </a:xfrm>
           <a:prstGeom prst="rect">
@@ -2495,7 +2269,7 @@
           <a:bodyPr wrap="square" lIns="0" tIns="0" rIns="0" bIns="0" rtlCol="0" anchor="t"/>
           <a:lstStyle/>
           <a:p>
-            <a:pPr algn="r" indent="0" marL="0">
+            <a:pPr marL="0" indent="0" algn="r">
               <a:buNone/>
             </a:pPr>
             <a:r>
@@ -2521,7 +2295,7 @@
         </p:nvSpPr>
         <p:spPr>
           <a:xfrm>
-            <a:off x="6430753" y="3954810"/>
+            <a:off x="6386303" y="3954810"/>
             <a:ext cx="274320" cy="128016"/>
           </a:xfrm>
           <a:prstGeom prst="rect">
@@ -2534,7 +2308,7 @@
           <a:bodyPr wrap="square" lIns="0" tIns="0" rIns="0" bIns="0" rtlCol="0" anchor="t"/>
           <a:lstStyle/>
           <a:p>
-            <a:pPr algn="r" indent="0" marL="0">
+            <a:pPr marL="0" indent="0" algn="r">
               <a:buNone/>
             </a:pPr>
             <a:r>
@@ -2573,7 +2347,7 @@
           <a:bodyPr wrap="square" lIns="0" tIns="114300" rIns="114300" bIns="0" rtlCol="0" anchor="ctr"/>
           <a:lstStyle/>
           <a:p>
-            <a:pPr algn="r" indent="0" marL="0">
+            <a:pPr marL="0" indent="0" algn="r">
               <a:buNone/>
             </a:pPr>
             <a:r>
@@ -2612,7 +2386,7 @@
           <a:bodyPr wrap="square" lIns="0" tIns="114300" rIns="114300" bIns="0" rtlCol="0" anchor="ctr"/>
           <a:lstStyle/>
           <a:p>
-            <a:pPr algn="r" indent="0" marL="0">
+            <a:pPr marL="0" indent="0" algn="r">
               <a:buNone/>
             </a:pPr>
             <a:r>
@@ -2651,7 +2425,7 @@
           <a:bodyPr wrap="square" lIns="0" tIns="114300" rIns="114300" bIns="0" rtlCol="0" anchor="ctr"/>
           <a:lstStyle/>
           <a:p>
-            <a:pPr algn="r" indent="0" marL="0">
+            <a:pPr marL="0" indent="0" algn="r">
               <a:buNone/>
             </a:pPr>
             <a:r>
@@ -2690,7 +2464,7 @@
           <a:bodyPr wrap="square" lIns="0" tIns="114300" rIns="114300" bIns="0" rtlCol="0" anchor="ctr"/>
           <a:lstStyle/>
           <a:p>
-            <a:pPr algn="r" indent="0" marL="0">
+            <a:pPr marL="0" indent="0" algn="r">
               <a:buNone/>
             </a:pPr>
             <a:r>
@@ -2729,7 +2503,7 @@
           <a:bodyPr wrap="square" lIns="0" tIns="114300" rIns="114300" bIns="0" rtlCol="0" anchor="ctr"/>
           <a:lstStyle/>
           <a:p>
-            <a:pPr algn="r" indent="0" marL="0">
+            <a:pPr marL="0" indent="0" algn="r">
               <a:buNone/>
             </a:pPr>
             <a:r>
@@ -2768,7 +2542,7 @@
           <a:bodyPr wrap="square" lIns="0" tIns="114300" rIns="114300" bIns="0" rtlCol="0" anchor="ctr"/>
           <a:lstStyle/>
           <a:p>
-            <a:pPr algn="r" indent="0" marL="0">
+            <a:pPr marL="0" indent="0" algn="r">
               <a:buNone/>
             </a:pPr>
             <a:r>
@@ -2807,7 +2581,7 @@
           <a:bodyPr wrap="square" lIns="0" tIns="114300" rIns="114300" bIns="0" rtlCol="0" anchor="ctr"/>
           <a:lstStyle/>
           <a:p>
-            <a:pPr algn="r" indent="0" marL="0">
+            <a:pPr marL="0" indent="0" algn="r">
               <a:buNone/>
             </a:pPr>
             <a:r>
@@ -2846,7 +2620,7 @@
           <a:bodyPr wrap="square" lIns="0" tIns="114300" rIns="114300" bIns="0" rtlCol="0" anchor="ctr"/>
           <a:lstStyle/>
           <a:p>
-            <a:pPr algn="r" indent="0" marL="0">
+            <a:pPr marL="0" indent="0" algn="r">
               <a:buNone/>
             </a:pPr>
             <a:r>
@@ -2885,7 +2659,7 @@
           <a:bodyPr wrap="square" lIns="0" tIns="114300" rIns="114300" bIns="0" rtlCol="0" anchor="ctr"/>
           <a:lstStyle/>
           <a:p>
-            <a:pPr algn="r" indent="0" marL="0">
+            <a:pPr marL="0" indent="0" algn="r">
               <a:buNone/>
             </a:pPr>
             <a:r>
@@ -2924,7 +2698,7 @@
           <a:bodyPr wrap="square" lIns="0" tIns="114300" rIns="114300" bIns="0" rtlCol="0" anchor="ctr"/>
           <a:lstStyle/>
           <a:p>
-            <a:pPr algn="r" indent="0" marL="0">
+            <a:pPr marL="0" indent="0" algn="r">
               <a:buNone/>
             </a:pPr>
             <a:r>
@@ -2963,7 +2737,7 @@
           <a:bodyPr wrap="square" lIns="0" tIns="114300" rIns="114300" bIns="0" rtlCol="0" anchor="ctr"/>
           <a:lstStyle/>
           <a:p>
-            <a:pPr algn="r" indent="0" marL="0">
+            <a:pPr marL="0" indent="0" algn="r">
               <a:buNone/>
             </a:pPr>
             <a:r>
@@ -3002,7 +2776,7 @@
           <a:bodyPr wrap="square" lIns="0" tIns="114300" rIns="114300" bIns="0" rtlCol="0" anchor="ctr"/>
           <a:lstStyle/>
           <a:p>
-            <a:pPr algn="r" indent="0" marL="0">
+            <a:pPr marL="0" indent="0" algn="r">
               <a:buNone/>
             </a:pPr>
             <a:r>
@@ -3041,7 +2815,7 @@
           <a:bodyPr wrap="square" lIns="0" tIns="114300" rIns="114300" bIns="0" rtlCol="0" anchor="ctr"/>
           <a:lstStyle/>
           <a:p>
-            <a:pPr algn="r" indent="0" marL="0">
+            <a:pPr marL="0" indent="0" algn="r">
               <a:buNone/>
             </a:pPr>
             <a:r>
@@ -3080,7 +2854,7 @@
           <a:bodyPr wrap="square" lIns="0" tIns="114300" rIns="114300" bIns="0" rtlCol="0" anchor="ctr"/>
           <a:lstStyle/>
           <a:p>
-            <a:pPr algn="r" indent="0" marL="0">
+            <a:pPr marL="0" indent="0" algn="r">
               <a:buNone/>
             </a:pPr>
             <a:r>
@@ -3119,7 +2893,7 @@
           <a:bodyPr wrap="square" lIns="0" tIns="114300" rIns="114300" bIns="0" rtlCol="0" anchor="ctr"/>
           <a:lstStyle/>
           <a:p>
-            <a:pPr algn="r" indent="0" marL="0">
+            <a:pPr marL="0" indent="0" algn="r">
               <a:buNone/>
             </a:pPr>
             <a:r>
@@ -3158,7 +2932,7 @@
           <a:bodyPr wrap="square" lIns="0" tIns="114300" rIns="114300" bIns="0" rtlCol="0" anchor="ctr"/>
           <a:lstStyle/>
           <a:p>
-            <a:pPr algn="r" indent="0" marL="0">
+            <a:pPr marL="0" indent="0" algn="r">
               <a:buNone/>
             </a:pPr>
             <a:r>
@@ -3197,7 +2971,7 @@
           <a:bodyPr wrap="square" lIns="0" tIns="114300" rIns="114300" bIns="0" rtlCol="0" anchor="ctr"/>
           <a:lstStyle/>
           <a:p>
-            <a:pPr algn="r" indent="0" marL="0">
+            <a:pPr marL="0" indent="0" algn="r">
               <a:buNone/>
             </a:pPr>
             <a:r>
@@ -3236,7 +3010,7 @@
           <a:bodyPr wrap="square" lIns="0" tIns="114300" rIns="114300" bIns="0" rtlCol="0" anchor="ctr"/>
           <a:lstStyle/>
           <a:p>
-            <a:pPr algn="r" indent="0" marL="0">
+            <a:pPr marL="0" indent="0" algn="r">
               <a:buNone/>
             </a:pPr>
             <a:r>
@@ -3275,7 +3049,7 @@
           <a:bodyPr wrap="square" lIns="0" tIns="114300" rIns="114300" bIns="0" rtlCol="0" anchor="ctr"/>
           <a:lstStyle/>
           <a:p>
-            <a:pPr algn="r" indent="0" marL="0">
+            <a:pPr marL="0" indent="0" algn="r">
               <a:buNone/>
             </a:pPr>
             <a:r>
@@ -3314,7 +3088,7 @@
           <a:bodyPr wrap="square" lIns="0" tIns="114300" rIns="114300" bIns="0" rtlCol="0" anchor="ctr"/>
           <a:lstStyle/>
           <a:p>
-            <a:pPr algn="r" indent="0" marL="0">
+            <a:pPr marL="0" indent="0" algn="r">
               <a:buNone/>
             </a:pPr>
             <a:r>
@@ -3353,7 +3127,7 @@
           <a:bodyPr wrap="square" lIns="0" tIns="114300" rIns="114300" bIns="0" rtlCol="0" anchor="ctr"/>
           <a:lstStyle/>
           <a:p>
-            <a:pPr algn="r" indent="0" marL="0">
+            <a:pPr marL="0" indent="0" algn="r">
               <a:buNone/>
             </a:pPr>
             <a:r>
@@ -3392,7 +3166,7 @@
           <a:bodyPr wrap="square" lIns="0" tIns="114300" rIns="114300" bIns="0" rtlCol="0" anchor="ctr"/>
           <a:lstStyle/>
           <a:p>
-            <a:pPr algn="r" indent="0" marL="0">
+            <a:pPr marL="0" indent="0" algn="r">
               <a:buNone/>
             </a:pPr>
             <a:r>
@@ -3431,7 +3205,7 @@
           <a:bodyPr wrap="square" lIns="0" tIns="114300" rIns="114300" bIns="0" rtlCol="0" anchor="ctr"/>
           <a:lstStyle/>
           <a:p>
-            <a:pPr algn="r" indent="0" marL="0">
+            <a:pPr marL="0" indent="0" algn="r">
               <a:buNone/>
             </a:pPr>
             <a:r>
@@ -3470,7 +3244,7 @@
           <a:bodyPr wrap="square" lIns="0" tIns="0" rIns="0" bIns="0" rtlCol="0" anchor="t"/>
           <a:lstStyle/>
           <a:p>
-            <a:pPr algn="r" indent="0" marL="0">
+            <a:pPr marL="0" indent="0" algn="r">
               <a:buNone/>
             </a:pPr>
             <a:r>
@@ -3509,7 +3283,7 @@
           <a:bodyPr wrap="square" lIns="0" tIns="0" rIns="0" bIns="0" rtlCol="0" anchor="t"/>
           <a:lstStyle/>
           <a:p>
-            <a:pPr algn="r" indent="0" marL="0">
+            <a:pPr marL="0" indent="0" algn="r">
               <a:buNone/>
             </a:pPr>
             <a:r>
@@ -3548,7 +3322,7 @@
           <a:bodyPr wrap="square" lIns="0" tIns="0" rIns="0" bIns="0" rtlCol="0" anchor="t"/>
           <a:lstStyle/>
           <a:p>
-            <a:pPr algn="r" indent="0" marL="0">
+            <a:pPr marL="0" indent="0" algn="r">
               <a:buNone/>
             </a:pPr>
             <a:r>
@@ -3587,7 +3361,7 @@
           <a:bodyPr wrap="square" lIns="0" tIns="0" rIns="0" bIns="0" rtlCol="0" anchor="t"/>
           <a:lstStyle/>
           <a:p>
-            <a:pPr algn="r" indent="0" marL="0">
+            <a:pPr marL="0" indent="0" algn="r">
               <a:buNone/>
             </a:pPr>
             <a:r>
@@ -3626,7 +3400,7 @@
           <a:bodyPr wrap="square" lIns="0" tIns="0" rIns="0" bIns="0" rtlCol="0" anchor="t"/>
           <a:lstStyle/>
           <a:p>
-            <a:pPr algn="r" indent="0" marL="0">
+            <a:pPr marL="0" indent="0" algn="r">
               <a:buNone/>
             </a:pPr>
             <a:r>
@@ -3665,7 +3439,7 @@
           <a:bodyPr wrap="square" lIns="0" tIns="0" rIns="0" bIns="0" rtlCol="0" anchor="t"/>
           <a:lstStyle/>
           <a:p>
-            <a:pPr algn="r" indent="0" marL="0">
+            <a:pPr marL="0" indent="0" algn="r">
               <a:buNone/>
             </a:pPr>
             <a:r>
@@ -3704,7 +3478,7 @@
           <a:bodyPr wrap="square" lIns="0" tIns="0" rIns="0" bIns="0" rtlCol="0" anchor="t"/>
           <a:lstStyle/>
           <a:p>
-            <a:pPr algn="r" indent="0" marL="0">
+            <a:pPr marL="0" indent="0" algn="r">
               <a:buNone/>
             </a:pPr>
             <a:r>
@@ -3749,14 +3523,14 @@
       </p:grpSpPr>
       <p:pic>
         <p:nvPicPr>
-          <p:cNvPr id="2" name="Image 0" descr="C:\01_Repositorios\02_CRM\02_Informe_Semetral\dash\tradicional\ppt_slides\sk_01_main.png">    </p:cNvPr>
+          <p:cNvPr id="2" name="Image 0" descr="C:\01_Repositorios\02_CRM\02_Informe_Semetral\dash\tradicional\ppt_slides\sk_01_main.png"/>
           <p:cNvPicPr>
             <a:picLocks noChangeAspect="1"/>
           </p:cNvPicPr>
           <p:nvPr/>
         </p:nvPicPr>
         <p:blipFill>
-          <a:blip r:embed="rId1"/>
+          <a:blip r:embed="rId3"/>
           <a:stretch>
             <a:fillRect/>
           </a:stretch>
@@ -3792,7 +3566,7 @@
           <a:bodyPr wrap="square" lIns="0" tIns="0" rIns="0" bIns="0" rtlCol="0" anchor="t"/>
           <a:lstStyle/>
           <a:p>
-            <a:pPr algn="l" indent="0" marL="0">
+            <a:pPr marL="0" indent="0" algn="l">
               <a:buNone/>
             </a:pPr>
             <a:r>
@@ -3831,7 +3605,7 @@
           <a:bodyPr wrap="square" lIns="0" tIns="0" rIns="0" bIns="0" rtlCol="0" anchor="t"/>
           <a:lstStyle/>
           <a:p>
-            <a:pPr algn="l" indent="0" marL="0">
+            <a:pPr marL="0" indent="0" algn="l">
               <a:buNone/>
             </a:pPr>
             <a:r>
@@ -3870,7 +3644,7 @@
           <a:bodyPr wrap="square" lIns="0" tIns="0" rIns="0" bIns="0" rtlCol="0" anchor="t"/>
           <a:lstStyle/>
           <a:p>
-            <a:pPr algn="l" indent="0" marL="0">
+            <a:pPr marL="0" indent="0" algn="l">
               <a:buNone/>
             </a:pPr>
             <a:r>
@@ -3909,7 +3683,7 @@
           <a:bodyPr wrap="square" lIns="0" tIns="0" rIns="0" bIns="0" rtlCol="0" anchor="t"/>
           <a:lstStyle/>
           <a:p>
-            <a:pPr algn="l" indent="0" marL="0">
+            <a:pPr marL="0" indent="0" algn="l">
               <a:buNone/>
             </a:pPr>
             <a:r>
@@ -3948,7 +3722,7 @@
           <a:bodyPr wrap="square" lIns="0" tIns="0" rIns="0" bIns="0" rtlCol="0" anchor="t"/>
           <a:lstStyle/>
           <a:p>
-            <a:pPr algn="l" indent="0" marL="0">
+            <a:pPr marL="0" indent="0" algn="l">
               <a:buNone/>
             </a:pPr>
             <a:r>
@@ -3987,7 +3761,7 @@
           <a:bodyPr wrap="square" lIns="0" tIns="114300" rIns="114300" bIns="0" rtlCol="0" anchor="ctr"/>
           <a:lstStyle/>
           <a:p>
-            <a:pPr algn="l" indent="0" marL="0">
+            <a:pPr marL="0" indent="0" algn="l">
               <a:buNone/>
             </a:pPr>
             <a:r>
@@ -4026,7 +3800,7 @@
           <a:bodyPr wrap="square" lIns="0" tIns="114300" rIns="114300" bIns="0" rtlCol="0" anchor="ctr"/>
           <a:lstStyle/>
           <a:p>
-            <a:pPr algn="l" indent="0" marL="0">
+            <a:pPr marL="0" indent="0" algn="l">
               <a:buNone/>
             </a:pPr>
             <a:r>
@@ -4065,7 +3839,7 @@
           <a:bodyPr wrap="square" lIns="0" tIns="114300" rIns="114300" bIns="0" rtlCol="0" anchor="ctr"/>
           <a:lstStyle/>
           <a:p>
-            <a:pPr algn="l" indent="0" marL="0">
+            <a:pPr marL="0" indent="0" algn="l">
               <a:buNone/>
             </a:pPr>
             <a:r>
@@ -4104,7 +3878,7 @@
           <a:bodyPr wrap="square" lIns="0" tIns="114300" rIns="114300" bIns="0" rtlCol="0" anchor="ctr"/>
           <a:lstStyle/>
           <a:p>
-            <a:pPr algn="l" indent="0" marL="0">
+            <a:pPr marL="0" indent="0" algn="l">
               <a:buNone/>
             </a:pPr>
             <a:r>
@@ -4143,7 +3917,7 @@
           <a:bodyPr wrap="square" lIns="0" tIns="114300" rIns="114300" bIns="0" rtlCol="0" anchor="ctr"/>
           <a:lstStyle/>
           <a:p>
-            <a:pPr algn="l" indent="0" marL="0">
+            <a:pPr marL="0" indent="0" algn="l">
               <a:buNone/>
             </a:pPr>
             <a:r>
@@ -4182,7 +3956,7 @@
           <a:bodyPr wrap="square" lIns="0" tIns="114300" rIns="114300" bIns="0" rtlCol="0" anchor="ctr"/>
           <a:lstStyle/>
           <a:p>
-            <a:pPr algn="l" indent="0" marL="0">
+            <a:pPr marL="0" indent="0" algn="l">
               <a:buNone/>
             </a:pPr>
             <a:r>
@@ -4221,7 +3995,7 @@
           <a:bodyPr wrap="square" lIns="0" tIns="114300" rIns="114300" bIns="0" rtlCol="0" anchor="ctr"/>
           <a:lstStyle/>
           <a:p>
-            <a:pPr algn="l" indent="0" marL="0">
+            <a:pPr marL="0" indent="0" algn="l">
               <a:buNone/>
             </a:pPr>
             <a:r>
@@ -4260,7 +4034,7 @@
           <a:bodyPr wrap="square" lIns="0" tIns="114300" rIns="114300" bIns="0" rtlCol="0" anchor="ctr"/>
           <a:lstStyle/>
           <a:p>
-            <a:pPr algn="l" indent="0" marL="0">
+            <a:pPr marL="0" indent="0" algn="l">
               <a:buNone/>
             </a:pPr>
             <a:r>
@@ -4299,7 +4073,7 @@
           <a:bodyPr wrap="square" lIns="0" tIns="114300" rIns="114300" bIns="0" rtlCol="0" anchor="ctr"/>
           <a:lstStyle/>
           <a:p>
-            <a:pPr algn="l" indent="0" marL="0">
+            <a:pPr marL="0" indent="0" algn="l">
               <a:buNone/>
             </a:pPr>
             <a:r>
@@ -4338,7 +4112,7 @@
           <a:bodyPr wrap="square" lIns="0" tIns="114300" rIns="114300" bIns="0" rtlCol="0" anchor="ctr"/>
           <a:lstStyle/>
           <a:p>
-            <a:pPr algn="l" indent="0" marL="0">
+            <a:pPr marL="0" indent="0" algn="l">
               <a:buNone/>
             </a:pPr>
             <a:r>
@@ -4377,7 +4151,7 @@
           <a:bodyPr wrap="square" lIns="0" tIns="114300" rIns="114300" bIns="0" rtlCol="0" anchor="ctr"/>
           <a:lstStyle/>
           <a:p>
-            <a:pPr algn="l" indent="0" marL="0">
+            <a:pPr marL="0" indent="0" algn="l">
               <a:buNone/>
             </a:pPr>
             <a:r>
@@ -4416,7 +4190,7 @@
           <a:bodyPr wrap="square" lIns="0" tIns="114300" rIns="114300" bIns="0" rtlCol="0" anchor="ctr"/>
           <a:lstStyle/>
           <a:p>
-            <a:pPr algn="l" indent="0" marL="0">
+            <a:pPr marL="0" indent="0" algn="l">
               <a:buNone/>
             </a:pPr>
             <a:r>
@@ -4455,7 +4229,7 @@
           <a:bodyPr wrap="square" lIns="0" tIns="114300" rIns="114300" bIns="0" rtlCol="0" anchor="ctr"/>
           <a:lstStyle/>
           <a:p>
-            <a:pPr algn="l" indent="0" marL="0">
+            <a:pPr marL="0" indent="0" algn="l">
               <a:buNone/>
             </a:pPr>
             <a:r>
@@ -4494,7 +4268,7 @@
           <a:bodyPr wrap="square" lIns="0" tIns="114300" rIns="114300" bIns="0" rtlCol="0" anchor="ctr"/>
           <a:lstStyle/>
           <a:p>
-            <a:pPr algn="l" indent="0" marL="0">
+            <a:pPr marL="0" indent="0" algn="l">
               <a:buNone/>
             </a:pPr>
             <a:r>
@@ -4533,7 +4307,7 @@
           <a:bodyPr wrap="square" lIns="0" tIns="114300" rIns="114300" bIns="0" rtlCol="0" anchor="ctr"/>
           <a:lstStyle/>
           <a:p>
-            <a:pPr algn="l" indent="0" marL="0">
+            <a:pPr marL="0" indent="0" algn="l">
               <a:buNone/>
             </a:pPr>
             <a:r>
@@ -4572,7 +4346,7 @@
           <a:bodyPr wrap="square" lIns="0" tIns="114300" rIns="114300" bIns="0" rtlCol="0" anchor="ctr"/>
           <a:lstStyle/>
           <a:p>
-            <a:pPr algn="l" indent="0" marL="0">
+            <a:pPr marL="0" indent="0" algn="l">
               <a:buNone/>
             </a:pPr>
             <a:r>
@@ -4611,7 +4385,7 @@
           <a:bodyPr wrap="square" lIns="0" tIns="114300" rIns="114300" bIns="0" rtlCol="0" anchor="ctr"/>
           <a:lstStyle/>
           <a:p>
-            <a:pPr algn="l" indent="0" marL="0">
+            <a:pPr marL="0" indent="0" algn="l">
               <a:buNone/>
             </a:pPr>
             <a:r>
@@ -4650,7 +4424,7 @@
           <a:bodyPr wrap="square" lIns="0" tIns="114300" rIns="114300" bIns="0" rtlCol="0" anchor="ctr"/>
           <a:lstStyle/>
           <a:p>
-            <a:pPr algn="l" indent="0" marL="0">
+            <a:pPr marL="0" indent="0" algn="l">
               <a:buNone/>
             </a:pPr>
             <a:r>
@@ -4689,7 +4463,7 @@
           <a:bodyPr wrap="square" lIns="0" tIns="114300" rIns="114300" bIns="0" rtlCol="0" anchor="ctr"/>
           <a:lstStyle/>
           <a:p>
-            <a:pPr algn="l" indent="0" marL="0">
+            <a:pPr marL="0" indent="0" algn="l">
               <a:buNone/>
             </a:pPr>
             <a:r>
@@ -4728,7 +4502,7 @@
           <a:bodyPr wrap="square" lIns="0" tIns="114300" rIns="114300" bIns="0" rtlCol="0" anchor="ctr"/>
           <a:lstStyle/>
           <a:p>
-            <a:pPr algn="l" indent="0" marL="0">
+            <a:pPr marL="0" indent="0" algn="l">
               <a:buNone/>
             </a:pPr>
             <a:r>
@@ -4767,7 +4541,7 @@
           <a:bodyPr wrap="square" lIns="0" tIns="114300" rIns="114300" bIns="0" rtlCol="0" anchor="ctr"/>
           <a:lstStyle/>
           <a:p>
-            <a:pPr algn="l" indent="0" marL="0">
+            <a:pPr marL="0" indent="0" algn="l">
               <a:buNone/>
             </a:pPr>
             <a:r>
@@ -4806,7 +4580,7 @@
           <a:bodyPr wrap="square" lIns="0" tIns="114300" rIns="114300" bIns="0" rtlCol="0" anchor="ctr"/>
           <a:lstStyle/>
           <a:p>
-            <a:pPr algn="l" indent="0" marL="0">
+            <a:pPr marL="0" indent="0" algn="l">
               <a:buNone/>
             </a:pPr>
             <a:r>
@@ -4845,7 +4619,7 @@
           <a:bodyPr wrap="square" lIns="0" tIns="114300" rIns="114300" bIns="0" rtlCol="0" anchor="ctr"/>
           <a:lstStyle/>
           <a:p>
-            <a:pPr algn="l" indent="0" marL="0">
+            <a:pPr marL="0" indent="0" algn="l">
               <a:buNone/>
             </a:pPr>
             <a:r>
@@ -4884,7 +4658,7 @@
           <a:bodyPr wrap="square" lIns="0" tIns="114300" rIns="114300" bIns="0" rtlCol="0" anchor="ctr"/>
           <a:lstStyle/>
           <a:p>
-            <a:pPr algn="l" indent="0" marL="0">
+            <a:pPr marL="0" indent="0" algn="l">
               <a:buNone/>
             </a:pPr>
             <a:r>
@@ -4923,7 +4697,7 @@
           <a:bodyPr wrap="square" lIns="0" tIns="114300" rIns="114300" bIns="0" rtlCol="0" anchor="ctr"/>
           <a:lstStyle/>
           <a:p>
-            <a:pPr algn="l" indent="0" marL="0">
+            <a:pPr marL="0" indent="0" algn="l">
               <a:buNone/>
             </a:pPr>
             <a:r>
@@ -4962,7 +4736,7 @@
           <a:bodyPr wrap="square" lIns="0" tIns="114300" rIns="114300" bIns="0" rtlCol="0" anchor="ctr"/>
           <a:lstStyle/>
           <a:p>
-            <a:pPr algn="l" indent="0" marL="0">
+            <a:pPr marL="0" indent="0" algn="l">
               <a:buNone/>
             </a:pPr>
             <a:r>
@@ -5001,7 +4775,7 @@
           <a:bodyPr wrap="square" lIns="0" tIns="114300" rIns="114300" bIns="0" rtlCol="0" anchor="ctr"/>
           <a:lstStyle/>
           <a:p>
-            <a:pPr algn="l" indent="0" marL="0">
+            <a:pPr marL="0" indent="0" algn="l">
               <a:buNone/>
             </a:pPr>
             <a:r>
@@ -5040,7 +4814,7 @@
           <a:bodyPr wrap="square" lIns="0" tIns="114300" rIns="114300" bIns="0" rtlCol="0" anchor="ctr"/>
           <a:lstStyle/>
           <a:p>
-            <a:pPr algn="l" indent="0" marL="0">
+            <a:pPr marL="0" indent="0" algn="l">
               <a:buNone/>
             </a:pPr>
             <a:r>
@@ -5079,7 +4853,7 @@
           <a:bodyPr wrap="square" lIns="0" tIns="114300" rIns="114300" bIns="0" rtlCol="0" anchor="ctr"/>
           <a:lstStyle/>
           <a:p>
-            <a:pPr algn="l" indent="0" marL="0">
+            <a:pPr marL="0" indent="0" algn="l">
               <a:buNone/>
             </a:pPr>
             <a:r>
@@ -5118,7 +4892,7 @@
           <a:bodyPr wrap="square" lIns="0" tIns="114300" rIns="114300" bIns="0" rtlCol="0" anchor="ctr"/>
           <a:lstStyle/>
           <a:p>
-            <a:pPr algn="l" indent="0" marL="0">
+            <a:pPr marL="0" indent="0" algn="l">
               <a:buNone/>
             </a:pPr>
             <a:r>
@@ -5144,7 +4918,7 @@
         </p:nvSpPr>
         <p:spPr>
           <a:xfrm>
-            <a:off x="8536999" y="1276350"/>
+            <a:off x="8489374" y="1228725"/>
             <a:ext cx="761847" cy="133350"/>
           </a:xfrm>
           <a:prstGeom prst="rect">
@@ -5157,7 +4931,7 @@
           <a:bodyPr wrap="square" lIns="0" tIns="114300" rIns="114300" bIns="0" rtlCol="0" anchor="ctr"/>
           <a:lstStyle/>
           <a:p>
-            <a:pPr algn="r" indent="0" marL="0">
+            <a:pPr marL="0" indent="0" algn="r">
               <a:buNone/>
             </a:pPr>
             <a:r>
@@ -5183,7 +4957,7 @@
         </p:nvSpPr>
         <p:spPr>
           <a:xfrm>
-            <a:off x="704832" y="1489472"/>
+            <a:off x="657207" y="1460897"/>
             <a:ext cx="1556804" cy="133350"/>
           </a:xfrm>
           <a:prstGeom prst="rect">
@@ -5196,7 +4970,7 @@
           <a:bodyPr wrap="square" lIns="0" tIns="114300" rIns="114300" bIns="0" rtlCol="0" anchor="ctr"/>
           <a:lstStyle/>
           <a:p>
-            <a:pPr algn="l" indent="0" marL="0">
+            <a:pPr marL="0" indent="0" algn="l">
               <a:buNone/>
             </a:pPr>
             <a:r>
@@ -5222,7 +4996,7 @@
         </p:nvSpPr>
         <p:spPr>
           <a:xfrm>
-            <a:off x="4006204" y="1489472"/>
+            <a:off x="3949054" y="1441847"/>
             <a:ext cx="1556804" cy="133350"/>
           </a:xfrm>
           <a:prstGeom prst="rect">
@@ -5235,7 +5009,7 @@
           <a:bodyPr wrap="square" lIns="0" tIns="114300" rIns="114300" bIns="0" rtlCol="0" anchor="ctr"/>
           <a:lstStyle/>
           <a:p>
-            <a:pPr algn="l" indent="0" marL="0">
+            <a:pPr marL="0" indent="0" algn="l">
               <a:buNone/>
             </a:pPr>
             <a:r>
@@ -5261,7 +5035,7 @@
         </p:nvSpPr>
         <p:spPr>
           <a:xfrm>
-            <a:off x="9277398" y="1276350"/>
+            <a:off x="9229773" y="1228725"/>
             <a:ext cx="736401" cy="133350"/>
           </a:xfrm>
           <a:prstGeom prst="rect">
@@ -5274,7 +5048,7 @@
           <a:bodyPr wrap="square" lIns="0" tIns="114300" rIns="114300" bIns="0" rtlCol="0" anchor="ctr"/>
           <a:lstStyle/>
           <a:p>
-            <a:pPr algn="r" indent="0" marL="0">
+            <a:pPr marL="0" indent="0" algn="r">
               <a:buNone/>
             </a:pPr>
             <a:r>
@@ -5300,7 +5074,7 @@
         </p:nvSpPr>
         <p:spPr>
           <a:xfrm>
-            <a:off x="10710147" y="1276350"/>
+            <a:off x="10662522" y="1228725"/>
             <a:ext cx="776716" cy="133350"/>
           </a:xfrm>
           <a:prstGeom prst="rect">
@@ -5313,7 +5087,7 @@
           <a:bodyPr wrap="square" lIns="0" tIns="114300" rIns="114300" bIns="0" rtlCol="0" anchor="ctr"/>
           <a:lstStyle/>
           <a:p>
-            <a:pPr algn="r" indent="0" marL="0">
+            <a:pPr marL="0" indent="0" algn="r">
               <a:buNone/>
             </a:pPr>
             <a:r>
@@ -5352,7 +5126,7 @@
           <a:bodyPr wrap="square" lIns="0" tIns="114300" rIns="114300" bIns="0" rtlCol="0" anchor="ctr"/>
           <a:lstStyle/>
           <a:p>
-            <a:pPr algn="l" indent="0" marL="0">
+            <a:pPr marL="0" indent="0" algn="l">
               <a:buNone/>
             </a:pPr>
             <a:r>
@@ -5391,7 +5165,7 @@
           <a:bodyPr wrap="square" lIns="0" tIns="114300" rIns="114300" bIns="0" rtlCol="0" anchor="ctr"/>
           <a:lstStyle/>
           <a:p>
-            <a:pPr algn="l" indent="0" marL="0">
+            <a:pPr marL="0" indent="0" algn="l">
               <a:buNone/>
             </a:pPr>
             <a:r>
@@ -5430,7 +5204,7 @@
           <a:bodyPr wrap="square" lIns="0" tIns="114300" rIns="114300" bIns="0" rtlCol="0" anchor="ctr"/>
           <a:lstStyle/>
           <a:p>
-            <a:pPr algn="l" indent="0" marL="0">
+            <a:pPr marL="0" indent="0" algn="l">
               <a:buNone/>
             </a:pPr>
             <a:r>
@@ -5456,7 +5230,7 @@
         </p:nvSpPr>
         <p:spPr>
           <a:xfrm>
-            <a:off x="9992230" y="1276350"/>
+            <a:off x="9944605" y="1228725"/>
             <a:ext cx="740540" cy="133350"/>
           </a:xfrm>
           <a:prstGeom prst="rect">
@@ -5469,7 +5243,7 @@
           <a:bodyPr wrap="square" lIns="0" tIns="114300" rIns="114300" bIns="0" rtlCol="0" anchor="ctr"/>
           <a:lstStyle/>
           <a:p>
-            <a:pPr algn="r" indent="0" marL="0">
+            <a:pPr marL="0" indent="0" algn="r">
               <a:buNone/>
             </a:pPr>
             <a:r>
@@ -5495,7 +5269,7 @@
         </p:nvSpPr>
         <p:spPr>
           <a:xfrm>
-            <a:off x="10710147" y="1514475"/>
+            <a:off x="10662522" y="1466850"/>
             <a:ext cx="776716" cy="123825"/>
           </a:xfrm>
           <a:prstGeom prst="rect">
@@ -5508,7 +5282,7 @@
           <a:bodyPr wrap="square" lIns="0" tIns="114300" rIns="114300" bIns="0" rtlCol="0" anchor="ctr"/>
           <a:lstStyle/>
           <a:p>
-            <a:pPr algn="r" indent="0" marL="0">
+            <a:pPr marL="0" indent="0" algn="r">
               <a:buNone/>
             </a:pPr>
             <a:r>
@@ -5534,7 +5308,7 @@
         </p:nvSpPr>
         <p:spPr>
           <a:xfrm>
-            <a:off x="10710147" y="2009775"/>
+            <a:off x="10662522" y="1962150"/>
             <a:ext cx="776716" cy="123825"/>
           </a:xfrm>
           <a:prstGeom prst="rect">
@@ -5547,7 +5321,7 @@
           <a:bodyPr wrap="square" lIns="0" tIns="114300" rIns="114300" bIns="0" rtlCol="0" anchor="ctr"/>
           <a:lstStyle/>
           <a:p>
-            <a:pPr algn="r" indent="0" marL="0">
+            <a:pPr marL="0" indent="0" algn="r">
               <a:buNone/>
             </a:pPr>
             <a:r>
@@ -5573,7 +5347,7 @@
         </p:nvSpPr>
         <p:spPr>
           <a:xfrm>
-            <a:off x="10710147" y="2752725"/>
+            <a:off x="10662522" y="2705100"/>
             <a:ext cx="776716" cy="123825"/>
           </a:xfrm>
           <a:prstGeom prst="rect">
@@ -5586,7 +5360,7 @@
           <a:bodyPr wrap="square" lIns="0" tIns="114300" rIns="114300" bIns="0" rtlCol="0" anchor="ctr"/>
           <a:lstStyle/>
           <a:p>
-            <a:pPr algn="r" indent="0" marL="0">
+            <a:pPr marL="0" indent="0" algn="r">
               <a:buNone/>
             </a:pPr>
             <a:r>
@@ -5625,7 +5399,7 @@
           <a:bodyPr wrap="square" lIns="0" tIns="114300" rIns="114300" bIns="0" rtlCol="0" anchor="ctr"/>
           <a:lstStyle/>
           <a:p>
-            <a:pPr algn="l" indent="0" marL="0">
+            <a:pPr marL="0" indent="0" algn="l">
               <a:buNone/>
             </a:pPr>
             <a:r>
@@ -5651,7 +5425,7 @@
         </p:nvSpPr>
         <p:spPr>
           <a:xfrm>
-            <a:off x="2203068" y="1489472"/>
+            <a:off x="2155443" y="1460897"/>
             <a:ext cx="454042" cy="133350"/>
           </a:xfrm>
           <a:prstGeom prst="rect">
@@ -5664,7 +5438,7 @@
           <a:bodyPr wrap="square" lIns="0" tIns="114300" rIns="114300" bIns="0" rtlCol="0" anchor="ctr"/>
           <a:lstStyle/>
           <a:p>
-            <a:pPr algn="r" indent="0" marL="0">
+            <a:pPr marL="0" indent="0" algn="r">
               <a:buNone/>
             </a:pPr>
             <a:r>
@@ -5690,7 +5464,7 @@
         </p:nvSpPr>
         <p:spPr>
           <a:xfrm>
-            <a:off x="2643886" y="1489472"/>
+            <a:off x="2596261" y="1460897"/>
             <a:ext cx="454042" cy="133350"/>
           </a:xfrm>
           <a:prstGeom prst="rect">
@@ -5703,7 +5477,7 @@
           <a:bodyPr wrap="square" lIns="0" tIns="114300" rIns="114300" bIns="0" rtlCol="0" anchor="ctr"/>
           <a:lstStyle/>
           <a:p>
-            <a:pPr algn="r" indent="0" marL="0">
+            <a:pPr marL="0" indent="0" algn="r">
               <a:buNone/>
             </a:pPr>
             <a:r>
@@ -5729,7 +5503,7 @@
         </p:nvSpPr>
         <p:spPr>
           <a:xfrm>
-            <a:off x="3075252" y="1489472"/>
+            <a:off x="3027627" y="1460897"/>
             <a:ext cx="778556" cy="133350"/>
           </a:xfrm>
           <a:prstGeom prst="rect">
@@ -5742,7 +5516,7 @@
           <a:bodyPr wrap="square" lIns="0" tIns="114300" rIns="114300" bIns="0" rtlCol="0" anchor="ctr"/>
           <a:lstStyle/>
           <a:p>
-            <a:pPr algn="r" indent="0" marL="0">
+            <a:pPr marL="0" indent="0" algn="r">
               <a:buNone/>
             </a:pPr>
             <a:r>
@@ -5768,7 +5542,7 @@
         </p:nvSpPr>
         <p:spPr>
           <a:xfrm>
-            <a:off x="5504440" y="1489472"/>
+            <a:off x="5447290" y="1441847"/>
             <a:ext cx="454042" cy="133350"/>
           </a:xfrm>
           <a:prstGeom prst="rect">
@@ -5781,7 +5555,7 @@
           <a:bodyPr wrap="square" lIns="0" tIns="114300" rIns="114300" bIns="0" rtlCol="0" anchor="ctr"/>
           <a:lstStyle/>
           <a:p>
-            <a:pPr algn="r" indent="0" marL="0">
+            <a:pPr marL="0" indent="0" algn="r">
               <a:buNone/>
             </a:pPr>
             <a:r>
@@ -5807,7 +5581,7 @@
         </p:nvSpPr>
         <p:spPr>
           <a:xfrm>
-            <a:off x="5945258" y="1489472"/>
+            <a:off x="5888108" y="1441847"/>
             <a:ext cx="454042" cy="133350"/>
           </a:xfrm>
           <a:prstGeom prst="rect">
@@ -5820,7 +5594,7 @@
           <a:bodyPr wrap="square" lIns="0" tIns="114300" rIns="114300" bIns="0" rtlCol="0" anchor="ctr"/>
           <a:lstStyle/>
           <a:p>
-            <a:pPr algn="r" indent="0" marL="0">
+            <a:pPr marL="0" indent="0" algn="r">
               <a:buNone/>
             </a:pPr>
             <a:r>
@@ -5846,7 +5620,7 @@
         </p:nvSpPr>
         <p:spPr>
           <a:xfrm>
-            <a:off x="6376624" y="1489472"/>
+            <a:off x="6319474" y="1441847"/>
             <a:ext cx="778556" cy="133350"/>
           </a:xfrm>
           <a:prstGeom prst="rect">
@@ -5859,7 +5633,7 @@
           <a:bodyPr wrap="square" lIns="0" tIns="114300" rIns="114300" bIns="0" rtlCol="0" anchor="ctr"/>
           <a:lstStyle/>
           <a:p>
-            <a:pPr algn="r" indent="0" marL="0">
+            <a:pPr marL="0" indent="0" algn="r">
               <a:buNone/>
             </a:pPr>
             <a:r>
@@ -5885,7 +5659,7 @@
         </p:nvSpPr>
         <p:spPr>
           <a:xfrm>
-            <a:off x="6376624" y="1975247"/>
+            <a:off x="6319474" y="1927622"/>
             <a:ext cx="778556" cy="123825"/>
           </a:xfrm>
           <a:prstGeom prst="rect">
@@ -5898,7 +5672,7 @@
           <a:bodyPr wrap="square" lIns="0" tIns="114300" rIns="114300" bIns="0" rtlCol="0" anchor="ctr"/>
           <a:lstStyle/>
           <a:p>
-            <a:pPr algn="r" indent="0" marL="0">
+            <a:pPr marL="0" indent="0" algn="r">
               <a:buNone/>
             </a:pPr>
             <a:r>
@@ -5924,7 +5698,7 @@
         </p:nvSpPr>
         <p:spPr>
           <a:xfrm>
-            <a:off x="6376624" y="2222897"/>
+            <a:off x="6319474" y="2175272"/>
             <a:ext cx="778556" cy="123825"/>
           </a:xfrm>
           <a:prstGeom prst="rect">
@@ -5937,7 +5711,7 @@
           <a:bodyPr wrap="square" lIns="0" tIns="114300" rIns="114300" bIns="0" rtlCol="0" anchor="ctr"/>
           <a:lstStyle/>
           <a:p>
-            <a:pPr algn="r" indent="0" marL="0">
+            <a:pPr marL="0" indent="0" algn="r">
               <a:buNone/>
             </a:pPr>
             <a:r>
@@ -5963,7 +5737,7 @@
         </p:nvSpPr>
         <p:spPr>
           <a:xfrm>
-            <a:off x="6376624" y="3213497"/>
+            <a:off x="6319474" y="3165872"/>
             <a:ext cx="778556" cy="123825"/>
           </a:xfrm>
           <a:prstGeom prst="rect">
@@ -5976,7 +5750,7 @@
           <a:bodyPr wrap="square" lIns="0" tIns="114300" rIns="114300" bIns="0" rtlCol="0" anchor="ctr"/>
           <a:lstStyle/>
           <a:p>
-            <a:pPr algn="r" indent="0" marL="0">
+            <a:pPr marL="0" indent="0" algn="r">
               <a:buNone/>
             </a:pPr>
             <a:r>
@@ -6002,7 +5776,7 @@
         </p:nvSpPr>
         <p:spPr>
           <a:xfrm>
-            <a:off x="10710147" y="1762125"/>
+            <a:off x="10662522" y="1714500"/>
             <a:ext cx="776716" cy="123825"/>
           </a:xfrm>
           <a:prstGeom prst="rect">
@@ -6015,7 +5789,7 @@
           <a:bodyPr wrap="square" lIns="0" tIns="114300" rIns="114300" bIns="0" rtlCol="0" anchor="ctr"/>
           <a:lstStyle/>
           <a:p>
-            <a:pPr algn="r" indent="0" marL="0">
+            <a:pPr marL="0" indent="0" algn="r">
               <a:buNone/>
             </a:pPr>
             <a:r>
@@ -6041,7 +5815,7 @@
         </p:nvSpPr>
         <p:spPr>
           <a:xfrm>
-            <a:off x="10710147" y="2257425"/>
+            <a:off x="10662522" y="2209800"/>
             <a:ext cx="776716" cy="123825"/>
           </a:xfrm>
           <a:prstGeom prst="rect">
@@ -6054,7 +5828,7 @@
           <a:bodyPr wrap="square" lIns="0" tIns="114300" rIns="114300" bIns="0" rtlCol="0" anchor="ctr"/>
           <a:lstStyle/>
           <a:p>
-            <a:pPr algn="r" indent="0" marL="0">
+            <a:pPr marL="0" indent="0" algn="r">
               <a:buNone/>
             </a:pPr>
             <a:r>
@@ -6080,7 +5854,7 @@
         </p:nvSpPr>
         <p:spPr>
           <a:xfrm>
-            <a:off x="10710147" y="2505075"/>
+            <a:off x="10662522" y="2457450"/>
             <a:ext cx="776716" cy="123825"/>
           </a:xfrm>
           <a:prstGeom prst="rect">
@@ -6093,7 +5867,7 @@
           <a:bodyPr wrap="square" lIns="0" tIns="114300" rIns="114300" bIns="0" rtlCol="0" anchor="ctr"/>
           <a:lstStyle/>
           <a:p>
-            <a:pPr algn="r" indent="0" marL="0">
+            <a:pPr marL="0" indent="0" algn="r">
               <a:buNone/>
             </a:pPr>
             <a:r>
@@ -6119,7 +5893,7 @@
         </p:nvSpPr>
         <p:spPr>
           <a:xfrm>
-            <a:off x="10710147" y="3000375"/>
+            <a:off x="10662522" y="2952750"/>
             <a:ext cx="776716" cy="123825"/>
           </a:xfrm>
           <a:prstGeom prst="rect">
@@ -6132,7 +5906,7 @@
           <a:bodyPr wrap="square" lIns="0" tIns="114300" rIns="114300" bIns="0" rtlCol="0" anchor="ctr"/>
           <a:lstStyle/>
           <a:p>
-            <a:pPr algn="r" indent="0" marL="0">
+            <a:pPr marL="0" indent="0" algn="r">
               <a:buNone/>
             </a:pPr>
             <a:r>
@@ -6158,7 +5932,7 @@
         </p:nvSpPr>
         <p:spPr>
           <a:xfrm>
-            <a:off x="10710147" y="3248025"/>
+            <a:off x="10662522" y="3200400"/>
             <a:ext cx="776716" cy="123825"/>
           </a:xfrm>
           <a:prstGeom prst="rect">
@@ -6171,7 +5945,7 @@
           <a:bodyPr wrap="square" lIns="0" tIns="114300" rIns="114300" bIns="0" rtlCol="0" anchor="ctr"/>
           <a:lstStyle/>
           <a:p>
-            <a:pPr algn="r" indent="0" marL="0">
+            <a:pPr marL="0" indent="0" algn="r">
               <a:buNone/>
             </a:pPr>
             <a:r>
@@ -6197,7 +5971,7 @@
         </p:nvSpPr>
         <p:spPr>
           <a:xfrm>
-            <a:off x="10710147" y="3495675"/>
+            <a:off x="10662522" y="3448050"/>
             <a:ext cx="776716" cy="123825"/>
           </a:xfrm>
           <a:prstGeom prst="rect">
@@ -6210,7 +5984,7 @@
           <a:bodyPr wrap="square" lIns="0" tIns="114300" rIns="114300" bIns="0" rtlCol="0" anchor="ctr"/>
           <a:lstStyle/>
           <a:p>
-            <a:pPr algn="r" indent="0" marL="0">
+            <a:pPr marL="0" indent="0" algn="r">
               <a:buNone/>
             </a:pPr>
             <a:r>
@@ -6249,7 +6023,7 @@
           <a:bodyPr wrap="square" lIns="0" tIns="114300" rIns="114300" bIns="0" rtlCol="0" anchor="ctr"/>
           <a:lstStyle/>
           <a:p>
-            <a:pPr algn="l" indent="0" marL="0">
+            <a:pPr marL="0" indent="0" algn="l">
               <a:buNone/>
             </a:pPr>
             <a:r>
@@ -6288,7 +6062,7 @@
           <a:bodyPr wrap="square" lIns="0" tIns="114300" rIns="114300" bIns="0" rtlCol="0" anchor="ctr"/>
           <a:lstStyle/>
           <a:p>
-            <a:pPr algn="r" indent="0" marL="0">
+            <a:pPr marL="0" indent="0" algn="r">
               <a:buNone/>
             </a:pPr>
             <a:r>
@@ -6314,7 +6088,7 @@
         </p:nvSpPr>
         <p:spPr>
           <a:xfrm>
-            <a:off x="3075252" y="1727597"/>
+            <a:off x="3027627" y="1699022"/>
             <a:ext cx="778556" cy="123825"/>
           </a:xfrm>
           <a:prstGeom prst="rect">
@@ -6327,7 +6101,7 @@
           <a:bodyPr wrap="square" lIns="0" tIns="114300" rIns="114300" bIns="0" rtlCol="0" anchor="ctr"/>
           <a:lstStyle/>
           <a:p>
-            <a:pPr algn="r" indent="0" marL="0">
+            <a:pPr marL="0" indent="0" algn="r">
               <a:buNone/>
             </a:pPr>
             <a:r>
@@ -6353,7 +6127,7 @@
         </p:nvSpPr>
         <p:spPr>
           <a:xfrm>
-            <a:off x="3075252" y="1975247"/>
+            <a:off x="3027627" y="1946672"/>
             <a:ext cx="778556" cy="123825"/>
           </a:xfrm>
           <a:prstGeom prst="rect">
@@ -6366,7 +6140,7 @@
           <a:bodyPr wrap="square" lIns="0" tIns="114300" rIns="114300" bIns="0" rtlCol="0" anchor="ctr"/>
           <a:lstStyle/>
           <a:p>
-            <a:pPr algn="r" indent="0" marL="0">
+            <a:pPr marL="0" indent="0" algn="r">
               <a:buNone/>
             </a:pPr>
             <a:r>
@@ -6392,7 +6166,7 @@
         </p:nvSpPr>
         <p:spPr>
           <a:xfrm>
-            <a:off x="3075252" y="2222897"/>
+            <a:off x="3027627" y="2194322"/>
             <a:ext cx="778556" cy="123825"/>
           </a:xfrm>
           <a:prstGeom prst="rect">
@@ -6405,7 +6179,7 @@
           <a:bodyPr wrap="square" lIns="0" tIns="114300" rIns="114300" bIns="0" rtlCol="0" anchor="ctr"/>
           <a:lstStyle/>
           <a:p>
-            <a:pPr algn="r" indent="0" marL="0">
+            <a:pPr marL="0" indent="0" algn="r">
               <a:buNone/>
             </a:pPr>
             <a:r>
@@ -6431,7 +6205,7 @@
         </p:nvSpPr>
         <p:spPr>
           <a:xfrm>
-            <a:off x="3075252" y="2470547"/>
+            <a:off x="3027627" y="2441972"/>
             <a:ext cx="778556" cy="123825"/>
           </a:xfrm>
           <a:prstGeom prst="rect">
@@ -6444,7 +6218,7 @@
           <a:bodyPr wrap="square" lIns="0" tIns="114300" rIns="114300" bIns="0" rtlCol="0" anchor="ctr"/>
           <a:lstStyle/>
           <a:p>
-            <a:pPr algn="r" indent="0" marL="0">
+            <a:pPr marL="0" indent="0" algn="r">
               <a:buNone/>
             </a:pPr>
             <a:r>
@@ -6470,7 +6244,7 @@
         </p:nvSpPr>
         <p:spPr>
           <a:xfrm>
-            <a:off x="3075252" y="2965847"/>
+            <a:off x="3027627" y="2937272"/>
             <a:ext cx="778556" cy="123825"/>
           </a:xfrm>
           <a:prstGeom prst="rect">
@@ -6483,7 +6257,7 @@
           <a:bodyPr wrap="square" lIns="0" tIns="114300" rIns="114300" bIns="0" rtlCol="0" anchor="ctr"/>
           <a:lstStyle/>
           <a:p>
-            <a:pPr algn="r" indent="0" marL="0">
+            <a:pPr marL="0" indent="0" algn="r">
               <a:buNone/>
             </a:pPr>
             <a:r>
@@ -6509,7 +6283,7 @@
         </p:nvSpPr>
         <p:spPr>
           <a:xfrm>
-            <a:off x="3075252" y="3213497"/>
+            <a:off x="3027627" y="3184922"/>
             <a:ext cx="778556" cy="123825"/>
           </a:xfrm>
           <a:prstGeom prst="rect">
@@ -6522,7 +6296,7 @@
           <a:bodyPr wrap="square" lIns="0" tIns="114300" rIns="114300" bIns="0" rtlCol="0" anchor="ctr"/>
           <a:lstStyle/>
           <a:p>
-            <a:pPr algn="r" indent="0" marL="0">
+            <a:pPr marL="0" indent="0" algn="r">
               <a:buNone/>
             </a:pPr>
             <a:r>
@@ -6548,7 +6322,7 @@
         </p:nvSpPr>
         <p:spPr>
           <a:xfrm>
-            <a:off x="3075252" y="3461147"/>
+            <a:off x="3027627" y="3432572"/>
             <a:ext cx="778556" cy="123825"/>
           </a:xfrm>
           <a:prstGeom prst="rect">
@@ -6561,7 +6335,7 @@
           <a:bodyPr wrap="square" lIns="0" tIns="114300" rIns="114300" bIns="0" rtlCol="0" anchor="ctr"/>
           <a:lstStyle/>
           <a:p>
-            <a:pPr algn="r" indent="0" marL="0">
+            <a:pPr marL="0" indent="0" algn="r">
               <a:buNone/>
             </a:pPr>
             <a:r>
@@ -6587,7 +6361,7 @@
         </p:nvSpPr>
         <p:spPr>
           <a:xfrm>
-            <a:off x="3075252" y="3708797"/>
+            <a:off x="3027627" y="3680222"/>
             <a:ext cx="778556" cy="123825"/>
           </a:xfrm>
           <a:prstGeom prst="rect">
@@ -6600,7 +6374,7 @@
           <a:bodyPr wrap="square" lIns="0" tIns="114300" rIns="114300" bIns="0" rtlCol="0" anchor="ctr"/>
           <a:lstStyle/>
           <a:p>
-            <a:pPr algn="r" indent="0" marL="0">
+            <a:pPr marL="0" indent="0" algn="r">
               <a:buNone/>
             </a:pPr>
             <a:r>
@@ -6626,7 +6400,7 @@
         </p:nvSpPr>
         <p:spPr>
           <a:xfrm>
-            <a:off x="3075252" y="4204097"/>
+            <a:off x="3027627" y="4175522"/>
             <a:ext cx="778556" cy="123825"/>
           </a:xfrm>
           <a:prstGeom prst="rect">
@@ -6639,7 +6413,7 @@
           <a:bodyPr wrap="square" lIns="0" tIns="114300" rIns="114300" bIns="0" rtlCol="0" anchor="ctr"/>
           <a:lstStyle/>
           <a:p>
-            <a:pPr algn="r" indent="0" marL="0">
+            <a:pPr marL="0" indent="0" algn="r">
               <a:buNone/>
             </a:pPr>
             <a:r>
@@ -6665,7 +6439,7 @@
         </p:nvSpPr>
         <p:spPr>
           <a:xfrm>
-            <a:off x="6376624" y="2470547"/>
+            <a:off x="6319474" y="2422922"/>
             <a:ext cx="778556" cy="123825"/>
           </a:xfrm>
           <a:prstGeom prst="rect">
@@ -6678,7 +6452,7 @@
           <a:bodyPr wrap="square" lIns="0" tIns="114300" rIns="114300" bIns="0" rtlCol="0" anchor="ctr"/>
           <a:lstStyle/>
           <a:p>
-            <a:pPr algn="r" indent="0" marL="0">
+            <a:pPr marL="0" indent="0" algn="r">
               <a:buNone/>
             </a:pPr>
             <a:r>
@@ -6704,7 +6478,7 @@
         </p:nvSpPr>
         <p:spPr>
           <a:xfrm>
-            <a:off x="6376624" y="2965847"/>
+            <a:off x="6319474" y="2918222"/>
             <a:ext cx="778556" cy="123825"/>
           </a:xfrm>
           <a:prstGeom prst="rect">
@@ -6717,7 +6491,7 @@
           <a:bodyPr wrap="square" lIns="0" tIns="114300" rIns="114300" bIns="0" rtlCol="0" anchor="ctr"/>
           <a:lstStyle/>
           <a:p>
-            <a:pPr algn="r" indent="0" marL="0">
+            <a:pPr marL="0" indent="0" algn="r">
               <a:buNone/>
             </a:pPr>
             <a:r>
@@ -6743,7 +6517,7 @@
         </p:nvSpPr>
         <p:spPr>
           <a:xfrm>
-            <a:off x="6376624" y="3956447"/>
+            <a:off x="6319474" y="3908822"/>
             <a:ext cx="778556" cy="123825"/>
           </a:xfrm>
           <a:prstGeom prst="rect">
@@ -6756,7 +6530,7 @@
           <a:bodyPr wrap="square" lIns="0" tIns="114300" rIns="114300" bIns="0" rtlCol="0" anchor="ctr"/>
           <a:lstStyle/>
           <a:p>
-            <a:pPr algn="r" indent="0" marL="0">
+            <a:pPr marL="0" indent="0" algn="r">
               <a:buNone/>
             </a:pPr>
             <a:r>
@@ -6782,7 +6556,7 @@
         </p:nvSpPr>
         <p:spPr>
           <a:xfrm>
-            <a:off x="6376624" y="4204097"/>
+            <a:off x="6319474" y="4156472"/>
             <a:ext cx="778556" cy="123825"/>
           </a:xfrm>
           <a:prstGeom prst="rect">
@@ -6795,7 +6569,7 @@
           <a:bodyPr wrap="square" lIns="0" tIns="114300" rIns="114300" bIns="0" rtlCol="0" anchor="ctr"/>
           <a:lstStyle/>
           <a:p>
-            <a:pPr algn="r" indent="0" marL="0">
+            <a:pPr marL="0" indent="0" algn="r">
               <a:buNone/>
             </a:pPr>
             <a:r>
@@ -6821,7 +6595,7 @@
         </p:nvSpPr>
         <p:spPr>
           <a:xfrm>
-            <a:off x="7555220" y="1276350"/>
+            <a:off x="7507595" y="1228725"/>
             <a:ext cx="1034089" cy="133350"/>
           </a:xfrm>
           <a:prstGeom prst="rect">
@@ -6834,7 +6608,7 @@
           <a:bodyPr wrap="square" lIns="0" tIns="114300" rIns="114300" bIns="0" rtlCol="0" anchor="ctr"/>
           <a:lstStyle/>
           <a:p>
-            <a:pPr algn="l" indent="0" marL="0">
+            <a:pPr marL="0" indent="0" algn="l">
               <a:buNone/>
             </a:pPr>
             <a:r>
@@ -6873,7 +6647,7 @@
           <a:bodyPr wrap="square" lIns="0" tIns="114300" rIns="114300" bIns="0" rtlCol="0" anchor="ctr"/>
           <a:lstStyle/>
           <a:p>
-            <a:pPr algn="l" indent="0" marL="0">
+            <a:pPr marL="0" indent="0" algn="l">
               <a:buNone/>
             </a:pPr>
             <a:r>
@@ -6912,7 +6686,7 @@
           <a:bodyPr wrap="square" lIns="0" tIns="114300" rIns="114300" bIns="0" rtlCol="0" anchor="ctr"/>
           <a:lstStyle/>
           <a:p>
-            <a:pPr algn="l" indent="0" marL="0">
+            <a:pPr marL="0" indent="0" algn="l">
               <a:buNone/>
             </a:pPr>
             <a:r>
@@ -6951,7 +6725,7 @@
           <a:bodyPr wrap="square" lIns="0" tIns="114300" rIns="114300" bIns="0" rtlCol="0" anchor="ctr"/>
           <a:lstStyle/>
           <a:p>
-            <a:pPr algn="l" indent="0" marL="0">
+            <a:pPr marL="0" indent="0" algn="l">
               <a:buNone/>
             </a:pPr>
             <a:r>
@@ -6990,7 +6764,7 @@
           <a:bodyPr wrap="square" lIns="0" tIns="114300" rIns="114300" bIns="0" rtlCol="0" anchor="ctr"/>
           <a:lstStyle/>
           <a:p>
-            <a:pPr algn="l" indent="0" marL="0">
+            <a:pPr marL="0" indent="0" algn="l">
               <a:buNone/>
             </a:pPr>
             <a:r>
@@ -7029,7 +6803,7 @@
           <a:bodyPr wrap="square" lIns="0" tIns="114300" rIns="114300" bIns="0" rtlCol="0" anchor="ctr"/>
           <a:lstStyle/>
           <a:p>
-            <a:pPr algn="l" indent="0" marL="0">
+            <a:pPr marL="0" indent="0" algn="l">
               <a:buNone/>
             </a:pPr>
             <a:r>
@@ -7068,7 +6842,7 @@
           <a:bodyPr wrap="square" lIns="0" tIns="114300" rIns="114300" bIns="0" rtlCol="0" anchor="ctr"/>
           <a:lstStyle/>
           <a:p>
-            <a:pPr algn="l" indent="0" marL="0">
+            <a:pPr marL="0" indent="0" algn="l">
               <a:buNone/>
             </a:pPr>
             <a:r>
@@ -7107,7 +6881,7 @@
           <a:bodyPr wrap="square" lIns="0" tIns="114300" rIns="114300" bIns="0" rtlCol="0" anchor="ctr"/>
           <a:lstStyle/>
           <a:p>
-            <a:pPr algn="l" indent="0" marL="0">
+            <a:pPr marL="0" indent="0" algn="l">
               <a:buNone/>
             </a:pPr>
             <a:r>
@@ -7146,7 +6920,7 @@
           <a:bodyPr wrap="square" lIns="0" tIns="114300" rIns="114300" bIns="0" rtlCol="0" anchor="ctr"/>
           <a:lstStyle/>
           <a:p>
-            <a:pPr algn="l" indent="0" marL="0">
+            <a:pPr marL="0" indent="0" algn="l">
               <a:buNone/>
             </a:pPr>
             <a:r>
@@ -7185,7 +6959,7 @@
           <a:bodyPr wrap="square" lIns="0" tIns="114300" rIns="114300" bIns="0" rtlCol="0" anchor="ctr"/>
           <a:lstStyle/>
           <a:p>
-            <a:pPr algn="r" indent="0" marL="0">
+            <a:pPr marL="0" indent="0" algn="r">
               <a:buNone/>
             </a:pPr>
             <a:r>
@@ -7224,7 +6998,7 @@
           <a:bodyPr wrap="square" lIns="0" tIns="114300" rIns="114300" bIns="0" rtlCol="0" anchor="ctr"/>
           <a:lstStyle/>
           <a:p>
-            <a:pPr algn="r" indent="0" marL="0">
+            <a:pPr marL="0" indent="0" algn="r">
               <a:buNone/>
             </a:pPr>
             <a:r>
@@ -7263,7 +7037,7 @@
           <a:bodyPr wrap="square" lIns="0" tIns="114300" rIns="114300" bIns="0" rtlCol="0" anchor="ctr"/>
           <a:lstStyle/>
           <a:p>
-            <a:pPr algn="r" indent="0" marL="0">
+            <a:pPr marL="0" indent="0" algn="r">
               <a:buNone/>
             </a:pPr>
             <a:r>
@@ -7302,7 +7076,7 @@
           <a:bodyPr wrap="square" lIns="0" tIns="114300" rIns="114300" bIns="0" rtlCol="0" anchor="ctr"/>
           <a:lstStyle/>
           <a:p>
-            <a:pPr algn="r" indent="0" marL="0">
+            <a:pPr marL="0" indent="0" algn="r">
               <a:buNone/>
             </a:pPr>
             <a:r>
@@ -7341,7 +7115,7 @@
           <a:bodyPr wrap="square" lIns="0" tIns="114300" rIns="114300" bIns="0" rtlCol="0" anchor="ctr"/>
           <a:lstStyle/>
           <a:p>
-            <a:pPr algn="r" indent="0" marL="0">
+            <a:pPr marL="0" indent="0" algn="r">
               <a:buNone/>
             </a:pPr>
             <a:r>
@@ -7380,7 +7154,7 @@
           <a:bodyPr wrap="square" lIns="0" tIns="114300" rIns="114300" bIns="0" rtlCol="0" anchor="ctr"/>
           <a:lstStyle/>
           <a:p>
-            <a:pPr algn="r" indent="0" marL="0">
+            <a:pPr marL="0" indent="0" algn="r">
               <a:buNone/>
             </a:pPr>
             <a:r>
@@ -7419,7 +7193,7 @@
           <a:bodyPr wrap="square" lIns="0" tIns="114300" rIns="114300" bIns="0" rtlCol="0" anchor="ctr"/>
           <a:lstStyle/>
           <a:p>
-            <a:pPr algn="r" indent="0" marL="0">
+            <a:pPr marL="0" indent="0" algn="r">
               <a:buNone/>
             </a:pPr>
             <a:r>
@@ -7458,7 +7232,7 @@
           <a:bodyPr wrap="square" lIns="0" tIns="114300" rIns="114300" bIns="0" rtlCol="0" anchor="ctr"/>
           <a:lstStyle/>
           <a:p>
-            <a:pPr algn="r" indent="0" marL="0">
+            <a:pPr marL="0" indent="0" algn="r">
               <a:buNone/>
             </a:pPr>
             <a:r>
@@ -7497,7 +7271,7 @@
           <a:bodyPr wrap="square" lIns="0" tIns="114300" rIns="114300" bIns="0" rtlCol="0" anchor="ctr"/>
           <a:lstStyle/>
           <a:p>
-            <a:pPr algn="r" indent="0" marL="0">
+            <a:pPr marL="0" indent="0" algn="r">
               <a:buNone/>
             </a:pPr>
             <a:r>
@@ -7536,7 +7310,7 @@
           <a:bodyPr wrap="square" lIns="0" tIns="114300" rIns="114300" bIns="0" rtlCol="0" anchor="ctr"/>
           <a:lstStyle/>
           <a:p>
-            <a:pPr algn="r" indent="0" marL="0">
+            <a:pPr marL="0" indent="0" algn="r">
               <a:buNone/>
             </a:pPr>
             <a:r>
@@ -7562,7 +7336,7 @@
         </p:nvSpPr>
         <p:spPr>
           <a:xfrm>
-            <a:off x="3075252" y="2718197"/>
+            <a:off x="3027627" y="2689622"/>
             <a:ext cx="778556" cy="123825"/>
           </a:xfrm>
           <a:prstGeom prst="rect">
@@ -7575,7 +7349,7 @@
           <a:bodyPr wrap="square" lIns="0" tIns="114300" rIns="114300" bIns="0" rtlCol="0" anchor="ctr"/>
           <a:lstStyle/>
           <a:p>
-            <a:pPr algn="r" indent="0" marL="0">
+            <a:pPr marL="0" indent="0" algn="r">
               <a:buNone/>
             </a:pPr>
             <a:r>
@@ -7614,7 +7388,7 @@
           <a:bodyPr wrap="square" lIns="0" tIns="114300" rIns="114300" bIns="0" rtlCol="0" anchor="ctr"/>
           <a:lstStyle/>
           <a:p>
-            <a:pPr algn="r" indent="0" marL="0">
+            <a:pPr marL="0" indent="0" algn="r">
               <a:buNone/>
             </a:pPr>
             <a:r>
@@ -7653,7 +7427,7 @@
           <a:bodyPr wrap="square" lIns="0" tIns="114300" rIns="114300" bIns="0" rtlCol="0" anchor="ctr"/>
           <a:lstStyle/>
           <a:p>
-            <a:pPr algn="r" indent="0" marL="0">
+            <a:pPr marL="0" indent="0" algn="r">
               <a:buNone/>
             </a:pPr>
             <a:r>
@@ -7692,7 +7466,7 @@
           <a:bodyPr wrap="square" lIns="0" tIns="114300" rIns="114300" bIns="0" rtlCol="0" anchor="ctr"/>
           <a:lstStyle/>
           <a:p>
-            <a:pPr algn="r" indent="0" marL="0">
+            <a:pPr marL="0" indent="0" algn="r">
               <a:buNone/>
             </a:pPr>
             <a:r>
@@ -7731,7 +7505,7 @@
           <a:bodyPr wrap="square" lIns="0" tIns="114300" rIns="114300" bIns="0" rtlCol="0" anchor="ctr"/>
           <a:lstStyle/>
           <a:p>
-            <a:pPr algn="r" indent="0" marL="0">
+            <a:pPr marL="0" indent="0" algn="r">
               <a:buNone/>
             </a:pPr>
             <a:r>
@@ -7770,7 +7544,7 @@
           <a:bodyPr wrap="square" lIns="0" tIns="114300" rIns="114300" bIns="0" rtlCol="0" anchor="ctr"/>
           <a:lstStyle/>
           <a:p>
-            <a:pPr algn="r" indent="0" marL="0">
+            <a:pPr marL="0" indent="0" algn="r">
               <a:buNone/>
             </a:pPr>
             <a:r>
@@ -7796,7 +7570,7 @@
         </p:nvSpPr>
         <p:spPr>
           <a:xfrm>
-            <a:off x="3075252" y="3956447"/>
+            <a:off x="3027627" y="3927872"/>
             <a:ext cx="778556" cy="123825"/>
           </a:xfrm>
           <a:prstGeom prst="rect">
@@ -7809,7 +7583,7 @@
           <a:bodyPr wrap="square" lIns="0" tIns="114300" rIns="114300" bIns="0" rtlCol="0" anchor="ctr"/>
           <a:lstStyle/>
           <a:p>
-            <a:pPr algn="r" indent="0" marL="0">
+            <a:pPr marL="0" indent="0" algn="r">
               <a:buNone/>
             </a:pPr>
             <a:r>
@@ -7835,7 +7609,7 @@
         </p:nvSpPr>
         <p:spPr>
           <a:xfrm>
-            <a:off x="6376624" y="1727597"/>
+            <a:off x="6319474" y="1679972"/>
             <a:ext cx="778556" cy="123825"/>
           </a:xfrm>
           <a:prstGeom prst="rect">
@@ -7848,7 +7622,7 @@
           <a:bodyPr wrap="square" lIns="0" tIns="114300" rIns="114300" bIns="0" rtlCol="0" anchor="ctr"/>
           <a:lstStyle/>
           <a:p>
-            <a:pPr algn="r" indent="0" marL="0">
+            <a:pPr marL="0" indent="0" algn="r">
               <a:buNone/>
             </a:pPr>
             <a:r>
@@ -7887,7 +7661,7 @@
           <a:bodyPr wrap="square" lIns="0" tIns="114300" rIns="114300" bIns="0" rtlCol="0" anchor="ctr"/>
           <a:lstStyle/>
           <a:p>
-            <a:pPr algn="r" indent="0" marL="0">
+            <a:pPr marL="0" indent="0" algn="r">
               <a:buNone/>
             </a:pPr>
             <a:r>
@@ -7926,7 +7700,7 @@
           <a:bodyPr wrap="square" lIns="0" tIns="114300" rIns="114300" bIns="0" rtlCol="0" anchor="ctr"/>
           <a:lstStyle/>
           <a:p>
-            <a:pPr algn="r" indent="0" marL="0">
+            <a:pPr marL="0" indent="0" algn="r">
               <a:buNone/>
             </a:pPr>
             <a:r>
@@ -7952,7 +7726,7 @@
         </p:nvSpPr>
         <p:spPr>
           <a:xfrm>
-            <a:off x="6376624" y="2718197"/>
+            <a:off x="6319474" y="2670572"/>
             <a:ext cx="778556" cy="123825"/>
           </a:xfrm>
           <a:prstGeom prst="rect">
@@ -7965,7 +7739,7 @@
           <a:bodyPr wrap="square" lIns="0" tIns="114300" rIns="114300" bIns="0" rtlCol="0" anchor="ctr"/>
           <a:lstStyle/>
           <a:p>
-            <a:pPr algn="r" indent="0" marL="0">
+            <a:pPr marL="0" indent="0" algn="r">
               <a:buNone/>
             </a:pPr>
             <a:r>
@@ -8004,7 +7778,7 @@
           <a:bodyPr wrap="square" lIns="0" tIns="114300" rIns="114300" bIns="0" rtlCol="0" anchor="ctr"/>
           <a:lstStyle/>
           <a:p>
-            <a:pPr algn="r" indent="0" marL="0">
+            <a:pPr marL="0" indent="0" algn="r">
               <a:buNone/>
             </a:pPr>
             <a:r>
@@ -8030,7 +7804,7 @@
         </p:nvSpPr>
         <p:spPr>
           <a:xfrm>
-            <a:off x="6376624" y="3461147"/>
+            <a:off x="6319474" y="3413522"/>
             <a:ext cx="778556" cy="123825"/>
           </a:xfrm>
           <a:prstGeom prst="rect">
@@ -8043,7 +7817,7 @@
           <a:bodyPr wrap="square" lIns="0" tIns="114300" rIns="114300" bIns="0" rtlCol="0" anchor="ctr"/>
           <a:lstStyle/>
           <a:p>
-            <a:pPr algn="r" indent="0" marL="0">
+            <a:pPr marL="0" indent="0" algn="r">
               <a:buNone/>
             </a:pPr>
             <a:r>
@@ -8069,7 +7843,7 @@
         </p:nvSpPr>
         <p:spPr>
           <a:xfrm>
-            <a:off x="6376624" y="3708797"/>
+            <a:off x="6319474" y="3661172"/>
             <a:ext cx="778556" cy="123825"/>
           </a:xfrm>
           <a:prstGeom prst="rect">
@@ -8082,7 +7856,7 @@
           <a:bodyPr wrap="square" lIns="0" tIns="114300" rIns="114300" bIns="0" rtlCol="0" anchor="ctr"/>
           <a:lstStyle/>
           <a:p>
-            <a:pPr algn="r" indent="0" marL="0">
+            <a:pPr marL="0" indent="0" algn="r">
               <a:buNone/>
             </a:pPr>
             <a:r>
@@ -8121,7 +7895,7 @@
           <a:bodyPr wrap="square" lIns="0" tIns="114300" rIns="114300" bIns="0" rtlCol="0" anchor="ctr"/>
           <a:lstStyle/>
           <a:p>
-            <a:pPr algn="r" indent="0" marL="0">
+            <a:pPr marL="0" indent="0" algn="r">
               <a:buNone/>
             </a:pPr>
             <a:r>
@@ -8160,7 +7934,7 @@
           <a:bodyPr wrap="square" lIns="0" tIns="114300" rIns="114300" bIns="0" rtlCol="0" anchor="ctr"/>
           <a:lstStyle/>
           <a:p>
-            <a:pPr algn="r" indent="0" marL="0">
+            <a:pPr marL="0" indent="0" algn="r">
               <a:buNone/>
             </a:pPr>
             <a:r>
@@ -8199,7 +7973,7 @@
           <a:bodyPr wrap="square" lIns="0" tIns="114300" rIns="114300" bIns="0" rtlCol="0" anchor="ctr"/>
           <a:lstStyle/>
           <a:p>
-            <a:pPr algn="r" indent="0" marL="0">
+            <a:pPr marL="0" indent="0" algn="r">
               <a:buNone/>
             </a:pPr>
             <a:r>
@@ -8238,7 +8012,7 @@
           <a:bodyPr wrap="square" lIns="0" tIns="114300" rIns="114300" bIns="0" rtlCol="0" anchor="ctr"/>
           <a:lstStyle/>
           <a:p>
-            <a:pPr algn="r" indent="0" marL="0">
+            <a:pPr marL="0" indent="0" algn="r">
               <a:buNone/>
             </a:pPr>
             <a:r>
@@ -8277,7 +8051,7 @@
           <a:bodyPr wrap="square" lIns="0" tIns="114300" rIns="114300" bIns="0" rtlCol="0" anchor="ctr"/>
           <a:lstStyle/>
           <a:p>
-            <a:pPr algn="r" indent="0" marL="0">
+            <a:pPr marL="0" indent="0" algn="r">
               <a:buNone/>
             </a:pPr>
             <a:r>
@@ -8316,7 +8090,7 @@
           <a:bodyPr wrap="square" lIns="0" tIns="114300" rIns="114300" bIns="0" rtlCol="0" anchor="ctr"/>
           <a:lstStyle/>
           <a:p>
-            <a:pPr algn="r" indent="0" marL="0">
+            <a:pPr marL="0" indent="0" algn="r">
               <a:buNone/>
             </a:pPr>
             <a:r>
@@ -8355,7 +8129,7 @@
           <a:bodyPr wrap="square" lIns="0" tIns="114300" rIns="114300" bIns="0" rtlCol="0" anchor="ctr"/>
           <a:lstStyle/>
           <a:p>
-            <a:pPr algn="r" indent="0" marL="0">
+            <a:pPr marL="0" indent="0" algn="r">
               <a:buNone/>
             </a:pPr>
             <a:r>
@@ -8394,7 +8168,7 @@
           <a:bodyPr wrap="square" lIns="0" tIns="114300" rIns="114300" bIns="0" rtlCol="0" anchor="ctr"/>
           <a:lstStyle/>
           <a:p>
-            <a:pPr algn="r" indent="0" marL="0">
+            <a:pPr marL="0" indent="0" algn="r">
               <a:buNone/>
             </a:pPr>
             <a:r>
@@ -8433,7 +8207,7 @@
           <a:bodyPr wrap="square" lIns="0" tIns="114300" rIns="114300" bIns="0" rtlCol="0" anchor="ctr"/>
           <a:lstStyle/>
           <a:p>
-            <a:pPr algn="r" indent="0" marL="0">
+            <a:pPr marL="0" indent="0" algn="r">
               <a:buNone/>
             </a:pPr>
             <a:r>
@@ -8472,7 +8246,7 @@
           <a:bodyPr wrap="square" lIns="0" tIns="114300" rIns="114300" bIns="0" rtlCol="0" anchor="ctr"/>
           <a:lstStyle/>
           <a:p>
-            <a:pPr algn="r" indent="0" marL="0">
+            <a:pPr marL="0" indent="0" algn="r">
               <a:buNone/>
             </a:pPr>
             <a:r>
@@ -8511,7 +8285,7 @@
           <a:bodyPr wrap="square" lIns="0" tIns="114300" rIns="114300" bIns="0" rtlCol="0" anchor="ctr"/>
           <a:lstStyle/>
           <a:p>
-            <a:pPr algn="r" indent="0" marL="0">
+            <a:pPr marL="0" indent="0" algn="r">
               <a:buNone/>
             </a:pPr>
             <a:r>
@@ -8550,7 +8324,7 @@
           <a:bodyPr wrap="square" lIns="0" tIns="114300" rIns="114300" bIns="0" rtlCol="0" anchor="ctr"/>
           <a:lstStyle/>
           <a:p>
-            <a:pPr algn="r" indent="0" marL="0">
+            <a:pPr marL="0" indent="0" algn="r">
               <a:buNone/>
             </a:pPr>
             <a:r>
@@ -8589,7 +8363,7 @@
           <a:bodyPr wrap="square" lIns="0" tIns="114300" rIns="114300" bIns="0" rtlCol="0" anchor="ctr"/>
           <a:lstStyle/>
           <a:p>
-            <a:pPr algn="r" indent="0" marL="0">
+            <a:pPr marL="0" indent="0" algn="r">
               <a:buNone/>
             </a:pPr>
             <a:r>
@@ -8628,7 +8402,7 @@
           <a:bodyPr wrap="square" lIns="0" tIns="114300" rIns="114300" bIns="0" rtlCol="0" anchor="ctr"/>
           <a:lstStyle/>
           <a:p>
-            <a:pPr algn="r" indent="0" marL="0">
+            <a:pPr marL="0" indent="0" algn="r">
               <a:buNone/>
             </a:pPr>
             <a:r>
@@ -8667,7 +8441,7 @@
           <a:bodyPr wrap="square" lIns="0" tIns="114300" rIns="114300" bIns="0" rtlCol="0" anchor="ctr"/>
           <a:lstStyle/>
           <a:p>
-            <a:pPr algn="r" indent="0" marL="0">
+            <a:pPr marL="0" indent="0" algn="r">
               <a:buNone/>
             </a:pPr>
             <a:r>
@@ -8706,7 +8480,7 @@
           <a:bodyPr wrap="square" lIns="0" tIns="114300" rIns="114300" bIns="0" rtlCol="0" anchor="ctr"/>
           <a:lstStyle/>
           <a:p>
-            <a:pPr algn="r" indent="0" marL="0">
+            <a:pPr marL="0" indent="0" algn="r">
               <a:buNone/>
             </a:pPr>
             <a:r>
@@ -8745,7 +8519,7 @@
           <a:bodyPr wrap="square" lIns="0" tIns="114300" rIns="114300" bIns="0" rtlCol="0" anchor="ctr"/>
           <a:lstStyle/>
           <a:p>
-            <a:pPr algn="r" indent="0" marL="0">
+            <a:pPr marL="0" indent="0" algn="r">
               <a:buNone/>
             </a:pPr>
             <a:r>
@@ -8784,7 +8558,7 @@
           <a:bodyPr wrap="square" lIns="0" tIns="114300" rIns="114300" bIns="0" rtlCol="0" anchor="ctr"/>
           <a:lstStyle/>
           <a:p>
-            <a:pPr algn="r" indent="0" marL="0">
+            <a:pPr marL="0" indent="0" algn="r">
               <a:buNone/>
             </a:pPr>
             <a:r>
@@ -8823,7 +8597,7 @@
           <a:bodyPr wrap="square" lIns="0" tIns="114300" rIns="114300" bIns="0" rtlCol="0" anchor="ctr"/>
           <a:lstStyle/>
           <a:p>
-            <a:pPr algn="r" indent="0" marL="0">
+            <a:pPr marL="0" indent="0" algn="r">
               <a:buNone/>
             </a:pPr>
             <a:r>
@@ -8862,7 +8636,7 @@
           <a:bodyPr wrap="square" lIns="0" tIns="114300" rIns="114300" bIns="0" rtlCol="0" anchor="ctr"/>
           <a:lstStyle/>
           <a:p>
-            <a:pPr algn="r" indent="0" marL="0">
+            <a:pPr marL="0" indent="0" algn="r">
               <a:buNone/>
             </a:pPr>
             <a:r>
@@ -8901,7 +8675,7 @@
           <a:bodyPr wrap="square" lIns="0" tIns="114300" rIns="114300" bIns="0" rtlCol="0" anchor="ctr"/>
           <a:lstStyle/>
           <a:p>
-            <a:pPr algn="r" indent="0" marL="0">
+            <a:pPr marL="0" indent="0" algn="r">
               <a:buNone/>
             </a:pPr>
             <a:r>
@@ -8940,7 +8714,7 @@
           <a:bodyPr wrap="square" lIns="0" tIns="114300" rIns="114300" bIns="0" rtlCol="0" anchor="ctr"/>
           <a:lstStyle/>
           <a:p>
-            <a:pPr algn="r" indent="0" marL="0">
+            <a:pPr marL="0" indent="0" algn="r">
               <a:buNone/>
             </a:pPr>
             <a:r>
@@ -8979,7 +8753,7 @@
           <a:bodyPr wrap="square" lIns="0" tIns="114300" rIns="114300" bIns="0" rtlCol="0" anchor="ctr"/>
           <a:lstStyle/>
           <a:p>
-            <a:pPr algn="r" indent="0" marL="0">
+            <a:pPr marL="0" indent="0" algn="r">
               <a:buNone/>
             </a:pPr>
             <a:r>
@@ -9018,7 +8792,7 @@
           <a:bodyPr wrap="square" lIns="0" tIns="114300" rIns="114300" bIns="0" rtlCol="0" anchor="ctr"/>
           <a:lstStyle/>
           <a:p>
-            <a:pPr algn="r" indent="0" marL="0">
+            <a:pPr marL="0" indent="0" algn="r">
               <a:buNone/>
             </a:pPr>
             <a:r>
@@ -9057,7 +8831,7 @@
           <a:bodyPr wrap="square" lIns="0" tIns="114300" rIns="114300" bIns="0" rtlCol="0" anchor="ctr"/>
           <a:lstStyle/>
           <a:p>
-            <a:pPr algn="r" indent="0" marL="0">
+            <a:pPr marL="0" indent="0" algn="r">
               <a:buNone/>
             </a:pPr>
             <a:r>
@@ -9096,7 +8870,7 @@
           <a:bodyPr wrap="square" lIns="0" tIns="114300" rIns="114300" bIns="0" rtlCol="0" anchor="ctr"/>
           <a:lstStyle/>
           <a:p>
-            <a:pPr algn="r" indent="0" marL="0">
+            <a:pPr marL="0" indent="0" algn="r">
               <a:buNone/>
             </a:pPr>
             <a:r>
@@ -9135,7 +8909,7 @@
           <a:bodyPr wrap="square" lIns="0" tIns="114300" rIns="114300" bIns="0" rtlCol="0" anchor="ctr"/>
           <a:lstStyle/>
           <a:p>
-            <a:pPr algn="r" indent="0" marL="0">
+            <a:pPr marL="0" indent="0" algn="r">
               <a:buNone/>
             </a:pPr>
             <a:r>
@@ -9174,7 +8948,7 @@
           <a:bodyPr wrap="square" lIns="0" tIns="114300" rIns="114300" bIns="0" rtlCol="0" anchor="ctr"/>
           <a:lstStyle/>
           <a:p>
-            <a:pPr algn="r" indent="0" marL="0">
+            <a:pPr marL="0" indent="0" algn="r">
               <a:buNone/>
             </a:pPr>
             <a:r>
@@ -9213,7 +8987,7 @@
           <a:bodyPr wrap="square" lIns="0" tIns="114300" rIns="114300" bIns="0" rtlCol="0" anchor="ctr"/>
           <a:lstStyle/>
           <a:p>
-            <a:pPr algn="r" indent="0" marL="0">
+            <a:pPr marL="0" indent="0" algn="r">
               <a:buNone/>
             </a:pPr>
             <a:r>
@@ -9252,7 +9026,7 @@
           <a:bodyPr wrap="square" lIns="0" tIns="114300" rIns="114300" bIns="0" rtlCol="0" anchor="ctr"/>
           <a:lstStyle/>
           <a:p>
-            <a:pPr algn="r" indent="0" marL="0">
+            <a:pPr marL="0" indent="0" algn="r">
               <a:buNone/>
             </a:pPr>
             <a:r>
@@ -9291,7 +9065,7 @@
           <a:bodyPr wrap="square" lIns="0" tIns="114300" rIns="114300" bIns="0" rtlCol="0" anchor="ctr"/>
           <a:lstStyle/>
           <a:p>
-            <a:pPr algn="r" indent="0" marL="0">
+            <a:pPr marL="0" indent="0" algn="r">
               <a:buNone/>
             </a:pPr>
             <a:r>
@@ -9330,7 +9104,7 @@
           <a:bodyPr wrap="square" lIns="0" tIns="114300" rIns="114300" bIns="0" rtlCol="0" anchor="ctr"/>
           <a:lstStyle/>
           <a:p>
-            <a:pPr algn="r" indent="0" marL="0">
+            <a:pPr marL="0" indent="0" algn="r">
               <a:buNone/>
             </a:pPr>
             <a:r>
@@ -9369,7 +9143,7 @@
           <a:bodyPr wrap="square" lIns="0" tIns="114300" rIns="114300" bIns="0" rtlCol="0" anchor="ctr"/>
           <a:lstStyle/>
           <a:p>
-            <a:pPr algn="r" indent="0" marL="0">
+            <a:pPr marL="0" indent="0" algn="r">
               <a:buNone/>
             </a:pPr>
             <a:r>
@@ -9408,7 +9182,7 @@
           <a:bodyPr wrap="square" lIns="0" tIns="114300" rIns="114300" bIns="0" rtlCol="0" anchor="ctr"/>
           <a:lstStyle/>
           <a:p>
-            <a:pPr algn="r" indent="0" marL="0">
+            <a:pPr marL="0" indent="0" algn="r">
               <a:buNone/>
             </a:pPr>
             <a:r>
@@ -9447,7 +9221,7 @@
           <a:bodyPr wrap="square" lIns="0" tIns="114300" rIns="114300" bIns="0" rtlCol="0" anchor="ctr"/>
           <a:lstStyle/>
           <a:p>
-            <a:pPr algn="r" indent="0" marL="0">
+            <a:pPr marL="0" indent="0" algn="r">
               <a:buNone/>
             </a:pPr>
             <a:r>
@@ -9486,7 +9260,7 @@
           <a:bodyPr wrap="square" lIns="0" tIns="114300" rIns="114300" bIns="0" rtlCol="0" anchor="ctr"/>
           <a:lstStyle/>
           <a:p>
-            <a:pPr algn="r" indent="0" marL="0">
+            <a:pPr marL="0" indent="0" algn="r">
               <a:buNone/>
             </a:pPr>
             <a:r>
@@ -9525,7 +9299,7 @@
           <a:bodyPr wrap="square" lIns="0" tIns="114300" rIns="114300" bIns="0" rtlCol="0" anchor="ctr"/>
           <a:lstStyle/>
           <a:p>
-            <a:pPr algn="r" indent="0" marL="0">
+            <a:pPr marL="0" indent="0" algn="r">
               <a:buNone/>
             </a:pPr>
             <a:r>
@@ -9564,7 +9338,7 @@
           <a:bodyPr wrap="square" lIns="0" tIns="114300" rIns="114300" bIns="0" rtlCol="0" anchor="ctr"/>
           <a:lstStyle/>
           <a:p>
-            <a:pPr algn="r" indent="0" marL="0">
+            <a:pPr marL="0" indent="0" algn="r">
               <a:buNone/>
             </a:pPr>
             <a:r>
@@ -9603,7 +9377,7 @@
           <a:bodyPr wrap="square" lIns="0" tIns="114300" rIns="114300" bIns="0" rtlCol="0" anchor="ctr"/>
           <a:lstStyle/>
           <a:p>
-            <a:pPr algn="r" indent="0" marL="0">
+            <a:pPr marL="0" indent="0" algn="r">
               <a:buNone/>
             </a:pPr>
             <a:r>
@@ -9642,7 +9416,7 @@
           <a:bodyPr wrap="square" lIns="0" tIns="114300" rIns="114300" bIns="0" rtlCol="0" anchor="ctr"/>
           <a:lstStyle/>
           <a:p>
-            <a:pPr algn="r" indent="0" marL="0">
+            <a:pPr marL="0" indent="0" algn="r">
               <a:buNone/>
             </a:pPr>
             <a:r>
@@ -9681,7 +9455,7 @@
           <a:bodyPr wrap="square" lIns="0" tIns="114300" rIns="114300" bIns="0" rtlCol="0" anchor="ctr"/>
           <a:lstStyle/>
           <a:p>
-            <a:pPr algn="r" indent="0" marL="0">
+            <a:pPr marL="0" indent="0" algn="r">
               <a:buNone/>
             </a:pPr>
             <a:r>
@@ -9720,7 +9494,7 @@
           <a:bodyPr wrap="square" lIns="0" tIns="114300" rIns="114300" bIns="0" rtlCol="0" anchor="ctr"/>
           <a:lstStyle/>
           <a:p>
-            <a:pPr algn="r" indent="0" marL="0">
+            <a:pPr marL="0" indent="0" algn="r">
               <a:buNone/>
             </a:pPr>
             <a:r>
@@ -9759,7 +9533,7 @@
           <a:bodyPr wrap="square" lIns="0" tIns="114300" rIns="114300" bIns="0" rtlCol="0" anchor="ctr"/>
           <a:lstStyle/>
           <a:p>
-            <a:pPr algn="r" indent="0" marL="0">
+            <a:pPr marL="0" indent="0" algn="r">
               <a:buNone/>
             </a:pPr>
             <a:r>
@@ -9798,7 +9572,7 @@
           <a:bodyPr wrap="square" lIns="0" tIns="114300" rIns="114300" bIns="0" rtlCol="0" anchor="ctr"/>
           <a:lstStyle/>
           <a:p>
-            <a:pPr algn="r" indent="0" marL="0">
+            <a:pPr marL="0" indent="0" algn="r">
               <a:buNone/>
             </a:pPr>
             <a:r>
@@ -9837,7 +9611,7 @@
           <a:bodyPr wrap="square" lIns="0" tIns="114300" rIns="114300" bIns="0" rtlCol="0" anchor="ctr"/>
           <a:lstStyle/>
           <a:p>
-            <a:pPr algn="r" indent="0" marL="0">
+            <a:pPr marL="0" indent="0" algn="r">
               <a:buNone/>
             </a:pPr>
             <a:r>
@@ -9876,7 +9650,7 @@
           <a:bodyPr wrap="square" lIns="0" tIns="114300" rIns="114300" bIns="0" rtlCol="0" anchor="ctr"/>
           <a:lstStyle/>
           <a:p>
-            <a:pPr algn="r" indent="0" marL="0">
+            <a:pPr marL="0" indent="0" algn="r">
               <a:buNone/>
             </a:pPr>
             <a:r>
@@ -9915,7 +9689,7 @@
           <a:bodyPr wrap="square" lIns="0" tIns="114300" rIns="114300" bIns="0" rtlCol="0" anchor="ctr"/>
           <a:lstStyle/>
           <a:p>
-            <a:pPr algn="r" indent="0" marL="0">
+            <a:pPr marL="0" indent="0" algn="r">
               <a:buNone/>
             </a:pPr>
             <a:r>
@@ -9954,7 +9728,7 @@
           <a:bodyPr wrap="square" lIns="0" tIns="114300" rIns="114300" bIns="0" rtlCol="0" anchor="ctr"/>
           <a:lstStyle/>
           <a:p>
-            <a:pPr algn="r" indent="0" marL="0">
+            <a:pPr marL="0" indent="0" algn="r">
               <a:buNone/>
             </a:pPr>
             <a:r>
@@ -9993,7 +9767,7 @@
           <a:bodyPr wrap="square" lIns="0" tIns="114300" rIns="114300" bIns="0" rtlCol="0" anchor="ctr"/>
           <a:lstStyle/>
           <a:p>
-            <a:pPr algn="r" indent="0" marL="0">
+            <a:pPr marL="0" indent="0" algn="r">
               <a:buNone/>
             </a:pPr>
             <a:r>
@@ -10032,7 +9806,7 @@
           <a:bodyPr wrap="square" lIns="0" tIns="114300" rIns="114300" bIns="0" rtlCol="0" anchor="ctr"/>
           <a:lstStyle/>
           <a:p>
-            <a:pPr algn="r" indent="0" marL="0">
+            <a:pPr marL="0" indent="0" algn="r">
               <a:buNone/>
             </a:pPr>
             <a:r>
@@ -10071,7 +9845,7 @@
           <a:bodyPr wrap="square" lIns="0" tIns="114300" rIns="114300" bIns="0" rtlCol="0" anchor="ctr"/>
           <a:lstStyle/>
           <a:p>
-            <a:pPr algn="r" indent="0" marL="0">
+            <a:pPr marL="0" indent="0" algn="r">
               <a:buNone/>
             </a:pPr>
             <a:r>
@@ -10110,7 +9884,7 @@
           <a:bodyPr wrap="square" lIns="0" tIns="114300" rIns="114300" bIns="0" rtlCol="0" anchor="ctr"/>
           <a:lstStyle/>
           <a:p>
-            <a:pPr algn="r" indent="0" marL="0">
+            <a:pPr marL="0" indent="0" algn="r">
               <a:buNone/>
             </a:pPr>
             <a:r>
@@ -10149,7 +9923,7 @@
           <a:bodyPr wrap="square" lIns="0" tIns="114300" rIns="114300" bIns="0" rtlCol="0" anchor="ctr"/>
           <a:lstStyle/>
           <a:p>
-            <a:pPr algn="r" indent="0" marL="0">
+            <a:pPr marL="0" indent="0" algn="r">
               <a:buNone/>
             </a:pPr>
             <a:r>
@@ -10188,7 +9962,7 @@
           <a:bodyPr wrap="square" lIns="0" tIns="114300" rIns="114300" bIns="0" rtlCol="0" anchor="ctr"/>
           <a:lstStyle/>
           <a:p>
-            <a:pPr algn="r" indent="0" marL="0">
+            <a:pPr marL="0" indent="0" algn="r">
               <a:buNone/>
             </a:pPr>
             <a:r>
@@ -10227,7 +10001,7 @@
           <a:bodyPr wrap="square" lIns="0" tIns="114300" rIns="114300" bIns="0" rtlCol="0" anchor="ctr"/>
           <a:lstStyle/>
           <a:p>
-            <a:pPr algn="r" indent="0" marL="0">
+            <a:pPr marL="0" indent="0" algn="r">
               <a:buNone/>
             </a:pPr>
             <a:r>
@@ -10266,7 +10040,7 @@
           <a:bodyPr wrap="square" lIns="0" tIns="114300" rIns="114300" bIns="0" rtlCol="0" anchor="ctr"/>
           <a:lstStyle/>
           <a:p>
-            <a:pPr algn="r" indent="0" marL="0">
+            <a:pPr marL="0" indent="0" algn="r">
               <a:buNone/>
             </a:pPr>
             <a:r>
@@ -10305,7 +10079,7 @@
           <a:bodyPr wrap="square" lIns="0" tIns="114300" rIns="114300" bIns="0" rtlCol="0" anchor="ctr"/>
           <a:lstStyle/>
           <a:p>
-            <a:pPr algn="r" indent="0" marL="0">
+            <a:pPr marL="0" indent="0" algn="r">
               <a:buNone/>
             </a:pPr>
             <a:r>
@@ -10344,7 +10118,7 @@
           <a:bodyPr wrap="square" lIns="0" tIns="114300" rIns="114300" bIns="0" rtlCol="0" anchor="ctr"/>
           <a:lstStyle/>
           <a:p>
-            <a:pPr algn="r" indent="0" marL="0">
+            <a:pPr marL="0" indent="0" algn="r">
               <a:buNone/>
             </a:pPr>
             <a:r>
@@ -10383,7 +10157,7 @@
           <a:bodyPr wrap="square" lIns="0" tIns="114300" rIns="114300" bIns="0" rtlCol="0" anchor="ctr"/>
           <a:lstStyle/>
           <a:p>
-            <a:pPr algn="r" indent="0" marL="0">
+            <a:pPr marL="0" indent="0" algn="r">
               <a:buNone/>
             </a:pPr>
             <a:r>
@@ -10422,7 +10196,7 @@
           <a:bodyPr wrap="square" lIns="0" tIns="114300" rIns="114300" bIns="0" rtlCol="0" anchor="ctr"/>
           <a:lstStyle/>
           <a:p>
-            <a:pPr algn="r" indent="0" marL="0">
+            <a:pPr marL="0" indent="0" algn="r">
               <a:buNone/>
             </a:pPr>
             <a:r>
@@ -10461,7 +10235,7 @@
           <a:bodyPr wrap="square" lIns="0" tIns="114300" rIns="114300" bIns="0" rtlCol="0" anchor="ctr"/>
           <a:lstStyle/>
           <a:p>
-            <a:pPr algn="r" indent="0" marL="0">
+            <a:pPr marL="0" indent="0" algn="r">
               <a:buNone/>
             </a:pPr>
             <a:r>
@@ -10500,7 +10274,7 @@
           <a:bodyPr wrap="square" lIns="0" tIns="114300" rIns="114300" bIns="0" rtlCol="0" anchor="ctr"/>
           <a:lstStyle/>
           <a:p>
-            <a:pPr algn="r" indent="0" marL="0">
+            <a:pPr marL="0" indent="0" algn="r">
               <a:buNone/>
             </a:pPr>
             <a:r>
@@ -10539,7 +10313,7 @@
           <a:bodyPr wrap="square" lIns="0" tIns="114300" rIns="114300" bIns="0" rtlCol="0" anchor="ctr"/>
           <a:lstStyle/>
           <a:p>
-            <a:pPr algn="r" indent="0" marL="0">
+            <a:pPr marL="0" indent="0" algn="r">
               <a:buNone/>
             </a:pPr>
             <a:r>
@@ -10578,7 +10352,7 @@
           <a:bodyPr wrap="square" lIns="0" tIns="114300" rIns="114300" bIns="0" rtlCol="0" anchor="ctr"/>
           <a:lstStyle/>
           <a:p>
-            <a:pPr algn="r" indent="0" marL="0">
+            <a:pPr marL="0" indent="0" algn="r">
               <a:buNone/>
             </a:pPr>
             <a:r>
@@ -10623,14 +10397,14 @@
       </p:grpSpPr>
       <p:pic>
         <p:nvPicPr>
-          <p:cNvPr id="2" name="Image 0" descr="C:\01_Repositorios\02_CRM\02_Informe_Semetral\dash\tradicional\ppt_slides\sk_02_main.png">    </p:cNvPr>
+          <p:cNvPr id="2" name="Image 0" descr="C:\01_Repositorios\02_CRM\02_Informe_Semetral\dash\tradicional\ppt_slides\sk_02_main.png"/>
           <p:cNvPicPr>
             <a:picLocks noChangeAspect="1"/>
           </p:cNvPicPr>
           <p:nvPr/>
         </p:nvPicPr>
         <p:blipFill>
-          <a:blip r:embed="rId1"/>
+          <a:blip r:embed="rId3"/>
           <a:stretch>
             <a:fillRect/>
           </a:stretch>
@@ -10666,7 +10440,7 @@
           <a:bodyPr wrap="square" lIns="0" tIns="0" rIns="0" bIns="0" rtlCol="0" anchor="t"/>
           <a:lstStyle/>
           <a:p>
-            <a:pPr algn="l" indent="0" marL="0">
+            <a:pPr marL="0" indent="0" algn="l">
               <a:buNone/>
             </a:pPr>
             <a:r>
@@ -10705,7 +10479,7 @@
           <a:bodyPr wrap="square" lIns="0" tIns="0" rIns="0" bIns="0" rtlCol="0" anchor="t"/>
           <a:lstStyle/>
           <a:p>
-            <a:pPr algn="l" indent="0" marL="0">
+            <a:pPr marL="0" indent="0" algn="l">
               <a:buNone/>
             </a:pPr>
             <a:r>
@@ -10744,7 +10518,7 @@
           <a:bodyPr wrap="square" lIns="0" tIns="0" rIns="0" bIns="0" rtlCol="0" anchor="t"/>
           <a:lstStyle/>
           <a:p>
-            <a:pPr algn="l" indent="0" marL="0">
+            <a:pPr marL="0" indent="0" algn="l">
               <a:buNone/>
             </a:pPr>
             <a:r>
@@ -10783,7 +10557,7 @@
           <a:bodyPr wrap="square" lIns="0" tIns="0" rIns="0" bIns="0" rtlCol="0" anchor="t"/>
           <a:lstStyle/>
           <a:p>
-            <a:pPr algn="l" indent="0" marL="0">
+            <a:pPr marL="0" indent="0" algn="l">
               <a:buNone/>
             </a:pPr>
             <a:r>
@@ -10822,7 +10596,7 @@
           <a:bodyPr wrap="square" lIns="0" tIns="0" rIns="0" bIns="0" rtlCol="0" anchor="t"/>
           <a:lstStyle/>
           <a:p>
-            <a:pPr algn="l" indent="0" marL="0">
+            <a:pPr marL="0" indent="0" algn="l">
               <a:buNone/>
             </a:pPr>
             <a:r>
@@ -10861,7 +10635,7 @@
           <a:bodyPr wrap="square" lIns="0" tIns="0" rIns="0" bIns="0" rtlCol="0" anchor="t"/>
           <a:lstStyle/>
           <a:p>
-            <a:pPr algn="l" indent="0" marL="0">
+            <a:pPr marL="0" indent="0" algn="l">
               <a:buNone/>
             </a:pPr>
             <a:r>
@@ -10900,7 +10674,7 @@
           <a:bodyPr wrap="square" lIns="0" tIns="0" rIns="0" bIns="0" rtlCol="0" anchor="t"/>
           <a:lstStyle/>
           <a:p>
-            <a:pPr algn="l" indent="0" marL="0">
+            <a:pPr marL="0" indent="0" algn="l">
               <a:buNone/>
             </a:pPr>
             <a:r>
@@ -10939,7 +10713,7 @@
           <a:bodyPr wrap="square" lIns="0" tIns="0" rIns="0" bIns="0" rtlCol="0" anchor="t"/>
           <a:lstStyle/>
           <a:p>
-            <a:pPr algn="l" indent="0" marL="0">
+            <a:pPr marL="0" indent="0" algn="l">
               <a:buNone/>
             </a:pPr>
             <a:r>
@@ -10978,7 +10752,7 @@
           <a:bodyPr wrap="square" lIns="0" tIns="0" rIns="0" bIns="0" rtlCol="0" anchor="t"/>
           <a:lstStyle/>
           <a:p>
-            <a:pPr algn="l" indent="0" marL="0">
+            <a:pPr marL="0" indent="0" algn="l">
               <a:buNone/>
             </a:pPr>
             <a:r>
@@ -11017,7 +10791,7 @@
           <a:bodyPr wrap="square" lIns="0" tIns="0" rIns="0" bIns="0" rtlCol="0" anchor="t"/>
           <a:lstStyle/>
           <a:p>
-            <a:pPr algn="l" indent="0" marL="0">
+            <a:pPr marL="0" indent="0" algn="l">
               <a:buNone/>
             </a:pPr>
             <a:r>
@@ -11056,7 +10830,7 @@
           <a:bodyPr wrap="square" lIns="0" tIns="0" rIns="0" bIns="0" rtlCol="0" anchor="t"/>
           <a:lstStyle/>
           <a:p>
-            <a:pPr algn="l" indent="0" marL="0">
+            <a:pPr marL="0" indent="0" algn="l">
               <a:buNone/>
             </a:pPr>
             <a:r>
@@ -11095,7 +10869,7 @@
           <a:bodyPr wrap="square" lIns="0" tIns="0" rIns="0" bIns="0" rtlCol="0" anchor="t"/>
           <a:lstStyle/>
           <a:p>
-            <a:pPr algn="l" indent="0" marL="0">
+            <a:pPr marL="0" indent="0" algn="l">
               <a:buNone/>
             </a:pPr>
             <a:r>
@@ -11134,7 +10908,7 @@
           <a:bodyPr wrap="square" lIns="0" tIns="0" rIns="0" bIns="0" rtlCol="0" anchor="t"/>
           <a:lstStyle/>
           <a:p>
-            <a:pPr algn="l" indent="0" marL="0">
+            <a:pPr marL="0" indent="0" algn="l">
               <a:buNone/>
             </a:pPr>
             <a:r>
@@ -11173,7 +10947,7 @@
           <a:bodyPr wrap="square" lIns="0" tIns="0" rIns="0" bIns="0" rtlCol="0" anchor="t"/>
           <a:lstStyle/>
           <a:p>
-            <a:pPr algn="l" indent="0" marL="0">
+            <a:pPr marL="0" indent="0" algn="l">
               <a:buNone/>
             </a:pPr>
             <a:r>
@@ -11212,7 +10986,7 @@
           <a:bodyPr wrap="square" lIns="0" tIns="0" rIns="0" bIns="0" rtlCol="0" anchor="t"/>
           <a:lstStyle/>
           <a:p>
-            <a:pPr algn="l" indent="0" marL="0">
+            <a:pPr marL="0" indent="0" algn="l">
               <a:buNone/>
             </a:pPr>
             <a:r>
@@ -11251,7 +11025,7 @@
           <a:bodyPr wrap="square" lIns="0" tIns="114300" rIns="114300" bIns="0" rtlCol="0" anchor="ctr"/>
           <a:lstStyle/>
           <a:p>
-            <a:pPr algn="r" indent="0" marL="0">
+            <a:pPr marL="0" indent="0" algn="r">
               <a:buNone/>
             </a:pPr>
             <a:r>
@@ -11290,7 +11064,7 @@
           <a:bodyPr wrap="square" lIns="0" tIns="114300" rIns="114300" bIns="0" rtlCol="0" anchor="ctr"/>
           <a:lstStyle/>
           <a:p>
-            <a:pPr algn="r" indent="0" marL="0">
+            <a:pPr marL="0" indent="0" algn="r">
               <a:buNone/>
             </a:pPr>
             <a:r>
@@ -11329,7 +11103,7 @@
           <a:bodyPr wrap="square" lIns="0" tIns="114300" rIns="114300" bIns="0" rtlCol="0" anchor="ctr"/>
           <a:lstStyle/>
           <a:p>
-            <a:pPr algn="r" indent="0" marL="0">
+            <a:pPr marL="0" indent="0" algn="r">
               <a:buNone/>
             </a:pPr>
             <a:r>
@@ -11368,7 +11142,7 @@
           <a:bodyPr wrap="square" lIns="0" tIns="114300" rIns="114300" bIns="0" rtlCol="0" anchor="ctr"/>
           <a:lstStyle/>
           <a:p>
-            <a:pPr algn="r" indent="0" marL="0">
+            <a:pPr marL="0" indent="0" algn="r">
               <a:buNone/>
             </a:pPr>
             <a:r>
@@ -11407,7 +11181,7 @@
           <a:bodyPr wrap="square" lIns="0" tIns="114300" rIns="114300" bIns="0" rtlCol="0" anchor="ctr"/>
           <a:lstStyle/>
           <a:p>
-            <a:pPr algn="r" indent="0" marL="0">
+            <a:pPr marL="0" indent="0" algn="r">
               <a:buNone/>
             </a:pPr>
             <a:r>
@@ -11446,7 +11220,7 @@
           <a:bodyPr wrap="square" lIns="0" tIns="114300" rIns="114300" bIns="0" rtlCol="0" anchor="ctr"/>
           <a:lstStyle/>
           <a:p>
-            <a:pPr algn="r" indent="0" marL="0">
+            <a:pPr marL="0" indent="0" algn="r">
               <a:buNone/>
             </a:pPr>
             <a:r>
@@ -11485,7 +11259,7 @@
           <a:bodyPr wrap="square" lIns="0" tIns="114300" rIns="114300" bIns="0" rtlCol="0" anchor="ctr"/>
           <a:lstStyle/>
           <a:p>
-            <a:pPr algn="r" indent="0" marL="0">
+            <a:pPr marL="0" indent="0" algn="r">
               <a:buNone/>
             </a:pPr>
             <a:r>
@@ -11524,7 +11298,7 @@
           <a:bodyPr wrap="square" lIns="0" tIns="114300" rIns="114300" bIns="0" rtlCol="0" anchor="ctr"/>
           <a:lstStyle/>
           <a:p>
-            <a:pPr algn="r" indent="0" marL="0">
+            <a:pPr marL="0" indent="0" algn="r">
               <a:buNone/>
             </a:pPr>
             <a:r>
@@ -11563,7 +11337,7 @@
           <a:bodyPr wrap="square" lIns="0" tIns="114300" rIns="114300" bIns="0" rtlCol="0" anchor="ctr"/>
           <a:lstStyle/>
           <a:p>
-            <a:pPr algn="r" indent="0" marL="0">
+            <a:pPr marL="0" indent="0" algn="r">
               <a:buNone/>
             </a:pPr>
             <a:r>
@@ -11602,7 +11376,7 @@
           <a:bodyPr wrap="square" lIns="0" tIns="114300" rIns="114300" bIns="0" rtlCol="0" anchor="ctr"/>
           <a:lstStyle/>
           <a:p>
-            <a:pPr algn="r" indent="0" marL="0">
+            <a:pPr marL="0" indent="0" algn="r">
               <a:buNone/>
             </a:pPr>
             <a:r>
@@ -11641,7 +11415,7 @@
           <a:bodyPr wrap="square" lIns="0" tIns="114300" rIns="114300" bIns="0" rtlCol="0" anchor="ctr"/>
           <a:lstStyle/>
           <a:p>
-            <a:pPr algn="r" indent="0" marL="0">
+            <a:pPr marL="0" indent="0" algn="r">
               <a:buNone/>
             </a:pPr>
             <a:r>
@@ -11680,7 +11454,7 @@
           <a:bodyPr wrap="square" lIns="0" tIns="114300" rIns="114300" bIns="0" rtlCol="0" anchor="ctr"/>
           <a:lstStyle/>
           <a:p>
-            <a:pPr algn="r" indent="0" marL="0">
+            <a:pPr marL="0" indent="0" algn="r">
               <a:buNone/>
             </a:pPr>
             <a:r>
@@ -11706,7 +11480,7 @@
         </p:nvSpPr>
         <p:spPr>
           <a:xfrm>
-            <a:off x="5073515" y="2715369"/>
+            <a:off x="5016365" y="2658219"/>
             <a:ext cx="860412" cy="123825"/>
           </a:xfrm>
           <a:prstGeom prst="rect">
@@ -11719,7 +11493,7 @@
           <a:bodyPr wrap="square" lIns="0" tIns="114300" rIns="114300" bIns="0" rtlCol="0" anchor="ctr"/>
           <a:lstStyle/>
           <a:p>
-            <a:pPr algn="r" indent="0" marL="0">
+            <a:pPr marL="0" indent="0" algn="r">
               <a:buNone/>
             </a:pPr>
             <a:r>
@@ -11758,7 +11532,7 @@
           <a:bodyPr wrap="square" lIns="0" tIns="114300" rIns="114300" bIns="0" rtlCol="0" anchor="ctr"/>
           <a:lstStyle/>
           <a:p>
-            <a:pPr algn="r" indent="0" marL="0">
+            <a:pPr marL="0" indent="0" algn="r">
               <a:buNone/>
             </a:pPr>
             <a:r>
@@ -11784,7 +11558,7 @@
         </p:nvSpPr>
         <p:spPr>
           <a:xfrm>
-            <a:off x="5073515" y="5325219"/>
+            <a:off x="5016365" y="5268069"/>
             <a:ext cx="860412" cy="123825"/>
           </a:xfrm>
           <a:prstGeom prst="rect">
@@ -11797,7 +11571,7 @@
           <a:bodyPr wrap="square" lIns="0" tIns="114300" rIns="114300" bIns="0" rtlCol="0" anchor="ctr"/>
           <a:lstStyle/>
           <a:p>
-            <a:pPr algn="r" indent="0" marL="0">
+            <a:pPr marL="0" indent="0" algn="r">
               <a:buNone/>
             </a:pPr>
             <a:r>
@@ -11836,7 +11610,7 @@
           <a:bodyPr wrap="square" lIns="0" tIns="0" rIns="0" bIns="0" rtlCol="0" anchor="t"/>
           <a:lstStyle/>
           <a:p>
-            <a:pPr algn="l" indent="0" marL="0">
+            <a:pPr marL="0" indent="0" algn="l">
               <a:buNone/>
             </a:pPr>
             <a:r>
@@ -11875,7 +11649,7 @@
           <a:bodyPr wrap="square" lIns="0" tIns="114300" rIns="114300" bIns="0" rtlCol="0" anchor="ctr"/>
           <a:lstStyle/>
           <a:p>
-            <a:pPr algn="r" indent="0" marL="0">
+            <a:pPr marL="0" indent="0" algn="r">
               <a:buNone/>
             </a:pPr>
             <a:r>
@@ -11901,7 +11675,7 @@
         </p:nvSpPr>
         <p:spPr>
           <a:xfrm>
-            <a:off x="5073515" y="2343596"/>
+            <a:off x="5016365" y="2286446"/>
             <a:ext cx="860412" cy="123825"/>
           </a:xfrm>
           <a:prstGeom prst="rect">
@@ -11914,7 +11688,7 @@
           <a:bodyPr wrap="square" lIns="0" tIns="114300" rIns="114300" bIns="0" rtlCol="0" anchor="ctr"/>
           <a:lstStyle/>
           <a:p>
-            <a:pPr algn="r" indent="0" marL="0">
+            <a:pPr marL="0" indent="0" algn="r">
               <a:buNone/>
             </a:pPr>
             <a:r>
@@ -11953,7 +11727,7 @@
           <a:bodyPr wrap="square" lIns="0" tIns="114300" rIns="114300" bIns="0" rtlCol="0" anchor="ctr"/>
           <a:lstStyle/>
           <a:p>
-            <a:pPr algn="r" indent="0" marL="0">
+            <a:pPr marL="0" indent="0" algn="r">
               <a:buNone/>
             </a:pPr>
             <a:r>
@@ -11992,7 +11766,7 @@
           <a:bodyPr wrap="square" lIns="0" tIns="114300" rIns="114300" bIns="0" rtlCol="0" anchor="ctr"/>
           <a:lstStyle/>
           <a:p>
-            <a:pPr algn="r" indent="0" marL="0">
+            <a:pPr marL="0" indent="0" algn="r">
               <a:buNone/>
             </a:pPr>
             <a:r>
@@ -12018,7 +11792,7 @@
         </p:nvSpPr>
         <p:spPr>
           <a:xfrm>
-            <a:off x="5073515" y="3088332"/>
+            <a:off x="5016365" y="3031182"/>
             <a:ext cx="860412" cy="123825"/>
           </a:xfrm>
           <a:prstGeom prst="rect">
@@ -12031,7 +11805,7 @@
           <a:bodyPr wrap="square" lIns="0" tIns="114300" rIns="114300" bIns="0" rtlCol="0" anchor="ctr"/>
           <a:lstStyle/>
           <a:p>
-            <a:pPr algn="r" indent="0" marL="0">
+            <a:pPr marL="0" indent="0" algn="r">
               <a:buNone/>
             </a:pPr>
             <a:r>
@@ -12070,7 +11844,7 @@
           <a:bodyPr wrap="square" lIns="0" tIns="114300" rIns="114300" bIns="0" rtlCol="0" anchor="ctr"/>
           <a:lstStyle/>
           <a:p>
-            <a:pPr algn="r" indent="0" marL="0">
+            <a:pPr marL="0" indent="0" algn="r">
               <a:buNone/>
             </a:pPr>
             <a:r>
@@ -12096,7 +11870,7 @@
         </p:nvSpPr>
         <p:spPr>
           <a:xfrm>
-            <a:off x="5073515" y="3461296"/>
+            <a:off x="5016365" y="3404146"/>
             <a:ext cx="860412" cy="123825"/>
           </a:xfrm>
           <a:prstGeom prst="rect">
@@ -12109,7 +11883,7 @@
           <a:bodyPr wrap="square" lIns="0" tIns="114300" rIns="114300" bIns="0" rtlCol="0" anchor="ctr"/>
           <a:lstStyle/>
           <a:p>
-            <a:pPr algn="r" indent="0" marL="0">
+            <a:pPr marL="0" indent="0" algn="r">
               <a:buNone/>
             </a:pPr>
             <a:r>
@@ -12148,7 +11922,7 @@
           <a:bodyPr wrap="square" lIns="0" tIns="114300" rIns="114300" bIns="0" rtlCol="0" anchor="ctr"/>
           <a:lstStyle/>
           <a:p>
-            <a:pPr algn="r" indent="0" marL="0">
+            <a:pPr marL="0" indent="0" algn="r">
               <a:buNone/>
             </a:pPr>
             <a:r>
@@ -12187,7 +11961,7 @@
           <a:bodyPr wrap="square" lIns="0" tIns="114300" rIns="114300" bIns="0" rtlCol="0" anchor="ctr"/>
           <a:lstStyle/>
           <a:p>
-            <a:pPr algn="r" indent="0" marL="0">
+            <a:pPr marL="0" indent="0" algn="r">
               <a:buNone/>
             </a:pPr>
             <a:r>
@@ -12226,7 +12000,7 @@
           <a:bodyPr wrap="square" lIns="0" tIns="114300" rIns="114300" bIns="0" rtlCol="0" anchor="ctr"/>
           <a:lstStyle/>
           <a:p>
-            <a:pPr algn="r" indent="0" marL="0">
+            <a:pPr marL="0" indent="0" algn="r">
               <a:buNone/>
             </a:pPr>
             <a:r>
@@ -12265,7 +12039,7 @@
           <a:bodyPr wrap="square" lIns="0" tIns="114300" rIns="114300" bIns="0" rtlCol="0" anchor="ctr"/>
           <a:lstStyle/>
           <a:p>
-            <a:pPr algn="l" indent="0" marL="0">
+            <a:pPr marL="0" indent="0" algn="l">
               <a:buNone/>
             </a:pPr>
             <a:r>
@@ -12291,7 +12065,7 @@
         </p:nvSpPr>
         <p:spPr>
           <a:xfrm>
-            <a:off x="10645500" y="2343596"/>
+            <a:off x="10588350" y="2286446"/>
             <a:ext cx="860412" cy="123825"/>
           </a:xfrm>
           <a:prstGeom prst="rect">
@@ -12304,7 +12078,7 @@
           <a:bodyPr wrap="square" lIns="0" tIns="114300" rIns="114300" bIns="0" rtlCol="0" anchor="ctr"/>
           <a:lstStyle/>
           <a:p>
-            <a:pPr algn="r" indent="0" marL="0">
+            <a:pPr marL="0" indent="0" algn="r">
               <a:buNone/>
             </a:pPr>
             <a:r>
@@ -12330,7 +12104,7 @@
         </p:nvSpPr>
         <p:spPr>
           <a:xfrm>
-            <a:off x="10645500" y="2715369"/>
+            <a:off x="10588350" y="2658219"/>
             <a:ext cx="860412" cy="123825"/>
           </a:xfrm>
           <a:prstGeom prst="rect">
@@ -12343,7 +12117,7 @@
           <a:bodyPr wrap="square" lIns="0" tIns="114300" rIns="114300" bIns="0" rtlCol="0" anchor="ctr"/>
           <a:lstStyle/>
           <a:p>
-            <a:pPr algn="r" indent="0" marL="0">
+            <a:pPr marL="0" indent="0" algn="r">
               <a:buNone/>
             </a:pPr>
             <a:r>
@@ -12369,7 +12143,7 @@
         </p:nvSpPr>
         <p:spPr>
           <a:xfrm>
-            <a:off x="10645500" y="3088332"/>
+            <a:off x="10588350" y="3031182"/>
             <a:ext cx="860412" cy="123825"/>
           </a:xfrm>
           <a:prstGeom prst="rect">
@@ -12382,7 +12156,7 @@
           <a:bodyPr wrap="square" lIns="0" tIns="114300" rIns="114300" bIns="0" rtlCol="0" anchor="ctr"/>
           <a:lstStyle/>
           <a:p>
-            <a:pPr algn="r" indent="0" marL="0">
+            <a:pPr marL="0" indent="0" algn="r">
               <a:buNone/>
             </a:pPr>
             <a:r>
@@ -12421,7 +12195,7 @@
           <a:bodyPr wrap="square" lIns="0" tIns="114300" rIns="114300" bIns="0" rtlCol="0" anchor="ctr"/>
           <a:lstStyle/>
           <a:p>
-            <a:pPr algn="r" indent="0" marL="0">
+            <a:pPr marL="0" indent="0" algn="r">
               <a:buNone/>
             </a:pPr>
             <a:r>
@@ -12460,7 +12234,7 @@
           <a:bodyPr wrap="square" lIns="0" tIns="114300" rIns="114300" bIns="0" rtlCol="0" anchor="ctr"/>
           <a:lstStyle/>
           <a:p>
-            <a:pPr algn="r" indent="0" marL="0">
+            <a:pPr marL="0" indent="0" algn="r">
               <a:buNone/>
             </a:pPr>
             <a:r>
@@ -12499,7 +12273,7 @@
           <a:bodyPr wrap="square" lIns="0" tIns="114300" rIns="114300" bIns="0" rtlCol="0" anchor="ctr"/>
           <a:lstStyle/>
           <a:p>
-            <a:pPr algn="l" indent="0" marL="0">
+            <a:pPr marL="0" indent="0" algn="l">
               <a:buNone/>
             </a:pPr>
             <a:r>
@@ -12538,7 +12312,7 @@
           <a:bodyPr wrap="square" lIns="0" tIns="114300" rIns="114300" bIns="0" rtlCol="0" anchor="ctr"/>
           <a:lstStyle/>
           <a:p>
-            <a:pPr algn="r" indent="0" marL="0">
+            <a:pPr marL="0" indent="0" algn="r">
               <a:buNone/>
             </a:pPr>
             <a:r>
@@ -12564,7 +12338,7 @@
         </p:nvSpPr>
         <p:spPr>
           <a:xfrm>
-            <a:off x="10645500" y="5325219"/>
+            <a:off x="10588350" y="5268069"/>
             <a:ext cx="860412" cy="123825"/>
           </a:xfrm>
           <a:prstGeom prst="rect">
@@ -12577,7 +12351,7 @@
           <a:bodyPr wrap="square" lIns="0" tIns="114300" rIns="114300" bIns="0" rtlCol="0" anchor="ctr"/>
           <a:lstStyle/>
           <a:p>
-            <a:pPr algn="r" indent="0" marL="0">
+            <a:pPr marL="0" indent="0" algn="r">
               <a:buNone/>
             </a:pPr>
             <a:r>
@@ -12616,7 +12390,7 @@
           <a:bodyPr wrap="square" lIns="0" tIns="0" rIns="0" bIns="0" rtlCol="0" anchor="t"/>
           <a:lstStyle/>
           <a:p>
-            <a:pPr algn="l" indent="0" marL="0">
+            <a:pPr marL="0" indent="0" algn="l">
               <a:buNone/>
             </a:pPr>
             <a:r>
@@ -12655,7 +12429,7 @@
           <a:bodyPr wrap="square" lIns="0" tIns="114300" rIns="114300" bIns="0" rtlCol="0" anchor="ctr"/>
           <a:lstStyle/>
           <a:p>
-            <a:pPr algn="l" indent="0" marL="0">
+            <a:pPr marL="0" indent="0" algn="l">
               <a:buNone/>
             </a:pPr>
             <a:r>
@@ -12694,7 +12468,7 @@
           <a:bodyPr wrap="square" lIns="0" tIns="114300" rIns="114300" bIns="0" rtlCol="0" anchor="ctr"/>
           <a:lstStyle/>
           <a:p>
-            <a:pPr algn="l" indent="0" marL="0">
+            <a:pPr marL="0" indent="0" algn="l">
               <a:buNone/>
             </a:pPr>
             <a:r>
@@ -12733,7 +12507,7 @@
           <a:bodyPr wrap="square" lIns="0" tIns="114300" rIns="114300" bIns="0" rtlCol="0" anchor="ctr"/>
           <a:lstStyle/>
           <a:p>
-            <a:pPr algn="l" indent="0" marL="0">
+            <a:pPr marL="0" indent="0" algn="l">
               <a:buNone/>
             </a:pPr>
             <a:r>
@@ -12772,7 +12546,7 @@
           <a:bodyPr wrap="square" lIns="0" tIns="114300" rIns="114300" bIns="0" rtlCol="0" anchor="ctr"/>
           <a:lstStyle/>
           <a:p>
-            <a:pPr algn="r" indent="0" marL="0">
+            <a:pPr marL="0" indent="0" algn="r">
               <a:buNone/>
             </a:pPr>
             <a:r>
@@ -12798,7 +12572,7 @@
         </p:nvSpPr>
         <p:spPr>
           <a:xfrm>
-            <a:off x="4260697" y="2696319"/>
+            <a:off x="4203547" y="2639169"/>
             <a:ext cx="837878" cy="114300"/>
           </a:xfrm>
           <a:prstGeom prst="rect">
@@ -12811,7 +12585,7 @@
           <a:bodyPr wrap="square" lIns="0" tIns="114300" rIns="114300" bIns="0" rtlCol="0" anchor="ctr"/>
           <a:lstStyle/>
           <a:p>
-            <a:pPr algn="r" indent="0" marL="0">
+            <a:pPr marL="0" indent="0" algn="r">
               <a:buNone/>
             </a:pPr>
             <a:r>
@@ -12850,7 +12624,7 @@
           <a:bodyPr wrap="square" lIns="0" tIns="114300" rIns="114300" bIns="0" rtlCol="0" anchor="ctr"/>
           <a:lstStyle/>
           <a:p>
-            <a:pPr algn="l" indent="0" marL="0">
+            <a:pPr marL="0" indent="0" algn="l">
               <a:buNone/>
             </a:pPr>
             <a:r>
@@ -12889,7 +12663,7 @@
           <a:bodyPr wrap="square" lIns="0" tIns="114300" rIns="114300" bIns="0" rtlCol="0" anchor="ctr"/>
           <a:lstStyle/>
           <a:p>
-            <a:pPr algn="r" indent="0" marL="0">
+            <a:pPr marL="0" indent="0" algn="r">
               <a:buNone/>
             </a:pPr>
             <a:r>
@@ -12928,7 +12702,7 @@
           <a:bodyPr wrap="square" lIns="0" tIns="114300" rIns="114300" bIns="0" rtlCol="0" anchor="ctr"/>
           <a:lstStyle/>
           <a:p>
-            <a:pPr algn="l" indent="0" marL="0">
+            <a:pPr marL="0" indent="0" algn="l">
               <a:buNone/>
             </a:pPr>
             <a:r>
@@ -12967,7 +12741,7 @@
           <a:bodyPr wrap="square" lIns="0" tIns="114300" rIns="114300" bIns="0" rtlCol="0" anchor="ctr"/>
           <a:lstStyle/>
           <a:p>
-            <a:pPr algn="r" indent="0" marL="0">
+            <a:pPr marL="0" indent="0" algn="r">
               <a:buNone/>
             </a:pPr>
             <a:r>
@@ -12993,7 +12767,7 @@
         </p:nvSpPr>
         <p:spPr>
           <a:xfrm>
-            <a:off x="4260697" y="3442246"/>
+            <a:off x="4203547" y="3385096"/>
             <a:ext cx="837878" cy="114300"/>
           </a:xfrm>
           <a:prstGeom prst="rect">
@@ -13006,7 +12780,7 @@
           <a:bodyPr wrap="square" lIns="0" tIns="114300" rIns="114300" bIns="0" rtlCol="0" anchor="ctr"/>
           <a:lstStyle/>
           <a:p>
-            <a:pPr algn="r" indent="0" marL="0">
+            <a:pPr marL="0" indent="0" algn="r">
               <a:buNone/>
             </a:pPr>
             <a:r>
@@ -13045,7 +12819,7 @@
           <a:bodyPr wrap="square" lIns="0" tIns="114300" rIns="114300" bIns="0" rtlCol="0" anchor="ctr"/>
           <a:lstStyle/>
           <a:p>
-            <a:pPr algn="l" indent="0" marL="0">
+            <a:pPr marL="0" indent="0" algn="l">
               <a:buNone/>
             </a:pPr>
             <a:r>
@@ -13084,7 +12858,7 @@
           <a:bodyPr wrap="square" lIns="0" tIns="114300" rIns="114300" bIns="0" rtlCol="0" anchor="ctr"/>
           <a:lstStyle/>
           <a:p>
-            <a:pPr algn="r" indent="0" marL="0">
+            <a:pPr marL="0" indent="0" algn="r">
               <a:buNone/>
             </a:pPr>
             <a:r>
@@ -13110,7 +12884,7 @@
         </p:nvSpPr>
         <p:spPr>
           <a:xfrm>
-            <a:off x="5073515" y="3834259"/>
+            <a:off x="5016365" y="3777109"/>
             <a:ext cx="860412" cy="123825"/>
           </a:xfrm>
           <a:prstGeom prst="rect">
@@ -13123,7 +12897,7 @@
           <a:bodyPr wrap="square" lIns="0" tIns="114300" rIns="114300" bIns="0" rtlCol="0" anchor="ctr"/>
           <a:lstStyle/>
           <a:p>
-            <a:pPr algn="r" indent="0" marL="0">
+            <a:pPr marL="0" indent="0" algn="r">
               <a:buNone/>
             </a:pPr>
             <a:r>
@@ -13162,7 +12936,7 @@
           <a:bodyPr wrap="square" lIns="0" tIns="114300" rIns="114300" bIns="0" rtlCol="0" anchor="ctr"/>
           <a:lstStyle/>
           <a:p>
-            <a:pPr algn="l" indent="0" marL="0">
+            <a:pPr marL="0" indent="0" algn="l">
               <a:buNone/>
             </a:pPr>
             <a:r>
@@ -13201,7 +12975,7 @@
           <a:bodyPr wrap="square" lIns="0" tIns="114300" rIns="114300" bIns="0" rtlCol="0" anchor="ctr"/>
           <a:lstStyle/>
           <a:p>
-            <a:pPr algn="r" indent="0" marL="0">
+            <a:pPr marL="0" indent="0" algn="r">
               <a:buNone/>
             </a:pPr>
             <a:r>
@@ -13227,7 +13001,7 @@
         </p:nvSpPr>
         <p:spPr>
           <a:xfrm>
-            <a:off x="5073515" y="4207222"/>
+            <a:off x="5016365" y="4150072"/>
             <a:ext cx="860412" cy="123825"/>
           </a:xfrm>
           <a:prstGeom prst="rect">
@@ -13240,7 +13014,7 @@
           <a:bodyPr wrap="square" lIns="0" tIns="114300" rIns="114300" bIns="0" rtlCol="0" anchor="ctr"/>
           <a:lstStyle/>
           <a:p>
-            <a:pPr algn="r" indent="0" marL="0">
+            <a:pPr marL="0" indent="0" algn="r">
               <a:buNone/>
             </a:pPr>
             <a:r>
@@ -13279,7 +13053,7 @@
           <a:bodyPr wrap="square" lIns="0" tIns="114300" rIns="114300" bIns="0" rtlCol="0" anchor="ctr"/>
           <a:lstStyle/>
           <a:p>
-            <a:pPr algn="l" indent="0" marL="0">
+            <a:pPr marL="0" indent="0" algn="l">
               <a:buNone/>
             </a:pPr>
             <a:r>
@@ -13318,7 +13092,7 @@
           <a:bodyPr wrap="square" lIns="0" tIns="114300" rIns="114300" bIns="0" rtlCol="0" anchor="ctr"/>
           <a:lstStyle/>
           <a:p>
-            <a:pPr algn="r" indent="0" marL="0">
+            <a:pPr marL="0" indent="0" algn="r">
               <a:buNone/>
             </a:pPr>
             <a:r>
@@ -13344,7 +13118,7 @@
         </p:nvSpPr>
         <p:spPr>
           <a:xfrm>
-            <a:off x="4260697" y="4561136"/>
+            <a:off x="4203547" y="4503986"/>
             <a:ext cx="837878" cy="114300"/>
           </a:xfrm>
           <a:prstGeom prst="rect">
@@ -13357,7 +13131,7 @@
           <a:bodyPr wrap="square" lIns="0" tIns="114300" rIns="114300" bIns="0" rtlCol="0" anchor="ctr"/>
           <a:lstStyle/>
           <a:p>
-            <a:pPr algn="r" indent="0" marL="0">
+            <a:pPr marL="0" indent="0" algn="r">
               <a:buNone/>
             </a:pPr>
             <a:r>
@@ -13383,7 +13157,7 @@
         </p:nvSpPr>
         <p:spPr>
           <a:xfrm>
-            <a:off x="5073515" y="4580186"/>
+            <a:off x="5016365" y="4523036"/>
             <a:ext cx="860412" cy="123825"/>
           </a:xfrm>
           <a:prstGeom prst="rect">
@@ -13396,7 +13170,7 @@
           <a:bodyPr wrap="square" lIns="0" tIns="114300" rIns="114300" bIns="0" rtlCol="0" anchor="ctr"/>
           <a:lstStyle/>
           <a:p>
-            <a:pPr algn="r" indent="0" marL="0">
+            <a:pPr marL="0" indent="0" algn="r">
               <a:buNone/>
             </a:pPr>
             <a:r>
@@ -13435,7 +13209,7 @@
           <a:bodyPr wrap="square" lIns="0" tIns="114300" rIns="114300" bIns="0" rtlCol="0" anchor="ctr"/>
           <a:lstStyle/>
           <a:p>
-            <a:pPr algn="l" indent="0" marL="0">
+            <a:pPr marL="0" indent="0" algn="l">
               <a:buNone/>
             </a:pPr>
             <a:r>
@@ -13474,7 +13248,7 @@
           <a:bodyPr wrap="square" lIns="0" tIns="114300" rIns="114300" bIns="0" rtlCol="0" anchor="ctr"/>
           <a:lstStyle/>
           <a:p>
-            <a:pPr algn="r" indent="0" marL="0">
+            <a:pPr marL="0" indent="0" algn="r">
               <a:buNone/>
             </a:pPr>
             <a:r>
@@ -13500,7 +13274,7 @@
         </p:nvSpPr>
         <p:spPr>
           <a:xfrm>
-            <a:off x="5073515" y="4953149"/>
+            <a:off x="5016365" y="4895999"/>
             <a:ext cx="860412" cy="123825"/>
           </a:xfrm>
           <a:prstGeom prst="rect">
@@ -13513,7 +13287,7 @@
           <a:bodyPr wrap="square" lIns="0" tIns="114300" rIns="114300" bIns="0" rtlCol="0" anchor="ctr"/>
           <a:lstStyle/>
           <a:p>
-            <a:pPr algn="r" indent="0" marL="0">
+            <a:pPr marL="0" indent="0" algn="r">
               <a:buNone/>
             </a:pPr>
             <a:r>
@@ -13552,7 +13326,7 @@
           <a:bodyPr wrap="square" lIns="0" tIns="114300" rIns="114300" bIns="0" rtlCol="0" anchor="ctr"/>
           <a:lstStyle/>
           <a:p>
-            <a:pPr algn="r" indent="0" marL="0">
+            <a:pPr marL="0" indent="0" algn="r">
               <a:buNone/>
             </a:pPr>
             <a:r>
@@ -13591,7 +13365,7 @@
           <a:bodyPr wrap="square" lIns="0" tIns="114300" rIns="114300" bIns="0" rtlCol="0" anchor="ctr"/>
           <a:lstStyle/>
           <a:p>
-            <a:pPr algn="r" indent="0" marL="0">
+            <a:pPr marL="0" indent="0" algn="r">
               <a:buNone/>
             </a:pPr>
             <a:r>
@@ -13630,7 +13404,7 @@
           <a:bodyPr wrap="square" lIns="0" tIns="114300" rIns="114300" bIns="0" rtlCol="0" anchor="ctr"/>
           <a:lstStyle/>
           <a:p>
-            <a:pPr algn="r" indent="0" marL="0">
+            <a:pPr marL="0" indent="0" algn="r">
               <a:buNone/>
             </a:pPr>
             <a:r>
@@ -13669,7 +13443,7 @@
           <a:bodyPr wrap="square" lIns="0" tIns="114300" rIns="114300" bIns="0" rtlCol="0" anchor="ctr"/>
           <a:lstStyle/>
           <a:p>
-            <a:pPr algn="l" indent="0" marL="0">
+            <a:pPr marL="0" indent="0" algn="l">
               <a:buNone/>
             </a:pPr>
             <a:r>
@@ -13708,7 +13482,7 @@
           <a:bodyPr wrap="square" lIns="0" tIns="114300" rIns="114300" bIns="0" rtlCol="0" anchor="ctr"/>
           <a:lstStyle/>
           <a:p>
-            <a:pPr algn="l" indent="0" marL="0">
+            <a:pPr marL="0" indent="0" algn="l">
               <a:buNone/>
             </a:pPr>
             <a:r>
@@ -13747,7 +13521,7 @@
           <a:bodyPr wrap="square" lIns="0" tIns="114300" rIns="114300" bIns="0" rtlCol="0" anchor="ctr"/>
           <a:lstStyle/>
           <a:p>
-            <a:pPr algn="r" indent="0" marL="0">
+            <a:pPr marL="0" indent="0" algn="r">
               <a:buNone/>
             </a:pPr>
             <a:r>
@@ -13786,7 +13560,7 @@
           <a:bodyPr wrap="square" lIns="0" tIns="114300" rIns="114300" bIns="0" rtlCol="0" anchor="ctr"/>
           <a:lstStyle/>
           <a:p>
-            <a:pPr algn="l" indent="0" marL="0">
+            <a:pPr marL="0" indent="0" algn="l">
               <a:buNone/>
             </a:pPr>
             <a:r>
@@ -13825,7 +13599,7 @@
           <a:bodyPr wrap="square" lIns="0" tIns="114300" rIns="114300" bIns="0" rtlCol="0" anchor="ctr"/>
           <a:lstStyle/>
           <a:p>
-            <a:pPr algn="r" indent="0" marL="0">
+            <a:pPr marL="0" indent="0" algn="r">
               <a:buNone/>
             </a:pPr>
             <a:r>
@@ -13864,7 +13638,7 @@
           <a:bodyPr wrap="square" lIns="0" tIns="114300" rIns="114300" bIns="0" rtlCol="0" anchor="ctr"/>
           <a:lstStyle/>
           <a:p>
-            <a:pPr algn="l" indent="0" marL="0">
+            <a:pPr marL="0" indent="0" algn="l">
               <a:buNone/>
             </a:pPr>
             <a:r>
@@ -13903,7 +13677,7 @@
           <a:bodyPr wrap="square" lIns="0" tIns="114300" rIns="114300" bIns="0" rtlCol="0" anchor="ctr"/>
           <a:lstStyle/>
           <a:p>
-            <a:pPr algn="r" indent="0" marL="0">
+            <a:pPr marL="0" indent="0" algn="r">
               <a:buNone/>
             </a:pPr>
             <a:r>
@@ -13942,7 +13716,7 @@
           <a:bodyPr wrap="square" lIns="0" tIns="114300" rIns="114300" bIns="0" rtlCol="0" anchor="ctr"/>
           <a:lstStyle/>
           <a:p>
-            <a:pPr algn="l" indent="0" marL="0">
+            <a:pPr marL="0" indent="0" algn="l">
               <a:buNone/>
             </a:pPr>
             <a:r>
@@ -13981,7 +13755,7 @@
           <a:bodyPr wrap="square" lIns="0" tIns="114300" rIns="114300" bIns="0" rtlCol="0" anchor="ctr"/>
           <a:lstStyle/>
           <a:p>
-            <a:pPr algn="r" indent="0" marL="0">
+            <a:pPr marL="0" indent="0" algn="r">
               <a:buNone/>
             </a:pPr>
             <a:r>
@@ -14007,7 +13781,7 @@
         </p:nvSpPr>
         <p:spPr>
           <a:xfrm>
-            <a:off x="10645500" y="3461296"/>
+            <a:off x="10588350" y="3404146"/>
             <a:ext cx="860412" cy="123825"/>
           </a:xfrm>
           <a:prstGeom prst="rect">
@@ -14020,7 +13794,7 @@
           <a:bodyPr wrap="square" lIns="0" tIns="114300" rIns="114300" bIns="0" rtlCol="0" anchor="ctr"/>
           <a:lstStyle/>
           <a:p>
-            <a:pPr algn="r" indent="0" marL="0">
+            <a:pPr marL="0" indent="0" algn="r">
               <a:buNone/>
             </a:pPr>
             <a:r>
@@ -14059,7 +13833,7 @@
           <a:bodyPr wrap="square" lIns="0" tIns="114300" rIns="114300" bIns="0" rtlCol="0" anchor="ctr"/>
           <a:lstStyle/>
           <a:p>
-            <a:pPr algn="l" indent="0" marL="0">
+            <a:pPr marL="0" indent="0" algn="l">
               <a:buNone/>
             </a:pPr>
             <a:r>
@@ -14098,7 +13872,7 @@
           <a:bodyPr wrap="square" lIns="0" tIns="114300" rIns="114300" bIns="0" rtlCol="0" anchor="ctr"/>
           <a:lstStyle/>
           <a:p>
-            <a:pPr algn="r" indent="0" marL="0">
+            <a:pPr marL="0" indent="0" algn="r">
               <a:buNone/>
             </a:pPr>
             <a:r>
@@ -14124,7 +13898,7 @@
         </p:nvSpPr>
         <p:spPr>
           <a:xfrm>
-            <a:off x="10645500" y="3834259"/>
+            <a:off x="10588350" y="3777109"/>
             <a:ext cx="860412" cy="123825"/>
           </a:xfrm>
           <a:prstGeom prst="rect">
@@ -14137,7 +13911,7 @@
           <a:bodyPr wrap="square" lIns="0" tIns="114300" rIns="114300" bIns="0" rtlCol="0" anchor="ctr"/>
           <a:lstStyle/>
           <a:p>
-            <a:pPr algn="r" indent="0" marL="0">
+            <a:pPr marL="0" indent="0" algn="r">
               <a:buNone/>
             </a:pPr>
             <a:r>
@@ -14176,7 +13950,7 @@
           <a:bodyPr wrap="square" lIns="0" tIns="114300" rIns="114300" bIns="0" rtlCol="0" anchor="ctr"/>
           <a:lstStyle/>
           <a:p>
-            <a:pPr algn="l" indent="0" marL="0">
+            <a:pPr marL="0" indent="0" algn="l">
               <a:buNone/>
             </a:pPr>
             <a:r>
@@ -14202,7 +13976,7 @@
         </p:nvSpPr>
         <p:spPr>
           <a:xfrm>
-            <a:off x="10645500" y="4207222"/>
+            <a:off x="10588350" y="4150072"/>
             <a:ext cx="860412" cy="123825"/>
           </a:xfrm>
           <a:prstGeom prst="rect">
@@ -14215,7 +13989,7 @@
           <a:bodyPr wrap="square" lIns="0" tIns="114300" rIns="114300" bIns="0" rtlCol="0" anchor="ctr"/>
           <a:lstStyle/>
           <a:p>
-            <a:pPr algn="r" indent="0" marL="0">
+            <a:pPr marL="0" indent="0" algn="r">
               <a:buNone/>
             </a:pPr>
             <a:r>
@@ -14254,7 +14028,7 @@
           <a:bodyPr wrap="square" lIns="0" tIns="114300" rIns="114300" bIns="0" rtlCol="0" anchor="ctr"/>
           <a:lstStyle/>
           <a:p>
-            <a:pPr algn="l" indent="0" marL="0">
+            <a:pPr marL="0" indent="0" algn="l">
               <a:buNone/>
             </a:pPr>
             <a:r>
@@ -14280,7 +14054,7 @@
         </p:nvSpPr>
         <p:spPr>
           <a:xfrm>
-            <a:off x="10645500" y="4580186"/>
+            <a:off x="10588350" y="4523036"/>
             <a:ext cx="860412" cy="123825"/>
           </a:xfrm>
           <a:prstGeom prst="rect">
@@ -14293,7 +14067,7 @@
           <a:bodyPr wrap="square" lIns="0" tIns="114300" rIns="114300" bIns="0" rtlCol="0" anchor="ctr"/>
           <a:lstStyle/>
           <a:p>
-            <a:pPr algn="r" indent="0" marL="0">
+            <a:pPr marL="0" indent="0" algn="r">
               <a:buNone/>
             </a:pPr>
             <a:r>
@@ -14332,7 +14106,7 @@
           <a:bodyPr wrap="square" lIns="0" tIns="114300" rIns="114300" bIns="0" rtlCol="0" anchor="ctr"/>
           <a:lstStyle/>
           <a:p>
-            <a:pPr algn="l" indent="0" marL="0">
+            <a:pPr marL="0" indent="0" algn="l">
               <a:buNone/>
             </a:pPr>
             <a:r>
@@ -14358,7 +14132,7 @@
         </p:nvSpPr>
         <p:spPr>
           <a:xfrm>
-            <a:off x="10645500" y="4953149"/>
+            <a:off x="10588350" y="4895999"/>
             <a:ext cx="860412" cy="123825"/>
           </a:xfrm>
           <a:prstGeom prst="rect">
@@ -14371,7 +14145,7 @@
           <a:bodyPr wrap="square" lIns="0" tIns="114300" rIns="114300" bIns="0" rtlCol="0" anchor="ctr"/>
           <a:lstStyle/>
           <a:p>
-            <a:pPr algn="r" indent="0" marL="0">
+            <a:pPr marL="0" indent="0" algn="r">
               <a:buNone/>
             </a:pPr>
             <a:r>
@@ -14410,7 +14184,7 @@
           <a:bodyPr wrap="square" lIns="0" tIns="114300" rIns="114300" bIns="0" rtlCol="0" anchor="ctr"/>
           <a:lstStyle/>
           <a:p>
-            <a:pPr algn="r" indent="0" marL="0">
+            <a:pPr marL="0" indent="0" algn="r">
               <a:buNone/>
             </a:pPr>
             <a:r>
@@ -14449,7 +14223,7 @@
           <a:bodyPr wrap="square" lIns="0" tIns="114300" rIns="114300" bIns="0" rtlCol="0" anchor="ctr"/>
           <a:lstStyle/>
           <a:p>
-            <a:pPr algn="r" indent="0" marL="0">
+            <a:pPr marL="0" indent="0" algn="r">
               <a:buNone/>
             </a:pPr>
             <a:r>
@@ -14488,7 +14262,7 @@
           <a:bodyPr wrap="square" lIns="0" tIns="114300" rIns="114300" bIns="0" rtlCol="0" anchor="ctr"/>
           <a:lstStyle/>
           <a:p>
-            <a:pPr algn="r" indent="0" marL="0">
+            <a:pPr marL="0" indent="0" algn="r">
               <a:buNone/>
             </a:pPr>
             <a:r>
@@ -14527,7 +14301,7 @@
           <a:bodyPr wrap="square" lIns="0" tIns="114300" rIns="114300" bIns="0" rtlCol="0" anchor="ctr"/>
           <a:lstStyle/>
           <a:p>
-            <a:pPr algn="r" indent="0" marL="0">
+            <a:pPr marL="0" indent="0" algn="r">
               <a:buNone/>
             </a:pPr>
             <a:r>
@@ -14566,7 +14340,7 @@
           <a:bodyPr wrap="square" lIns="0" tIns="0" rIns="0" bIns="0" rtlCol="0" anchor="t"/>
           <a:lstStyle/>
           <a:p>
-            <a:pPr algn="l" indent="0" marL="0">
+            <a:pPr marL="0" indent="0" algn="l">
               <a:buNone/>
             </a:pPr>
             <a:r>
@@ -14605,7 +14379,7 @@
           <a:bodyPr wrap="square" lIns="0" tIns="0" rIns="0" bIns="0" rtlCol="0" anchor="t"/>
           <a:lstStyle/>
           <a:p>
-            <a:pPr algn="l" indent="0" marL="0">
+            <a:pPr marL="0" indent="0" algn="l">
               <a:buNone/>
             </a:pPr>
             <a:r>
@@ -14644,7 +14418,7 @@
           <a:bodyPr wrap="square" lIns="0" tIns="114300" rIns="114300" bIns="0" rtlCol="0" anchor="ctr"/>
           <a:lstStyle/>
           <a:p>
-            <a:pPr algn="r" indent="0" marL="0">
+            <a:pPr marL="0" indent="0" algn="r">
               <a:buNone/>
             </a:pPr>
             <a:r>
@@ -14683,7 +14457,7 @@
           <a:bodyPr wrap="square" lIns="0" tIns="114300" rIns="114300" bIns="0" rtlCol="0" anchor="ctr"/>
           <a:lstStyle/>
           <a:p>
-            <a:pPr algn="r" indent="0" marL="0">
+            <a:pPr marL="0" indent="0" algn="r">
               <a:buNone/>
             </a:pPr>
             <a:r>
@@ -14709,7 +14483,7 @@
         </p:nvSpPr>
         <p:spPr>
           <a:xfrm>
-            <a:off x="4260697" y="2324546"/>
+            <a:off x="4203547" y="2267396"/>
             <a:ext cx="837878" cy="114300"/>
           </a:xfrm>
           <a:prstGeom prst="rect">
@@ -14722,7 +14496,7 @@
           <a:bodyPr wrap="square" lIns="0" tIns="114300" rIns="114300" bIns="0" rtlCol="0" anchor="ctr"/>
           <a:lstStyle/>
           <a:p>
-            <a:pPr algn="r" indent="0" marL="0">
+            <a:pPr marL="0" indent="0" algn="r">
               <a:buNone/>
             </a:pPr>
             <a:r>
@@ -14761,7 +14535,7 @@
           <a:bodyPr wrap="square" lIns="0" tIns="114300" rIns="114300" bIns="0" rtlCol="0" anchor="ctr"/>
           <a:lstStyle/>
           <a:p>
-            <a:pPr algn="r" indent="0" marL="0">
+            <a:pPr marL="0" indent="0" algn="r">
               <a:buNone/>
             </a:pPr>
             <a:r>
@@ -14800,7 +14574,7 @@
           <a:bodyPr wrap="square" lIns="0" tIns="114300" rIns="114300" bIns="0" rtlCol="0" anchor="ctr"/>
           <a:lstStyle/>
           <a:p>
-            <a:pPr algn="r" indent="0" marL="0">
+            <a:pPr marL="0" indent="0" algn="r">
               <a:buNone/>
             </a:pPr>
             <a:r>
@@ -14826,7 +14600,7 @@
         </p:nvSpPr>
         <p:spPr>
           <a:xfrm>
-            <a:off x="4260697" y="3069282"/>
+            <a:off x="4203547" y="3012132"/>
             <a:ext cx="837878" cy="114300"/>
           </a:xfrm>
           <a:prstGeom prst="rect">
@@ -14839,7 +14613,7 @@
           <a:bodyPr wrap="square" lIns="0" tIns="114300" rIns="114300" bIns="0" rtlCol="0" anchor="ctr"/>
           <a:lstStyle/>
           <a:p>
-            <a:pPr algn="r" indent="0" marL="0">
+            <a:pPr marL="0" indent="0" algn="r">
               <a:buNone/>
             </a:pPr>
             <a:r>
@@ -14878,7 +14652,7 @@
           <a:bodyPr wrap="square" lIns="0" tIns="114300" rIns="114300" bIns="0" rtlCol="0" anchor="ctr"/>
           <a:lstStyle/>
           <a:p>
-            <a:pPr algn="r" indent="0" marL="0">
+            <a:pPr marL="0" indent="0" algn="r">
               <a:buNone/>
             </a:pPr>
             <a:r>
@@ -14917,7 +14691,7 @@
           <a:bodyPr wrap="square" lIns="0" tIns="114300" rIns="114300" bIns="0" rtlCol="0" anchor="ctr"/>
           <a:lstStyle/>
           <a:p>
-            <a:pPr algn="r" indent="0" marL="0">
+            <a:pPr marL="0" indent="0" algn="r">
               <a:buNone/>
             </a:pPr>
             <a:r>
@@ -14956,7 +14730,7 @@
           <a:bodyPr wrap="square" lIns="0" tIns="114300" rIns="114300" bIns="0" rtlCol="0" anchor="ctr"/>
           <a:lstStyle/>
           <a:p>
-            <a:pPr algn="r" indent="0" marL="0">
+            <a:pPr marL="0" indent="0" algn="r">
               <a:buNone/>
             </a:pPr>
             <a:r>
@@ -14982,7 +14756,7 @@
         </p:nvSpPr>
         <p:spPr>
           <a:xfrm>
-            <a:off x="4260697" y="3815209"/>
+            <a:off x="4203547" y="3758059"/>
             <a:ext cx="837878" cy="114300"/>
           </a:xfrm>
           <a:prstGeom prst="rect">
@@ -14995,7 +14769,7 @@
           <a:bodyPr wrap="square" lIns="0" tIns="114300" rIns="114300" bIns="0" rtlCol="0" anchor="ctr"/>
           <a:lstStyle/>
           <a:p>
-            <a:pPr algn="r" indent="0" marL="0">
+            <a:pPr marL="0" indent="0" algn="r">
               <a:buNone/>
             </a:pPr>
             <a:r>
@@ -15034,7 +14808,7 @@
           <a:bodyPr wrap="square" lIns="0" tIns="114300" rIns="114300" bIns="0" rtlCol="0" anchor="ctr"/>
           <a:lstStyle/>
           <a:p>
-            <a:pPr algn="r" indent="0" marL="0">
+            <a:pPr marL="0" indent="0" algn="r">
               <a:buNone/>
             </a:pPr>
             <a:r>
@@ -15073,7 +14847,7 @@
           <a:bodyPr wrap="square" lIns="0" tIns="114300" rIns="114300" bIns="0" rtlCol="0" anchor="ctr"/>
           <a:lstStyle/>
           <a:p>
-            <a:pPr algn="r" indent="0" marL="0">
+            <a:pPr marL="0" indent="0" algn="r">
               <a:buNone/>
             </a:pPr>
             <a:r>
@@ -15099,7 +14873,7 @@
         </p:nvSpPr>
         <p:spPr>
           <a:xfrm>
-            <a:off x="4260697" y="4188172"/>
+            <a:off x="4203547" y="4131022"/>
             <a:ext cx="837878" cy="114300"/>
           </a:xfrm>
           <a:prstGeom prst="rect">
@@ -15112,7 +14886,7 @@
           <a:bodyPr wrap="square" lIns="0" tIns="114300" rIns="114300" bIns="0" rtlCol="0" anchor="ctr"/>
           <a:lstStyle/>
           <a:p>
-            <a:pPr algn="r" indent="0" marL="0">
+            <a:pPr marL="0" indent="0" algn="r">
               <a:buNone/>
             </a:pPr>
             <a:r>
@@ -15151,7 +14925,7 @@
           <a:bodyPr wrap="square" lIns="0" tIns="114300" rIns="114300" bIns="0" rtlCol="0" anchor="ctr"/>
           <a:lstStyle/>
           <a:p>
-            <a:pPr algn="r" indent="0" marL="0">
+            <a:pPr marL="0" indent="0" algn="r">
               <a:buNone/>
             </a:pPr>
             <a:r>
@@ -15190,7 +14964,7 @@
           <a:bodyPr wrap="square" lIns="0" tIns="114300" rIns="114300" bIns="0" rtlCol="0" anchor="ctr"/>
           <a:lstStyle/>
           <a:p>
-            <a:pPr algn="r" indent="0" marL="0">
+            <a:pPr marL="0" indent="0" algn="r">
               <a:buNone/>
             </a:pPr>
             <a:r>
@@ -15229,7 +15003,7 @@
           <a:bodyPr wrap="square" lIns="0" tIns="114300" rIns="114300" bIns="0" rtlCol="0" anchor="ctr"/>
           <a:lstStyle/>
           <a:p>
-            <a:pPr algn="r" indent="0" marL="0">
+            <a:pPr marL="0" indent="0" algn="r">
               <a:buNone/>
             </a:pPr>
             <a:r>
@@ -15268,7 +15042,7 @@
           <a:bodyPr wrap="square" lIns="0" tIns="114300" rIns="114300" bIns="0" rtlCol="0" anchor="ctr"/>
           <a:lstStyle/>
           <a:p>
-            <a:pPr algn="r" indent="0" marL="0">
+            <a:pPr marL="0" indent="0" algn="r">
               <a:buNone/>
             </a:pPr>
             <a:r>
@@ -15307,7 +15081,7 @@
           <a:bodyPr wrap="square" lIns="0" tIns="114300" rIns="114300" bIns="0" rtlCol="0" anchor="ctr"/>
           <a:lstStyle/>
           <a:p>
-            <a:pPr algn="r" indent="0" marL="0">
+            <a:pPr marL="0" indent="0" algn="r">
               <a:buNone/>
             </a:pPr>
             <a:r>
@@ -15346,7 +15120,7 @@
           <a:bodyPr wrap="square" lIns="0" tIns="114300" rIns="114300" bIns="0" rtlCol="0" anchor="ctr"/>
           <a:lstStyle/>
           <a:p>
-            <a:pPr algn="r" indent="0" marL="0">
+            <a:pPr marL="0" indent="0" algn="r">
               <a:buNone/>
             </a:pPr>
             <a:r>
@@ -15385,7 +15159,7 @@
           <a:bodyPr wrap="square" lIns="0" tIns="114300" rIns="114300" bIns="0" rtlCol="0" anchor="ctr"/>
           <a:lstStyle/>
           <a:p>
-            <a:pPr algn="r" indent="0" marL="0">
+            <a:pPr marL="0" indent="0" algn="r">
               <a:buNone/>
             </a:pPr>
             <a:r>
@@ -15411,7 +15185,7 @@
         </p:nvSpPr>
         <p:spPr>
           <a:xfrm>
-            <a:off x="9832683" y="2324546"/>
+            <a:off x="9775533" y="2267396"/>
             <a:ext cx="837878" cy="114300"/>
           </a:xfrm>
           <a:prstGeom prst="rect">
@@ -15424,7 +15198,7 @@
           <a:bodyPr wrap="square" lIns="0" tIns="114300" rIns="114300" bIns="0" rtlCol="0" anchor="ctr"/>
           <a:lstStyle/>
           <a:p>
-            <a:pPr algn="r" indent="0" marL="0">
+            <a:pPr marL="0" indent="0" algn="r">
               <a:buNone/>
             </a:pPr>
             <a:r>
@@ -15463,7 +15237,7 @@
           <a:bodyPr wrap="square" lIns="0" tIns="114300" rIns="114300" bIns="0" rtlCol="0" anchor="ctr"/>
           <a:lstStyle/>
           <a:p>
-            <a:pPr algn="r" indent="0" marL="0">
+            <a:pPr marL="0" indent="0" algn="r">
               <a:buNone/>
             </a:pPr>
             <a:r>
@@ -15502,7 +15276,7 @@
           <a:bodyPr wrap="square" lIns="0" tIns="114300" rIns="114300" bIns="0" rtlCol="0" anchor="ctr"/>
           <a:lstStyle/>
           <a:p>
-            <a:pPr algn="r" indent="0" marL="0">
+            <a:pPr marL="0" indent="0" algn="r">
               <a:buNone/>
             </a:pPr>
             <a:r>
@@ -15528,7 +15302,7 @@
         </p:nvSpPr>
         <p:spPr>
           <a:xfrm>
-            <a:off x="9832683" y="2696319"/>
+            <a:off x="9775533" y="2639169"/>
             <a:ext cx="837878" cy="114300"/>
           </a:xfrm>
           <a:prstGeom prst="rect">
@@ -15541,7 +15315,7 @@
           <a:bodyPr wrap="square" lIns="0" tIns="114300" rIns="114300" bIns="0" rtlCol="0" anchor="ctr"/>
           <a:lstStyle/>
           <a:p>
-            <a:pPr algn="r" indent="0" marL="0">
+            <a:pPr marL="0" indent="0" algn="r">
               <a:buNone/>
             </a:pPr>
             <a:r>
@@ -15580,7 +15354,7 @@
           <a:bodyPr wrap="square" lIns="0" tIns="114300" rIns="114300" bIns="0" rtlCol="0" anchor="ctr"/>
           <a:lstStyle/>
           <a:p>
-            <a:pPr algn="r" indent="0" marL="0">
+            <a:pPr marL="0" indent="0" algn="r">
               <a:buNone/>
             </a:pPr>
             <a:r>
@@ -15619,7 +15393,7 @@
           <a:bodyPr wrap="square" lIns="0" tIns="114300" rIns="114300" bIns="0" rtlCol="0" anchor="ctr"/>
           <a:lstStyle/>
           <a:p>
-            <a:pPr algn="r" indent="0" marL="0">
+            <a:pPr marL="0" indent="0" algn="r">
               <a:buNone/>
             </a:pPr>
             <a:r>
@@ -15645,7 +15419,7 @@
         </p:nvSpPr>
         <p:spPr>
           <a:xfrm>
-            <a:off x="9832683" y="3069282"/>
+            <a:off x="9775533" y="3012132"/>
             <a:ext cx="837878" cy="114300"/>
           </a:xfrm>
           <a:prstGeom prst="rect">
@@ -15658,7 +15432,7 @@
           <a:bodyPr wrap="square" lIns="0" tIns="114300" rIns="114300" bIns="0" rtlCol="0" anchor="ctr"/>
           <a:lstStyle/>
           <a:p>
-            <a:pPr algn="r" indent="0" marL="0">
+            <a:pPr marL="0" indent="0" algn="r">
               <a:buNone/>
             </a:pPr>
             <a:r>
@@ -15697,7 +15471,7 @@
           <a:bodyPr wrap="square" lIns="0" tIns="114300" rIns="114300" bIns="0" rtlCol="0" anchor="ctr"/>
           <a:lstStyle/>
           <a:p>
-            <a:pPr algn="r" indent="0" marL="0">
+            <a:pPr marL="0" indent="0" algn="r">
               <a:buNone/>
             </a:pPr>
             <a:r>
@@ -15736,7 +15510,7 @@
           <a:bodyPr wrap="square" lIns="0" tIns="114300" rIns="114300" bIns="0" rtlCol="0" anchor="ctr"/>
           <a:lstStyle/>
           <a:p>
-            <a:pPr algn="r" indent="0" marL="0">
+            <a:pPr marL="0" indent="0" algn="r">
               <a:buNone/>
             </a:pPr>
             <a:r>
@@ -15762,7 +15536,7 @@
         </p:nvSpPr>
         <p:spPr>
           <a:xfrm>
-            <a:off x="9832683" y="3442246"/>
+            <a:off x="9775533" y="3385096"/>
             <a:ext cx="837878" cy="114300"/>
           </a:xfrm>
           <a:prstGeom prst="rect">
@@ -15775,7 +15549,7 @@
           <a:bodyPr wrap="square" lIns="0" tIns="114300" rIns="114300" bIns="0" rtlCol="0" anchor="ctr"/>
           <a:lstStyle/>
           <a:p>
-            <a:pPr algn="r" indent="0" marL="0">
+            <a:pPr marL="0" indent="0" algn="r">
               <a:buNone/>
             </a:pPr>
             <a:r>
@@ -15814,7 +15588,7 @@
           <a:bodyPr wrap="square" lIns="0" tIns="114300" rIns="114300" bIns="0" rtlCol="0" anchor="ctr"/>
           <a:lstStyle/>
           <a:p>
-            <a:pPr algn="r" indent="0" marL="0">
+            <a:pPr marL="0" indent="0" algn="r">
               <a:buNone/>
             </a:pPr>
             <a:r>
@@ -15853,7 +15627,7 @@
           <a:bodyPr wrap="square" lIns="0" tIns="114300" rIns="114300" bIns="0" rtlCol="0" anchor="ctr"/>
           <a:lstStyle/>
           <a:p>
-            <a:pPr algn="r" indent="0" marL="0">
+            <a:pPr marL="0" indent="0" algn="r">
               <a:buNone/>
             </a:pPr>
             <a:r>
@@ -15879,7 +15653,7 @@
         </p:nvSpPr>
         <p:spPr>
           <a:xfrm>
-            <a:off x="9832683" y="3815209"/>
+            <a:off x="9775533" y="3758059"/>
             <a:ext cx="837878" cy="114300"/>
           </a:xfrm>
           <a:prstGeom prst="rect">
@@ -15892,7 +15666,7 @@
           <a:bodyPr wrap="square" lIns="0" tIns="114300" rIns="114300" bIns="0" rtlCol="0" anchor="ctr"/>
           <a:lstStyle/>
           <a:p>
-            <a:pPr algn="r" indent="0" marL="0">
+            <a:pPr marL="0" indent="0" algn="r">
               <a:buNone/>
             </a:pPr>
             <a:r>
@@ -15931,7 +15705,7 @@
           <a:bodyPr wrap="square" lIns="0" tIns="114300" rIns="114300" bIns="0" rtlCol="0" anchor="ctr"/>
           <a:lstStyle/>
           <a:p>
-            <a:pPr algn="r" indent="0" marL="0">
+            <a:pPr marL="0" indent="0" algn="r">
               <a:buNone/>
             </a:pPr>
             <a:r>
@@ -15970,7 +15744,7 @@
           <a:bodyPr wrap="square" lIns="0" tIns="114300" rIns="114300" bIns="0" rtlCol="0" anchor="ctr"/>
           <a:lstStyle/>
           <a:p>
-            <a:pPr algn="r" indent="0" marL="0">
+            <a:pPr marL="0" indent="0" algn="r">
               <a:buNone/>
             </a:pPr>
             <a:r>
@@ -16009,7 +15783,7 @@
           <a:bodyPr wrap="square" lIns="0" tIns="114300" rIns="114300" bIns="0" rtlCol="0" anchor="ctr"/>
           <a:lstStyle/>
           <a:p>
-            <a:pPr algn="r" indent="0" marL="0">
+            <a:pPr marL="0" indent="0" algn="r">
               <a:buNone/>
             </a:pPr>
             <a:r>
@@ -16035,7 +15809,7 @@
         </p:nvSpPr>
         <p:spPr>
           <a:xfrm>
-            <a:off x="9832683" y="4188172"/>
+            <a:off x="9775533" y="4131022"/>
             <a:ext cx="837878" cy="114300"/>
           </a:xfrm>
           <a:prstGeom prst="rect">
@@ -16048,7 +15822,7 @@
           <a:bodyPr wrap="square" lIns="0" tIns="114300" rIns="114300" bIns="0" rtlCol="0" anchor="ctr"/>
           <a:lstStyle/>
           <a:p>
-            <a:pPr algn="r" indent="0" marL="0">
+            <a:pPr marL="0" indent="0" algn="r">
               <a:buNone/>
             </a:pPr>
             <a:r>
@@ -16087,7 +15861,7 @@
           <a:bodyPr wrap="square" lIns="0" tIns="114300" rIns="114300" bIns="0" rtlCol="0" anchor="ctr"/>
           <a:lstStyle/>
           <a:p>
-            <a:pPr algn="r" indent="0" marL="0">
+            <a:pPr marL="0" indent="0" algn="r">
               <a:buNone/>
             </a:pPr>
             <a:r>
@@ -16126,7 +15900,7 @@
           <a:bodyPr wrap="square" lIns="0" tIns="114300" rIns="114300" bIns="0" rtlCol="0" anchor="ctr"/>
           <a:lstStyle/>
           <a:p>
-            <a:pPr algn="r" indent="0" marL="0">
+            <a:pPr marL="0" indent="0" algn="r">
               <a:buNone/>
             </a:pPr>
             <a:r>
@@ -16165,7 +15939,7 @@
           <a:bodyPr wrap="square" lIns="0" tIns="114300" rIns="114300" bIns="0" rtlCol="0" anchor="ctr"/>
           <a:lstStyle/>
           <a:p>
-            <a:pPr algn="r" indent="0" marL="0">
+            <a:pPr marL="0" indent="0" algn="r">
               <a:buNone/>
             </a:pPr>
             <a:r>
@@ -16191,7 +15965,7 @@
         </p:nvSpPr>
         <p:spPr>
           <a:xfrm>
-            <a:off x="9832683" y="4561136"/>
+            <a:off x="9775533" y="4503986"/>
             <a:ext cx="837878" cy="114300"/>
           </a:xfrm>
           <a:prstGeom prst="rect">
@@ -16204,7 +15978,7 @@
           <a:bodyPr wrap="square" lIns="0" tIns="114300" rIns="114300" bIns="0" rtlCol="0" anchor="ctr"/>
           <a:lstStyle/>
           <a:p>
-            <a:pPr algn="r" indent="0" marL="0">
+            <a:pPr marL="0" indent="0" algn="r">
               <a:buNone/>
             </a:pPr>
             <a:r>
@@ -16243,7 +16017,7 @@
           <a:bodyPr wrap="square" lIns="0" tIns="114300" rIns="114300" bIns="0" rtlCol="0" anchor="ctr"/>
           <a:lstStyle/>
           <a:p>
-            <a:pPr algn="r" indent="0" marL="0">
+            <a:pPr marL="0" indent="0" algn="r">
               <a:buNone/>
             </a:pPr>
             <a:r>
@@ -16282,7 +16056,7 @@
           <a:bodyPr wrap="square" lIns="0" tIns="114300" rIns="114300" bIns="0" rtlCol="0" anchor="ctr"/>
           <a:lstStyle/>
           <a:p>
-            <a:pPr algn="r" indent="0" marL="0">
+            <a:pPr marL="0" indent="0" algn="r">
               <a:buNone/>
             </a:pPr>
             <a:r>
@@ -16321,7 +16095,7 @@
           <a:bodyPr wrap="square" lIns="0" tIns="114300" rIns="114300" bIns="0" rtlCol="0" anchor="ctr"/>
           <a:lstStyle/>
           <a:p>
-            <a:pPr algn="r" indent="0" marL="0">
+            <a:pPr marL="0" indent="0" algn="r">
               <a:buNone/>
             </a:pPr>
             <a:r>
@@ -16360,7 +16134,7 @@
           <a:bodyPr wrap="square" lIns="0" tIns="114300" rIns="114300" bIns="0" rtlCol="0" anchor="ctr"/>
           <a:lstStyle/>
           <a:p>
-            <a:pPr algn="r" indent="0" marL="0">
+            <a:pPr marL="0" indent="0" algn="r">
               <a:buNone/>
             </a:pPr>
             <a:r>
@@ -16399,7 +16173,7 @@
           <a:bodyPr wrap="square" lIns="0" tIns="114300" rIns="114300" bIns="0" rtlCol="0" anchor="ctr"/>
           <a:lstStyle/>
           <a:p>
-            <a:pPr algn="r" indent="0" marL="0">
+            <a:pPr marL="0" indent="0" algn="r">
               <a:buNone/>
             </a:pPr>
             <a:r>
@@ -16438,7 +16212,7 @@
           <a:bodyPr wrap="square" lIns="0" tIns="114300" rIns="114300" bIns="0" rtlCol="0" anchor="ctr"/>
           <a:lstStyle/>
           <a:p>
-            <a:pPr algn="r" indent="0" marL="0">
+            <a:pPr marL="0" indent="0" algn="r">
               <a:buNone/>
             </a:pPr>
             <a:r>
@@ -16477,7 +16251,7 @@
           <a:bodyPr wrap="square" lIns="0" tIns="114300" rIns="114300" bIns="0" rtlCol="0" anchor="ctr"/>
           <a:lstStyle/>
           <a:p>
-            <a:pPr algn="r" indent="0" marL="0">
+            <a:pPr marL="0" indent="0" algn="r">
               <a:buNone/>
             </a:pPr>
             <a:r>
@@ -16503,7 +16277,7 @@
         </p:nvSpPr>
         <p:spPr>
           <a:xfrm>
-            <a:off x="4260697" y="4934099"/>
+            <a:off x="4203547" y="4876949"/>
             <a:ext cx="837878" cy="114300"/>
           </a:xfrm>
           <a:prstGeom prst="rect">
@@ -16516,7 +16290,7 @@
           <a:bodyPr wrap="square" lIns="0" tIns="114300" rIns="114300" bIns="0" rtlCol="0" anchor="ctr"/>
           <a:lstStyle/>
           <a:p>
-            <a:pPr algn="r" indent="0" marL="0">
+            <a:pPr marL="0" indent="0" algn="r">
               <a:buNone/>
             </a:pPr>
             <a:r>
@@ -16555,7 +16329,7 @@
           <a:bodyPr wrap="square" lIns="0" tIns="114300" rIns="114300" bIns="0" rtlCol="0" anchor="ctr"/>
           <a:lstStyle/>
           <a:p>
-            <a:pPr algn="r" indent="0" marL="0">
+            <a:pPr marL="0" indent="0" algn="r">
               <a:buNone/>
             </a:pPr>
             <a:r>
@@ -16594,7 +16368,7 @@
           <a:bodyPr wrap="square" lIns="0" tIns="114300" rIns="114300" bIns="0" rtlCol="0" anchor="ctr"/>
           <a:lstStyle/>
           <a:p>
-            <a:pPr algn="r" indent="0" marL="0">
+            <a:pPr marL="0" indent="0" algn="r">
               <a:buNone/>
             </a:pPr>
             <a:r>
@@ -16633,7 +16407,7 @@
           <a:bodyPr wrap="square" lIns="0" tIns="114300" rIns="114300" bIns="0" rtlCol="0" anchor="ctr"/>
           <a:lstStyle/>
           <a:p>
-            <a:pPr algn="r" indent="0" marL="0">
+            <a:pPr marL="0" indent="0" algn="r">
               <a:buNone/>
             </a:pPr>
             <a:r>
@@ -16672,7 +16446,7 @@
           <a:bodyPr wrap="square" lIns="0" tIns="114300" rIns="114300" bIns="0" rtlCol="0" anchor="ctr"/>
           <a:lstStyle/>
           <a:p>
-            <a:pPr algn="r" indent="0" marL="0">
+            <a:pPr marL="0" indent="0" algn="r">
               <a:buNone/>
             </a:pPr>
             <a:r>
@@ -16711,7 +16485,7 @@
           <a:bodyPr wrap="square" lIns="0" tIns="114300" rIns="114300" bIns="0" rtlCol="0" anchor="ctr"/>
           <a:lstStyle/>
           <a:p>
-            <a:pPr algn="r" indent="0" marL="0">
+            <a:pPr marL="0" indent="0" algn="r">
               <a:buNone/>
             </a:pPr>
             <a:r>
@@ -16750,7 +16524,7 @@
           <a:bodyPr wrap="square" lIns="0" tIns="114300" rIns="114300" bIns="0" rtlCol="0" anchor="ctr"/>
           <a:lstStyle/>
           <a:p>
-            <a:pPr algn="r" indent="0" marL="0">
+            <a:pPr marL="0" indent="0" algn="r">
               <a:buNone/>
             </a:pPr>
             <a:r>
@@ -16789,7 +16563,7 @@
           <a:bodyPr wrap="square" lIns="0" tIns="114300" rIns="114300" bIns="0" rtlCol="0" anchor="ctr"/>
           <a:lstStyle/>
           <a:p>
-            <a:pPr algn="r" indent="0" marL="0">
+            <a:pPr marL="0" indent="0" algn="r">
               <a:buNone/>
             </a:pPr>
             <a:r>
@@ -16815,7 +16589,7 @@
         </p:nvSpPr>
         <p:spPr>
           <a:xfrm>
-            <a:off x="9832683" y="4934099"/>
+            <a:off x="9775533" y="4876949"/>
             <a:ext cx="837878" cy="114300"/>
           </a:xfrm>
           <a:prstGeom prst="rect">
@@ -16828,7 +16602,7 @@
           <a:bodyPr wrap="square" lIns="0" tIns="114300" rIns="114300" bIns="0" rtlCol="0" anchor="ctr"/>
           <a:lstStyle/>
           <a:p>
-            <a:pPr algn="r" indent="0" marL="0">
+            <a:pPr marL="0" indent="0" algn="r">
               <a:buNone/>
             </a:pPr>
             <a:r>
@@ -17147,4 +16921,319 @@
     </a:ext>
   </a:extLst>
 </a:theme>
+</file>
+
+<file path=ppt/theme/theme2.xml><?xml version="1.0" encoding="utf-8"?>
+<a:theme xmlns:a="http://schemas.openxmlformats.org/drawingml/2006/main" name="Office Theme">
+  <a:themeElements>
+    <a:clrScheme name="Office">
+      <a:dk1>
+        <a:sysClr val="windowText" lastClr="000000"/>
+      </a:dk1>
+      <a:lt1>
+        <a:sysClr val="window" lastClr="FFFFFF"/>
+      </a:lt1>
+      <a:dk2>
+        <a:srgbClr val="0E2841"/>
+      </a:dk2>
+      <a:lt2>
+        <a:srgbClr val="E8E8E8"/>
+      </a:lt2>
+      <a:accent1>
+        <a:srgbClr val="156082"/>
+      </a:accent1>
+      <a:accent2>
+        <a:srgbClr val="E97132"/>
+      </a:accent2>
+      <a:accent3>
+        <a:srgbClr val="196B24"/>
+      </a:accent3>
+      <a:accent4>
+        <a:srgbClr val="0F9ED5"/>
+      </a:accent4>
+      <a:accent5>
+        <a:srgbClr val="A02B93"/>
+      </a:accent5>
+      <a:accent6>
+        <a:srgbClr val="4EA72E"/>
+      </a:accent6>
+      <a:hlink>
+        <a:srgbClr val="467886"/>
+      </a:hlink>
+      <a:folHlink>
+        <a:srgbClr val="96607D"/>
+      </a:folHlink>
+    </a:clrScheme>
+    <a:fontScheme name="Office">
+      <a:majorFont>
+        <a:latin typeface="Aptos Display" panose="02110004020202020204"/>
+        <a:ea typeface=""/>
+        <a:cs typeface=""/>
+        <a:font script="Jpan" typeface="游ゴシック Light"/>
+        <a:font script="Hang" typeface="맑은 고딕"/>
+        <a:font script="Hans" typeface="等线 Light"/>
+        <a:font script="Hant" typeface="新細明體"/>
+        <a:font script="Arab" typeface="Times New Roman"/>
+        <a:font script="Hebr" typeface="Times New Roman"/>
+        <a:font script="Thai" typeface="Angsana New"/>
+        <a:font script="Ethi" typeface="Nyala"/>
+        <a:font script="Beng" typeface="Vrinda"/>
+        <a:font script="Gujr" typeface="Shruti"/>
+        <a:font script="Khmr" typeface="MoolBoran"/>
+        <a:font script="Knda" typeface="Tunga"/>
+        <a:font script="Guru" typeface="Raavi"/>
+        <a:font script="Cans" typeface="Euphemia"/>
+        <a:font script="Cher" typeface="Plantagenet Cherokee"/>
+        <a:font script="Yiii" typeface="Microsoft Yi Baiti"/>
+        <a:font script="Tibt" typeface="Microsoft Himalaya"/>
+        <a:font script="Thaa" typeface="MV Boli"/>
+        <a:font script="Deva" typeface="Mangal"/>
+        <a:font script="Telu" typeface="Gautami"/>
+        <a:font script="Taml" typeface="Latha"/>
+        <a:font script="Syrc" typeface="Estrangelo Edessa"/>
+        <a:font script="Orya" typeface="Kalinga"/>
+        <a:font script="Mlym" typeface="Kartika"/>
+        <a:font script="Laoo" typeface="DokChampa"/>
+        <a:font script="Sinh" typeface="Iskoola Pota"/>
+        <a:font script="Mong" typeface="Mongolian Baiti"/>
+        <a:font script="Viet" typeface="Times New Roman"/>
+        <a:font script="Uigh" typeface="Microsoft Uighur"/>
+        <a:font script="Geor" typeface="Sylfaen"/>
+        <a:font script="Armn" typeface="Arial"/>
+        <a:font script="Bugi" typeface="Leelawadee UI"/>
+        <a:font script="Bopo" typeface="Microsoft JhengHei"/>
+        <a:font script="Java" typeface="Javanese Text"/>
+        <a:font script="Lisu" typeface="Segoe UI"/>
+        <a:font script="Mymr" typeface="Myanmar Text"/>
+        <a:font script="Nkoo" typeface="Ebrima"/>
+        <a:font script="Olck" typeface="Nirmala UI"/>
+        <a:font script="Osma" typeface="Ebrima"/>
+        <a:font script="Phag" typeface="Phagspa"/>
+        <a:font script="Syrn" typeface="Estrangelo Edessa"/>
+        <a:font script="Syrj" typeface="Estrangelo Edessa"/>
+        <a:font script="Syre" typeface="Estrangelo Edessa"/>
+        <a:font script="Sora" typeface="Nirmala UI"/>
+        <a:font script="Tale" typeface="Microsoft Tai Le"/>
+        <a:font script="Talu" typeface="Microsoft New Tai Lue"/>
+        <a:font script="Tfng" typeface="Ebrima"/>
+      </a:majorFont>
+      <a:minorFont>
+        <a:latin typeface="Aptos" panose="02110004020202020204"/>
+        <a:ea typeface=""/>
+        <a:cs typeface=""/>
+        <a:font script="Jpan" typeface="游ゴシック"/>
+        <a:font script="Hang" typeface="맑은 고딕"/>
+        <a:font script="Hans" typeface="等线"/>
+        <a:font script="Hant" typeface="新細明體"/>
+        <a:font script="Arab" typeface="Arial"/>
+        <a:font script="Hebr" typeface="Arial"/>
+        <a:font script="Thai" typeface="Cordia New"/>
+        <a:font script="Ethi" typeface="Nyala"/>
+        <a:font script="Beng" typeface="Vrinda"/>
+        <a:font script="Gujr" typeface="Shruti"/>
+        <a:font script="Khmr" typeface="DaunPenh"/>
+        <a:font script="Knda" typeface="Tunga"/>
+        <a:font script="Guru" typeface="Raavi"/>
+        <a:font script="Cans" typeface="Euphemia"/>
+        <a:font script="Cher" typeface="Plantagenet Cherokee"/>
+        <a:font script="Yiii" typeface="Microsoft Yi Baiti"/>
+        <a:font script="Tibt" typeface="Microsoft Himalaya"/>
+        <a:font script="Thaa" typeface="MV Boli"/>
+        <a:font script="Deva" typeface="Mangal"/>
+        <a:font script="Telu" typeface="Gautami"/>
+        <a:font script="Taml" typeface="Latha"/>
+        <a:font script="Syrc" typeface="Estrangelo Edessa"/>
+        <a:font script="Orya" typeface="Kalinga"/>
+        <a:font script="Mlym" typeface="Kartika"/>
+        <a:font script="Laoo" typeface="DokChampa"/>
+        <a:font script="Sinh" typeface="Iskoola Pota"/>
+        <a:font script="Mong" typeface="Mongolian Baiti"/>
+        <a:font script="Viet" typeface="Arial"/>
+        <a:font script="Uigh" typeface="Microsoft Uighur"/>
+        <a:font script="Geor" typeface="Sylfaen"/>
+        <a:font script="Armn" typeface="Arial"/>
+        <a:font script="Bugi" typeface="Leelawadee UI"/>
+        <a:font script="Bopo" typeface="Microsoft JhengHei"/>
+        <a:font script="Java" typeface="Javanese Text"/>
+        <a:font script="Lisu" typeface="Segoe UI"/>
+        <a:font script="Mymr" typeface="Myanmar Text"/>
+        <a:font script="Nkoo" typeface="Ebrima"/>
+        <a:font script="Olck" typeface="Nirmala UI"/>
+        <a:font script="Osma" typeface="Ebrima"/>
+        <a:font script="Phag" typeface="Phagspa"/>
+        <a:font script="Syrn" typeface="Estrangelo Edessa"/>
+        <a:font script="Syrj" typeface="Estrangelo Edessa"/>
+        <a:font script="Syre" typeface="Estrangelo Edessa"/>
+        <a:font script="Sora" typeface="Nirmala UI"/>
+        <a:font script="Tale" typeface="Microsoft Tai Le"/>
+        <a:font script="Talu" typeface="Microsoft New Tai Lue"/>
+        <a:font script="Tfng" typeface="Ebrima"/>
+      </a:minorFont>
+    </a:fontScheme>
+    <a:fmtScheme name="Office">
+      <a:fillStyleLst>
+        <a:solidFill>
+          <a:schemeClr val="phClr"/>
+        </a:solidFill>
+        <a:gradFill rotWithShape="1">
+          <a:gsLst>
+            <a:gs pos="0">
+              <a:schemeClr val="phClr">
+                <a:lumMod val="110000"/>
+                <a:satMod val="105000"/>
+                <a:tint val="67000"/>
+              </a:schemeClr>
+            </a:gs>
+            <a:gs pos="50000">
+              <a:schemeClr val="phClr">
+                <a:lumMod val="105000"/>
+                <a:satMod val="103000"/>
+                <a:tint val="73000"/>
+              </a:schemeClr>
+            </a:gs>
+            <a:gs pos="100000">
+              <a:schemeClr val="phClr">
+                <a:lumMod val="105000"/>
+                <a:satMod val="109000"/>
+                <a:tint val="81000"/>
+              </a:schemeClr>
+            </a:gs>
+          </a:gsLst>
+          <a:lin ang="5400000" scaled="0"/>
+        </a:gradFill>
+        <a:gradFill rotWithShape="1">
+          <a:gsLst>
+            <a:gs pos="0">
+              <a:schemeClr val="phClr">
+                <a:satMod val="103000"/>
+                <a:lumMod val="102000"/>
+                <a:tint val="94000"/>
+              </a:schemeClr>
+            </a:gs>
+            <a:gs pos="50000">
+              <a:schemeClr val="phClr">
+                <a:satMod val="110000"/>
+                <a:lumMod val="100000"/>
+                <a:shade val="100000"/>
+              </a:schemeClr>
+            </a:gs>
+            <a:gs pos="100000">
+              <a:schemeClr val="phClr">
+                <a:lumMod val="99000"/>
+                <a:satMod val="120000"/>
+                <a:shade val="78000"/>
+              </a:schemeClr>
+            </a:gs>
+          </a:gsLst>
+          <a:lin ang="5400000" scaled="0"/>
+        </a:gradFill>
+      </a:fillStyleLst>
+      <a:lnStyleLst>
+        <a:ln w="12700" cap="flat" cmpd="sng" algn="ctr">
+          <a:solidFill>
+            <a:schemeClr val="phClr"/>
+          </a:solidFill>
+          <a:prstDash val="solid"/>
+          <a:miter lim="800000"/>
+        </a:ln>
+        <a:ln w="19050" cap="flat" cmpd="sng" algn="ctr">
+          <a:solidFill>
+            <a:schemeClr val="phClr"/>
+          </a:solidFill>
+          <a:prstDash val="solid"/>
+          <a:miter lim="800000"/>
+        </a:ln>
+        <a:ln w="25400" cap="flat" cmpd="sng" algn="ctr">
+          <a:solidFill>
+            <a:schemeClr val="phClr"/>
+          </a:solidFill>
+          <a:prstDash val="solid"/>
+          <a:miter lim="800000"/>
+        </a:ln>
+      </a:lnStyleLst>
+      <a:effectStyleLst>
+        <a:effectStyle>
+          <a:effectLst/>
+        </a:effectStyle>
+        <a:effectStyle>
+          <a:effectLst/>
+        </a:effectStyle>
+        <a:effectStyle>
+          <a:effectLst>
+            <a:outerShdw blurRad="57150" dist="19050" dir="5400000" algn="ctr" rotWithShape="0">
+              <a:srgbClr val="000000">
+                <a:alpha val="63000"/>
+              </a:srgbClr>
+            </a:outerShdw>
+          </a:effectLst>
+        </a:effectStyle>
+      </a:effectStyleLst>
+      <a:bgFillStyleLst>
+        <a:solidFill>
+          <a:schemeClr val="phClr"/>
+        </a:solidFill>
+        <a:solidFill>
+          <a:schemeClr val="phClr">
+            <a:tint val="95000"/>
+            <a:satMod val="170000"/>
+          </a:schemeClr>
+        </a:solidFill>
+        <a:gradFill rotWithShape="1">
+          <a:gsLst>
+            <a:gs pos="0">
+              <a:schemeClr val="phClr">
+                <a:tint val="93000"/>
+                <a:satMod val="150000"/>
+                <a:shade val="98000"/>
+                <a:lumMod val="102000"/>
+              </a:schemeClr>
+            </a:gs>
+            <a:gs pos="50000">
+              <a:schemeClr val="phClr">
+                <a:tint val="98000"/>
+                <a:satMod val="130000"/>
+                <a:shade val="90000"/>
+                <a:lumMod val="103000"/>
+              </a:schemeClr>
+            </a:gs>
+            <a:gs pos="100000">
+              <a:schemeClr val="phClr">
+                <a:shade val="63000"/>
+                <a:satMod val="120000"/>
+              </a:schemeClr>
+            </a:gs>
+          </a:gsLst>
+          <a:lin ang="5400000" scaled="0"/>
+        </a:gradFill>
+      </a:bgFillStyleLst>
+    </a:fmtScheme>
+  </a:themeElements>
+  <a:objectDefaults>
+    <a:lnDef>
+      <a:spPr/>
+      <a:bodyPr/>
+      <a:lstStyle/>
+      <a:style>
+        <a:lnRef idx="2">
+          <a:schemeClr val="accent1"/>
+        </a:lnRef>
+        <a:fillRef idx="0">
+          <a:schemeClr val="accent1"/>
+        </a:fillRef>
+        <a:effectRef idx="1">
+          <a:schemeClr val="accent1"/>
+        </a:effectRef>
+        <a:fontRef idx="minor">
+          <a:schemeClr val="tx1"/>
+        </a:fontRef>
+      </a:style>
+    </a:lnDef>
+  </a:objectDefaults>
+  <a:extraClrSchemeLst/>
+  <a:extLst>
+    <a:ext uri="{05A4C25C-085E-4340-85A3-A5531E510DB2}">
+      <thm15:themeFamily xmlns:thm15="http://schemas.microsoft.com/office/thememl/2012/main" name="Office Theme" id="{2E142A2C-CD16-42D6-873A-C26D2A0506FA}" vid="{1BDDFF52-6CD6-40A5-AB3C-68EB2F1E4D0A}"/>
+    </a:ext>
+  </a:extLst>
+</a:theme>
 </file>
--- a/tradicional/INFORME_TRADICIONAL.pptx
+++ b/tradicional/INFORME_TRADICIONAL.pptx
@@ -4,16 +4,16 @@
   <p:sldMasterIdLst>
     <p:sldMasterId id="2147483648" r:id="rId1"/>
   </p:sldMasterIdLst>
-  <p:notesMasterIdLst>
-    <p:notesMasterId r:id="rId5"/>
-  </p:notesMasterIdLst>
   <p:sldIdLst>
     <p:sldId id="256" r:id="rId2"/>
     <p:sldId id="257" r:id="rId3"/>
     <p:sldId id="258" r:id="rId4"/>
   </p:sldIdLst>
-  <p:sldSz cx="12192000" cy="6858000"/>
-  <p:notesSz cx="6858000" cy="12192000"/>
+  <p:notesMasterIdLst>
+    <p:notesMasterId r:id="rId5"/>
+  </p:notesMasterIdLst>
+  <p:sldSz cx="12191695" cy="6858000"/>
+  <p:notesSz cx="6858000" cy="12191695"/>
   <p:defaultTextStyle>
     <a:lvl1pPr marL="0" algn="l" defTabSz="914400" rtl="0" eaLnBrk="1" latinLnBrk="0" hangingPunct="1">
       <a:defRPr sz="1800" kern="1200">
@@ -106,11 +106,6 @@
       </a:defRPr>
     </a:lvl9pPr>
   </p:defaultTextStyle>
-  <p:extLst>
-    <p:ext uri="{EFAFB233-063F-42B5-8137-9DF3F51BA10A}">
-      <p15:sldGuideLst xmlns:p15="http://schemas.microsoft.com/office/powerpoint/2012/main"/>
-    </p:ext>
-  </p:extLst>
 </p:presentation>
 </file>
 
@@ -136,10 +131,234 @@
           <a:chExt cx="0" cy="0"/>
         </a:xfrm>
       </p:grpSpPr>
+      <p:sp>
+        <p:nvSpPr>
+          <p:cNvPr id="2" name="Header Placeholder 1"/>
+          <p:cNvSpPr>
+            <a:spLocks noGrp="1"/>
+          </p:cNvSpPr>
+          <p:nvPr>
+            <p:ph type="hdr" sz="quarter"/>
+          </p:nvPr>
+        </p:nvSpPr>
+        <p:spPr>
+          <a:xfrm>
+            <a:off x="0" y="0"/>
+            <a:ext cx="2971800" cy="458788"/>
+          </a:xfrm>
+          <a:prstGeom prst="rect">
+            <a:avLst/>
+          </a:prstGeom>
+        </p:spPr>
+        <p:txBody>
+          <a:bodyPr vert="horz" lIns="91440" tIns="45720" rIns="91440" bIns="45720" rtlCol="0"/>
+          <a:lstStyle>
+            <a:lvl1pPr algn="l">
+              <a:defRPr sz="1200"/>
+            </a:lvl1pPr>
+          </a:lstStyle>
+          <a:p>
+            <a:endParaRPr lang="en-US"/>
+          </a:p>
+        </p:txBody>
+      </p:sp>
+      <p:sp>
+        <p:nvSpPr>
+          <p:cNvPr id="3" name="Date Placeholder 2"/>
+          <p:cNvSpPr>
+            <a:spLocks noGrp="1"/>
+          </p:cNvSpPr>
+          <p:nvPr>
+            <p:ph type="dt" idx="1"/>
+          </p:nvPr>
+        </p:nvSpPr>
+        <p:spPr>
+          <a:xfrm>
+            <a:off x="3884613" y="0"/>
+            <a:ext cx="2971800" cy="458788"/>
+          </a:xfrm>
+          <a:prstGeom prst="rect">
+            <a:avLst/>
+          </a:prstGeom>
+        </p:spPr>
+        <p:txBody>
+          <a:bodyPr vert="horz" lIns="91440" tIns="45720" rIns="91440" bIns="45720" rtlCol="0"/>
+          <a:lstStyle>
+            <a:lvl1pPr algn="r">
+              <a:defRPr sz="1200"/>
+            </a:lvl1pPr>
+          </a:lstStyle>
+          <a:p>
+            <a:fld id="{5282F153-3F37-0F45-9E97-73ACFA13230C}" type="datetimeFigureOut">
+              <a:rPr lang="en-US"/>
+              <a:t>7/23/19</a:t>
+            </a:fld>
+            <a:endParaRPr lang="en-US"/>
+          </a:p>
+        </p:txBody>
+      </p:sp>
+      <p:sp>
+        <p:nvSpPr>
+          <p:cNvPr id="4" name="Slide Image Placeholder 3"/>
+          <p:cNvSpPr>
+            <a:spLocks noGrp="1" noRot="1" noChangeAspect="1"/>
+          </p:cNvSpPr>
+          <p:nvPr>
+            <p:ph type="sldImg" idx="2"/>
+          </p:nvPr>
+        </p:nvSpPr>
+        <p:spPr>
+          <a:xfrm>
+            <a:off x="685800" y="1143000"/>
+            <a:ext cx="5486400" cy="3086100"/>
+          </a:xfrm>
+          <a:prstGeom prst="rect">
+            <a:avLst/>
+          </a:prstGeom>
+          <a:noFill/>
+          <a:ln w="12700">
+            <a:solidFill>
+              <a:prstClr val="black"/>
+            </a:solidFill>
+          </a:ln>
+        </p:spPr>
+        <p:txBody>
+          <a:bodyPr vert="horz" lIns="91440" tIns="45720" rIns="91440" bIns="45720" rtlCol="0" anchor="ctr"/>
+          <a:lstStyle/>
+          <a:p>
+            <a:endParaRPr lang="en-US"/>
+          </a:p>
+        </p:txBody>
+      </p:sp>
+      <p:sp>
+        <p:nvSpPr>
+          <p:cNvPr id="5" name="Notes Placeholder 4"/>
+          <p:cNvSpPr>
+            <a:spLocks noGrp="1"/>
+          </p:cNvSpPr>
+          <p:nvPr>
+            <p:ph type="body" sz="quarter" idx="3"/>
+          </p:nvPr>
+        </p:nvSpPr>
+        <p:spPr>
+          <a:xfrm>
+            <a:off x="685800" y="4400550"/>
+            <a:ext cx="5486400" cy="3600450"/>
+          </a:xfrm>
+          <a:prstGeom prst="rect">
+            <a:avLst/>
+          </a:prstGeom>
+        </p:spPr>
+        <p:txBody>
+          <a:bodyPr vert="horz" lIns="91440" tIns="45720" rIns="91440" bIns="45720" rtlCol="0"/>
+          <a:lstStyle/>
+          <a:p>
+            <a:pPr lvl="0"/>
+            <a:r>
+              <a:rPr lang="en-US"/>
+              <a:t>Click to edit Master text styles</a:t>
+            </a:r>
+          </a:p>
+          <a:p>
+            <a:pPr lvl="1"/>
+            <a:r>
+              <a:rPr lang="en-US"/>
+              <a:t>Second level</a:t>
+            </a:r>
+          </a:p>
+          <a:p>
+            <a:pPr lvl="2"/>
+            <a:r>
+              <a:rPr lang="en-US"/>
+              <a:t>Third level</a:t>
+            </a:r>
+          </a:p>
+          <a:p>
+            <a:pPr lvl="3"/>
+            <a:r>
+              <a:rPr lang="en-US"/>
+              <a:t>Fourth level</a:t>
+            </a:r>
+          </a:p>
+          <a:p>
+            <a:pPr lvl="4"/>
+            <a:r>
+              <a:rPr lang="en-US"/>
+              <a:t>Fifth level</a:t>
+            </a:r>
+          </a:p>
+        </p:txBody>
+      </p:sp>
+      <p:sp>
+        <p:nvSpPr>
+          <p:cNvPr id="6" name="Footer Placeholder 5"/>
+          <p:cNvSpPr>
+            <a:spLocks noGrp="1"/>
+          </p:cNvSpPr>
+          <p:nvPr>
+            <p:ph type="ftr" sz="quarter" idx="4"/>
+          </p:nvPr>
+        </p:nvSpPr>
+        <p:spPr>
+          <a:xfrm>
+            <a:off x="0" y="8685213"/>
+            <a:ext cx="2971800" cy="458787"/>
+          </a:xfrm>
+          <a:prstGeom prst="rect">
+            <a:avLst/>
+          </a:prstGeom>
+        </p:spPr>
+        <p:txBody>
+          <a:bodyPr vert="horz" lIns="91440" tIns="45720" rIns="91440" bIns="45720" rtlCol="0" anchor="b"/>
+          <a:lstStyle>
+            <a:lvl1pPr algn="l">
+              <a:defRPr sz="1200"/>
+            </a:lvl1pPr>
+          </a:lstStyle>
+          <a:p>
+            <a:endParaRPr lang="en-US"/>
+          </a:p>
+        </p:txBody>
+      </p:sp>
+      <p:sp>
+        <p:nvSpPr>
+          <p:cNvPr id="7" name="Slide Number Placeholder 6"/>
+          <p:cNvSpPr>
+            <a:spLocks noGrp="1"/>
+          </p:cNvSpPr>
+          <p:nvPr>
+            <p:ph type="sldNum" sz="quarter" idx="5"/>
+          </p:nvPr>
+        </p:nvSpPr>
+        <p:spPr>
+          <a:xfrm>
+            <a:off x="3884613" y="8685213"/>
+            <a:ext cx="2971800" cy="458787"/>
+          </a:xfrm>
+          <a:prstGeom prst="rect">
+            <a:avLst/>
+          </a:prstGeom>
+        </p:spPr>
+        <p:txBody>
+          <a:bodyPr vert="horz" lIns="91440" tIns="45720" rIns="91440" bIns="45720" rtlCol="0" anchor="b"/>
+          <a:lstStyle>
+            <a:lvl1pPr algn="r">
+              <a:defRPr sz="1200"/>
+            </a:lvl1pPr>
+          </a:lstStyle>
+          <a:p>
+            <a:fld id="{CE5E9CC1-C706-0F49-92D6-E571CC5EEA8F}" type="slidenum">
+              <a:rPr lang="en-US"/>
+              <a:t>‹#›</a:t>
+            </a:fld>
+            <a:endParaRPr lang="en-US"/>
+          </a:p>
+        </p:txBody>
+      </p:sp>
     </p:spTree>
     <p:extLst>
       <p:ext uri="{BB962C8B-B14F-4D97-AF65-F5344CB8AC3E}">
-        <p14:creationId xmlns:p14="http://schemas.microsoft.com/office/powerpoint/2010/main" val="2592517362"/>
+        <p14:creationId xmlns:p14="http://schemas.microsoft.com/office/powerpoint/2010/main" val="1024086991"/>
       </p:ext>
     </p:extLst>
   </p:cSld>
@@ -283,6 +502,10 @@
           <a:bodyPr/>
           <a:lstStyle/>
           <a:p>
+            <a:r>
+              <a:rPr lang="en-US" dirty="0"/>
+              <a:t/>
+            </a:r>
             <a:endParaRPr lang="en-US" dirty="0"/>
           </a:p>
         </p:txBody>
@@ -367,6 +590,10 @@
           <a:bodyPr/>
           <a:lstStyle/>
           <a:p>
+            <a:r>
+              <a:rPr lang="en-US" dirty="0"/>
+              <a:t/>
+            </a:r>
             <a:endParaRPr lang="en-US" dirty="0"/>
           </a:p>
         </p:txBody>
@@ -451,6 +678,10 @@
           <a:bodyPr/>
           <a:lstStyle/>
           <a:p>
+            <a:r>
+              <a:rPr lang="en-US" dirty="0"/>
+              <a:t/>
+            </a:r>
             <a:endParaRPr lang="en-US" dirty="0"/>
           </a:p>
         </p:txBody>
@@ -524,11 +755,6 @@
 <file path=ppt/slideMasters/slideMaster1.xml><?xml version="1.0" encoding="utf-8"?>
 <p:sldMaster xmlns:a="http://schemas.openxmlformats.org/drawingml/2006/main" xmlns:r="http://schemas.openxmlformats.org/officeDocument/2006/relationships" xmlns:p="http://schemas.openxmlformats.org/presentationml/2006/main">
   <p:cSld>
-    <p:bg>
-      <p:bgRef idx="1001">
-        <a:schemeClr val="bg1"/>
-      </p:bgRef>
-    </p:bg>
     <p:spTree>
       <p:nvGrpSpPr>
         <p:cNvPr id="1" name=""/>
@@ -822,14 +1048,14 @@
       </p:grpSpPr>
       <p:pic>
         <p:nvPicPr>
-          <p:cNvPr id="2" name="Image 0" descr="C:\01_Repositorios\02_CRM\02_Informe_Semetral\dash\tradicional\ppt_slides\sk_00_main.png"/>
+          <p:cNvPr id="2" name="Image 0" descr="C:\01_Repositorios\02_CRM\02_Informe_Semetral\dash\tradicional\ppt_slides\sk_00_main.png">    </p:cNvPr>
           <p:cNvPicPr>
             <a:picLocks noChangeAspect="1"/>
           </p:cNvPicPr>
           <p:nvPr/>
         </p:nvPicPr>
         <p:blipFill>
-          <a:blip r:embed="rId3"/>
+          <a:blip r:embed="rId1"/>
           <a:stretch>
             <a:fillRect/>
           </a:stretch>
@@ -865,7 +1091,7 @@
           <a:bodyPr wrap="square" lIns="0" tIns="0" rIns="0" bIns="0" rtlCol="0" anchor="t"/>
           <a:lstStyle/>
           <a:p>
-            <a:pPr marL="0" indent="0" algn="l">
+            <a:pPr algn="l" indent="0" marL="0">
               <a:buNone/>
             </a:pPr>
             <a:r>
@@ -904,7 +1130,7 @@
           <a:bodyPr wrap="square" lIns="0" tIns="0" rIns="0" bIns="0" rtlCol="0" anchor="t"/>
           <a:lstStyle/>
           <a:p>
-            <a:pPr marL="0" indent="0" algn="l">
+            <a:pPr algn="l" indent="0" marL="0">
               <a:buNone/>
             </a:pPr>
             <a:r>
@@ -943,7 +1169,7 @@
           <a:bodyPr wrap="square" lIns="0" tIns="0" rIns="0" bIns="0" rtlCol="0" anchor="t"/>
           <a:lstStyle/>
           <a:p>
-            <a:pPr marL="0" indent="0" algn="l">
+            <a:pPr algn="l" indent="0" marL="0">
               <a:buNone/>
             </a:pPr>
             <a:r>
@@ -982,7 +1208,7 @@
           <a:bodyPr wrap="square" lIns="0" tIns="0" rIns="0" bIns="0" rtlCol="0" anchor="t"/>
           <a:lstStyle/>
           <a:p>
-            <a:pPr marL="0" indent="0" algn="l">
+            <a:pPr algn="l" indent="0" marL="0">
               <a:buNone/>
             </a:pPr>
             <a:r>
@@ -1021,7 +1247,7 @@
           <a:bodyPr wrap="square" lIns="0" tIns="0" rIns="0" bIns="0" rtlCol="0" anchor="t"/>
           <a:lstStyle/>
           <a:p>
-            <a:pPr marL="0" indent="0" algn="l">
+            <a:pPr algn="l" indent="0" marL="0">
               <a:buNone/>
             </a:pPr>
             <a:r>
@@ -1060,7 +1286,7 @@
           <a:bodyPr wrap="square" lIns="0" tIns="0" rIns="0" bIns="0" rtlCol="0" anchor="t"/>
           <a:lstStyle/>
           <a:p>
-            <a:pPr marL="0" indent="0" algn="l">
+            <a:pPr algn="l" indent="0" marL="0">
               <a:buNone/>
             </a:pPr>
             <a:r>
@@ -1099,7 +1325,7 @@
           <a:bodyPr wrap="square" lIns="0" tIns="0" rIns="0" bIns="0" rtlCol="0" anchor="t"/>
           <a:lstStyle/>
           <a:p>
-            <a:pPr marL="0" indent="0" algn="l">
+            <a:pPr algn="l" indent="0" marL="0">
               <a:buNone/>
             </a:pPr>
             <a:r>
@@ -1138,7 +1364,7 @@
           <a:bodyPr wrap="square" lIns="0" tIns="0" rIns="0" bIns="0" rtlCol="0" anchor="t"/>
           <a:lstStyle/>
           <a:p>
-            <a:pPr marL="0" indent="0" algn="l">
+            <a:pPr algn="l" indent="0" marL="0">
               <a:buNone/>
             </a:pPr>
             <a:r>
@@ -1177,7 +1403,7 @@
           <a:bodyPr wrap="square" lIns="0" tIns="0" rIns="0" bIns="0" rtlCol="0" anchor="t"/>
           <a:lstStyle/>
           <a:p>
-            <a:pPr marL="0" indent="0" algn="l">
+            <a:pPr algn="l" indent="0" marL="0">
               <a:buNone/>
             </a:pPr>
             <a:r>
@@ -1216,7 +1442,7 @@
           <a:bodyPr wrap="square" lIns="0" tIns="0" rIns="0" bIns="0" rtlCol="0" anchor="t"/>
           <a:lstStyle/>
           <a:p>
-            <a:pPr marL="0" indent="0" algn="l">
+            <a:pPr algn="l" indent="0" marL="0">
               <a:buNone/>
             </a:pPr>
             <a:r>
@@ -1242,7 +1468,7 @@
         </p:nvSpPr>
         <p:spPr>
           <a:xfrm>
-            <a:off x="2639713" y="2321005"/>
+            <a:off x="2639713" y="2364135"/>
             <a:ext cx="1951371" cy="133350"/>
           </a:xfrm>
           <a:prstGeom prst="rect">
@@ -1255,7 +1481,7 @@
           <a:bodyPr wrap="square" lIns="0" tIns="114300" rIns="114300" bIns="0" rtlCol="0" anchor="ctr"/>
           <a:lstStyle/>
           <a:p>
-            <a:pPr marL="0" indent="0" algn="r">
+            <a:pPr algn="r" indent="0" marL="0">
               <a:buNone/>
             </a:pPr>
             <a:r>
@@ -1281,7 +1507,7 @@
         </p:nvSpPr>
         <p:spPr>
           <a:xfrm>
-            <a:off x="4552513" y="2321005"/>
+            <a:off x="4552513" y="2364135"/>
             <a:ext cx="1324265" cy="133350"/>
           </a:xfrm>
           <a:prstGeom prst="rect">
@@ -1294,7 +1520,7 @@
           <a:bodyPr wrap="square" lIns="0" tIns="114300" rIns="114300" bIns="0" rtlCol="0" anchor="ctr"/>
           <a:lstStyle/>
           <a:p>
-            <a:pPr marL="0" indent="0" algn="r">
+            <a:pPr algn="r" indent="0" marL="0">
               <a:buNone/>
             </a:pPr>
             <a:r>
@@ -1333,7 +1559,7 @@
           <a:bodyPr wrap="square" lIns="0" tIns="114300" rIns="114300" bIns="0" rtlCol="0" anchor="ctr"/>
           <a:lstStyle/>
           <a:p>
-            <a:pPr marL="0" indent="0" algn="l">
+            <a:pPr algn="l" indent="0" marL="0">
               <a:buNone/>
             </a:pPr>
             <a:r>
@@ -1359,7 +1585,7 @@
         </p:nvSpPr>
         <p:spPr>
           <a:xfrm>
-            <a:off x="1905424" y="2321005"/>
+            <a:off x="1905424" y="2364135"/>
             <a:ext cx="791125" cy="133350"/>
           </a:xfrm>
           <a:prstGeom prst="rect">
@@ -1372,7 +1598,7 @@
           <a:bodyPr wrap="square" lIns="0" tIns="114300" rIns="114300" bIns="0" rtlCol="0" anchor="ctr"/>
           <a:lstStyle/>
           <a:p>
-            <a:pPr marL="0" indent="0" algn="r">
+            <a:pPr algn="r" indent="0" marL="0">
               <a:buNone/>
             </a:pPr>
             <a:r>
@@ -1411,7 +1637,7 @@
           <a:bodyPr wrap="square" lIns="0" tIns="0" rIns="0" bIns="0" rtlCol="0" anchor="t"/>
           <a:lstStyle/>
           <a:p>
-            <a:pPr marL="0" indent="0" algn="l">
+            <a:pPr algn="l" indent="0" marL="0">
               <a:buNone/>
             </a:pPr>
             <a:r>
@@ -1437,7 +1663,7 @@
         </p:nvSpPr>
         <p:spPr>
           <a:xfrm>
-            <a:off x="723882" y="2321005"/>
+            <a:off x="723882" y="2364135"/>
             <a:ext cx="1240722" cy="133350"/>
           </a:xfrm>
           <a:prstGeom prst="rect">
@@ -1450,7 +1676,7 @@
           <a:bodyPr wrap="square" lIns="0" tIns="114300" rIns="114300" bIns="0" rtlCol="0" anchor="ctr"/>
           <a:lstStyle/>
           <a:p>
-            <a:pPr marL="0" indent="0" algn="l">
+            <a:pPr algn="l" indent="0" marL="0">
               <a:buNone/>
             </a:pPr>
             <a:r>
@@ -1489,7 +1715,7 @@
           <a:bodyPr wrap="square" lIns="0" tIns="114300" rIns="114300" bIns="0" rtlCol="0" anchor="ctr"/>
           <a:lstStyle/>
           <a:p>
-            <a:pPr marL="0" indent="0" algn="l">
+            <a:pPr algn="l" indent="0" marL="0">
               <a:buNone/>
             </a:pPr>
             <a:r>
@@ -1528,7 +1754,7 @@
           <a:bodyPr wrap="square" lIns="0" tIns="114300" rIns="114300" bIns="0" rtlCol="0" anchor="ctr"/>
           <a:lstStyle/>
           <a:p>
-            <a:pPr marL="0" indent="0" algn="l">
+            <a:pPr algn="l" indent="0" marL="0">
               <a:buNone/>
             </a:pPr>
             <a:r>
@@ -1567,7 +1793,7 @@
           <a:bodyPr wrap="square" lIns="0" tIns="114300" rIns="114300" bIns="0" rtlCol="0" anchor="ctr"/>
           <a:lstStyle/>
           <a:p>
-            <a:pPr marL="0" indent="0" algn="l">
+            <a:pPr algn="l" indent="0" marL="0">
               <a:buNone/>
             </a:pPr>
             <a:r>
@@ -1606,7 +1832,7 @@
           <a:bodyPr wrap="square" lIns="0" tIns="114300" rIns="114300" bIns="0" rtlCol="0" anchor="ctr"/>
           <a:lstStyle/>
           <a:p>
-            <a:pPr marL="0" indent="0" algn="r">
+            <a:pPr algn="r" indent="0" marL="0">
               <a:buNone/>
             </a:pPr>
             <a:r>
@@ -1645,7 +1871,7 @@
           <a:bodyPr wrap="square" lIns="0" tIns="114300" rIns="114300" bIns="0" rtlCol="0" anchor="ctr"/>
           <a:lstStyle/>
           <a:p>
-            <a:pPr marL="0" indent="0" algn="l">
+            <a:pPr algn="l" indent="0" marL="0">
               <a:buNone/>
             </a:pPr>
             <a:r>
@@ -1684,7 +1910,7 @@
           <a:bodyPr wrap="square" lIns="0" tIns="114300" rIns="114300" bIns="0" rtlCol="0" anchor="ctr"/>
           <a:lstStyle/>
           <a:p>
-            <a:pPr marL="0" indent="0" algn="l">
+            <a:pPr algn="l" indent="0" marL="0">
               <a:buNone/>
             </a:pPr>
             <a:r>
@@ -1723,7 +1949,7 @@
           <a:bodyPr wrap="square" lIns="0" tIns="114300" rIns="114300" bIns="0" rtlCol="0" anchor="ctr"/>
           <a:lstStyle/>
           <a:p>
-            <a:pPr marL="0" indent="0" algn="l">
+            <a:pPr algn="l" indent="0" marL="0">
               <a:buNone/>
             </a:pPr>
             <a:r>
@@ -1762,7 +1988,7 @@
           <a:bodyPr wrap="square" lIns="0" tIns="114300" rIns="114300" bIns="0" rtlCol="0" anchor="ctr"/>
           <a:lstStyle/>
           <a:p>
-            <a:pPr marL="0" indent="0" algn="l">
+            <a:pPr algn="l" indent="0" marL="0">
               <a:buNone/>
             </a:pPr>
             <a:r>
@@ -1801,7 +2027,7 @@
           <a:bodyPr wrap="square" lIns="0" tIns="114300" rIns="114300" bIns="0" rtlCol="0" anchor="ctr"/>
           <a:lstStyle/>
           <a:p>
-            <a:pPr marL="0" indent="0" algn="l">
+            <a:pPr algn="l" indent="0" marL="0">
               <a:buNone/>
             </a:pPr>
             <a:r>
@@ -1840,7 +2066,7 @@
           <a:bodyPr wrap="square" lIns="0" tIns="114300" rIns="114300" bIns="0" rtlCol="0" anchor="ctr"/>
           <a:lstStyle/>
           <a:p>
-            <a:pPr marL="0" indent="0" algn="r">
+            <a:pPr algn="r" indent="0" marL="0">
               <a:buNone/>
             </a:pPr>
             <a:r>
@@ -1852,7 +2078,7 @@
                 <a:ea typeface="Raleway" pitchFamily="34" charset="-122"/>
                 <a:cs typeface="Raleway" pitchFamily="34" charset="-120"/>
               </a:rPr>
-              <a:t>596</a:t>
+              <a:t>618</a:t>
             </a:r>
             <a:endParaRPr lang="en-US" sz="864" dirty="0"/>
           </a:p>
@@ -1879,7 +2105,7 @@
           <a:bodyPr wrap="square" lIns="0" tIns="114300" rIns="114300" bIns="0" rtlCol="0" anchor="ctr"/>
           <a:lstStyle/>
           <a:p>
-            <a:pPr marL="0" indent="0" algn="r">
+            <a:pPr algn="r" indent="0" marL="0">
               <a:buNone/>
             </a:pPr>
             <a:r>
@@ -1891,7 +2117,7 @@
                 <a:ea typeface="Raleway" pitchFamily="34" charset="-122"/>
                 <a:cs typeface="Raleway" pitchFamily="34" charset="-120"/>
               </a:rPr>
-              <a:t>512</a:t>
+              <a:t>533</a:t>
             </a:r>
             <a:endParaRPr lang="en-US" sz="864" dirty="0"/>
           </a:p>
@@ -1918,7 +2144,7 @@
           <a:bodyPr wrap="square" lIns="0" tIns="114300" rIns="114300" bIns="0" rtlCol="0" anchor="ctr"/>
           <a:lstStyle/>
           <a:p>
-            <a:pPr marL="0" indent="0" algn="r">
+            <a:pPr algn="r" indent="0" marL="0">
               <a:buNone/>
             </a:pPr>
             <a:r>
@@ -1930,7 +2156,7 @@
                 <a:ea typeface="Raleway" pitchFamily="34" charset="-122"/>
                 <a:cs typeface="Raleway" pitchFamily="34" charset="-120"/>
               </a:rPr>
-              <a:t>209</a:t>
+              <a:t>217</a:t>
             </a:r>
             <a:endParaRPr lang="en-US" sz="864" dirty="0"/>
           </a:p>
@@ -1945,7 +2171,7 @@
         <p:spPr>
           <a:xfrm>
             <a:off x="781030" y="1143000"/>
-            <a:ext cx="429395" cy="264890"/>
+            <a:ext cx="424346" cy="264890"/>
           </a:xfrm>
           <a:prstGeom prst="rect">
             <a:avLst/>
@@ -1957,7 +2183,7 @@
           <a:bodyPr wrap="square" lIns="0" tIns="0" rIns="0" bIns="0" rtlCol="0" anchor="t"/>
           <a:lstStyle/>
           <a:p>
-            <a:pPr marL="0" indent="0" algn="l">
+            <a:pPr algn="l" indent="0" marL="0">
               <a:buNone/>
             </a:pPr>
             <a:r>
@@ -1969,7 +2195,7 @@
                 <a:ea typeface="Raleway" pitchFamily="34" charset="-122"/>
                 <a:cs typeface="Raleway" pitchFamily="34" charset="-120"/>
               </a:rPr>
-              <a:t>596</a:t>
+              <a:t>618</a:t>
             </a:r>
             <a:endParaRPr lang="en-US" sz="1740" dirty="0"/>
           </a:p>
@@ -1983,7 +2209,7 @@
         </p:nvSpPr>
         <p:spPr>
           <a:xfrm>
-            <a:off x="6396399" y="2354610"/>
+            <a:off x="6440849" y="2354610"/>
             <a:ext cx="274320" cy="128016"/>
           </a:xfrm>
           <a:prstGeom prst="rect">
@@ -1996,7 +2222,7 @@
           <a:bodyPr wrap="square" lIns="0" tIns="0" rIns="0" bIns="0" rtlCol="0" anchor="t"/>
           <a:lstStyle/>
           <a:p>
-            <a:pPr marL="0" indent="0" algn="r">
+            <a:pPr algn="r" indent="0" marL="0">
               <a:buNone/>
             </a:pPr>
             <a:r>
@@ -2022,7 +2248,7 @@
         </p:nvSpPr>
         <p:spPr>
           <a:xfrm>
-            <a:off x="6398923" y="2583210"/>
+            <a:off x="6443373" y="2583210"/>
             <a:ext cx="274320" cy="128016"/>
           </a:xfrm>
           <a:prstGeom prst="rect">
@@ -2035,7 +2261,7 @@
           <a:bodyPr wrap="square" lIns="0" tIns="0" rIns="0" bIns="0" rtlCol="0" anchor="t"/>
           <a:lstStyle/>
           <a:p>
-            <a:pPr marL="0" indent="0" algn="r">
+            <a:pPr algn="r" indent="0" marL="0">
               <a:buNone/>
             </a:pPr>
             <a:r>
@@ -2061,7 +2287,7 @@
         </p:nvSpPr>
         <p:spPr>
           <a:xfrm>
-            <a:off x="6394348" y="2811810"/>
+            <a:off x="6438798" y="2811810"/>
             <a:ext cx="274320" cy="128016"/>
           </a:xfrm>
           <a:prstGeom prst="rect">
@@ -2074,7 +2300,7 @@
           <a:bodyPr wrap="square" lIns="0" tIns="0" rIns="0" bIns="0" rtlCol="0" anchor="t"/>
           <a:lstStyle/>
           <a:p>
-            <a:pPr marL="0" indent="0" algn="r">
+            <a:pPr algn="r" indent="0" marL="0">
               <a:buNone/>
             </a:pPr>
             <a:r>
@@ -2113,7 +2339,7 @@
           <a:bodyPr wrap="square" lIns="0" tIns="0" rIns="0" bIns="0" rtlCol="0" anchor="t"/>
           <a:lstStyle/>
           <a:p>
-            <a:pPr marL="0" indent="0" algn="r">
+            <a:pPr algn="r" indent="0" marL="0">
               <a:buNone/>
             </a:pPr>
             <a:r>
@@ -2139,7 +2365,7 @@
         </p:nvSpPr>
         <p:spPr>
           <a:xfrm>
-            <a:off x="6407757" y="3040410"/>
+            <a:off x="6452207" y="3040410"/>
             <a:ext cx="274320" cy="128016"/>
           </a:xfrm>
           <a:prstGeom prst="rect">
@@ -2152,7 +2378,7 @@
           <a:bodyPr wrap="square" lIns="0" tIns="0" rIns="0" bIns="0" rtlCol="0" anchor="t"/>
           <a:lstStyle/>
           <a:p>
-            <a:pPr marL="0" indent="0" algn="r">
+            <a:pPr algn="r" indent="0" marL="0">
               <a:buNone/>
             </a:pPr>
             <a:r>
@@ -2178,7 +2404,7 @@
         </p:nvSpPr>
         <p:spPr>
           <a:xfrm>
-            <a:off x="6379361" y="3269010"/>
+            <a:off x="6423811" y="3269010"/>
             <a:ext cx="274320" cy="128016"/>
           </a:xfrm>
           <a:prstGeom prst="rect">
@@ -2191,7 +2417,7 @@
           <a:bodyPr wrap="square" lIns="0" tIns="0" rIns="0" bIns="0" rtlCol="0" anchor="t"/>
           <a:lstStyle/>
           <a:p>
-            <a:pPr marL="0" indent="0" algn="r">
+            <a:pPr algn="r" indent="0" marL="0">
               <a:buNone/>
             </a:pPr>
             <a:r>
@@ -2217,7 +2443,7 @@
         </p:nvSpPr>
         <p:spPr>
           <a:xfrm>
-            <a:off x="6406337" y="3497610"/>
+            <a:off x="6450787" y="3497610"/>
             <a:ext cx="274320" cy="128016"/>
           </a:xfrm>
           <a:prstGeom prst="rect">
@@ -2230,7 +2456,7 @@
           <a:bodyPr wrap="square" lIns="0" tIns="0" rIns="0" bIns="0" rtlCol="0" anchor="t"/>
           <a:lstStyle/>
           <a:p>
-            <a:pPr marL="0" indent="0" algn="r">
+            <a:pPr algn="r" indent="0" marL="0">
               <a:buNone/>
             </a:pPr>
             <a:r>
@@ -2256,7 +2482,7 @@
         </p:nvSpPr>
         <p:spPr>
           <a:xfrm>
-            <a:off x="6436468" y="3726210"/>
+            <a:off x="6480918" y="3726210"/>
             <a:ext cx="274320" cy="128016"/>
           </a:xfrm>
           <a:prstGeom prst="rect">
@@ -2269,7 +2495,7 @@
           <a:bodyPr wrap="square" lIns="0" tIns="0" rIns="0" bIns="0" rtlCol="0" anchor="t"/>
           <a:lstStyle/>
           <a:p>
-            <a:pPr marL="0" indent="0" algn="r">
+            <a:pPr algn="r" indent="0" marL="0">
               <a:buNone/>
             </a:pPr>
             <a:r>
@@ -2295,7 +2521,7 @@
         </p:nvSpPr>
         <p:spPr>
           <a:xfrm>
-            <a:off x="6386303" y="3954810"/>
+            <a:off x="6430753" y="3954810"/>
             <a:ext cx="274320" cy="128016"/>
           </a:xfrm>
           <a:prstGeom prst="rect">
@@ -2308,7 +2534,7 @@
           <a:bodyPr wrap="square" lIns="0" tIns="0" rIns="0" bIns="0" rtlCol="0" anchor="t"/>
           <a:lstStyle/>
           <a:p>
-            <a:pPr marL="0" indent="0" algn="r">
+            <a:pPr algn="r" indent="0" marL="0">
               <a:buNone/>
             </a:pPr>
             <a:r>
@@ -2347,7 +2573,7 @@
           <a:bodyPr wrap="square" lIns="0" tIns="114300" rIns="114300" bIns="0" rtlCol="0" anchor="ctr"/>
           <a:lstStyle/>
           <a:p>
-            <a:pPr marL="0" indent="0" algn="r">
+            <a:pPr algn="r" indent="0" marL="0">
               <a:buNone/>
             </a:pPr>
             <a:r>
@@ -2386,7 +2612,7 @@
           <a:bodyPr wrap="square" lIns="0" tIns="114300" rIns="114300" bIns="0" rtlCol="0" anchor="ctr"/>
           <a:lstStyle/>
           <a:p>
-            <a:pPr marL="0" indent="0" algn="r">
+            <a:pPr algn="r" indent="0" marL="0">
               <a:buNone/>
             </a:pPr>
             <a:r>
@@ -2425,7 +2651,7 @@
           <a:bodyPr wrap="square" lIns="0" tIns="114300" rIns="114300" bIns="0" rtlCol="0" anchor="ctr"/>
           <a:lstStyle/>
           <a:p>
-            <a:pPr marL="0" indent="0" algn="r">
+            <a:pPr algn="r" indent="0" marL="0">
               <a:buNone/>
             </a:pPr>
             <a:r>
@@ -2464,7 +2690,7 @@
           <a:bodyPr wrap="square" lIns="0" tIns="114300" rIns="114300" bIns="0" rtlCol="0" anchor="ctr"/>
           <a:lstStyle/>
           <a:p>
-            <a:pPr marL="0" indent="0" algn="r">
+            <a:pPr algn="r" indent="0" marL="0">
               <a:buNone/>
             </a:pPr>
             <a:r>
@@ -2503,7 +2729,7 @@
           <a:bodyPr wrap="square" lIns="0" tIns="114300" rIns="114300" bIns="0" rtlCol="0" anchor="ctr"/>
           <a:lstStyle/>
           <a:p>
-            <a:pPr marL="0" indent="0" algn="r">
+            <a:pPr algn="r" indent="0" marL="0">
               <a:buNone/>
             </a:pPr>
             <a:r>
@@ -2542,7 +2768,7 @@
           <a:bodyPr wrap="square" lIns="0" tIns="114300" rIns="114300" bIns="0" rtlCol="0" anchor="ctr"/>
           <a:lstStyle/>
           <a:p>
-            <a:pPr marL="0" indent="0" algn="r">
+            <a:pPr algn="r" indent="0" marL="0">
               <a:buNone/>
             </a:pPr>
             <a:r>
@@ -2581,7 +2807,7 @@
           <a:bodyPr wrap="square" lIns="0" tIns="114300" rIns="114300" bIns="0" rtlCol="0" anchor="ctr"/>
           <a:lstStyle/>
           <a:p>
-            <a:pPr marL="0" indent="0" algn="r">
+            <a:pPr algn="r" indent="0" marL="0">
               <a:buNone/>
             </a:pPr>
             <a:r>
@@ -2620,7 +2846,7 @@
           <a:bodyPr wrap="square" lIns="0" tIns="114300" rIns="114300" bIns="0" rtlCol="0" anchor="ctr"/>
           <a:lstStyle/>
           <a:p>
-            <a:pPr marL="0" indent="0" algn="r">
+            <a:pPr algn="r" indent="0" marL="0">
               <a:buNone/>
             </a:pPr>
             <a:r>
@@ -2659,7 +2885,7 @@
           <a:bodyPr wrap="square" lIns="0" tIns="114300" rIns="114300" bIns="0" rtlCol="0" anchor="ctr"/>
           <a:lstStyle/>
           <a:p>
-            <a:pPr marL="0" indent="0" algn="r">
+            <a:pPr algn="r" indent="0" marL="0">
               <a:buNone/>
             </a:pPr>
             <a:r>
@@ -2698,7 +2924,7 @@
           <a:bodyPr wrap="square" lIns="0" tIns="114300" rIns="114300" bIns="0" rtlCol="0" anchor="ctr"/>
           <a:lstStyle/>
           <a:p>
-            <a:pPr marL="0" indent="0" algn="r">
+            <a:pPr algn="r" indent="0" marL="0">
               <a:buNone/>
             </a:pPr>
             <a:r>
@@ -2737,7 +2963,7 @@
           <a:bodyPr wrap="square" lIns="0" tIns="114300" rIns="114300" bIns="0" rtlCol="0" anchor="ctr"/>
           <a:lstStyle/>
           <a:p>
-            <a:pPr marL="0" indent="0" algn="r">
+            <a:pPr algn="r" indent="0" marL="0">
               <a:buNone/>
             </a:pPr>
             <a:r>
@@ -2776,7 +3002,7 @@
           <a:bodyPr wrap="square" lIns="0" tIns="114300" rIns="114300" bIns="0" rtlCol="0" anchor="ctr"/>
           <a:lstStyle/>
           <a:p>
-            <a:pPr marL="0" indent="0" algn="r">
+            <a:pPr algn="r" indent="0" marL="0">
               <a:buNone/>
             </a:pPr>
             <a:r>
@@ -2815,7 +3041,7 @@
           <a:bodyPr wrap="square" lIns="0" tIns="114300" rIns="114300" bIns="0" rtlCol="0" anchor="ctr"/>
           <a:lstStyle/>
           <a:p>
-            <a:pPr marL="0" indent="0" algn="r">
+            <a:pPr algn="r" indent="0" marL="0">
               <a:buNone/>
             </a:pPr>
             <a:r>
@@ -2854,7 +3080,7 @@
           <a:bodyPr wrap="square" lIns="0" tIns="114300" rIns="114300" bIns="0" rtlCol="0" anchor="ctr"/>
           <a:lstStyle/>
           <a:p>
-            <a:pPr marL="0" indent="0" algn="r">
+            <a:pPr algn="r" indent="0" marL="0">
               <a:buNone/>
             </a:pPr>
             <a:r>
@@ -2893,7 +3119,7 @@
           <a:bodyPr wrap="square" lIns="0" tIns="114300" rIns="114300" bIns="0" rtlCol="0" anchor="ctr"/>
           <a:lstStyle/>
           <a:p>
-            <a:pPr marL="0" indent="0" algn="r">
+            <a:pPr algn="r" indent="0" marL="0">
               <a:buNone/>
             </a:pPr>
             <a:r>
@@ -2932,7 +3158,7 @@
           <a:bodyPr wrap="square" lIns="0" tIns="114300" rIns="114300" bIns="0" rtlCol="0" anchor="ctr"/>
           <a:lstStyle/>
           <a:p>
-            <a:pPr marL="0" indent="0" algn="r">
+            <a:pPr algn="r" indent="0" marL="0">
               <a:buNone/>
             </a:pPr>
             <a:r>
@@ -2971,7 +3197,7 @@
           <a:bodyPr wrap="square" lIns="0" tIns="114300" rIns="114300" bIns="0" rtlCol="0" anchor="ctr"/>
           <a:lstStyle/>
           <a:p>
-            <a:pPr marL="0" indent="0" algn="r">
+            <a:pPr algn="r" indent="0" marL="0">
               <a:buNone/>
             </a:pPr>
             <a:r>
@@ -3010,7 +3236,7 @@
           <a:bodyPr wrap="square" lIns="0" tIns="114300" rIns="114300" bIns="0" rtlCol="0" anchor="ctr"/>
           <a:lstStyle/>
           <a:p>
-            <a:pPr marL="0" indent="0" algn="r">
+            <a:pPr algn="r" indent="0" marL="0">
               <a:buNone/>
             </a:pPr>
             <a:r>
@@ -3049,7 +3275,7 @@
           <a:bodyPr wrap="square" lIns="0" tIns="114300" rIns="114300" bIns="0" rtlCol="0" anchor="ctr"/>
           <a:lstStyle/>
           <a:p>
-            <a:pPr marL="0" indent="0" algn="r">
+            <a:pPr algn="r" indent="0" marL="0">
               <a:buNone/>
             </a:pPr>
             <a:r>
@@ -3088,7 +3314,7 @@
           <a:bodyPr wrap="square" lIns="0" tIns="114300" rIns="114300" bIns="0" rtlCol="0" anchor="ctr"/>
           <a:lstStyle/>
           <a:p>
-            <a:pPr marL="0" indent="0" algn="r">
+            <a:pPr algn="r" indent="0" marL="0">
               <a:buNone/>
             </a:pPr>
             <a:r>
@@ -3127,7 +3353,7 @@
           <a:bodyPr wrap="square" lIns="0" tIns="114300" rIns="114300" bIns="0" rtlCol="0" anchor="ctr"/>
           <a:lstStyle/>
           <a:p>
-            <a:pPr marL="0" indent="0" algn="r">
+            <a:pPr algn="r" indent="0" marL="0">
               <a:buNone/>
             </a:pPr>
             <a:r>
@@ -3139,7 +3365,7 @@
                 <a:ea typeface="Raleway" pitchFamily="34" charset="-122"/>
                 <a:cs typeface="Raleway" pitchFamily="34" charset="-120"/>
               </a:rPr>
-              <a:t>52</a:t>
+              <a:t>74</a:t>
             </a:r>
             <a:endParaRPr lang="en-US" sz="864" dirty="0"/>
           </a:p>
@@ -3166,7 +3392,7 @@
           <a:bodyPr wrap="square" lIns="0" tIns="114300" rIns="114300" bIns="0" rtlCol="0" anchor="ctr"/>
           <a:lstStyle/>
           <a:p>
-            <a:pPr marL="0" indent="0" algn="r">
+            <a:pPr algn="r" indent="0" marL="0">
               <a:buNone/>
             </a:pPr>
             <a:r>
@@ -3178,7 +3404,7 @@
                 <a:ea typeface="Raleway" pitchFamily="34" charset="-122"/>
                 <a:cs typeface="Raleway" pitchFamily="34" charset="-120"/>
               </a:rPr>
-              <a:t>48</a:t>
+              <a:t>69</a:t>
             </a:r>
             <a:endParaRPr lang="en-US" sz="864" dirty="0"/>
           </a:p>
@@ -3205,7 +3431,7 @@
           <a:bodyPr wrap="square" lIns="0" tIns="114300" rIns="114300" bIns="0" rtlCol="0" anchor="ctr"/>
           <a:lstStyle/>
           <a:p>
-            <a:pPr marL="0" indent="0" algn="r">
+            <a:pPr algn="r" indent="0" marL="0">
               <a:buNone/>
             </a:pPr>
             <a:r>
@@ -3217,7 +3443,7 @@
                 <a:ea typeface="Raleway" pitchFamily="34" charset="-122"/>
                 <a:cs typeface="Raleway" pitchFamily="34" charset="-120"/>
               </a:rPr>
-              <a:t>20</a:t>
+              <a:t>28</a:t>
             </a:r>
             <a:endParaRPr lang="en-US" sz="864" dirty="0"/>
           </a:p>
@@ -3244,7 +3470,7 @@
           <a:bodyPr wrap="square" lIns="0" tIns="0" rIns="0" bIns="0" rtlCol="0" anchor="t"/>
           <a:lstStyle/>
           <a:p>
-            <a:pPr marL="0" indent="0" algn="r">
+            <a:pPr algn="r" indent="0" marL="0">
               <a:buNone/>
             </a:pPr>
             <a:r>
@@ -3283,7 +3509,7 @@
           <a:bodyPr wrap="square" lIns="0" tIns="0" rIns="0" bIns="0" rtlCol="0" anchor="t"/>
           <a:lstStyle/>
           <a:p>
-            <a:pPr marL="0" indent="0" algn="r">
+            <a:pPr algn="r" indent="0" marL="0">
               <a:buNone/>
             </a:pPr>
             <a:r>
@@ -3322,7 +3548,7 @@
           <a:bodyPr wrap="square" lIns="0" tIns="0" rIns="0" bIns="0" rtlCol="0" anchor="t"/>
           <a:lstStyle/>
           <a:p>
-            <a:pPr marL="0" indent="0" algn="r">
+            <a:pPr algn="r" indent="0" marL="0">
               <a:buNone/>
             </a:pPr>
             <a:r>
@@ -3361,7 +3587,7 @@
           <a:bodyPr wrap="square" lIns="0" tIns="0" rIns="0" bIns="0" rtlCol="0" anchor="t"/>
           <a:lstStyle/>
           <a:p>
-            <a:pPr marL="0" indent="0" algn="r">
+            <a:pPr algn="r" indent="0" marL="0">
               <a:buNone/>
             </a:pPr>
             <a:r>
@@ -3400,7 +3626,7 @@
           <a:bodyPr wrap="square" lIns="0" tIns="0" rIns="0" bIns="0" rtlCol="0" anchor="t"/>
           <a:lstStyle/>
           <a:p>
-            <a:pPr marL="0" indent="0" algn="r">
+            <a:pPr algn="r" indent="0" marL="0">
               <a:buNone/>
             </a:pPr>
             <a:r>
@@ -3439,7 +3665,7 @@
           <a:bodyPr wrap="square" lIns="0" tIns="0" rIns="0" bIns="0" rtlCol="0" anchor="t"/>
           <a:lstStyle/>
           <a:p>
-            <a:pPr marL="0" indent="0" algn="r">
+            <a:pPr algn="r" indent="0" marL="0">
               <a:buNone/>
             </a:pPr>
             <a:r>
@@ -3465,7 +3691,7 @@
         </p:nvSpPr>
         <p:spPr>
           <a:xfrm>
-            <a:off x="11329948" y="3954810"/>
+            <a:off x="11331841" y="3954810"/>
             <a:ext cx="274320" cy="128016"/>
           </a:xfrm>
           <a:prstGeom prst="rect">
@@ -3478,7 +3704,7 @@
           <a:bodyPr wrap="square" lIns="0" tIns="0" rIns="0" bIns="0" rtlCol="0" anchor="t"/>
           <a:lstStyle/>
           <a:p>
-            <a:pPr marL="0" indent="0" algn="r">
+            <a:pPr algn="r" indent="0" marL="0">
               <a:buNone/>
             </a:pPr>
             <a:r>
@@ -3490,7 +3716,7 @@
                 <a:ea typeface="Raleway" pitchFamily="34" charset="-122"/>
                 <a:cs typeface="Raleway" pitchFamily="34" charset="-120"/>
               </a:rPr>
-              <a:t>52</a:t>
+              <a:t>74</a:t>
             </a:r>
             <a:endParaRPr lang="en-US" sz="780" dirty="0"/>
           </a:p>
@@ -3523,14 +3749,14 @@
       </p:grpSpPr>
       <p:pic>
         <p:nvPicPr>
-          <p:cNvPr id="2" name="Image 0" descr="C:\01_Repositorios\02_CRM\02_Informe_Semetral\dash\tradicional\ppt_slides\sk_01_main.png"/>
+          <p:cNvPr id="2" name="Image 0" descr="C:\01_Repositorios\02_CRM\02_Informe_Semetral\dash\tradicional\ppt_slides\sk_01_main.png">    </p:cNvPr>
           <p:cNvPicPr>
             <a:picLocks noChangeAspect="1"/>
           </p:cNvPicPr>
           <p:nvPr/>
         </p:nvPicPr>
         <p:blipFill>
-          <a:blip r:embed="rId3"/>
+          <a:blip r:embed="rId1"/>
           <a:stretch>
             <a:fillRect/>
           </a:stretch>
@@ -3566,7 +3792,7 @@
           <a:bodyPr wrap="square" lIns="0" tIns="0" rIns="0" bIns="0" rtlCol="0" anchor="t"/>
           <a:lstStyle/>
           <a:p>
-            <a:pPr marL="0" indent="0" algn="l">
+            <a:pPr algn="l" indent="0" marL="0">
               <a:buNone/>
             </a:pPr>
             <a:r>
@@ -3605,7 +3831,7 @@
           <a:bodyPr wrap="square" lIns="0" tIns="0" rIns="0" bIns="0" rtlCol="0" anchor="t"/>
           <a:lstStyle/>
           <a:p>
-            <a:pPr marL="0" indent="0" algn="l">
+            <a:pPr algn="l" indent="0" marL="0">
               <a:buNone/>
             </a:pPr>
             <a:r>
@@ -3644,7 +3870,7 @@
           <a:bodyPr wrap="square" lIns="0" tIns="0" rIns="0" bIns="0" rtlCol="0" anchor="t"/>
           <a:lstStyle/>
           <a:p>
-            <a:pPr marL="0" indent="0" algn="l">
+            <a:pPr algn="l" indent="0" marL="0">
               <a:buNone/>
             </a:pPr>
             <a:r>
@@ -3683,7 +3909,7 @@
           <a:bodyPr wrap="square" lIns="0" tIns="0" rIns="0" bIns="0" rtlCol="0" anchor="t"/>
           <a:lstStyle/>
           <a:p>
-            <a:pPr marL="0" indent="0" algn="l">
+            <a:pPr algn="l" indent="0" marL="0">
               <a:buNone/>
             </a:pPr>
             <a:r>
@@ -3722,7 +3948,7 @@
           <a:bodyPr wrap="square" lIns="0" tIns="0" rIns="0" bIns="0" rtlCol="0" anchor="t"/>
           <a:lstStyle/>
           <a:p>
-            <a:pPr marL="0" indent="0" algn="l">
+            <a:pPr algn="l" indent="0" marL="0">
               <a:buNone/>
             </a:pPr>
             <a:r>
@@ -3761,7 +3987,7 @@
           <a:bodyPr wrap="square" lIns="0" tIns="114300" rIns="114300" bIns="0" rtlCol="0" anchor="ctr"/>
           <a:lstStyle/>
           <a:p>
-            <a:pPr marL="0" indent="0" algn="l">
+            <a:pPr algn="l" indent="0" marL="0">
               <a:buNone/>
             </a:pPr>
             <a:r>
@@ -3800,7 +4026,7 @@
           <a:bodyPr wrap="square" lIns="0" tIns="114300" rIns="114300" bIns="0" rtlCol="0" anchor="ctr"/>
           <a:lstStyle/>
           <a:p>
-            <a:pPr marL="0" indent="0" algn="l">
+            <a:pPr algn="l" indent="0" marL="0">
               <a:buNone/>
             </a:pPr>
             <a:r>
@@ -3839,7 +4065,7 @@
           <a:bodyPr wrap="square" lIns="0" tIns="114300" rIns="114300" bIns="0" rtlCol="0" anchor="ctr"/>
           <a:lstStyle/>
           <a:p>
-            <a:pPr marL="0" indent="0" algn="l">
+            <a:pPr algn="l" indent="0" marL="0">
               <a:buNone/>
             </a:pPr>
             <a:r>
@@ -3878,7 +4104,7 @@
           <a:bodyPr wrap="square" lIns="0" tIns="114300" rIns="114300" bIns="0" rtlCol="0" anchor="ctr"/>
           <a:lstStyle/>
           <a:p>
-            <a:pPr marL="0" indent="0" algn="l">
+            <a:pPr algn="l" indent="0" marL="0">
               <a:buNone/>
             </a:pPr>
             <a:r>
@@ -3917,7 +4143,7 @@
           <a:bodyPr wrap="square" lIns="0" tIns="114300" rIns="114300" bIns="0" rtlCol="0" anchor="ctr"/>
           <a:lstStyle/>
           <a:p>
-            <a:pPr marL="0" indent="0" algn="l">
+            <a:pPr algn="l" indent="0" marL="0">
               <a:buNone/>
             </a:pPr>
             <a:r>
@@ -3956,7 +4182,7 @@
           <a:bodyPr wrap="square" lIns="0" tIns="114300" rIns="114300" bIns="0" rtlCol="0" anchor="ctr"/>
           <a:lstStyle/>
           <a:p>
-            <a:pPr marL="0" indent="0" algn="l">
+            <a:pPr algn="l" indent="0" marL="0">
               <a:buNone/>
             </a:pPr>
             <a:r>
@@ -3995,7 +4221,7 @@
           <a:bodyPr wrap="square" lIns="0" tIns="114300" rIns="114300" bIns="0" rtlCol="0" anchor="ctr"/>
           <a:lstStyle/>
           <a:p>
-            <a:pPr marL="0" indent="0" algn="l">
+            <a:pPr algn="l" indent="0" marL="0">
               <a:buNone/>
             </a:pPr>
             <a:r>
@@ -4034,7 +4260,7 @@
           <a:bodyPr wrap="square" lIns="0" tIns="114300" rIns="114300" bIns="0" rtlCol="0" anchor="ctr"/>
           <a:lstStyle/>
           <a:p>
-            <a:pPr marL="0" indent="0" algn="l">
+            <a:pPr algn="l" indent="0" marL="0">
               <a:buNone/>
             </a:pPr>
             <a:r>
@@ -4073,7 +4299,7 @@
           <a:bodyPr wrap="square" lIns="0" tIns="114300" rIns="114300" bIns="0" rtlCol="0" anchor="ctr"/>
           <a:lstStyle/>
           <a:p>
-            <a:pPr marL="0" indent="0" algn="l">
+            <a:pPr algn="l" indent="0" marL="0">
               <a:buNone/>
             </a:pPr>
             <a:r>
@@ -4112,7 +4338,7 @@
           <a:bodyPr wrap="square" lIns="0" tIns="114300" rIns="114300" bIns="0" rtlCol="0" anchor="ctr"/>
           <a:lstStyle/>
           <a:p>
-            <a:pPr marL="0" indent="0" algn="l">
+            <a:pPr algn="l" indent="0" marL="0">
               <a:buNone/>
             </a:pPr>
             <a:r>
@@ -4151,7 +4377,7 @@
           <a:bodyPr wrap="square" lIns="0" tIns="114300" rIns="114300" bIns="0" rtlCol="0" anchor="ctr"/>
           <a:lstStyle/>
           <a:p>
-            <a:pPr marL="0" indent="0" algn="l">
+            <a:pPr algn="l" indent="0" marL="0">
               <a:buNone/>
             </a:pPr>
             <a:r>
@@ -4190,7 +4416,7 @@
           <a:bodyPr wrap="square" lIns="0" tIns="114300" rIns="114300" bIns="0" rtlCol="0" anchor="ctr"/>
           <a:lstStyle/>
           <a:p>
-            <a:pPr marL="0" indent="0" algn="l">
+            <a:pPr algn="l" indent="0" marL="0">
               <a:buNone/>
             </a:pPr>
             <a:r>
@@ -4229,7 +4455,7 @@
           <a:bodyPr wrap="square" lIns="0" tIns="114300" rIns="114300" bIns="0" rtlCol="0" anchor="ctr"/>
           <a:lstStyle/>
           <a:p>
-            <a:pPr marL="0" indent="0" algn="l">
+            <a:pPr algn="l" indent="0" marL="0">
               <a:buNone/>
             </a:pPr>
             <a:r>
@@ -4268,7 +4494,7 @@
           <a:bodyPr wrap="square" lIns="0" tIns="114300" rIns="114300" bIns="0" rtlCol="0" anchor="ctr"/>
           <a:lstStyle/>
           <a:p>
-            <a:pPr marL="0" indent="0" algn="l">
+            <a:pPr algn="l" indent="0" marL="0">
               <a:buNone/>
             </a:pPr>
             <a:r>
@@ -4307,7 +4533,7 @@
           <a:bodyPr wrap="square" lIns="0" tIns="114300" rIns="114300" bIns="0" rtlCol="0" anchor="ctr"/>
           <a:lstStyle/>
           <a:p>
-            <a:pPr marL="0" indent="0" algn="l">
+            <a:pPr algn="l" indent="0" marL="0">
               <a:buNone/>
             </a:pPr>
             <a:r>
@@ -4346,7 +4572,7 @@
           <a:bodyPr wrap="square" lIns="0" tIns="114300" rIns="114300" bIns="0" rtlCol="0" anchor="ctr"/>
           <a:lstStyle/>
           <a:p>
-            <a:pPr marL="0" indent="0" algn="l">
+            <a:pPr algn="l" indent="0" marL="0">
               <a:buNone/>
             </a:pPr>
             <a:r>
@@ -4385,7 +4611,7 @@
           <a:bodyPr wrap="square" lIns="0" tIns="114300" rIns="114300" bIns="0" rtlCol="0" anchor="ctr"/>
           <a:lstStyle/>
           <a:p>
-            <a:pPr marL="0" indent="0" algn="l">
+            <a:pPr algn="l" indent="0" marL="0">
               <a:buNone/>
             </a:pPr>
             <a:r>
@@ -4424,7 +4650,7 @@
           <a:bodyPr wrap="square" lIns="0" tIns="114300" rIns="114300" bIns="0" rtlCol="0" anchor="ctr"/>
           <a:lstStyle/>
           <a:p>
-            <a:pPr marL="0" indent="0" algn="l">
+            <a:pPr algn="l" indent="0" marL="0">
               <a:buNone/>
             </a:pPr>
             <a:r>
@@ -4463,7 +4689,7 @@
           <a:bodyPr wrap="square" lIns="0" tIns="114300" rIns="114300" bIns="0" rtlCol="0" anchor="ctr"/>
           <a:lstStyle/>
           <a:p>
-            <a:pPr marL="0" indent="0" algn="l">
+            <a:pPr algn="l" indent="0" marL="0">
               <a:buNone/>
             </a:pPr>
             <a:r>
@@ -4502,7 +4728,7 @@
           <a:bodyPr wrap="square" lIns="0" tIns="114300" rIns="114300" bIns="0" rtlCol="0" anchor="ctr"/>
           <a:lstStyle/>
           <a:p>
-            <a:pPr marL="0" indent="0" algn="l">
+            <a:pPr algn="l" indent="0" marL="0">
               <a:buNone/>
             </a:pPr>
             <a:r>
@@ -4541,7 +4767,7 @@
           <a:bodyPr wrap="square" lIns="0" tIns="114300" rIns="114300" bIns="0" rtlCol="0" anchor="ctr"/>
           <a:lstStyle/>
           <a:p>
-            <a:pPr marL="0" indent="0" algn="l">
+            <a:pPr algn="l" indent="0" marL="0">
               <a:buNone/>
             </a:pPr>
             <a:r>
@@ -4580,7 +4806,7 @@
           <a:bodyPr wrap="square" lIns="0" tIns="114300" rIns="114300" bIns="0" rtlCol="0" anchor="ctr"/>
           <a:lstStyle/>
           <a:p>
-            <a:pPr marL="0" indent="0" algn="l">
+            <a:pPr algn="l" indent="0" marL="0">
               <a:buNone/>
             </a:pPr>
             <a:r>
@@ -4619,7 +4845,7 @@
           <a:bodyPr wrap="square" lIns="0" tIns="114300" rIns="114300" bIns="0" rtlCol="0" anchor="ctr"/>
           <a:lstStyle/>
           <a:p>
-            <a:pPr marL="0" indent="0" algn="l">
+            <a:pPr algn="l" indent="0" marL="0">
               <a:buNone/>
             </a:pPr>
             <a:r>
@@ -4658,7 +4884,7 @@
           <a:bodyPr wrap="square" lIns="0" tIns="114300" rIns="114300" bIns="0" rtlCol="0" anchor="ctr"/>
           <a:lstStyle/>
           <a:p>
-            <a:pPr marL="0" indent="0" algn="l">
+            <a:pPr algn="l" indent="0" marL="0">
               <a:buNone/>
             </a:pPr>
             <a:r>
@@ -4697,7 +4923,7 @@
           <a:bodyPr wrap="square" lIns="0" tIns="114300" rIns="114300" bIns="0" rtlCol="0" anchor="ctr"/>
           <a:lstStyle/>
           <a:p>
-            <a:pPr marL="0" indent="0" algn="l">
+            <a:pPr algn="l" indent="0" marL="0">
               <a:buNone/>
             </a:pPr>
             <a:r>
@@ -4736,7 +4962,7 @@
           <a:bodyPr wrap="square" lIns="0" tIns="114300" rIns="114300" bIns="0" rtlCol="0" anchor="ctr"/>
           <a:lstStyle/>
           <a:p>
-            <a:pPr marL="0" indent="0" algn="l">
+            <a:pPr algn="l" indent="0" marL="0">
               <a:buNone/>
             </a:pPr>
             <a:r>
@@ -4775,7 +5001,7 @@
           <a:bodyPr wrap="square" lIns="0" tIns="114300" rIns="114300" bIns="0" rtlCol="0" anchor="ctr"/>
           <a:lstStyle/>
           <a:p>
-            <a:pPr marL="0" indent="0" algn="l">
+            <a:pPr algn="l" indent="0" marL="0">
               <a:buNone/>
             </a:pPr>
             <a:r>
@@ -4814,7 +5040,7 @@
           <a:bodyPr wrap="square" lIns="0" tIns="114300" rIns="114300" bIns="0" rtlCol="0" anchor="ctr"/>
           <a:lstStyle/>
           <a:p>
-            <a:pPr marL="0" indent="0" algn="l">
+            <a:pPr algn="l" indent="0" marL="0">
               <a:buNone/>
             </a:pPr>
             <a:r>
@@ -4853,7 +5079,7 @@
           <a:bodyPr wrap="square" lIns="0" tIns="114300" rIns="114300" bIns="0" rtlCol="0" anchor="ctr"/>
           <a:lstStyle/>
           <a:p>
-            <a:pPr marL="0" indent="0" algn="l">
+            <a:pPr algn="l" indent="0" marL="0">
               <a:buNone/>
             </a:pPr>
             <a:r>
@@ -4892,7 +5118,7 @@
           <a:bodyPr wrap="square" lIns="0" tIns="114300" rIns="114300" bIns="0" rtlCol="0" anchor="ctr"/>
           <a:lstStyle/>
           <a:p>
-            <a:pPr marL="0" indent="0" algn="l">
+            <a:pPr algn="l" indent="0" marL="0">
               <a:buNone/>
             </a:pPr>
             <a:r>
@@ -4918,7 +5144,7 @@
         </p:nvSpPr>
         <p:spPr>
           <a:xfrm>
-            <a:off x="8489374" y="1228725"/>
+            <a:off x="8536999" y="1276350"/>
             <a:ext cx="761847" cy="133350"/>
           </a:xfrm>
           <a:prstGeom prst="rect">
@@ -4931,7 +5157,7 @@
           <a:bodyPr wrap="square" lIns="0" tIns="114300" rIns="114300" bIns="0" rtlCol="0" anchor="ctr"/>
           <a:lstStyle/>
           <a:p>
-            <a:pPr marL="0" indent="0" algn="r">
+            <a:pPr algn="r" indent="0" marL="0">
               <a:buNone/>
             </a:pPr>
             <a:r>
@@ -4957,7 +5183,7 @@
         </p:nvSpPr>
         <p:spPr>
           <a:xfrm>
-            <a:off x="657207" y="1460897"/>
+            <a:off x="704832" y="1489472"/>
             <a:ext cx="1556804" cy="133350"/>
           </a:xfrm>
           <a:prstGeom prst="rect">
@@ -4970,7 +5196,7 @@
           <a:bodyPr wrap="square" lIns="0" tIns="114300" rIns="114300" bIns="0" rtlCol="0" anchor="ctr"/>
           <a:lstStyle/>
           <a:p>
-            <a:pPr marL="0" indent="0" algn="l">
+            <a:pPr algn="l" indent="0" marL="0">
               <a:buNone/>
             </a:pPr>
             <a:r>
@@ -4996,7 +5222,7 @@
         </p:nvSpPr>
         <p:spPr>
           <a:xfrm>
-            <a:off x="3949054" y="1441847"/>
+            <a:off x="4006204" y="1489472"/>
             <a:ext cx="1556804" cy="133350"/>
           </a:xfrm>
           <a:prstGeom prst="rect">
@@ -5009,7 +5235,7 @@
           <a:bodyPr wrap="square" lIns="0" tIns="114300" rIns="114300" bIns="0" rtlCol="0" anchor="ctr"/>
           <a:lstStyle/>
           <a:p>
-            <a:pPr marL="0" indent="0" algn="l">
+            <a:pPr algn="l" indent="0" marL="0">
               <a:buNone/>
             </a:pPr>
             <a:r>
@@ -5035,7 +5261,7 @@
         </p:nvSpPr>
         <p:spPr>
           <a:xfrm>
-            <a:off x="9229773" y="1228725"/>
+            <a:off x="9277398" y="1276350"/>
             <a:ext cx="736401" cy="133350"/>
           </a:xfrm>
           <a:prstGeom prst="rect">
@@ -5048,7 +5274,7 @@
           <a:bodyPr wrap="square" lIns="0" tIns="114300" rIns="114300" bIns="0" rtlCol="0" anchor="ctr"/>
           <a:lstStyle/>
           <a:p>
-            <a:pPr marL="0" indent="0" algn="r">
+            <a:pPr algn="r" indent="0" marL="0">
               <a:buNone/>
             </a:pPr>
             <a:r>
@@ -5074,7 +5300,7 @@
         </p:nvSpPr>
         <p:spPr>
           <a:xfrm>
-            <a:off x="10662522" y="1228725"/>
+            <a:off x="10710147" y="1276350"/>
             <a:ext cx="776716" cy="133350"/>
           </a:xfrm>
           <a:prstGeom prst="rect">
@@ -5087,7 +5313,7 @@
           <a:bodyPr wrap="square" lIns="0" tIns="114300" rIns="114300" bIns="0" rtlCol="0" anchor="ctr"/>
           <a:lstStyle/>
           <a:p>
-            <a:pPr marL="0" indent="0" algn="r">
+            <a:pPr algn="r" indent="0" marL="0">
               <a:buNone/>
             </a:pPr>
             <a:r>
@@ -5126,7 +5352,7 @@
           <a:bodyPr wrap="square" lIns="0" tIns="114300" rIns="114300" bIns="0" rtlCol="0" anchor="ctr"/>
           <a:lstStyle/>
           <a:p>
-            <a:pPr marL="0" indent="0" algn="l">
+            <a:pPr algn="l" indent="0" marL="0">
               <a:buNone/>
             </a:pPr>
             <a:r>
@@ -5165,7 +5391,7 @@
           <a:bodyPr wrap="square" lIns="0" tIns="114300" rIns="114300" bIns="0" rtlCol="0" anchor="ctr"/>
           <a:lstStyle/>
           <a:p>
-            <a:pPr marL="0" indent="0" algn="l">
+            <a:pPr algn="l" indent="0" marL="0">
               <a:buNone/>
             </a:pPr>
             <a:r>
@@ -5204,7 +5430,7 @@
           <a:bodyPr wrap="square" lIns="0" tIns="114300" rIns="114300" bIns="0" rtlCol="0" anchor="ctr"/>
           <a:lstStyle/>
           <a:p>
-            <a:pPr marL="0" indent="0" algn="l">
+            <a:pPr algn="l" indent="0" marL="0">
               <a:buNone/>
             </a:pPr>
             <a:r>
@@ -5230,7 +5456,7 @@
         </p:nvSpPr>
         <p:spPr>
           <a:xfrm>
-            <a:off x="9944605" y="1228725"/>
+            <a:off x="9992230" y="1276350"/>
             <a:ext cx="740540" cy="133350"/>
           </a:xfrm>
           <a:prstGeom prst="rect">
@@ -5243,7 +5469,7 @@
           <a:bodyPr wrap="square" lIns="0" tIns="114300" rIns="114300" bIns="0" rtlCol="0" anchor="ctr"/>
           <a:lstStyle/>
           <a:p>
-            <a:pPr marL="0" indent="0" algn="r">
+            <a:pPr algn="r" indent="0" marL="0">
               <a:buNone/>
             </a:pPr>
             <a:r>
@@ -5269,7 +5495,7 @@
         </p:nvSpPr>
         <p:spPr>
           <a:xfrm>
-            <a:off x="10662522" y="1466850"/>
+            <a:off x="10710147" y="1514475"/>
             <a:ext cx="776716" cy="123825"/>
           </a:xfrm>
           <a:prstGeom prst="rect">
@@ -5282,7 +5508,7 @@
           <a:bodyPr wrap="square" lIns="0" tIns="114300" rIns="114300" bIns="0" rtlCol="0" anchor="ctr"/>
           <a:lstStyle/>
           <a:p>
-            <a:pPr marL="0" indent="0" algn="r">
+            <a:pPr algn="r" indent="0" marL="0">
               <a:buNone/>
             </a:pPr>
             <a:r>
@@ -5308,7 +5534,7 @@
         </p:nvSpPr>
         <p:spPr>
           <a:xfrm>
-            <a:off x="10662522" y="1962150"/>
+            <a:off x="10710147" y="2009775"/>
             <a:ext cx="776716" cy="123825"/>
           </a:xfrm>
           <a:prstGeom prst="rect">
@@ -5321,7 +5547,7 @@
           <a:bodyPr wrap="square" lIns="0" tIns="114300" rIns="114300" bIns="0" rtlCol="0" anchor="ctr"/>
           <a:lstStyle/>
           <a:p>
-            <a:pPr marL="0" indent="0" algn="r">
+            <a:pPr algn="r" indent="0" marL="0">
               <a:buNone/>
             </a:pPr>
             <a:r>
@@ -5347,7 +5573,7 @@
         </p:nvSpPr>
         <p:spPr>
           <a:xfrm>
-            <a:off x="10662522" y="2705100"/>
+            <a:off x="10710147" y="2752725"/>
             <a:ext cx="776716" cy="123825"/>
           </a:xfrm>
           <a:prstGeom prst="rect">
@@ -5360,7 +5586,7 @@
           <a:bodyPr wrap="square" lIns="0" tIns="114300" rIns="114300" bIns="0" rtlCol="0" anchor="ctr"/>
           <a:lstStyle/>
           <a:p>
-            <a:pPr marL="0" indent="0" algn="r">
+            <a:pPr algn="r" indent="0" marL="0">
               <a:buNone/>
             </a:pPr>
             <a:r>
@@ -5399,7 +5625,7 @@
           <a:bodyPr wrap="square" lIns="0" tIns="114300" rIns="114300" bIns="0" rtlCol="0" anchor="ctr"/>
           <a:lstStyle/>
           <a:p>
-            <a:pPr marL="0" indent="0" algn="l">
+            <a:pPr algn="l" indent="0" marL="0">
               <a:buNone/>
             </a:pPr>
             <a:r>
@@ -5425,7 +5651,7 @@
         </p:nvSpPr>
         <p:spPr>
           <a:xfrm>
-            <a:off x="2155443" y="1460897"/>
+            <a:off x="2203068" y="1489472"/>
             <a:ext cx="454042" cy="133350"/>
           </a:xfrm>
           <a:prstGeom prst="rect">
@@ -5438,7 +5664,7 @@
           <a:bodyPr wrap="square" lIns="0" tIns="114300" rIns="114300" bIns="0" rtlCol="0" anchor="ctr"/>
           <a:lstStyle/>
           <a:p>
-            <a:pPr marL="0" indent="0" algn="r">
+            <a:pPr algn="r" indent="0" marL="0">
               <a:buNone/>
             </a:pPr>
             <a:r>
@@ -5464,7 +5690,7 @@
         </p:nvSpPr>
         <p:spPr>
           <a:xfrm>
-            <a:off x="2596261" y="1460897"/>
+            <a:off x="2643886" y="1489472"/>
             <a:ext cx="454042" cy="133350"/>
           </a:xfrm>
           <a:prstGeom prst="rect">
@@ -5477,7 +5703,7 @@
           <a:bodyPr wrap="square" lIns="0" tIns="114300" rIns="114300" bIns="0" rtlCol="0" anchor="ctr"/>
           <a:lstStyle/>
           <a:p>
-            <a:pPr marL="0" indent="0" algn="r">
+            <a:pPr algn="r" indent="0" marL="0">
               <a:buNone/>
             </a:pPr>
             <a:r>
@@ -5503,7 +5729,7 @@
         </p:nvSpPr>
         <p:spPr>
           <a:xfrm>
-            <a:off x="3027627" y="1460897"/>
+            <a:off x="3075252" y="1489472"/>
             <a:ext cx="778556" cy="133350"/>
           </a:xfrm>
           <a:prstGeom prst="rect">
@@ -5516,7 +5742,7 @@
           <a:bodyPr wrap="square" lIns="0" tIns="114300" rIns="114300" bIns="0" rtlCol="0" anchor="ctr"/>
           <a:lstStyle/>
           <a:p>
-            <a:pPr marL="0" indent="0" algn="r">
+            <a:pPr algn="r" indent="0" marL="0">
               <a:buNone/>
             </a:pPr>
             <a:r>
@@ -5542,7 +5768,7 @@
         </p:nvSpPr>
         <p:spPr>
           <a:xfrm>
-            <a:off x="5447290" y="1441847"/>
+            <a:off x="5504440" y="1489472"/>
             <a:ext cx="454042" cy="133350"/>
           </a:xfrm>
           <a:prstGeom prst="rect">
@@ -5555,7 +5781,7 @@
           <a:bodyPr wrap="square" lIns="0" tIns="114300" rIns="114300" bIns="0" rtlCol="0" anchor="ctr"/>
           <a:lstStyle/>
           <a:p>
-            <a:pPr marL="0" indent="0" algn="r">
+            <a:pPr algn="r" indent="0" marL="0">
               <a:buNone/>
             </a:pPr>
             <a:r>
@@ -5581,7 +5807,7 @@
         </p:nvSpPr>
         <p:spPr>
           <a:xfrm>
-            <a:off x="5888108" y="1441847"/>
+            <a:off x="5945258" y="1489472"/>
             <a:ext cx="454042" cy="133350"/>
           </a:xfrm>
           <a:prstGeom prst="rect">
@@ -5594,7 +5820,7 @@
           <a:bodyPr wrap="square" lIns="0" tIns="114300" rIns="114300" bIns="0" rtlCol="0" anchor="ctr"/>
           <a:lstStyle/>
           <a:p>
-            <a:pPr marL="0" indent="0" algn="r">
+            <a:pPr algn="r" indent="0" marL="0">
               <a:buNone/>
             </a:pPr>
             <a:r>
@@ -5620,7 +5846,7 @@
         </p:nvSpPr>
         <p:spPr>
           <a:xfrm>
-            <a:off x="6319474" y="1441847"/>
+            <a:off x="6376624" y="1489472"/>
             <a:ext cx="778556" cy="133350"/>
           </a:xfrm>
           <a:prstGeom prst="rect">
@@ -5633,7 +5859,7 @@
           <a:bodyPr wrap="square" lIns="0" tIns="114300" rIns="114300" bIns="0" rtlCol="0" anchor="ctr"/>
           <a:lstStyle/>
           <a:p>
-            <a:pPr marL="0" indent="0" algn="r">
+            <a:pPr algn="r" indent="0" marL="0">
               <a:buNone/>
             </a:pPr>
             <a:r>
@@ -5659,7 +5885,7 @@
         </p:nvSpPr>
         <p:spPr>
           <a:xfrm>
-            <a:off x="6319474" y="1927622"/>
+            <a:off x="6376624" y="1975247"/>
             <a:ext cx="778556" cy="123825"/>
           </a:xfrm>
           <a:prstGeom prst="rect">
@@ -5672,7 +5898,7 @@
           <a:bodyPr wrap="square" lIns="0" tIns="114300" rIns="114300" bIns="0" rtlCol="0" anchor="ctr"/>
           <a:lstStyle/>
           <a:p>
-            <a:pPr marL="0" indent="0" algn="r">
+            <a:pPr algn="r" indent="0" marL="0">
               <a:buNone/>
             </a:pPr>
             <a:r>
@@ -5698,7 +5924,7 @@
         </p:nvSpPr>
         <p:spPr>
           <a:xfrm>
-            <a:off x="6319474" y="2175272"/>
+            <a:off x="6376624" y="2222897"/>
             <a:ext cx="778556" cy="123825"/>
           </a:xfrm>
           <a:prstGeom prst="rect">
@@ -5711,7 +5937,7 @@
           <a:bodyPr wrap="square" lIns="0" tIns="114300" rIns="114300" bIns="0" rtlCol="0" anchor="ctr"/>
           <a:lstStyle/>
           <a:p>
-            <a:pPr marL="0" indent="0" algn="r">
+            <a:pPr algn="r" indent="0" marL="0">
               <a:buNone/>
             </a:pPr>
             <a:r>
@@ -5737,7 +5963,7 @@
         </p:nvSpPr>
         <p:spPr>
           <a:xfrm>
-            <a:off x="6319474" y="3165872"/>
+            <a:off x="6376624" y="3213497"/>
             <a:ext cx="778556" cy="123825"/>
           </a:xfrm>
           <a:prstGeom prst="rect">
@@ -5750,7 +5976,7 @@
           <a:bodyPr wrap="square" lIns="0" tIns="114300" rIns="114300" bIns="0" rtlCol="0" anchor="ctr"/>
           <a:lstStyle/>
           <a:p>
-            <a:pPr marL="0" indent="0" algn="r">
+            <a:pPr algn="r" indent="0" marL="0">
               <a:buNone/>
             </a:pPr>
             <a:r>
@@ -5776,7 +6002,7 @@
         </p:nvSpPr>
         <p:spPr>
           <a:xfrm>
-            <a:off x="10662522" y="1714500"/>
+            <a:off x="10710147" y="1762125"/>
             <a:ext cx="776716" cy="123825"/>
           </a:xfrm>
           <a:prstGeom prst="rect">
@@ -5789,7 +6015,7 @@
           <a:bodyPr wrap="square" lIns="0" tIns="114300" rIns="114300" bIns="0" rtlCol="0" anchor="ctr"/>
           <a:lstStyle/>
           <a:p>
-            <a:pPr marL="0" indent="0" algn="r">
+            <a:pPr algn="r" indent="0" marL="0">
               <a:buNone/>
             </a:pPr>
             <a:r>
@@ -5815,7 +6041,7 @@
         </p:nvSpPr>
         <p:spPr>
           <a:xfrm>
-            <a:off x="10662522" y="2209800"/>
+            <a:off x="10710147" y="2257425"/>
             <a:ext cx="776716" cy="123825"/>
           </a:xfrm>
           <a:prstGeom prst="rect">
@@ -5828,7 +6054,7 @@
           <a:bodyPr wrap="square" lIns="0" tIns="114300" rIns="114300" bIns="0" rtlCol="0" anchor="ctr"/>
           <a:lstStyle/>
           <a:p>
-            <a:pPr marL="0" indent="0" algn="r">
+            <a:pPr algn="r" indent="0" marL="0">
               <a:buNone/>
             </a:pPr>
             <a:r>
@@ -5854,7 +6080,7 @@
         </p:nvSpPr>
         <p:spPr>
           <a:xfrm>
-            <a:off x="10662522" y="2457450"/>
+            <a:off x="10710147" y="2505075"/>
             <a:ext cx="776716" cy="123825"/>
           </a:xfrm>
           <a:prstGeom prst="rect">
@@ -5867,7 +6093,7 @@
           <a:bodyPr wrap="square" lIns="0" tIns="114300" rIns="114300" bIns="0" rtlCol="0" anchor="ctr"/>
           <a:lstStyle/>
           <a:p>
-            <a:pPr marL="0" indent="0" algn="r">
+            <a:pPr algn="r" indent="0" marL="0">
               <a:buNone/>
             </a:pPr>
             <a:r>
@@ -5893,7 +6119,7 @@
         </p:nvSpPr>
         <p:spPr>
           <a:xfrm>
-            <a:off x="10662522" y="2952750"/>
+            <a:off x="10710147" y="3000375"/>
             <a:ext cx="776716" cy="123825"/>
           </a:xfrm>
           <a:prstGeom prst="rect">
@@ -5906,7 +6132,7 @@
           <a:bodyPr wrap="square" lIns="0" tIns="114300" rIns="114300" bIns="0" rtlCol="0" anchor="ctr"/>
           <a:lstStyle/>
           <a:p>
-            <a:pPr marL="0" indent="0" algn="r">
+            <a:pPr algn="r" indent="0" marL="0">
               <a:buNone/>
             </a:pPr>
             <a:r>
@@ -5932,7 +6158,7 @@
         </p:nvSpPr>
         <p:spPr>
           <a:xfrm>
-            <a:off x="10662522" y="3200400"/>
+            <a:off x="10710147" y="3248025"/>
             <a:ext cx="776716" cy="123825"/>
           </a:xfrm>
           <a:prstGeom prst="rect">
@@ -5945,7 +6171,7 @@
           <a:bodyPr wrap="square" lIns="0" tIns="114300" rIns="114300" bIns="0" rtlCol="0" anchor="ctr"/>
           <a:lstStyle/>
           <a:p>
-            <a:pPr marL="0" indent="0" algn="r">
+            <a:pPr algn="r" indent="0" marL="0">
               <a:buNone/>
             </a:pPr>
             <a:r>
@@ -5971,7 +6197,7 @@
         </p:nvSpPr>
         <p:spPr>
           <a:xfrm>
-            <a:off x="10662522" y="3448050"/>
+            <a:off x="10710147" y="3495675"/>
             <a:ext cx="776716" cy="123825"/>
           </a:xfrm>
           <a:prstGeom prst="rect">
@@ -5984,7 +6210,7 @@
           <a:bodyPr wrap="square" lIns="0" tIns="114300" rIns="114300" bIns="0" rtlCol="0" anchor="ctr"/>
           <a:lstStyle/>
           <a:p>
-            <a:pPr marL="0" indent="0" algn="r">
+            <a:pPr algn="r" indent="0" marL="0">
               <a:buNone/>
             </a:pPr>
             <a:r>
@@ -6023,7 +6249,7 @@
           <a:bodyPr wrap="square" lIns="0" tIns="114300" rIns="114300" bIns="0" rtlCol="0" anchor="ctr"/>
           <a:lstStyle/>
           <a:p>
-            <a:pPr marL="0" indent="0" algn="l">
+            <a:pPr algn="l" indent="0" marL="0">
               <a:buNone/>
             </a:pPr>
             <a:r>
@@ -6062,7 +6288,7 @@
           <a:bodyPr wrap="square" lIns="0" tIns="114300" rIns="114300" bIns="0" rtlCol="0" anchor="ctr"/>
           <a:lstStyle/>
           <a:p>
-            <a:pPr marL="0" indent="0" algn="r">
+            <a:pPr algn="r" indent="0" marL="0">
               <a:buNone/>
             </a:pPr>
             <a:r>
@@ -6088,7 +6314,7 @@
         </p:nvSpPr>
         <p:spPr>
           <a:xfrm>
-            <a:off x="3027627" y="1699022"/>
+            <a:off x="3075252" y="1727597"/>
             <a:ext cx="778556" cy="123825"/>
           </a:xfrm>
           <a:prstGeom prst="rect">
@@ -6101,7 +6327,7 @@
           <a:bodyPr wrap="square" lIns="0" tIns="114300" rIns="114300" bIns="0" rtlCol="0" anchor="ctr"/>
           <a:lstStyle/>
           <a:p>
-            <a:pPr marL="0" indent="0" algn="r">
+            <a:pPr algn="r" indent="0" marL="0">
               <a:buNone/>
             </a:pPr>
             <a:r>
@@ -6127,7 +6353,7 @@
         </p:nvSpPr>
         <p:spPr>
           <a:xfrm>
-            <a:off x="3027627" y="1946672"/>
+            <a:off x="3075252" y="1975247"/>
             <a:ext cx="778556" cy="123825"/>
           </a:xfrm>
           <a:prstGeom prst="rect">
@@ -6140,7 +6366,7 @@
           <a:bodyPr wrap="square" lIns="0" tIns="114300" rIns="114300" bIns="0" rtlCol="0" anchor="ctr"/>
           <a:lstStyle/>
           <a:p>
-            <a:pPr marL="0" indent="0" algn="r">
+            <a:pPr algn="r" indent="0" marL="0">
               <a:buNone/>
             </a:pPr>
             <a:r>
@@ -6166,7 +6392,7 @@
         </p:nvSpPr>
         <p:spPr>
           <a:xfrm>
-            <a:off x="3027627" y="2194322"/>
+            <a:off x="3075252" y="2222897"/>
             <a:ext cx="778556" cy="123825"/>
           </a:xfrm>
           <a:prstGeom prst="rect">
@@ -6179,7 +6405,7 @@
           <a:bodyPr wrap="square" lIns="0" tIns="114300" rIns="114300" bIns="0" rtlCol="0" anchor="ctr"/>
           <a:lstStyle/>
           <a:p>
-            <a:pPr marL="0" indent="0" algn="r">
+            <a:pPr algn="r" indent="0" marL="0">
               <a:buNone/>
             </a:pPr>
             <a:r>
@@ -6205,7 +6431,7 @@
         </p:nvSpPr>
         <p:spPr>
           <a:xfrm>
-            <a:off x="3027627" y="2441972"/>
+            <a:off x="3075252" y="2470547"/>
             <a:ext cx="778556" cy="123825"/>
           </a:xfrm>
           <a:prstGeom prst="rect">
@@ -6218,7 +6444,7 @@
           <a:bodyPr wrap="square" lIns="0" tIns="114300" rIns="114300" bIns="0" rtlCol="0" anchor="ctr"/>
           <a:lstStyle/>
           <a:p>
-            <a:pPr marL="0" indent="0" algn="r">
+            <a:pPr algn="r" indent="0" marL="0">
               <a:buNone/>
             </a:pPr>
             <a:r>
@@ -6244,7 +6470,7 @@
         </p:nvSpPr>
         <p:spPr>
           <a:xfrm>
-            <a:off x="3027627" y="2937272"/>
+            <a:off x="3075252" y="2965847"/>
             <a:ext cx="778556" cy="123825"/>
           </a:xfrm>
           <a:prstGeom prst="rect">
@@ -6257,7 +6483,7 @@
           <a:bodyPr wrap="square" lIns="0" tIns="114300" rIns="114300" bIns="0" rtlCol="0" anchor="ctr"/>
           <a:lstStyle/>
           <a:p>
-            <a:pPr marL="0" indent="0" algn="r">
+            <a:pPr algn="r" indent="0" marL="0">
               <a:buNone/>
             </a:pPr>
             <a:r>
@@ -6283,7 +6509,7 @@
         </p:nvSpPr>
         <p:spPr>
           <a:xfrm>
-            <a:off x="3027627" y="3184922"/>
+            <a:off x="3075252" y="3213497"/>
             <a:ext cx="778556" cy="123825"/>
           </a:xfrm>
           <a:prstGeom prst="rect">
@@ -6296,7 +6522,7 @@
           <a:bodyPr wrap="square" lIns="0" tIns="114300" rIns="114300" bIns="0" rtlCol="0" anchor="ctr"/>
           <a:lstStyle/>
           <a:p>
-            <a:pPr marL="0" indent="0" algn="r">
+            <a:pPr algn="r" indent="0" marL="0">
               <a:buNone/>
             </a:pPr>
             <a:r>
@@ -6322,7 +6548,7 @@
         </p:nvSpPr>
         <p:spPr>
           <a:xfrm>
-            <a:off x="3027627" y="3432572"/>
+            <a:off x="3075252" y="3461147"/>
             <a:ext cx="778556" cy="123825"/>
           </a:xfrm>
           <a:prstGeom prst="rect">
@@ -6335,7 +6561,7 @@
           <a:bodyPr wrap="square" lIns="0" tIns="114300" rIns="114300" bIns="0" rtlCol="0" anchor="ctr"/>
           <a:lstStyle/>
           <a:p>
-            <a:pPr marL="0" indent="0" algn="r">
+            <a:pPr algn="r" indent="0" marL="0">
               <a:buNone/>
             </a:pPr>
             <a:r>
@@ -6361,7 +6587,7 @@
         </p:nvSpPr>
         <p:spPr>
           <a:xfrm>
-            <a:off x="3027627" y="3680222"/>
+            <a:off x="3075252" y="3708797"/>
             <a:ext cx="778556" cy="123825"/>
           </a:xfrm>
           <a:prstGeom prst="rect">
@@ -6374,7 +6600,7 @@
           <a:bodyPr wrap="square" lIns="0" tIns="114300" rIns="114300" bIns="0" rtlCol="0" anchor="ctr"/>
           <a:lstStyle/>
           <a:p>
-            <a:pPr marL="0" indent="0" algn="r">
+            <a:pPr algn="r" indent="0" marL="0">
               <a:buNone/>
             </a:pPr>
             <a:r>
@@ -6400,7 +6626,7 @@
         </p:nvSpPr>
         <p:spPr>
           <a:xfrm>
-            <a:off x="3027627" y="4175522"/>
+            <a:off x="3075252" y="4204097"/>
             <a:ext cx="778556" cy="123825"/>
           </a:xfrm>
           <a:prstGeom prst="rect">
@@ -6413,7 +6639,7 @@
           <a:bodyPr wrap="square" lIns="0" tIns="114300" rIns="114300" bIns="0" rtlCol="0" anchor="ctr"/>
           <a:lstStyle/>
           <a:p>
-            <a:pPr marL="0" indent="0" algn="r">
+            <a:pPr algn="r" indent="0" marL="0">
               <a:buNone/>
             </a:pPr>
             <a:r>
@@ -6439,7 +6665,7 @@
         </p:nvSpPr>
         <p:spPr>
           <a:xfrm>
-            <a:off x="6319474" y="2422922"/>
+            <a:off x="6376624" y="2470547"/>
             <a:ext cx="778556" cy="123825"/>
           </a:xfrm>
           <a:prstGeom prst="rect">
@@ -6452,7 +6678,7 @@
           <a:bodyPr wrap="square" lIns="0" tIns="114300" rIns="114300" bIns="0" rtlCol="0" anchor="ctr"/>
           <a:lstStyle/>
           <a:p>
-            <a:pPr marL="0" indent="0" algn="r">
+            <a:pPr algn="r" indent="0" marL="0">
               <a:buNone/>
             </a:pPr>
             <a:r>
@@ -6478,7 +6704,7 @@
         </p:nvSpPr>
         <p:spPr>
           <a:xfrm>
-            <a:off x="6319474" y="2918222"/>
+            <a:off x="6376624" y="2965847"/>
             <a:ext cx="778556" cy="123825"/>
           </a:xfrm>
           <a:prstGeom prst="rect">
@@ -6491,7 +6717,7 @@
           <a:bodyPr wrap="square" lIns="0" tIns="114300" rIns="114300" bIns="0" rtlCol="0" anchor="ctr"/>
           <a:lstStyle/>
           <a:p>
-            <a:pPr marL="0" indent="0" algn="r">
+            <a:pPr algn="r" indent="0" marL="0">
               <a:buNone/>
             </a:pPr>
             <a:r>
@@ -6517,7 +6743,7 @@
         </p:nvSpPr>
         <p:spPr>
           <a:xfrm>
-            <a:off x="6319474" y="3908822"/>
+            <a:off x="6376624" y="3956447"/>
             <a:ext cx="778556" cy="123825"/>
           </a:xfrm>
           <a:prstGeom prst="rect">
@@ -6530,7 +6756,7 @@
           <a:bodyPr wrap="square" lIns="0" tIns="114300" rIns="114300" bIns="0" rtlCol="0" anchor="ctr"/>
           <a:lstStyle/>
           <a:p>
-            <a:pPr marL="0" indent="0" algn="r">
+            <a:pPr algn="r" indent="0" marL="0">
               <a:buNone/>
             </a:pPr>
             <a:r>
@@ -6556,7 +6782,7 @@
         </p:nvSpPr>
         <p:spPr>
           <a:xfrm>
-            <a:off x="6319474" y="4156472"/>
+            <a:off x="6376624" y="4204097"/>
             <a:ext cx="778556" cy="123825"/>
           </a:xfrm>
           <a:prstGeom prst="rect">
@@ -6569,7 +6795,7 @@
           <a:bodyPr wrap="square" lIns="0" tIns="114300" rIns="114300" bIns="0" rtlCol="0" anchor="ctr"/>
           <a:lstStyle/>
           <a:p>
-            <a:pPr marL="0" indent="0" algn="r">
+            <a:pPr algn="r" indent="0" marL="0">
               <a:buNone/>
             </a:pPr>
             <a:r>
@@ -6595,7 +6821,7 @@
         </p:nvSpPr>
         <p:spPr>
           <a:xfrm>
-            <a:off x="7507595" y="1228725"/>
+            <a:off x="7555220" y="1276350"/>
             <a:ext cx="1034089" cy="133350"/>
           </a:xfrm>
           <a:prstGeom prst="rect">
@@ -6608,7 +6834,7 @@
           <a:bodyPr wrap="square" lIns="0" tIns="114300" rIns="114300" bIns="0" rtlCol="0" anchor="ctr"/>
           <a:lstStyle/>
           <a:p>
-            <a:pPr marL="0" indent="0" algn="l">
+            <a:pPr algn="l" indent="0" marL="0">
               <a:buNone/>
             </a:pPr>
             <a:r>
@@ -6647,7 +6873,7 @@
           <a:bodyPr wrap="square" lIns="0" tIns="114300" rIns="114300" bIns="0" rtlCol="0" anchor="ctr"/>
           <a:lstStyle/>
           <a:p>
-            <a:pPr marL="0" indent="0" algn="l">
+            <a:pPr algn="l" indent="0" marL="0">
               <a:buNone/>
             </a:pPr>
             <a:r>
@@ -6686,7 +6912,7 @@
           <a:bodyPr wrap="square" lIns="0" tIns="114300" rIns="114300" bIns="0" rtlCol="0" anchor="ctr"/>
           <a:lstStyle/>
           <a:p>
-            <a:pPr marL="0" indent="0" algn="l">
+            <a:pPr algn="l" indent="0" marL="0">
               <a:buNone/>
             </a:pPr>
             <a:r>
@@ -6725,7 +6951,7 @@
           <a:bodyPr wrap="square" lIns="0" tIns="114300" rIns="114300" bIns="0" rtlCol="0" anchor="ctr"/>
           <a:lstStyle/>
           <a:p>
-            <a:pPr marL="0" indent="0" algn="l">
+            <a:pPr algn="l" indent="0" marL="0">
               <a:buNone/>
             </a:pPr>
             <a:r>
@@ -6764,7 +6990,7 @@
           <a:bodyPr wrap="square" lIns="0" tIns="114300" rIns="114300" bIns="0" rtlCol="0" anchor="ctr"/>
           <a:lstStyle/>
           <a:p>
-            <a:pPr marL="0" indent="0" algn="l">
+            <a:pPr algn="l" indent="0" marL="0">
               <a:buNone/>
             </a:pPr>
             <a:r>
@@ -6803,7 +7029,7 @@
           <a:bodyPr wrap="square" lIns="0" tIns="114300" rIns="114300" bIns="0" rtlCol="0" anchor="ctr"/>
           <a:lstStyle/>
           <a:p>
-            <a:pPr marL="0" indent="0" algn="l">
+            <a:pPr algn="l" indent="0" marL="0">
               <a:buNone/>
             </a:pPr>
             <a:r>
@@ -6842,7 +7068,7 @@
           <a:bodyPr wrap="square" lIns="0" tIns="114300" rIns="114300" bIns="0" rtlCol="0" anchor="ctr"/>
           <a:lstStyle/>
           <a:p>
-            <a:pPr marL="0" indent="0" algn="l">
+            <a:pPr algn="l" indent="0" marL="0">
               <a:buNone/>
             </a:pPr>
             <a:r>
@@ -6881,7 +7107,7 @@
           <a:bodyPr wrap="square" lIns="0" tIns="114300" rIns="114300" bIns="0" rtlCol="0" anchor="ctr"/>
           <a:lstStyle/>
           <a:p>
-            <a:pPr marL="0" indent="0" algn="l">
+            <a:pPr algn="l" indent="0" marL="0">
               <a:buNone/>
             </a:pPr>
             <a:r>
@@ -6920,7 +7146,7 @@
           <a:bodyPr wrap="square" lIns="0" tIns="114300" rIns="114300" bIns="0" rtlCol="0" anchor="ctr"/>
           <a:lstStyle/>
           <a:p>
-            <a:pPr marL="0" indent="0" algn="l">
+            <a:pPr algn="l" indent="0" marL="0">
               <a:buNone/>
             </a:pPr>
             <a:r>
@@ -6959,7 +7185,7 @@
           <a:bodyPr wrap="square" lIns="0" tIns="114300" rIns="114300" bIns="0" rtlCol="0" anchor="ctr"/>
           <a:lstStyle/>
           <a:p>
-            <a:pPr marL="0" indent="0" algn="r">
+            <a:pPr algn="r" indent="0" marL="0">
               <a:buNone/>
             </a:pPr>
             <a:r>
@@ -6971,7 +7197,7 @@
                 <a:ea typeface="Raleway" pitchFamily="34" charset="-122"/>
                 <a:cs typeface="Raleway" pitchFamily="34" charset="-120"/>
               </a:rPr>
-              <a:t>283</a:t>
+              <a:t>294</a:t>
             </a:r>
             <a:endParaRPr lang="en-US" sz="672" dirty="0"/>
           </a:p>
@@ -6998,7 +7224,7 @@
           <a:bodyPr wrap="square" lIns="0" tIns="114300" rIns="114300" bIns="0" rtlCol="0" anchor="ctr"/>
           <a:lstStyle/>
           <a:p>
-            <a:pPr marL="0" indent="0" algn="r">
+            <a:pPr algn="r" indent="0" marL="0">
               <a:buNone/>
             </a:pPr>
             <a:r>
@@ -7037,7 +7263,7 @@
           <a:bodyPr wrap="square" lIns="0" tIns="114300" rIns="114300" bIns="0" rtlCol="0" anchor="ctr"/>
           <a:lstStyle/>
           <a:p>
-            <a:pPr marL="0" indent="0" algn="r">
+            <a:pPr algn="r" indent="0" marL="0">
               <a:buNone/>
             </a:pPr>
             <a:r>
@@ -7076,7 +7302,7 @@
           <a:bodyPr wrap="square" lIns="0" tIns="114300" rIns="114300" bIns="0" rtlCol="0" anchor="ctr"/>
           <a:lstStyle/>
           <a:p>
-            <a:pPr marL="0" indent="0" algn="r">
+            <a:pPr algn="r" indent="0" marL="0">
               <a:buNone/>
             </a:pPr>
             <a:r>
@@ -7115,7 +7341,7 @@
           <a:bodyPr wrap="square" lIns="0" tIns="114300" rIns="114300" bIns="0" rtlCol="0" anchor="ctr"/>
           <a:lstStyle/>
           <a:p>
-            <a:pPr marL="0" indent="0" algn="r">
+            <a:pPr algn="r" indent="0" marL="0">
               <a:buNone/>
             </a:pPr>
             <a:r>
@@ -7154,7 +7380,7 @@
           <a:bodyPr wrap="square" lIns="0" tIns="114300" rIns="114300" bIns="0" rtlCol="0" anchor="ctr"/>
           <a:lstStyle/>
           <a:p>
-            <a:pPr marL="0" indent="0" algn="r">
+            <a:pPr algn="r" indent="0" marL="0">
               <a:buNone/>
             </a:pPr>
             <a:r>
@@ -7193,7 +7419,7 @@
           <a:bodyPr wrap="square" lIns="0" tIns="114300" rIns="114300" bIns="0" rtlCol="0" anchor="ctr"/>
           <a:lstStyle/>
           <a:p>
-            <a:pPr marL="0" indent="0" algn="r">
+            <a:pPr algn="r" indent="0" marL="0">
               <a:buNone/>
             </a:pPr>
             <a:r>
@@ -7232,7 +7458,7 @@
           <a:bodyPr wrap="square" lIns="0" tIns="114300" rIns="114300" bIns="0" rtlCol="0" anchor="ctr"/>
           <a:lstStyle/>
           <a:p>
-            <a:pPr marL="0" indent="0" algn="r">
+            <a:pPr algn="r" indent="0" marL="0">
               <a:buNone/>
             </a:pPr>
             <a:r>
@@ -7271,7 +7497,7 @@
           <a:bodyPr wrap="square" lIns="0" tIns="114300" rIns="114300" bIns="0" rtlCol="0" anchor="ctr"/>
           <a:lstStyle/>
           <a:p>
-            <a:pPr marL="0" indent="0" algn="r">
+            <a:pPr algn="r" indent="0" marL="0">
               <a:buNone/>
             </a:pPr>
             <a:r>
@@ -7310,7 +7536,7 @@
           <a:bodyPr wrap="square" lIns="0" tIns="114300" rIns="114300" bIns="0" rtlCol="0" anchor="ctr"/>
           <a:lstStyle/>
           <a:p>
-            <a:pPr marL="0" indent="0" algn="r">
+            <a:pPr algn="r" indent="0" marL="0">
               <a:buNone/>
             </a:pPr>
             <a:r>
@@ -7336,7 +7562,7 @@
         </p:nvSpPr>
         <p:spPr>
           <a:xfrm>
-            <a:off x="3027627" y="2689622"/>
+            <a:off x="3075252" y="2718197"/>
             <a:ext cx="778556" cy="123825"/>
           </a:xfrm>
           <a:prstGeom prst="rect">
@@ -7349,7 +7575,7 @@
           <a:bodyPr wrap="square" lIns="0" tIns="114300" rIns="114300" bIns="0" rtlCol="0" anchor="ctr"/>
           <a:lstStyle/>
           <a:p>
-            <a:pPr marL="0" indent="0" algn="r">
+            <a:pPr algn="r" indent="0" marL="0">
               <a:buNone/>
             </a:pPr>
             <a:r>
@@ -7388,7 +7614,7 @@
           <a:bodyPr wrap="square" lIns="0" tIns="114300" rIns="114300" bIns="0" rtlCol="0" anchor="ctr"/>
           <a:lstStyle/>
           <a:p>
-            <a:pPr marL="0" indent="0" algn="r">
+            <a:pPr algn="r" indent="0" marL="0">
               <a:buNone/>
             </a:pPr>
             <a:r>
@@ -7427,7 +7653,7 @@
           <a:bodyPr wrap="square" lIns="0" tIns="114300" rIns="114300" bIns="0" rtlCol="0" anchor="ctr"/>
           <a:lstStyle/>
           <a:p>
-            <a:pPr marL="0" indent="0" algn="r">
+            <a:pPr algn="r" indent="0" marL="0">
               <a:buNone/>
             </a:pPr>
             <a:r>
@@ -7466,7 +7692,7 @@
           <a:bodyPr wrap="square" lIns="0" tIns="114300" rIns="114300" bIns="0" rtlCol="0" anchor="ctr"/>
           <a:lstStyle/>
           <a:p>
-            <a:pPr marL="0" indent="0" algn="r">
+            <a:pPr algn="r" indent="0" marL="0">
               <a:buNone/>
             </a:pPr>
             <a:r>
@@ -7505,7 +7731,7 @@
           <a:bodyPr wrap="square" lIns="0" tIns="114300" rIns="114300" bIns="0" rtlCol="0" anchor="ctr"/>
           <a:lstStyle/>
           <a:p>
-            <a:pPr marL="0" indent="0" algn="r">
+            <a:pPr algn="r" indent="0" marL="0">
               <a:buNone/>
             </a:pPr>
             <a:r>
@@ -7544,7 +7770,7 @@
           <a:bodyPr wrap="square" lIns="0" tIns="114300" rIns="114300" bIns="0" rtlCol="0" anchor="ctr"/>
           <a:lstStyle/>
           <a:p>
-            <a:pPr marL="0" indent="0" algn="r">
+            <a:pPr algn="r" indent="0" marL="0">
               <a:buNone/>
             </a:pPr>
             <a:r>
@@ -7570,7 +7796,7 @@
         </p:nvSpPr>
         <p:spPr>
           <a:xfrm>
-            <a:off x="3027627" y="3927872"/>
+            <a:off x="3075252" y="3956447"/>
             <a:ext cx="778556" cy="123825"/>
           </a:xfrm>
           <a:prstGeom prst="rect">
@@ -7583,7 +7809,7 @@
           <a:bodyPr wrap="square" lIns="0" tIns="114300" rIns="114300" bIns="0" rtlCol="0" anchor="ctr"/>
           <a:lstStyle/>
           <a:p>
-            <a:pPr marL="0" indent="0" algn="r">
+            <a:pPr algn="r" indent="0" marL="0">
               <a:buNone/>
             </a:pPr>
             <a:r>
@@ -7609,7 +7835,7 @@
         </p:nvSpPr>
         <p:spPr>
           <a:xfrm>
-            <a:off x="6319474" y="1679972"/>
+            <a:off x="6376624" y="1727597"/>
             <a:ext cx="778556" cy="123825"/>
           </a:xfrm>
           <a:prstGeom prst="rect">
@@ -7622,7 +7848,7 @@
           <a:bodyPr wrap="square" lIns="0" tIns="114300" rIns="114300" bIns="0" rtlCol="0" anchor="ctr"/>
           <a:lstStyle/>
           <a:p>
-            <a:pPr marL="0" indent="0" algn="r">
+            <a:pPr algn="r" indent="0" marL="0">
               <a:buNone/>
             </a:pPr>
             <a:r>
@@ -7661,7 +7887,7 @@
           <a:bodyPr wrap="square" lIns="0" tIns="114300" rIns="114300" bIns="0" rtlCol="0" anchor="ctr"/>
           <a:lstStyle/>
           <a:p>
-            <a:pPr marL="0" indent="0" algn="r">
+            <a:pPr algn="r" indent="0" marL="0">
               <a:buNone/>
             </a:pPr>
             <a:r>
@@ -7700,7 +7926,7 @@
           <a:bodyPr wrap="square" lIns="0" tIns="114300" rIns="114300" bIns="0" rtlCol="0" anchor="ctr"/>
           <a:lstStyle/>
           <a:p>
-            <a:pPr marL="0" indent="0" algn="r">
+            <a:pPr algn="r" indent="0" marL="0">
               <a:buNone/>
             </a:pPr>
             <a:r>
@@ -7726,7 +7952,7 @@
         </p:nvSpPr>
         <p:spPr>
           <a:xfrm>
-            <a:off x="6319474" y="2670572"/>
+            <a:off x="6376624" y="2718197"/>
             <a:ext cx="778556" cy="123825"/>
           </a:xfrm>
           <a:prstGeom prst="rect">
@@ -7739,7 +7965,7 @@
           <a:bodyPr wrap="square" lIns="0" tIns="114300" rIns="114300" bIns="0" rtlCol="0" anchor="ctr"/>
           <a:lstStyle/>
           <a:p>
-            <a:pPr marL="0" indent="0" algn="r">
+            <a:pPr algn="r" indent="0" marL="0">
               <a:buNone/>
             </a:pPr>
             <a:r>
@@ -7778,7 +8004,7 @@
           <a:bodyPr wrap="square" lIns="0" tIns="114300" rIns="114300" bIns="0" rtlCol="0" anchor="ctr"/>
           <a:lstStyle/>
           <a:p>
-            <a:pPr marL="0" indent="0" algn="r">
+            <a:pPr algn="r" indent="0" marL="0">
               <a:buNone/>
             </a:pPr>
             <a:r>
@@ -7804,7 +8030,7 @@
         </p:nvSpPr>
         <p:spPr>
           <a:xfrm>
-            <a:off x="6319474" y="3413522"/>
+            <a:off x="6376624" y="3461147"/>
             <a:ext cx="778556" cy="123825"/>
           </a:xfrm>
           <a:prstGeom prst="rect">
@@ -7817,7 +8043,7 @@
           <a:bodyPr wrap="square" lIns="0" tIns="114300" rIns="114300" bIns="0" rtlCol="0" anchor="ctr"/>
           <a:lstStyle/>
           <a:p>
-            <a:pPr marL="0" indent="0" algn="r">
+            <a:pPr algn="r" indent="0" marL="0">
               <a:buNone/>
             </a:pPr>
             <a:r>
@@ -7843,7 +8069,7 @@
         </p:nvSpPr>
         <p:spPr>
           <a:xfrm>
-            <a:off x="6319474" y="3661172"/>
+            <a:off x="6376624" y="3708797"/>
             <a:ext cx="778556" cy="123825"/>
           </a:xfrm>
           <a:prstGeom prst="rect">
@@ -7856,7 +8082,7 @@
           <a:bodyPr wrap="square" lIns="0" tIns="114300" rIns="114300" bIns="0" rtlCol="0" anchor="ctr"/>
           <a:lstStyle/>
           <a:p>
-            <a:pPr marL="0" indent="0" algn="r">
+            <a:pPr algn="r" indent="0" marL="0">
               <a:buNone/>
             </a:pPr>
             <a:r>
@@ -7895,7 +8121,7 @@
           <a:bodyPr wrap="square" lIns="0" tIns="114300" rIns="114300" bIns="0" rtlCol="0" anchor="ctr"/>
           <a:lstStyle/>
           <a:p>
-            <a:pPr marL="0" indent="0" algn="r">
+            <a:pPr algn="r" indent="0" marL="0">
               <a:buNone/>
             </a:pPr>
             <a:r>
@@ -7934,7 +8160,7 @@
           <a:bodyPr wrap="square" lIns="0" tIns="114300" rIns="114300" bIns="0" rtlCol="0" anchor="ctr"/>
           <a:lstStyle/>
           <a:p>
-            <a:pPr marL="0" indent="0" algn="r">
+            <a:pPr algn="r" indent="0" marL="0">
               <a:buNone/>
             </a:pPr>
             <a:r>
@@ -7973,7 +8199,7 @@
           <a:bodyPr wrap="square" lIns="0" tIns="114300" rIns="114300" bIns="0" rtlCol="0" anchor="ctr"/>
           <a:lstStyle/>
           <a:p>
-            <a:pPr marL="0" indent="0" algn="r">
+            <a:pPr algn="r" indent="0" marL="0">
               <a:buNone/>
             </a:pPr>
             <a:r>
@@ -8012,7 +8238,7 @@
           <a:bodyPr wrap="square" lIns="0" tIns="114300" rIns="114300" bIns="0" rtlCol="0" anchor="ctr"/>
           <a:lstStyle/>
           <a:p>
-            <a:pPr marL="0" indent="0" algn="r">
+            <a:pPr algn="r" indent="0" marL="0">
               <a:buNone/>
             </a:pPr>
             <a:r>
@@ -8051,7 +8277,7 @@
           <a:bodyPr wrap="square" lIns="0" tIns="114300" rIns="114300" bIns="0" rtlCol="0" anchor="ctr"/>
           <a:lstStyle/>
           <a:p>
-            <a:pPr marL="0" indent="0" algn="r">
+            <a:pPr algn="r" indent="0" marL="0">
               <a:buNone/>
             </a:pPr>
             <a:r>
@@ -8090,7 +8316,7 @@
           <a:bodyPr wrap="square" lIns="0" tIns="114300" rIns="114300" bIns="0" rtlCol="0" anchor="ctr"/>
           <a:lstStyle/>
           <a:p>
-            <a:pPr marL="0" indent="0" algn="r">
+            <a:pPr algn="r" indent="0" marL="0">
               <a:buNone/>
             </a:pPr>
             <a:r>
@@ -8129,7 +8355,7 @@
           <a:bodyPr wrap="square" lIns="0" tIns="114300" rIns="114300" bIns="0" rtlCol="0" anchor="ctr"/>
           <a:lstStyle/>
           <a:p>
-            <a:pPr marL="0" indent="0" algn="r">
+            <a:pPr algn="r" indent="0" marL="0">
               <a:buNone/>
             </a:pPr>
             <a:r>
@@ -8168,7 +8394,7 @@
           <a:bodyPr wrap="square" lIns="0" tIns="114300" rIns="114300" bIns="0" rtlCol="0" anchor="ctr"/>
           <a:lstStyle/>
           <a:p>
-            <a:pPr marL="0" indent="0" algn="r">
+            <a:pPr algn="r" indent="0" marL="0">
               <a:buNone/>
             </a:pPr>
             <a:r>
@@ -8207,7 +8433,7 @@
           <a:bodyPr wrap="square" lIns="0" tIns="114300" rIns="114300" bIns="0" rtlCol="0" anchor="ctr"/>
           <a:lstStyle/>
           <a:p>
-            <a:pPr marL="0" indent="0" algn="r">
+            <a:pPr algn="r" indent="0" marL="0">
               <a:buNone/>
             </a:pPr>
             <a:r>
@@ -8246,7 +8472,7 @@
           <a:bodyPr wrap="square" lIns="0" tIns="114300" rIns="114300" bIns="0" rtlCol="0" anchor="ctr"/>
           <a:lstStyle/>
           <a:p>
-            <a:pPr marL="0" indent="0" algn="r">
+            <a:pPr algn="r" indent="0" marL="0">
               <a:buNone/>
             </a:pPr>
             <a:r>
@@ -8285,7 +8511,7 @@
           <a:bodyPr wrap="square" lIns="0" tIns="114300" rIns="114300" bIns="0" rtlCol="0" anchor="ctr"/>
           <a:lstStyle/>
           <a:p>
-            <a:pPr marL="0" indent="0" algn="r">
+            <a:pPr algn="r" indent="0" marL="0">
               <a:buNone/>
             </a:pPr>
             <a:r>
@@ -8324,7 +8550,7 @@
           <a:bodyPr wrap="square" lIns="0" tIns="114300" rIns="114300" bIns="0" rtlCol="0" anchor="ctr"/>
           <a:lstStyle/>
           <a:p>
-            <a:pPr marL="0" indent="0" algn="r">
+            <a:pPr algn="r" indent="0" marL="0">
               <a:buNone/>
             </a:pPr>
             <a:r>
@@ -8363,7 +8589,7 @@
           <a:bodyPr wrap="square" lIns="0" tIns="114300" rIns="114300" bIns="0" rtlCol="0" anchor="ctr"/>
           <a:lstStyle/>
           <a:p>
-            <a:pPr marL="0" indent="0" algn="r">
+            <a:pPr algn="r" indent="0" marL="0">
               <a:buNone/>
             </a:pPr>
             <a:r>
@@ -8402,7 +8628,7 @@
           <a:bodyPr wrap="square" lIns="0" tIns="114300" rIns="114300" bIns="0" rtlCol="0" anchor="ctr"/>
           <a:lstStyle/>
           <a:p>
-            <a:pPr marL="0" indent="0" algn="r">
+            <a:pPr algn="r" indent="0" marL="0">
               <a:buNone/>
             </a:pPr>
             <a:r>
@@ -8441,7 +8667,7 @@
           <a:bodyPr wrap="square" lIns="0" tIns="114300" rIns="114300" bIns="0" rtlCol="0" anchor="ctr"/>
           <a:lstStyle/>
           <a:p>
-            <a:pPr marL="0" indent="0" algn="r">
+            <a:pPr algn="r" indent="0" marL="0">
               <a:buNone/>
             </a:pPr>
             <a:r>
@@ -8480,7 +8706,7 @@
           <a:bodyPr wrap="square" lIns="0" tIns="114300" rIns="114300" bIns="0" rtlCol="0" anchor="ctr"/>
           <a:lstStyle/>
           <a:p>
-            <a:pPr marL="0" indent="0" algn="r">
+            <a:pPr algn="r" indent="0" marL="0">
               <a:buNone/>
             </a:pPr>
             <a:r>
@@ -8519,7 +8745,7 @@
           <a:bodyPr wrap="square" lIns="0" tIns="114300" rIns="114300" bIns="0" rtlCol="0" anchor="ctr"/>
           <a:lstStyle/>
           <a:p>
-            <a:pPr marL="0" indent="0" algn="r">
+            <a:pPr algn="r" indent="0" marL="0">
               <a:buNone/>
             </a:pPr>
             <a:r>
@@ -8558,7 +8784,7 @@
           <a:bodyPr wrap="square" lIns="0" tIns="114300" rIns="114300" bIns="0" rtlCol="0" anchor="ctr"/>
           <a:lstStyle/>
           <a:p>
-            <a:pPr marL="0" indent="0" algn="r">
+            <a:pPr algn="r" indent="0" marL="0">
               <a:buNone/>
             </a:pPr>
             <a:r>
@@ -8597,7 +8823,7 @@
           <a:bodyPr wrap="square" lIns="0" tIns="114300" rIns="114300" bIns="0" rtlCol="0" anchor="ctr"/>
           <a:lstStyle/>
           <a:p>
-            <a:pPr marL="0" indent="0" algn="r">
+            <a:pPr algn="r" indent="0" marL="0">
               <a:buNone/>
             </a:pPr>
             <a:r>
@@ -8636,7 +8862,7 @@
           <a:bodyPr wrap="square" lIns="0" tIns="114300" rIns="114300" bIns="0" rtlCol="0" anchor="ctr"/>
           <a:lstStyle/>
           <a:p>
-            <a:pPr marL="0" indent="0" algn="r">
+            <a:pPr algn="r" indent="0" marL="0">
               <a:buNone/>
             </a:pPr>
             <a:r>
@@ -8648,7 +8874,7 @@
                 <a:ea typeface="Raleway" pitchFamily="34" charset="-122"/>
                 <a:cs typeface="Raleway" pitchFamily="34" charset="-120"/>
               </a:rPr>
-              <a:t>33</a:t>
+              <a:t>41</a:t>
             </a:r>
             <a:endParaRPr lang="en-US" sz="672" dirty="0"/>
           </a:p>
@@ -8675,7 +8901,7 @@
           <a:bodyPr wrap="square" lIns="0" tIns="114300" rIns="114300" bIns="0" rtlCol="0" anchor="ctr"/>
           <a:lstStyle/>
           <a:p>
-            <a:pPr marL="0" indent="0" algn="r">
+            <a:pPr algn="r" indent="0" marL="0">
               <a:buNone/>
             </a:pPr>
             <a:r>
@@ -8714,7 +8940,7 @@
           <a:bodyPr wrap="square" lIns="0" tIns="114300" rIns="114300" bIns="0" rtlCol="0" anchor="ctr"/>
           <a:lstStyle/>
           <a:p>
-            <a:pPr marL="0" indent="0" algn="r">
+            <a:pPr algn="r" indent="0" marL="0">
               <a:buNone/>
             </a:pPr>
             <a:r>
@@ -8753,7 +8979,7 @@
           <a:bodyPr wrap="square" lIns="0" tIns="114300" rIns="114300" bIns="0" rtlCol="0" anchor="ctr"/>
           <a:lstStyle/>
           <a:p>
-            <a:pPr marL="0" indent="0" algn="r">
+            <a:pPr algn="r" indent="0" marL="0">
               <a:buNone/>
             </a:pPr>
             <a:r>
@@ -8765,7 +8991,7 @@
                 <a:ea typeface="Raleway" pitchFamily="34" charset="-122"/>
                 <a:cs typeface="Raleway" pitchFamily="34" charset="-120"/>
               </a:rPr>
-              <a:t>15</a:t>
+              <a:t>18</a:t>
             </a:r>
             <a:endParaRPr lang="en-US" sz="672" dirty="0"/>
           </a:p>
@@ -8792,7 +9018,7 @@
           <a:bodyPr wrap="square" lIns="0" tIns="114300" rIns="114300" bIns="0" rtlCol="0" anchor="ctr"/>
           <a:lstStyle/>
           <a:p>
-            <a:pPr marL="0" indent="0" algn="r">
+            <a:pPr algn="r" indent="0" marL="0">
               <a:buNone/>
             </a:pPr>
             <a:r>
@@ -8831,7 +9057,7 @@
           <a:bodyPr wrap="square" lIns="0" tIns="114300" rIns="114300" bIns="0" rtlCol="0" anchor="ctr"/>
           <a:lstStyle/>
           <a:p>
-            <a:pPr marL="0" indent="0" algn="r">
+            <a:pPr algn="r" indent="0" marL="0">
               <a:buNone/>
             </a:pPr>
             <a:r>
@@ -8870,7 +9096,7 @@
           <a:bodyPr wrap="square" lIns="0" tIns="114300" rIns="114300" bIns="0" rtlCol="0" anchor="ctr"/>
           <a:lstStyle/>
           <a:p>
-            <a:pPr marL="0" indent="0" algn="r">
+            <a:pPr algn="r" indent="0" marL="0">
               <a:buNone/>
             </a:pPr>
             <a:r>
@@ -8909,7 +9135,7 @@
           <a:bodyPr wrap="square" lIns="0" tIns="114300" rIns="114300" bIns="0" rtlCol="0" anchor="ctr"/>
           <a:lstStyle/>
           <a:p>
-            <a:pPr marL="0" indent="0" algn="r">
+            <a:pPr algn="r" indent="0" marL="0">
               <a:buNone/>
             </a:pPr>
             <a:r>
@@ -8948,7 +9174,7 @@
           <a:bodyPr wrap="square" lIns="0" tIns="114300" rIns="114300" bIns="0" rtlCol="0" anchor="ctr"/>
           <a:lstStyle/>
           <a:p>
-            <a:pPr marL="0" indent="0" algn="r">
+            <a:pPr algn="r" indent="0" marL="0">
               <a:buNone/>
             </a:pPr>
             <a:r>
@@ -8987,7 +9213,7 @@
           <a:bodyPr wrap="square" lIns="0" tIns="114300" rIns="114300" bIns="0" rtlCol="0" anchor="ctr"/>
           <a:lstStyle/>
           <a:p>
-            <a:pPr marL="0" indent="0" algn="r">
+            <a:pPr algn="r" indent="0" marL="0">
               <a:buNone/>
             </a:pPr>
             <a:r>
@@ -9026,7 +9252,7 @@
           <a:bodyPr wrap="square" lIns="0" tIns="114300" rIns="114300" bIns="0" rtlCol="0" anchor="ctr"/>
           <a:lstStyle/>
           <a:p>
-            <a:pPr marL="0" indent="0" algn="r">
+            <a:pPr algn="r" indent="0" marL="0">
               <a:buNone/>
             </a:pPr>
             <a:r>
@@ -9065,7 +9291,7 @@
           <a:bodyPr wrap="square" lIns="0" tIns="114300" rIns="114300" bIns="0" rtlCol="0" anchor="ctr"/>
           <a:lstStyle/>
           <a:p>
-            <a:pPr marL="0" indent="0" algn="r">
+            <a:pPr algn="r" indent="0" marL="0">
               <a:buNone/>
             </a:pPr>
             <a:r>
@@ -9104,7 +9330,7 @@
           <a:bodyPr wrap="square" lIns="0" tIns="114300" rIns="114300" bIns="0" rtlCol="0" anchor="ctr"/>
           <a:lstStyle/>
           <a:p>
-            <a:pPr marL="0" indent="0" algn="r">
+            <a:pPr algn="r" indent="0" marL="0">
               <a:buNone/>
             </a:pPr>
             <a:r>
@@ -9143,7 +9369,7 @@
           <a:bodyPr wrap="square" lIns="0" tIns="114300" rIns="114300" bIns="0" rtlCol="0" anchor="ctr"/>
           <a:lstStyle/>
           <a:p>
-            <a:pPr marL="0" indent="0" algn="r">
+            <a:pPr algn="r" indent="0" marL="0">
               <a:buNone/>
             </a:pPr>
             <a:r>
@@ -9182,7 +9408,7 @@
           <a:bodyPr wrap="square" lIns="0" tIns="114300" rIns="114300" bIns="0" rtlCol="0" anchor="ctr"/>
           <a:lstStyle/>
           <a:p>
-            <a:pPr marL="0" indent="0" algn="r">
+            <a:pPr algn="r" indent="0" marL="0">
               <a:buNone/>
             </a:pPr>
             <a:r>
@@ -9221,7 +9447,7 @@
           <a:bodyPr wrap="square" lIns="0" tIns="114300" rIns="114300" bIns="0" rtlCol="0" anchor="ctr"/>
           <a:lstStyle/>
           <a:p>
-            <a:pPr marL="0" indent="0" algn="r">
+            <a:pPr algn="r" indent="0" marL="0">
               <a:buNone/>
             </a:pPr>
             <a:r>
@@ -9260,7 +9486,7 @@
           <a:bodyPr wrap="square" lIns="0" tIns="114300" rIns="114300" bIns="0" rtlCol="0" anchor="ctr"/>
           <a:lstStyle/>
           <a:p>
-            <a:pPr marL="0" indent="0" algn="r">
+            <a:pPr algn="r" indent="0" marL="0">
               <a:buNone/>
             </a:pPr>
             <a:r>
@@ -9299,7 +9525,7 @@
           <a:bodyPr wrap="square" lIns="0" tIns="114300" rIns="114300" bIns="0" rtlCol="0" anchor="ctr"/>
           <a:lstStyle/>
           <a:p>
-            <a:pPr marL="0" indent="0" algn="r">
+            <a:pPr algn="r" indent="0" marL="0">
               <a:buNone/>
             </a:pPr>
             <a:r>
@@ -9338,7 +9564,7 @@
           <a:bodyPr wrap="square" lIns="0" tIns="114300" rIns="114300" bIns="0" rtlCol="0" anchor="ctr"/>
           <a:lstStyle/>
           <a:p>
-            <a:pPr marL="0" indent="0" algn="r">
+            <a:pPr algn="r" indent="0" marL="0">
               <a:buNone/>
             </a:pPr>
             <a:r>
@@ -9377,7 +9603,7 @@
           <a:bodyPr wrap="square" lIns="0" tIns="114300" rIns="114300" bIns="0" rtlCol="0" anchor="ctr"/>
           <a:lstStyle/>
           <a:p>
-            <a:pPr marL="0" indent="0" algn="r">
+            <a:pPr algn="r" indent="0" marL="0">
               <a:buNone/>
             </a:pPr>
             <a:r>
@@ -9416,7 +9642,7 @@
           <a:bodyPr wrap="square" lIns="0" tIns="114300" rIns="114300" bIns="0" rtlCol="0" anchor="ctr"/>
           <a:lstStyle/>
           <a:p>
-            <a:pPr marL="0" indent="0" algn="r">
+            <a:pPr algn="r" indent="0" marL="0">
               <a:buNone/>
             </a:pPr>
             <a:r>
@@ -9455,7 +9681,7 @@
           <a:bodyPr wrap="square" lIns="0" tIns="114300" rIns="114300" bIns="0" rtlCol="0" anchor="ctr"/>
           <a:lstStyle/>
           <a:p>
-            <a:pPr marL="0" indent="0" algn="r">
+            <a:pPr algn="r" indent="0" marL="0">
               <a:buNone/>
             </a:pPr>
             <a:r>
@@ -9494,7 +9720,7 @@
           <a:bodyPr wrap="square" lIns="0" tIns="114300" rIns="114300" bIns="0" rtlCol="0" anchor="ctr"/>
           <a:lstStyle/>
           <a:p>
-            <a:pPr marL="0" indent="0" algn="r">
+            <a:pPr algn="r" indent="0" marL="0">
               <a:buNone/>
             </a:pPr>
             <a:r>
@@ -9533,7 +9759,7 @@
           <a:bodyPr wrap="square" lIns="0" tIns="114300" rIns="114300" bIns="0" rtlCol="0" anchor="ctr"/>
           <a:lstStyle/>
           <a:p>
-            <a:pPr marL="0" indent="0" algn="r">
+            <a:pPr algn="r" indent="0" marL="0">
               <a:buNone/>
             </a:pPr>
             <a:r>
@@ -9572,7 +9798,7 @@
           <a:bodyPr wrap="square" lIns="0" tIns="114300" rIns="114300" bIns="0" rtlCol="0" anchor="ctr"/>
           <a:lstStyle/>
           <a:p>
-            <a:pPr marL="0" indent="0" algn="r">
+            <a:pPr algn="r" indent="0" marL="0">
               <a:buNone/>
             </a:pPr>
             <a:r>
@@ -9611,7 +9837,7 @@
           <a:bodyPr wrap="square" lIns="0" tIns="114300" rIns="114300" bIns="0" rtlCol="0" anchor="ctr"/>
           <a:lstStyle/>
           <a:p>
-            <a:pPr marL="0" indent="0" algn="r">
+            <a:pPr algn="r" indent="0" marL="0">
               <a:buNone/>
             </a:pPr>
             <a:r>
@@ -9650,7 +9876,7 @@
           <a:bodyPr wrap="square" lIns="0" tIns="114300" rIns="114300" bIns="0" rtlCol="0" anchor="ctr"/>
           <a:lstStyle/>
           <a:p>
-            <a:pPr marL="0" indent="0" algn="r">
+            <a:pPr algn="r" indent="0" marL="0">
               <a:buNone/>
             </a:pPr>
             <a:r>
@@ -9689,7 +9915,7 @@
           <a:bodyPr wrap="square" lIns="0" tIns="114300" rIns="114300" bIns="0" rtlCol="0" anchor="ctr"/>
           <a:lstStyle/>
           <a:p>
-            <a:pPr marL="0" indent="0" algn="r">
+            <a:pPr algn="r" indent="0" marL="0">
               <a:buNone/>
             </a:pPr>
             <a:r>
@@ -9728,7 +9954,7 @@
           <a:bodyPr wrap="square" lIns="0" tIns="114300" rIns="114300" bIns="0" rtlCol="0" anchor="ctr"/>
           <a:lstStyle/>
           <a:p>
-            <a:pPr marL="0" indent="0" algn="r">
+            <a:pPr algn="r" indent="0" marL="0">
               <a:buNone/>
             </a:pPr>
             <a:r>
@@ -9767,7 +9993,7 @@
           <a:bodyPr wrap="square" lIns="0" tIns="114300" rIns="114300" bIns="0" rtlCol="0" anchor="ctr"/>
           <a:lstStyle/>
           <a:p>
-            <a:pPr marL="0" indent="0" algn="r">
+            <a:pPr algn="r" indent="0" marL="0">
               <a:buNone/>
             </a:pPr>
             <a:r>
@@ -9806,7 +10032,7 @@
           <a:bodyPr wrap="square" lIns="0" tIns="114300" rIns="114300" bIns="0" rtlCol="0" anchor="ctr"/>
           <a:lstStyle/>
           <a:p>
-            <a:pPr marL="0" indent="0" algn="r">
+            <a:pPr algn="r" indent="0" marL="0">
               <a:buNone/>
             </a:pPr>
             <a:r>
@@ -9845,7 +10071,7 @@
           <a:bodyPr wrap="square" lIns="0" tIns="114300" rIns="114300" bIns="0" rtlCol="0" anchor="ctr"/>
           <a:lstStyle/>
           <a:p>
-            <a:pPr marL="0" indent="0" algn="r">
+            <a:pPr algn="r" indent="0" marL="0">
               <a:buNone/>
             </a:pPr>
             <a:r>
@@ -9884,7 +10110,7 @@
           <a:bodyPr wrap="square" lIns="0" tIns="114300" rIns="114300" bIns="0" rtlCol="0" anchor="ctr"/>
           <a:lstStyle/>
           <a:p>
-            <a:pPr marL="0" indent="0" algn="r">
+            <a:pPr algn="r" indent="0" marL="0">
               <a:buNone/>
             </a:pPr>
             <a:r>
@@ -9923,7 +10149,7 @@
           <a:bodyPr wrap="square" lIns="0" tIns="114300" rIns="114300" bIns="0" rtlCol="0" anchor="ctr"/>
           <a:lstStyle/>
           <a:p>
-            <a:pPr marL="0" indent="0" algn="r">
+            <a:pPr algn="r" indent="0" marL="0">
               <a:buNone/>
             </a:pPr>
             <a:r>
@@ -9962,7 +10188,7 @@
           <a:bodyPr wrap="square" lIns="0" tIns="114300" rIns="114300" bIns="0" rtlCol="0" anchor="ctr"/>
           <a:lstStyle/>
           <a:p>
-            <a:pPr marL="0" indent="0" algn="r">
+            <a:pPr algn="r" indent="0" marL="0">
               <a:buNone/>
             </a:pPr>
             <a:r>
@@ -10001,7 +10227,7 @@
           <a:bodyPr wrap="square" lIns="0" tIns="114300" rIns="114300" bIns="0" rtlCol="0" anchor="ctr"/>
           <a:lstStyle/>
           <a:p>
-            <a:pPr marL="0" indent="0" algn="r">
+            <a:pPr algn="r" indent="0" marL="0">
               <a:buNone/>
             </a:pPr>
             <a:r>
@@ -10040,7 +10266,7 @@
           <a:bodyPr wrap="square" lIns="0" tIns="114300" rIns="114300" bIns="0" rtlCol="0" anchor="ctr"/>
           <a:lstStyle/>
           <a:p>
-            <a:pPr marL="0" indent="0" algn="r">
+            <a:pPr algn="r" indent="0" marL="0">
               <a:buNone/>
             </a:pPr>
             <a:r>
@@ -10079,7 +10305,7 @@
           <a:bodyPr wrap="square" lIns="0" tIns="114300" rIns="114300" bIns="0" rtlCol="0" anchor="ctr"/>
           <a:lstStyle/>
           <a:p>
-            <a:pPr marL="0" indent="0" algn="r">
+            <a:pPr algn="r" indent="0" marL="0">
               <a:buNone/>
             </a:pPr>
             <a:r>
@@ -10118,7 +10344,7 @@
           <a:bodyPr wrap="square" lIns="0" tIns="114300" rIns="114300" bIns="0" rtlCol="0" anchor="ctr"/>
           <a:lstStyle/>
           <a:p>
-            <a:pPr marL="0" indent="0" algn="r">
+            <a:pPr algn="r" indent="0" marL="0">
               <a:buNone/>
             </a:pPr>
             <a:r>
@@ -10157,7 +10383,7 @@
           <a:bodyPr wrap="square" lIns="0" tIns="114300" rIns="114300" bIns="0" rtlCol="0" anchor="ctr"/>
           <a:lstStyle/>
           <a:p>
-            <a:pPr marL="0" indent="0" algn="r">
+            <a:pPr algn="r" indent="0" marL="0">
               <a:buNone/>
             </a:pPr>
             <a:r>
@@ -10196,7 +10422,7 @@
           <a:bodyPr wrap="square" lIns="0" tIns="114300" rIns="114300" bIns="0" rtlCol="0" anchor="ctr"/>
           <a:lstStyle/>
           <a:p>
-            <a:pPr marL="0" indent="0" algn="r">
+            <a:pPr algn="r" indent="0" marL="0">
               <a:buNone/>
             </a:pPr>
             <a:r>
@@ -10235,7 +10461,7 @@
           <a:bodyPr wrap="square" lIns="0" tIns="114300" rIns="114300" bIns="0" rtlCol="0" anchor="ctr"/>
           <a:lstStyle/>
           <a:p>
-            <a:pPr marL="0" indent="0" algn="r">
+            <a:pPr algn="r" indent="0" marL="0">
               <a:buNone/>
             </a:pPr>
             <a:r>
@@ -10274,7 +10500,7 @@
           <a:bodyPr wrap="square" lIns="0" tIns="114300" rIns="114300" bIns="0" rtlCol="0" anchor="ctr"/>
           <a:lstStyle/>
           <a:p>
-            <a:pPr marL="0" indent="0" algn="r">
+            <a:pPr algn="r" indent="0" marL="0">
               <a:buNone/>
             </a:pPr>
             <a:r>
@@ -10313,7 +10539,7 @@
           <a:bodyPr wrap="square" lIns="0" tIns="114300" rIns="114300" bIns="0" rtlCol="0" anchor="ctr"/>
           <a:lstStyle/>
           <a:p>
-            <a:pPr marL="0" indent="0" algn="r">
+            <a:pPr algn="r" indent="0" marL="0">
               <a:buNone/>
             </a:pPr>
             <a:r>
@@ -10352,7 +10578,7 @@
           <a:bodyPr wrap="square" lIns="0" tIns="114300" rIns="114300" bIns="0" rtlCol="0" anchor="ctr"/>
           <a:lstStyle/>
           <a:p>
-            <a:pPr marL="0" indent="0" algn="r">
+            <a:pPr algn="r" indent="0" marL="0">
               <a:buNone/>
             </a:pPr>
             <a:r>
@@ -10397,14 +10623,14 @@
       </p:grpSpPr>
       <p:pic>
         <p:nvPicPr>
-          <p:cNvPr id="2" name="Image 0" descr="C:\01_Repositorios\02_CRM\02_Informe_Semetral\dash\tradicional\ppt_slides\sk_02_main.png"/>
+          <p:cNvPr id="2" name="Image 0" descr="C:\01_Repositorios\02_CRM\02_Informe_Semetral\dash\tradicional\ppt_slides\sk_02_main.png">    </p:cNvPr>
           <p:cNvPicPr>
             <a:picLocks noChangeAspect="1"/>
           </p:cNvPicPr>
           <p:nvPr/>
         </p:nvPicPr>
         <p:blipFill>
-          <a:blip r:embed="rId3"/>
+          <a:blip r:embed="rId1"/>
           <a:stretch>
             <a:fillRect/>
           </a:stretch>
@@ -10440,7 +10666,7 @@
           <a:bodyPr wrap="square" lIns="0" tIns="0" rIns="0" bIns="0" rtlCol="0" anchor="t"/>
           <a:lstStyle/>
           <a:p>
-            <a:pPr marL="0" indent="0" algn="l">
+            <a:pPr algn="l" indent="0" marL="0">
               <a:buNone/>
             </a:pPr>
             <a:r>
@@ -10479,7 +10705,7 @@
           <a:bodyPr wrap="square" lIns="0" tIns="0" rIns="0" bIns="0" rtlCol="0" anchor="t"/>
           <a:lstStyle/>
           <a:p>
-            <a:pPr marL="0" indent="0" algn="l">
+            <a:pPr algn="l" indent="0" marL="0">
               <a:buNone/>
             </a:pPr>
             <a:r>
@@ -10518,7 +10744,7 @@
           <a:bodyPr wrap="square" lIns="0" tIns="0" rIns="0" bIns="0" rtlCol="0" anchor="t"/>
           <a:lstStyle/>
           <a:p>
-            <a:pPr marL="0" indent="0" algn="l">
+            <a:pPr algn="l" indent="0" marL="0">
               <a:buNone/>
             </a:pPr>
             <a:r>
@@ -10557,7 +10783,7 @@
           <a:bodyPr wrap="square" lIns="0" tIns="0" rIns="0" bIns="0" rtlCol="0" anchor="t"/>
           <a:lstStyle/>
           <a:p>
-            <a:pPr marL="0" indent="0" algn="l">
+            <a:pPr algn="l" indent="0" marL="0">
               <a:buNone/>
             </a:pPr>
             <a:r>
@@ -10596,7 +10822,7 @@
           <a:bodyPr wrap="square" lIns="0" tIns="0" rIns="0" bIns="0" rtlCol="0" anchor="t"/>
           <a:lstStyle/>
           <a:p>
-            <a:pPr marL="0" indent="0" algn="l">
+            <a:pPr algn="l" indent="0" marL="0">
               <a:buNone/>
             </a:pPr>
             <a:r>
@@ -10635,7 +10861,7 @@
           <a:bodyPr wrap="square" lIns="0" tIns="0" rIns="0" bIns="0" rtlCol="0" anchor="t"/>
           <a:lstStyle/>
           <a:p>
-            <a:pPr marL="0" indent="0" algn="l">
+            <a:pPr algn="l" indent="0" marL="0">
               <a:buNone/>
             </a:pPr>
             <a:r>
@@ -10674,7 +10900,7 @@
           <a:bodyPr wrap="square" lIns="0" tIns="0" rIns="0" bIns="0" rtlCol="0" anchor="t"/>
           <a:lstStyle/>
           <a:p>
-            <a:pPr marL="0" indent="0" algn="l">
+            <a:pPr algn="l" indent="0" marL="0">
               <a:buNone/>
             </a:pPr>
             <a:r>
@@ -10713,7 +10939,7 @@
           <a:bodyPr wrap="square" lIns="0" tIns="0" rIns="0" bIns="0" rtlCol="0" anchor="t"/>
           <a:lstStyle/>
           <a:p>
-            <a:pPr marL="0" indent="0" algn="l">
+            <a:pPr algn="l" indent="0" marL="0">
               <a:buNone/>
             </a:pPr>
             <a:r>
@@ -10752,7 +10978,7 @@
           <a:bodyPr wrap="square" lIns="0" tIns="0" rIns="0" bIns="0" rtlCol="0" anchor="t"/>
           <a:lstStyle/>
           <a:p>
-            <a:pPr marL="0" indent="0" algn="l">
+            <a:pPr algn="l" indent="0" marL="0">
               <a:buNone/>
             </a:pPr>
             <a:r>
@@ -10791,7 +11017,7 @@
           <a:bodyPr wrap="square" lIns="0" tIns="0" rIns="0" bIns="0" rtlCol="0" anchor="t"/>
           <a:lstStyle/>
           <a:p>
-            <a:pPr marL="0" indent="0" algn="l">
+            <a:pPr algn="l" indent="0" marL="0">
               <a:buNone/>
             </a:pPr>
             <a:r>
@@ -10830,7 +11056,7 @@
           <a:bodyPr wrap="square" lIns="0" tIns="0" rIns="0" bIns="0" rtlCol="0" anchor="t"/>
           <a:lstStyle/>
           <a:p>
-            <a:pPr marL="0" indent="0" algn="l">
+            <a:pPr algn="l" indent="0" marL="0">
               <a:buNone/>
             </a:pPr>
             <a:r>
@@ -10869,7 +11095,7 @@
           <a:bodyPr wrap="square" lIns="0" tIns="0" rIns="0" bIns="0" rtlCol="0" anchor="t"/>
           <a:lstStyle/>
           <a:p>
-            <a:pPr marL="0" indent="0" algn="l">
+            <a:pPr algn="l" indent="0" marL="0">
               <a:buNone/>
             </a:pPr>
             <a:r>
@@ -10908,7 +11134,7 @@
           <a:bodyPr wrap="square" lIns="0" tIns="0" rIns="0" bIns="0" rtlCol="0" anchor="t"/>
           <a:lstStyle/>
           <a:p>
-            <a:pPr marL="0" indent="0" algn="l">
+            <a:pPr algn="l" indent="0" marL="0">
               <a:buNone/>
             </a:pPr>
             <a:r>
@@ -10947,7 +11173,7 @@
           <a:bodyPr wrap="square" lIns="0" tIns="0" rIns="0" bIns="0" rtlCol="0" anchor="t"/>
           <a:lstStyle/>
           <a:p>
-            <a:pPr marL="0" indent="0" algn="l">
+            <a:pPr algn="l" indent="0" marL="0">
               <a:buNone/>
             </a:pPr>
             <a:r>
@@ -10986,7 +11212,7 @@
           <a:bodyPr wrap="square" lIns="0" tIns="0" rIns="0" bIns="0" rtlCol="0" anchor="t"/>
           <a:lstStyle/>
           <a:p>
-            <a:pPr marL="0" indent="0" algn="l">
+            <a:pPr algn="l" indent="0" marL="0">
               <a:buNone/>
             </a:pPr>
             <a:r>
@@ -11025,7 +11251,7 @@
           <a:bodyPr wrap="square" lIns="0" tIns="114300" rIns="114300" bIns="0" rtlCol="0" anchor="ctr"/>
           <a:lstStyle/>
           <a:p>
-            <a:pPr marL="0" indent="0" algn="r">
+            <a:pPr algn="r" indent="0" marL="0">
               <a:buNone/>
             </a:pPr>
             <a:r>
@@ -11064,7 +11290,7 @@
           <a:bodyPr wrap="square" lIns="0" tIns="114300" rIns="114300" bIns="0" rtlCol="0" anchor="ctr"/>
           <a:lstStyle/>
           <a:p>
-            <a:pPr marL="0" indent="0" algn="r">
+            <a:pPr algn="r" indent="0" marL="0">
               <a:buNone/>
             </a:pPr>
             <a:r>
@@ -11103,7 +11329,7 @@
           <a:bodyPr wrap="square" lIns="0" tIns="114300" rIns="114300" bIns="0" rtlCol="0" anchor="ctr"/>
           <a:lstStyle/>
           <a:p>
-            <a:pPr marL="0" indent="0" algn="r">
+            <a:pPr algn="r" indent="0" marL="0">
               <a:buNone/>
             </a:pPr>
             <a:r>
@@ -11142,7 +11368,7 @@
           <a:bodyPr wrap="square" lIns="0" tIns="114300" rIns="114300" bIns="0" rtlCol="0" anchor="ctr"/>
           <a:lstStyle/>
           <a:p>
-            <a:pPr marL="0" indent="0" algn="r">
+            <a:pPr algn="r" indent="0" marL="0">
               <a:buNone/>
             </a:pPr>
             <a:r>
@@ -11181,7 +11407,7 @@
           <a:bodyPr wrap="square" lIns="0" tIns="114300" rIns="114300" bIns="0" rtlCol="0" anchor="ctr"/>
           <a:lstStyle/>
           <a:p>
-            <a:pPr marL="0" indent="0" algn="r">
+            <a:pPr algn="r" indent="0" marL="0">
               <a:buNone/>
             </a:pPr>
             <a:r>
@@ -11220,7 +11446,7 @@
           <a:bodyPr wrap="square" lIns="0" tIns="114300" rIns="114300" bIns="0" rtlCol="0" anchor="ctr"/>
           <a:lstStyle/>
           <a:p>
-            <a:pPr marL="0" indent="0" algn="r">
+            <a:pPr algn="r" indent="0" marL="0">
               <a:buNone/>
             </a:pPr>
             <a:r>
@@ -11259,7 +11485,7 @@
           <a:bodyPr wrap="square" lIns="0" tIns="114300" rIns="114300" bIns="0" rtlCol="0" anchor="ctr"/>
           <a:lstStyle/>
           <a:p>
-            <a:pPr marL="0" indent="0" algn="r">
+            <a:pPr algn="r" indent="0" marL="0">
               <a:buNone/>
             </a:pPr>
             <a:r>
@@ -11298,7 +11524,7 @@
           <a:bodyPr wrap="square" lIns="0" tIns="114300" rIns="114300" bIns="0" rtlCol="0" anchor="ctr"/>
           <a:lstStyle/>
           <a:p>
-            <a:pPr marL="0" indent="0" algn="r">
+            <a:pPr algn="r" indent="0" marL="0">
               <a:buNone/>
             </a:pPr>
             <a:r>
@@ -11337,7 +11563,7 @@
           <a:bodyPr wrap="square" lIns="0" tIns="114300" rIns="114300" bIns="0" rtlCol="0" anchor="ctr"/>
           <a:lstStyle/>
           <a:p>
-            <a:pPr marL="0" indent="0" algn="r">
+            <a:pPr algn="r" indent="0" marL="0">
               <a:buNone/>
             </a:pPr>
             <a:r>
@@ -11376,7 +11602,7 @@
           <a:bodyPr wrap="square" lIns="0" tIns="114300" rIns="114300" bIns="0" rtlCol="0" anchor="ctr"/>
           <a:lstStyle/>
           <a:p>
-            <a:pPr marL="0" indent="0" algn="r">
+            <a:pPr algn="r" indent="0" marL="0">
               <a:buNone/>
             </a:pPr>
             <a:r>
@@ -11415,7 +11641,7 @@
           <a:bodyPr wrap="square" lIns="0" tIns="114300" rIns="114300" bIns="0" rtlCol="0" anchor="ctr"/>
           <a:lstStyle/>
           <a:p>
-            <a:pPr marL="0" indent="0" algn="r">
+            <a:pPr algn="r" indent="0" marL="0">
               <a:buNone/>
             </a:pPr>
             <a:r>
@@ -11454,7 +11680,7 @@
           <a:bodyPr wrap="square" lIns="0" tIns="114300" rIns="114300" bIns="0" rtlCol="0" anchor="ctr"/>
           <a:lstStyle/>
           <a:p>
-            <a:pPr marL="0" indent="0" algn="r">
+            <a:pPr algn="r" indent="0" marL="0">
               <a:buNone/>
             </a:pPr>
             <a:r>
@@ -11480,7 +11706,7 @@
         </p:nvSpPr>
         <p:spPr>
           <a:xfrm>
-            <a:off x="5016365" y="2658219"/>
+            <a:off x="5073515" y="2715369"/>
             <a:ext cx="860412" cy="123825"/>
           </a:xfrm>
           <a:prstGeom prst="rect">
@@ -11493,7 +11719,7 @@
           <a:bodyPr wrap="square" lIns="0" tIns="114300" rIns="114300" bIns="0" rtlCol="0" anchor="ctr"/>
           <a:lstStyle/>
           <a:p>
-            <a:pPr marL="0" indent="0" algn="r">
+            <a:pPr algn="r" indent="0" marL="0">
               <a:buNone/>
             </a:pPr>
             <a:r>
@@ -11532,7 +11758,7 @@
           <a:bodyPr wrap="square" lIns="0" tIns="114300" rIns="114300" bIns="0" rtlCol="0" anchor="ctr"/>
           <a:lstStyle/>
           <a:p>
-            <a:pPr marL="0" indent="0" algn="r">
+            <a:pPr algn="r" indent="0" marL="0">
               <a:buNone/>
             </a:pPr>
             <a:r>
@@ -11558,7 +11784,7 @@
         </p:nvSpPr>
         <p:spPr>
           <a:xfrm>
-            <a:off x="5016365" y="5268069"/>
+            <a:off x="5073515" y="5325219"/>
             <a:ext cx="860412" cy="123825"/>
           </a:xfrm>
           <a:prstGeom prst="rect">
@@ -11571,7 +11797,7 @@
           <a:bodyPr wrap="square" lIns="0" tIns="114300" rIns="114300" bIns="0" rtlCol="0" anchor="ctr"/>
           <a:lstStyle/>
           <a:p>
-            <a:pPr marL="0" indent="0" algn="r">
+            <a:pPr algn="r" indent="0" marL="0">
               <a:buNone/>
             </a:pPr>
             <a:r>
@@ -11610,7 +11836,7 @@
           <a:bodyPr wrap="square" lIns="0" tIns="0" rIns="0" bIns="0" rtlCol="0" anchor="t"/>
           <a:lstStyle/>
           <a:p>
-            <a:pPr marL="0" indent="0" algn="l">
+            <a:pPr algn="l" indent="0" marL="0">
               <a:buNone/>
             </a:pPr>
             <a:r>
@@ -11649,7 +11875,7 @@
           <a:bodyPr wrap="square" lIns="0" tIns="114300" rIns="114300" bIns="0" rtlCol="0" anchor="ctr"/>
           <a:lstStyle/>
           <a:p>
-            <a:pPr marL="0" indent="0" algn="r">
+            <a:pPr algn="r" indent="0" marL="0">
               <a:buNone/>
             </a:pPr>
             <a:r>
@@ -11675,7 +11901,7 @@
         </p:nvSpPr>
         <p:spPr>
           <a:xfrm>
-            <a:off x="5016365" y="2286446"/>
+            <a:off x="5073515" y="2343596"/>
             <a:ext cx="860412" cy="123825"/>
           </a:xfrm>
           <a:prstGeom prst="rect">
@@ -11688,7 +11914,7 @@
           <a:bodyPr wrap="square" lIns="0" tIns="114300" rIns="114300" bIns="0" rtlCol="0" anchor="ctr"/>
           <a:lstStyle/>
           <a:p>
-            <a:pPr marL="0" indent="0" algn="r">
+            <a:pPr algn="r" indent="0" marL="0">
               <a:buNone/>
             </a:pPr>
             <a:r>
@@ -11727,7 +11953,7 @@
           <a:bodyPr wrap="square" lIns="0" tIns="114300" rIns="114300" bIns="0" rtlCol="0" anchor="ctr"/>
           <a:lstStyle/>
           <a:p>
-            <a:pPr marL="0" indent="0" algn="r">
+            <a:pPr algn="r" indent="0" marL="0">
               <a:buNone/>
             </a:pPr>
             <a:r>
@@ -11766,7 +11992,7 @@
           <a:bodyPr wrap="square" lIns="0" tIns="114300" rIns="114300" bIns="0" rtlCol="0" anchor="ctr"/>
           <a:lstStyle/>
           <a:p>
-            <a:pPr marL="0" indent="0" algn="r">
+            <a:pPr algn="r" indent="0" marL="0">
               <a:buNone/>
             </a:pPr>
             <a:r>
@@ -11792,7 +12018,7 @@
         </p:nvSpPr>
         <p:spPr>
           <a:xfrm>
-            <a:off x="5016365" y="3031182"/>
+            <a:off x="5073515" y="3088332"/>
             <a:ext cx="860412" cy="123825"/>
           </a:xfrm>
           <a:prstGeom prst="rect">
@@ -11805,7 +12031,7 @@
           <a:bodyPr wrap="square" lIns="0" tIns="114300" rIns="114300" bIns="0" rtlCol="0" anchor="ctr"/>
           <a:lstStyle/>
           <a:p>
-            <a:pPr marL="0" indent="0" algn="r">
+            <a:pPr algn="r" indent="0" marL="0">
               <a:buNone/>
             </a:pPr>
             <a:r>
@@ -11844,7 +12070,7 @@
           <a:bodyPr wrap="square" lIns="0" tIns="114300" rIns="114300" bIns="0" rtlCol="0" anchor="ctr"/>
           <a:lstStyle/>
           <a:p>
-            <a:pPr marL="0" indent="0" algn="r">
+            <a:pPr algn="r" indent="0" marL="0">
               <a:buNone/>
             </a:pPr>
             <a:r>
@@ -11870,7 +12096,7 @@
         </p:nvSpPr>
         <p:spPr>
           <a:xfrm>
-            <a:off x="5016365" y="3404146"/>
+            <a:off x="5073515" y="3461296"/>
             <a:ext cx="860412" cy="123825"/>
           </a:xfrm>
           <a:prstGeom prst="rect">
@@ -11883,7 +12109,7 @@
           <a:bodyPr wrap="square" lIns="0" tIns="114300" rIns="114300" bIns="0" rtlCol="0" anchor="ctr"/>
           <a:lstStyle/>
           <a:p>
-            <a:pPr marL="0" indent="0" algn="r">
+            <a:pPr algn="r" indent="0" marL="0">
               <a:buNone/>
             </a:pPr>
             <a:r>
@@ -11922,7 +12148,7 @@
           <a:bodyPr wrap="square" lIns="0" tIns="114300" rIns="114300" bIns="0" rtlCol="0" anchor="ctr"/>
           <a:lstStyle/>
           <a:p>
-            <a:pPr marL="0" indent="0" algn="r">
+            <a:pPr algn="r" indent="0" marL="0">
               <a:buNone/>
             </a:pPr>
             <a:r>
@@ -11961,7 +12187,7 @@
           <a:bodyPr wrap="square" lIns="0" tIns="114300" rIns="114300" bIns="0" rtlCol="0" anchor="ctr"/>
           <a:lstStyle/>
           <a:p>
-            <a:pPr marL="0" indent="0" algn="r">
+            <a:pPr algn="r" indent="0" marL="0">
               <a:buNone/>
             </a:pPr>
             <a:r>
@@ -12000,7 +12226,7 @@
           <a:bodyPr wrap="square" lIns="0" tIns="114300" rIns="114300" bIns="0" rtlCol="0" anchor="ctr"/>
           <a:lstStyle/>
           <a:p>
-            <a:pPr marL="0" indent="0" algn="r">
+            <a:pPr algn="r" indent="0" marL="0">
               <a:buNone/>
             </a:pPr>
             <a:r>
@@ -12039,7 +12265,7 @@
           <a:bodyPr wrap="square" lIns="0" tIns="114300" rIns="114300" bIns="0" rtlCol="0" anchor="ctr"/>
           <a:lstStyle/>
           <a:p>
-            <a:pPr marL="0" indent="0" algn="l">
+            <a:pPr algn="l" indent="0" marL="0">
               <a:buNone/>
             </a:pPr>
             <a:r>
@@ -12065,7 +12291,7 @@
         </p:nvSpPr>
         <p:spPr>
           <a:xfrm>
-            <a:off x="10588350" y="2286446"/>
+            <a:off x="10645500" y="2343596"/>
             <a:ext cx="860412" cy="123825"/>
           </a:xfrm>
           <a:prstGeom prst="rect">
@@ -12078,7 +12304,7 @@
           <a:bodyPr wrap="square" lIns="0" tIns="114300" rIns="114300" bIns="0" rtlCol="0" anchor="ctr"/>
           <a:lstStyle/>
           <a:p>
-            <a:pPr marL="0" indent="0" algn="r">
+            <a:pPr algn="r" indent="0" marL="0">
               <a:buNone/>
             </a:pPr>
             <a:r>
@@ -12104,7 +12330,7 @@
         </p:nvSpPr>
         <p:spPr>
           <a:xfrm>
-            <a:off x="10588350" y="2658219"/>
+            <a:off x="10645500" y="2715369"/>
             <a:ext cx="860412" cy="123825"/>
           </a:xfrm>
           <a:prstGeom prst="rect">
@@ -12117,7 +12343,7 @@
           <a:bodyPr wrap="square" lIns="0" tIns="114300" rIns="114300" bIns="0" rtlCol="0" anchor="ctr"/>
           <a:lstStyle/>
           <a:p>
-            <a:pPr marL="0" indent="0" algn="r">
+            <a:pPr algn="r" indent="0" marL="0">
               <a:buNone/>
             </a:pPr>
             <a:r>
@@ -12143,7 +12369,7 @@
         </p:nvSpPr>
         <p:spPr>
           <a:xfrm>
-            <a:off x="10588350" y="3031182"/>
+            <a:off x="10645500" y="3088332"/>
             <a:ext cx="860412" cy="123825"/>
           </a:xfrm>
           <a:prstGeom prst="rect">
@@ -12156,7 +12382,7 @@
           <a:bodyPr wrap="square" lIns="0" tIns="114300" rIns="114300" bIns="0" rtlCol="0" anchor="ctr"/>
           <a:lstStyle/>
           <a:p>
-            <a:pPr marL="0" indent="0" algn="r">
+            <a:pPr algn="r" indent="0" marL="0">
               <a:buNone/>
             </a:pPr>
             <a:r>
@@ -12195,7 +12421,7 @@
           <a:bodyPr wrap="square" lIns="0" tIns="114300" rIns="114300" bIns="0" rtlCol="0" anchor="ctr"/>
           <a:lstStyle/>
           <a:p>
-            <a:pPr marL="0" indent="0" algn="r">
+            <a:pPr algn="r" indent="0" marL="0">
               <a:buNone/>
             </a:pPr>
             <a:r>
@@ -12234,7 +12460,7 @@
           <a:bodyPr wrap="square" lIns="0" tIns="114300" rIns="114300" bIns="0" rtlCol="0" anchor="ctr"/>
           <a:lstStyle/>
           <a:p>
-            <a:pPr marL="0" indent="0" algn="r">
+            <a:pPr algn="r" indent="0" marL="0">
               <a:buNone/>
             </a:pPr>
             <a:r>
@@ -12273,7 +12499,7 @@
           <a:bodyPr wrap="square" lIns="0" tIns="114300" rIns="114300" bIns="0" rtlCol="0" anchor="ctr"/>
           <a:lstStyle/>
           <a:p>
-            <a:pPr marL="0" indent="0" algn="l">
+            <a:pPr algn="l" indent="0" marL="0">
               <a:buNone/>
             </a:pPr>
             <a:r>
@@ -12312,7 +12538,7 @@
           <a:bodyPr wrap="square" lIns="0" tIns="114300" rIns="114300" bIns="0" rtlCol="0" anchor="ctr"/>
           <a:lstStyle/>
           <a:p>
-            <a:pPr marL="0" indent="0" algn="r">
+            <a:pPr algn="r" indent="0" marL="0">
               <a:buNone/>
             </a:pPr>
             <a:r>
@@ -12338,7 +12564,7 @@
         </p:nvSpPr>
         <p:spPr>
           <a:xfrm>
-            <a:off x="10588350" y="5268069"/>
+            <a:off x="10645500" y="5325219"/>
             <a:ext cx="860412" cy="123825"/>
           </a:xfrm>
           <a:prstGeom prst="rect">
@@ -12351,7 +12577,7 @@
           <a:bodyPr wrap="square" lIns="0" tIns="114300" rIns="114300" bIns="0" rtlCol="0" anchor="ctr"/>
           <a:lstStyle/>
           <a:p>
-            <a:pPr marL="0" indent="0" algn="r">
+            <a:pPr algn="r" indent="0" marL="0">
               <a:buNone/>
             </a:pPr>
             <a:r>
@@ -12390,7 +12616,7 @@
           <a:bodyPr wrap="square" lIns="0" tIns="0" rIns="0" bIns="0" rtlCol="0" anchor="t"/>
           <a:lstStyle/>
           <a:p>
-            <a:pPr marL="0" indent="0" algn="l">
+            <a:pPr algn="l" indent="0" marL="0">
               <a:buNone/>
             </a:pPr>
             <a:r>
@@ -12429,7 +12655,7 @@
           <a:bodyPr wrap="square" lIns="0" tIns="114300" rIns="114300" bIns="0" rtlCol="0" anchor="ctr"/>
           <a:lstStyle/>
           <a:p>
-            <a:pPr marL="0" indent="0" algn="l">
+            <a:pPr algn="l" indent="0" marL="0">
               <a:buNone/>
             </a:pPr>
             <a:r>
@@ -12468,7 +12694,7 @@
           <a:bodyPr wrap="square" lIns="0" tIns="114300" rIns="114300" bIns="0" rtlCol="0" anchor="ctr"/>
           <a:lstStyle/>
           <a:p>
-            <a:pPr marL="0" indent="0" algn="l">
+            <a:pPr algn="l" indent="0" marL="0">
               <a:buNone/>
             </a:pPr>
             <a:r>
@@ -12507,7 +12733,7 @@
           <a:bodyPr wrap="square" lIns="0" tIns="114300" rIns="114300" bIns="0" rtlCol="0" anchor="ctr"/>
           <a:lstStyle/>
           <a:p>
-            <a:pPr marL="0" indent="0" algn="l">
+            <a:pPr algn="l" indent="0" marL="0">
               <a:buNone/>
             </a:pPr>
             <a:r>
@@ -12546,7 +12772,7 @@
           <a:bodyPr wrap="square" lIns="0" tIns="114300" rIns="114300" bIns="0" rtlCol="0" anchor="ctr"/>
           <a:lstStyle/>
           <a:p>
-            <a:pPr marL="0" indent="0" algn="r">
+            <a:pPr algn="r" indent="0" marL="0">
               <a:buNone/>
             </a:pPr>
             <a:r>
@@ -12572,7 +12798,7 @@
         </p:nvSpPr>
         <p:spPr>
           <a:xfrm>
-            <a:off x="4203547" y="2639169"/>
+            <a:off x="4260697" y="2696319"/>
             <a:ext cx="837878" cy="114300"/>
           </a:xfrm>
           <a:prstGeom prst="rect">
@@ -12585,7 +12811,7 @@
           <a:bodyPr wrap="square" lIns="0" tIns="114300" rIns="114300" bIns="0" rtlCol="0" anchor="ctr"/>
           <a:lstStyle/>
           <a:p>
-            <a:pPr marL="0" indent="0" algn="r">
+            <a:pPr algn="r" indent="0" marL="0">
               <a:buNone/>
             </a:pPr>
             <a:r>
@@ -12624,7 +12850,7 @@
           <a:bodyPr wrap="square" lIns="0" tIns="114300" rIns="114300" bIns="0" rtlCol="0" anchor="ctr"/>
           <a:lstStyle/>
           <a:p>
-            <a:pPr marL="0" indent="0" algn="l">
+            <a:pPr algn="l" indent="0" marL="0">
               <a:buNone/>
             </a:pPr>
             <a:r>
@@ -12663,7 +12889,7 @@
           <a:bodyPr wrap="square" lIns="0" tIns="114300" rIns="114300" bIns="0" rtlCol="0" anchor="ctr"/>
           <a:lstStyle/>
           <a:p>
-            <a:pPr marL="0" indent="0" algn="r">
+            <a:pPr algn="r" indent="0" marL="0">
               <a:buNone/>
             </a:pPr>
             <a:r>
@@ -12702,7 +12928,7 @@
           <a:bodyPr wrap="square" lIns="0" tIns="114300" rIns="114300" bIns="0" rtlCol="0" anchor="ctr"/>
           <a:lstStyle/>
           <a:p>
-            <a:pPr marL="0" indent="0" algn="l">
+            <a:pPr algn="l" indent="0" marL="0">
               <a:buNone/>
             </a:pPr>
             <a:r>
@@ -12741,7 +12967,7 @@
           <a:bodyPr wrap="square" lIns="0" tIns="114300" rIns="114300" bIns="0" rtlCol="0" anchor="ctr"/>
           <a:lstStyle/>
           <a:p>
-            <a:pPr marL="0" indent="0" algn="r">
+            <a:pPr algn="r" indent="0" marL="0">
               <a:buNone/>
             </a:pPr>
             <a:r>
@@ -12767,7 +12993,7 @@
         </p:nvSpPr>
         <p:spPr>
           <a:xfrm>
-            <a:off x="4203547" y="3385096"/>
+            <a:off x="4260697" y="3442246"/>
             <a:ext cx="837878" cy="114300"/>
           </a:xfrm>
           <a:prstGeom prst="rect">
@@ -12780,7 +13006,7 @@
           <a:bodyPr wrap="square" lIns="0" tIns="114300" rIns="114300" bIns="0" rtlCol="0" anchor="ctr"/>
           <a:lstStyle/>
           <a:p>
-            <a:pPr marL="0" indent="0" algn="r">
+            <a:pPr algn="r" indent="0" marL="0">
               <a:buNone/>
             </a:pPr>
             <a:r>
@@ -12819,7 +13045,7 @@
           <a:bodyPr wrap="square" lIns="0" tIns="114300" rIns="114300" bIns="0" rtlCol="0" anchor="ctr"/>
           <a:lstStyle/>
           <a:p>
-            <a:pPr marL="0" indent="0" algn="l">
+            <a:pPr algn="l" indent="0" marL="0">
               <a:buNone/>
             </a:pPr>
             <a:r>
@@ -12858,7 +13084,7 @@
           <a:bodyPr wrap="square" lIns="0" tIns="114300" rIns="114300" bIns="0" rtlCol="0" anchor="ctr"/>
           <a:lstStyle/>
           <a:p>
-            <a:pPr marL="0" indent="0" algn="r">
+            <a:pPr algn="r" indent="0" marL="0">
               <a:buNone/>
             </a:pPr>
             <a:r>
@@ -12884,7 +13110,7 @@
         </p:nvSpPr>
         <p:spPr>
           <a:xfrm>
-            <a:off x="5016365" y="3777109"/>
+            <a:off x="5073515" y="3834259"/>
             <a:ext cx="860412" cy="123825"/>
           </a:xfrm>
           <a:prstGeom prst="rect">
@@ -12897,7 +13123,7 @@
           <a:bodyPr wrap="square" lIns="0" tIns="114300" rIns="114300" bIns="0" rtlCol="0" anchor="ctr"/>
           <a:lstStyle/>
           <a:p>
-            <a:pPr marL="0" indent="0" algn="r">
+            <a:pPr algn="r" indent="0" marL="0">
               <a:buNone/>
             </a:pPr>
             <a:r>
@@ -12936,7 +13162,7 @@
           <a:bodyPr wrap="square" lIns="0" tIns="114300" rIns="114300" bIns="0" rtlCol="0" anchor="ctr"/>
           <a:lstStyle/>
           <a:p>
-            <a:pPr marL="0" indent="0" algn="l">
+            <a:pPr algn="l" indent="0" marL="0">
               <a:buNone/>
             </a:pPr>
             <a:r>
@@ -12975,7 +13201,7 @@
           <a:bodyPr wrap="square" lIns="0" tIns="114300" rIns="114300" bIns="0" rtlCol="0" anchor="ctr"/>
           <a:lstStyle/>
           <a:p>
-            <a:pPr marL="0" indent="0" algn="r">
+            <a:pPr algn="r" indent="0" marL="0">
               <a:buNone/>
             </a:pPr>
             <a:r>
@@ -13001,7 +13227,7 @@
         </p:nvSpPr>
         <p:spPr>
           <a:xfrm>
-            <a:off x="5016365" y="4150072"/>
+            <a:off x="5073515" y="4207222"/>
             <a:ext cx="860412" cy="123825"/>
           </a:xfrm>
           <a:prstGeom prst="rect">
@@ -13014,7 +13240,7 @@
           <a:bodyPr wrap="square" lIns="0" tIns="114300" rIns="114300" bIns="0" rtlCol="0" anchor="ctr"/>
           <a:lstStyle/>
           <a:p>
-            <a:pPr marL="0" indent="0" algn="r">
+            <a:pPr algn="r" indent="0" marL="0">
               <a:buNone/>
             </a:pPr>
             <a:r>
@@ -13053,7 +13279,7 @@
           <a:bodyPr wrap="square" lIns="0" tIns="114300" rIns="114300" bIns="0" rtlCol="0" anchor="ctr"/>
           <a:lstStyle/>
           <a:p>
-            <a:pPr marL="0" indent="0" algn="l">
+            <a:pPr algn="l" indent="0" marL="0">
               <a:buNone/>
             </a:pPr>
             <a:r>
@@ -13092,7 +13318,7 @@
           <a:bodyPr wrap="square" lIns="0" tIns="114300" rIns="114300" bIns="0" rtlCol="0" anchor="ctr"/>
           <a:lstStyle/>
           <a:p>
-            <a:pPr marL="0" indent="0" algn="r">
+            <a:pPr algn="r" indent="0" marL="0">
               <a:buNone/>
             </a:pPr>
             <a:r>
@@ -13118,7 +13344,7 @@
         </p:nvSpPr>
         <p:spPr>
           <a:xfrm>
-            <a:off x="4203547" y="4503986"/>
+            <a:off x="4260697" y="4561136"/>
             <a:ext cx="837878" cy="114300"/>
           </a:xfrm>
           <a:prstGeom prst="rect">
@@ -13131,7 +13357,7 @@
           <a:bodyPr wrap="square" lIns="0" tIns="114300" rIns="114300" bIns="0" rtlCol="0" anchor="ctr"/>
           <a:lstStyle/>
           <a:p>
-            <a:pPr marL="0" indent="0" algn="r">
+            <a:pPr algn="r" indent="0" marL="0">
               <a:buNone/>
             </a:pPr>
             <a:r>
@@ -13157,7 +13383,7 @@
         </p:nvSpPr>
         <p:spPr>
           <a:xfrm>
-            <a:off x="5016365" y="4523036"/>
+            <a:off x="5073515" y="4580186"/>
             <a:ext cx="860412" cy="123825"/>
           </a:xfrm>
           <a:prstGeom prst="rect">
@@ -13170,7 +13396,7 @@
           <a:bodyPr wrap="square" lIns="0" tIns="114300" rIns="114300" bIns="0" rtlCol="0" anchor="ctr"/>
           <a:lstStyle/>
           <a:p>
-            <a:pPr marL="0" indent="0" algn="r">
+            <a:pPr algn="r" indent="0" marL="0">
               <a:buNone/>
             </a:pPr>
             <a:r>
@@ -13209,7 +13435,7 @@
           <a:bodyPr wrap="square" lIns="0" tIns="114300" rIns="114300" bIns="0" rtlCol="0" anchor="ctr"/>
           <a:lstStyle/>
           <a:p>
-            <a:pPr marL="0" indent="0" algn="l">
+            <a:pPr algn="l" indent="0" marL="0">
               <a:buNone/>
             </a:pPr>
             <a:r>
@@ -13248,7 +13474,7 @@
           <a:bodyPr wrap="square" lIns="0" tIns="114300" rIns="114300" bIns="0" rtlCol="0" anchor="ctr"/>
           <a:lstStyle/>
           <a:p>
-            <a:pPr marL="0" indent="0" algn="r">
+            <a:pPr algn="r" indent="0" marL="0">
               <a:buNone/>
             </a:pPr>
             <a:r>
@@ -13274,7 +13500,7 @@
         </p:nvSpPr>
         <p:spPr>
           <a:xfrm>
-            <a:off x="5016365" y="4895999"/>
+            <a:off x="5073515" y="4953149"/>
             <a:ext cx="860412" cy="123825"/>
           </a:xfrm>
           <a:prstGeom prst="rect">
@@ -13287,7 +13513,7 @@
           <a:bodyPr wrap="square" lIns="0" tIns="114300" rIns="114300" bIns="0" rtlCol="0" anchor="ctr"/>
           <a:lstStyle/>
           <a:p>
-            <a:pPr marL="0" indent="0" algn="r">
+            <a:pPr algn="r" indent="0" marL="0">
               <a:buNone/>
             </a:pPr>
             <a:r>
@@ -13326,7 +13552,7 @@
           <a:bodyPr wrap="square" lIns="0" tIns="114300" rIns="114300" bIns="0" rtlCol="0" anchor="ctr"/>
           <a:lstStyle/>
           <a:p>
-            <a:pPr marL="0" indent="0" algn="r">
+            <a:pPr algn="r" indent="0" marL="0">
               <a:buNone/>
             </a:pPr>
             <a:r>
@@ -13365,7 +13591,7 @@
           <a:bodyPr wrap="square" lIns="0" tIns="114300" rIns="114300" bIns="0" rtlCol="0" anchor="ctr"/>
           <a:lstStyle/>
           <a:p>
-            <a:pPr marL="0" indent="0" algn="r">
+            <a:pPr algn="r" indent="0" marL="0">
               <a:buNone/>
             </a:pPr>
             <a:r>
@@ -13404,7 +13630,7 @@
           <a:bodyPr wrap="square" lIns="0" tIns="114300" rIns="114300" bIns="0" rtlCol="0" anchor="ctr"/>
           <a:lstStyle/>
           <a:p>
-            <a:pPr marL="0" indent="0" algn="r">
+            <a:pPr algn="r" indent="0" marL="0">
               <a:buNone/>
             </a:pPr>
             <a:r>
@@ -13443,7 +13669,7 @@
           <a:bodyPr wrap="square" lIns="0" tIns="114300" rIns="114300" bIns="0" rtlCol="0" anchor="ctr"/>
           <a:lstStyle/>
           <a:p>
-            <a:pPr marL="0" indent="0" algn="l">
+            <a:pPr algn="l" indent="0" marL="0">
               <a:buNone/>
             </a:pPr>
             <a:r>
@@ -13482,7 +13708,7 @@
           <a:bodyPr wrap="square" lIns="0" tIns="114300" rIns="114300" bIns="0" rtlCol="0" anchor="ctr"/>
           <a:lstStyle/>
           <a:p>
-            <a:pPr marL="0" indent="0" algn="l">
+            <a:pPr algn="l" indent="0" marL="0">
               <a:buNone/>
             </a:pPr>
             <a:r>
@@ -13521,7 +13747,7 @@
           <a:bodyPr wrap="square" lIns="0" tIns="114300" rIns="114300" bIns="0" rtlCol="0" anchor="ctr"/>
           <a:lstStyle/>
           <a:p>
-            <a:pPr marL="0" indent="0" algn="r">
+            <a:pPr algn="r" indent="0" marL="0">
               <a:buNone/>
             </a:pPr>
             <a:r>
@@ -13560,7 +13786,7 @@
           <a:bodyPr wrap="square" lIns="0" tIns="114300" rIns="114300" bIns="0" rtlCol="0" anchor="ctr"/>
           <a:lstStyle/>
           <a:p>
-            <a:pPr marL="0" indent="0" algn="l">
+            <a:pPr algn="l" indent="0" marL="0">
               <a:buNone/>
             </a:pPr>
             <a:r>
@@ -13599,7 +13825,7 @@
           <a:bodyPr wrap="square" lIns="0" tIns="114300" rIns="114300" bIns="0" rtlCol="0" anchor="ctr"/>
           <a:lstStyle/>
           <a:p>
-            <a:pPr marL="0" indent="0" algn="r">
+            <a:pPr algn="r" indent="0" marL="0">
               <a:buNone/>
             </a:pPr>
             <a:r>
@@ -13638,7 +13864,7 @@
           <a:bodyPr wrap="square" lIns="0" tIns="114300" rIns="114300" bIns="0" rtlCol="0" anchor="ctr"/>
           <a:lstStyle/>
           <a:p>
-            <a:pPr marL="0" indent="0" algn="l">
+            <a:pPr algn="l" indent="0" marL="0">
               <a:buNone/>
             </a:pPr>
             <a:r>
@@ -13677,7 +13903,7 @@
           <a:bodyPr wrap="square" lIns="0" tIns="114300" rIns="114300" bIns="0" rtlCol="0" anchor="ctr"/>
           <a:lstStyle/>
           <a:p>
-            <a:pPr marL="0" indent="0" algn="r">
+            <a:pPr algn="r" indent="0" marL="0">
               <a:buNone/>
             </a:pPr>
             <a:r>
@@ -13716,7 +13942,7 @@
           <a:bodyPr wrap="square" lIns="0" tIns="114300" rIns="114300" bIns="0" rtlCol="0" anchor="ctr"/>
           <a:lstStyle/>
           <a:p>
-            <a:pPr marL="0" indent="0" algn="l">
+            <a:pPr algn="l" indent="0" marL="0">
               <a:buNone/>
             </a:pPr>
             <a:r>
@@ -13755,7 +13981,7 @@
           <a:bodyPr wrap="square" lIns="0" tIns="114300" rIns="114300" bIns="0" rtlCol="0" anchor="ctr"/>
           <a:lstStyle/>
           <a:p>
-            <a:pPr marL="0" indent="0" algn="r">
+            <a:pPr algn="r" indent="0" marL="0">
               <a:buNone/>
             </a:pPr>
             <a:r>
@@ -13781,7 +14007,7 @@
         </p:nvSpPr>
         <p:spPr>
           <a:xfrm>
-            <a:off x="10588350" y="3404146"/>
+            <a:off x="10645500" y="3461296"/>
             <a:ext cx="860412" cy="123825"/>
           </a:xfrm>
           <a:prstGeom prst="rect">
@@ -13794,7 +14020,7 @@
           <a:bodyPr wrap="square" lIns="0" tIns="114300" rIns="114300" bIns="0" rtlCol="0" anchor="ctr"/>
           <a:lstStyle/>
           <a:p>
-            <a:pPr marL="0" indent="0" algn="r">
+            <a:pPr algn="r" indent="0" marL="0">
               <a:buNone/>
             </a:pPr>
             <a:r>
@@ -13833,7 +14059,7 @@
           <a:bodyPr wrap="square" lIns="0" tIns="114300" rIns="114300" bIns="0" rtlCol="0" anchor="ctr"/>
           <a:lstStyle/>
           <a:p>
-            <a:pPr marL="0" indent="0" algn="l">
+            <a:pPr algn="l" indent="0" marL="0">
               <a:buNone/>
             </a:pPr>
             <a:r>
@@ -13872,7 +14098,7 @@
           <a:bodyPr wrap="square" lIns="0" tIns="114300" rIns="114300" bIns="0" rtlCol="0" anchor="ctr"/>
           <a:lstStyle/>
           <a:p>
-            <a:pPr marL="0" indent="0" algn="r">
+            <a:pPr algn="r" indent="0" marL="0">
               <a:buNone/>
             </a:pPr>
             <a:r>
@@ -13898,7 +14124,7 @@
         </p:nvSpPr>
         <p:spPr>
           <a:xfrm>
-            <a:off x="10588350" y="3777109"/>
+            <a:off x="10645500" y="3834259"/>
             <a:ext cx="860412" cy="123825"/>
           </a:xfrm>
           <a:prstGeom prst="rect">
@@ -13911,7 +14137,7 @@
           <a:bodyPr wrap="square" lIns="0" tIns="114300" rIns="114300" bIns="0" rtlCol="0" anchor="ctr"/>
           <a:lstStyle/>
           <a:p>
-            <a:pPr marL="0" indent="0" algn="r">
+            <a:pPr algn="r" indent="0" marL="0">
               <a:buNone/>
             </a:pPr>
             <a:r>
@@ -13950,7 +14176,7 @@
           <a:bodyPr wrap="square" lIns="0" tIns="114300" rIns="114300" bIns="0" rtlCol="0" anchor="ctr"/>
           <a:lstStyle/>
           <a:p>
-            <a:pPr marL="0" indent="0" algn="l">
+            <a:pPr algn="l" indent="0" marL="0">
               <a:buNone/>
             </a:pPr>
             <a:r>
@@ -13976,7 +14202,7 @@
         </p:nvSpPr>
         <p:spPr>
           <a:xfrm>
-            <a:off x="10588350" y="4150072"/>
+            <a:off x="10645500" y="4207222"/>
             <a:ext cx="860412" cy="123825"/>
           </a:xfrm>
           <a:prstGeom prst="rect">
@@ -13989,7 +14215,7 @@
           <a:bodyPr wrap="square" lIns="0" tIns="114300" rIns="114300" bIns="0" rtlCol="0" anchor="ctr"/>
           <a:lstStyle/>
           <a:p>
-            <a:pPr marL="0" indent="0" algn="r">
+            <a:pPr algn="r" indent="0" marL="0">
               <a:buNone/>
             </a:pPr>
             <a:r>
@@ -14028,7 +14254,7 @@
           <a:bodyPr wrap="square" lIns="0" tIns="114300" rIns="114300" bIns="0" rtlCol="0" anchor="ctr"/>
           <a:lstStyle/>
           <a:p>
-            <a:pPr marL="0" indent="0" algn="l">
+            <a:pPr algn="l" indent="0" marL="0">
               <a:buNone/>
             </a:pPr>
             <a:r>
@@ -14054,7 +14280,7 @@
         </p:nvSpPr>
         <p:spPr>
           <a:xfrm>
-            <a:off x="10588350" y="4523036"/>
+            <a:off x="10645500" y="4580186"/>
             <a:ext cx="860412" cy="123825"/>
           </a:xfrm>
           <a:prstGeom prst="rect">
@@ -14067,7 +14293,7 @@
           <a:bodyPr wrap="square" lIns="0" tIns="114300" rIns="114300" bIns="0" rtlCol="0" anchor="ctr"/>
           <a:lstStyle/>
           <a:p>
-            <a:pPr marL="0" indent="0" algn="r">
+            <a:pPr algn="r" indent="0" marL="0">
               <a:buNone/>
             </a:pPr>
             <a:r>
@@ -14106,7 +14332,7 @@
           <a:bodyPr wrap="square" lIns="0" tIns="114300" rIns="114300" bIns="0" rtlCol="0" anchor="ctr"/>
           <a:lstStyle/>
           <a:p>
-            <a:pPr marL="0" indent="0" algn="l">
+            <a:pPr algn="l" indent="0" marL="0">
               <a:buNone/>
             </a:pPr>
             <a:r>
@@ -14132,7 +14358,7 @@
         </p:nvSpPr>
         <p:spPr>
           <a:xfrm>
-            <a:off x="10588350" y="4895999"/>
+            <a:off x="10645500" y="4953149"/>
             <a:ext cx="860412" cy="123825"/>
           </a:xfrm>
           <a:prstGeom prst="rect">
@@ -14145,7 +14371,7 @@
           <a:bodyPr wrap="square" lIns="0" tIns="114300" rIns="114300" bIns="0" rtlCol="0" anchor="ctr"/>
           <a:lstStyle/>
           <a:p>
-            <a:pPr marL="0" indent="0" algn="r">
+            <a:pPr algn="r" indent="0" marL="0">
               <a:buNone/>
             </a:pPr>
             <a:r>
@@ -14184,7 +14410,7 @@
           <a:bodyPr wrap="square" lIns="0" tIns="114300" rIns="114300" bIns="0" rtlCol="0" anchor="ctr"/>
           <a:lstStyle/>
           <a:p>
-            <a:pPr marL="0" indent="0" algn="r">
+            <a:pPr algn="r" indent="0" marL="0">
               <a:buNone/>
             </a:pPr>
             <a:r>
@@ -14223,7 +14449,7 @@
           <a:bodyPr wrap="square" lIns="0" tIns="114300" rIns="114300" bIns="0" rtlCol="0" anchor="ctr"/>
           <a:lstStyle/>
           <a:p>
-            <a:pPr marL="0" indent="0" algn="r">
+            <a:pPr algn="r" indent="0" marL="0">
               <a:buNone/>
             </a:pPr>
             <a:r>
@@ -14262,7 +14488,7 @@
           <a:bodyPr wrap="square" lIns="0" tIns="114300" rIns="114300" bIns="0" rtlCol="0" anchor="ctr"/>
           <a:lstStyle/>
           <a:p>
-            <a:pPr marL="0" indent="0" algn="r">
+            <a:pPr algn="r" indent="0" marL="0">
               <a:buNone/>
             </a:pPr>
             <a:r>
@@ -14301,7 +14527,7 @@
           <a:bodyPr wrap="square" lIns="0" tIns="114300" rIns="114300" bIns="0" rtlCol="0" anchor="ctr"/>
           <a:lstStyle/>
           <a:p>
-            <a:pPr marL="0" indent="0" algn="r">
+            <a:pPr algn="r" indent="0" marL="0">
               <a:buNone/>
             </a:pPr>
             <a:r>
@@ -14340,7 +14566,7 @@
           <a:bodyPr wrap="square" lIns="0" tIns="0" rIns="0" bIns="0" rtlCol="0" anchor="t"/>
           <a:lstStyle/>
           <a:p>
-            <a:pPr marL="0" indent="0" algn="l">
+            <a:pPr algn="l" indent="0" marL="0">
               <a:buNone/>
             </a:pPr>
             <a:r>
@@ -14379,7 +14605,7 @@
           <a:bodyPr wrap="square" lIns="0" tIns="0" rIns="0" bIns="0" rtlCol="0" anchor="t"/>
           <a:lstStyle/>
           <a:p>
-            <a:pPr marL="0" indent="0" algn="l">
+            <a:pPr algn="l" indent="0" marL="0">
               <a:buNone/>
             </a:pPr>
             <a:r>
@@ -14418,7 +14644,7 @@
           <a:bodyPr wrap="square" lIns="0" tIns="114300" rIns="114300" bIns="0" rtlCol="0" anchor="ctr"/>
           <a:lstStyle/>
           <a:p>
-            <a:pPr marL="0" indent="0" algn="r">
+            <a:pPr algn="r" indent="0" marL="0">
               <a:buNone/>
             </a:pPr>
             <a:r>
@@ -14457,7 +14683,7 @@
           <a:bodyPr wrap="square" lIns="0" tIns="114300" rIns="114300" bIns="0" rtlCol="0" anchor="ctr"/>
           <a:lstStyle/>
           <a:p>
-            <a:pPr marL="0" indent="0" algn="r">
+            <a:pPr algn="r" indent="0" marL="0">
               <a:buNone/>
             </a:pPr>
             <a:r>
@@ -14483,7 +14709,7 @@
         </p:nvSpPr>
         <p:spPr>
           <a:xfrm>
-            <a:off x="4203547" y="2267396"/>
+            <a:off x="4260697" y="2324546"/>
             <a:ext cx="837878" cy="114300"/>
           </a:xfrm>
           <a:prstGeom prst="rect">
@@ -14496,7 +14722,7 @@
           <a:bodyPr wrap="square" lIns="0" tIns="114300" rIns="114300" bIns="0" rtlCol="0" anchor="ctr"/>
           <a:lstStyle/>
           <a:p>
-            <a:pPr marL="0" indent="0" algn="r">
+            <a:pPr algn="r" indent="0" marL="0">
               <a:buNone/>
             </a:pPr>
             <a:r>
@@ -14535,7 +14761,7 @@
           <a:bodyPr wrap="square" lIns="0" tIns="114300" rIns="114300" bIns="0" rtlCol="0" anchor="ctr"/>
           <a:lstStyle/>
           <a:p>
-            <a:pPr marL="0" indent="0" algn="r">
+            <a:pPr algn="r" indent="0" marL="0">
               <a:buNone/>
             </a:pPr>
             <a:r>
@@ -14574,7 +14800,7 @@
           <a:bodyPr wrap="square" lIns="0" tIns="114300" rIns="114300" bIns="0" rtlCol="0" anchor="ctr"/>
           <a:lstStyle/>
           <a:p>
-            <a:pPr marL="0" indent="0" algn="r">
+            <a:pPr algn="r" indent="0" marL="0">
               <a:buNone/>
             </a:pPr>
             <a:r>
@@ -14600,7 +14826,7 @@
         </p:nvSpPr>
         <p:spPr>
           <a:xfrm>
-            <a:off x="4203547" y="3012132"/>
+            <a:off x="4260697" y="3069282"/>
             <a:ext cx="837878" cy="114300"/>
           </a:xfrm>
           <a:prstGeom prst="rect">
@@ -14613,7 +14839,7 @@
           <a:bodyPr wrap="square" lIns="0" tIns="114300" rIns="114300" bIns="0" rtlCol="0" anchor="ctr"/>
           <a:lstStyle/>
           <a:p>
-            <a:pPr marL="0" indent="0" algn="r">
+            <a:pPr algn="r" indent="0" marL="0">
               <a:buNone/>
             </a:pPr>
             <a:r>
@@ -14652,7 +14878,7 @@
           <a:bodyPr wrap="square" lIns="0" tIns="114300" rIns="114300" bIns="0" rtlCol="0" anchor="ctr"/>
           <a:lstStyle/>
           <a:p>
-            <a:pPr marL="0" indent="0" algn="r">
+            <a:pPr algn="r" indent="0" marL="0">
               <a:buNone/>
             </a:pPr>
             <a:r>
@@ -14691,7 +14917,7 @@
           <a:bodyPr wrap="square" lIns="0" tIns="114300" rIns="114300" bIns="0" rtlCol="0" anchor="ctr"/>
           <a:lstStyle/>
           <a:p>
-            <a:pPr marL="0" indent="0" algn="r">
+            <a:pPr algn="r" indent="0" marL="0">
               <a:buNone/>
             </a:pPr>
             <a:r>
@@ -14730,7 +14956,7 @@
           <a:bodyPr wrap="square" lIns="0" tIns="114300" rIns="114300" bIns="0" rtlCol="0" anchor="ctr"/>
           <a:lstStyle/>
           <a:p>
-            <a:pPr marL="0" indent="0" algn="r">
+            <a:pPr algn="r" indent="0" marL="0">
               <a:buNone/>
             </a:pPr>
             <a:r>
@@ -14756,7 +14982,7 @@
         </p:nvSpPr>
         <p:spPr>
           <a:xfrm>
-            <a:off x="4203547" y="3758059"/>
+            <a:off x="4260697" y="3815209"/>
             <a:ext cx="837878" cy="114300"/>
           </a:xfrm>
           <a:prstGeom prst="rect">
@@ -14769,7 +14995,7 @@
           <a:bodyPr wrap="square" lIns="0" tIns="114300" rIns="114300" bIns="0" rtlCol="0" anchor="ctr"/>
           <a:lstStyle/>
           <a:p>
-            <a:pPr marL="0" indent="0" algn="r">
+            <a:pPr algn="r" indent="0" marL="0">
               <a:buNone/>
             </a:pPr>
             <a:r>
@@ -14808,7 +15034,7 @@
           <a:bodyPr wrap="square" lIns="0" tIns="114300" rIns="114300" bIns="0" rtlCol="0" anchor="ctr"/>
           <a:lstStyle/>
           <a:p>
-            <a:pPr marL="0" indent="0" algn="r">
+            <a:pPr algn="r" indent="0" marL="0">
               <a:buNone/>
             </a:pPr>
             <a:r>
@@ -14847,7 +15073,7 @@
           <a:bodyPr wrap="square" lIns="0" tIns="114300" rIns="114300" bIns="0" rtlCol="0" anchor="ctr"/>
           <a:lstStyle/>
           <a:p>
-            <a:pPr marL="0" indent="0" algn="r">
+            <a:pPr algn="r" indent="0" marL="0">
               <a:buNone/>
             </a:pPr>
             <a:r>
@@ -14873,7 +15099,7 @@
         </p:nvSpPr>
         <p:spPr>
           <a:xfrm>
-            <a:off x="4203547" y="4131022"/>
+            <a:off x="4260697" y="4188172"/>
             <a:ext cx="837878" cy="114300"/>
           </a:xfrm>
           <a:prstGeom prst="rect">
@@ -14886,7 +15112,7 @@
           <a:bodyPr wrap="square" lIns="0" tIns="114300" rIns="114300" bIns="0" rtlCol="0" anchor="ctr"/>
           <a:lstStyle/>
           <a:p>
-            <a:pPr marL="0" indent="0" algn="r">
+            <a:pPr algn="r" indent="0" marL="0">
               <a:buNone/>
             </a:pPr>
             <a:r>
@@ -14925,7 +15151,7 @@
           <a:bodyPr wrap="square" lIns="0" tIns="114300" rIns="114300" bIns="0" rtlCol="0" anchor="ctr"/>
           <a:lstStyle/>
           <a:p>
-            <a:pPr marL="0" indent="0" algn="r">
+            <a:pPr algn="r" indent="0" marL="0">
               <a:buNone/>
             </a:pPr>
             <a:r>
@@ -14964,7 +15190,7 @@
           <a:bodyPr wrap="square" lIns="0" tIns="114300" rIns="114300" bIns="0" rtlCol="0" anchor="ctr"/>
           <a:lstStyle/>
           <a:p>
-            <a:pPr marL="0" indent="0" algn="r">
+            <a:pPr algn="r" indent="0" marL="0">
               <a:buNone/>
             </a:pPr>
             <a:r>
@@ -15003,7 +15229,7 @@
           <a:bodyPr wrap="square" lIns="0" tIns="114300" rIns="114300" bIns="0" rtlCol="0" anchor="ctr"/>
           <a:lstStyle/>
           <a:p>
-            <a:pPr marL="0" indent="0" algn="r">
+            <a:pPr algn="r" indent="0" marL="0">
               <a:buNone/>
             </a:pPr>
             <a:r>
@@ -15042,7 +15268,7 @@
           <a:bodyPr wrap="square" lIns="0" tIns="114300" rIns="114300" bIns="0" rtlCol="0" anchor="ctr"/>
           <a:lstStyle/>
           <a:p>
-            <a:pPr marL="0" indent="0" algn="r">
+            <a:pPr algn="r" indent="0" marL="0">
               <a:buNone/>
             </a:pPr>
             <a:r>
@@ -15081,7 +15307,7 @@
           <a:bodyPr wrap="square" lIns="0" tIns="114300" rIns="114300" bIns="0" rtlCol="0" anchor="ctr"/>
           <a:lstStyle/>
           <a:p>
-            <a:pPr marL="0" indent="0" algn="r">
+            <a:pPr algn="r" indent="0" marL="0">
               <a:buNone/>
             </a:pPr>
             <a:r>
@@ -15120,7 +15346,7 @@
           <a:bodyPr wrap="square" lIns="0" tIns="114300" rIns="114300" bIns="0" rtlCol="0" anchor="ctr"/>
           <a:lstStyle/>
           <a:p>
-            <a:pPr marL="0" indent="0" algn="r">
+            <a:pPr algn="r" indent="0" marL="0">
               <a:buNone/>
             </a:pPr>
             <a:r>
@@ -15159,7 +15385,7 @@
           <a:bodyPr wrap="square" lIns="0" tIns="114300" rIns="114300" bIns="0" rtlCol="0" anchor="ctr"/>
           <a:lstStyle/>
           <a:p>
-            <a:pPr marL="0" indent="0" algn="r">
+            <a:pPr algn="r" indent="0" marL="0">
               <a:buNone/>
             </a:pPr>
             <a:r>
@@ -15185,7 +15411,7 @@
         </p:nvSpPr>
         <p:spPr>
           <a:xfrm>
-            <a:off x="9775533" y="2267396"/>
+            <a:off x="9832683" y="2324546"/>
             <a:ext cx="837878" cy="114300"/>
           </a:xfrm>
           <a:prstGeom prst="rect">
@@ -15198,7 +15424,7 @@
           <a:bodyPr wrap="square" lIns="0" tIns="114300" rIns="114300" bIns="0" rtlCol="0" anchor="ctr"/>
           <a:lstStyle/>
           <a:p>
-            <a:pPr marL="0" indent="0" algn="r">
+            <a:pPr algn="r" indent="0" marL="0">
               <a:buNone/>
             </a:pPr>
             <a:r>
@@ -15237,7 +15463,7 @@
           <a:bodyPr wrap="square" lIns="0" tIns="114300" rIns="114300" bIns="0" rtlCol="0" anchor="ctr"/>
           <a:lstStyle/>
           <a:p>
-            <a:pPr marL="0" indent="0" algn="r">
+            <a:pPr algn="r" indent="0" marL="0">
               <a:buNone/>
             </a:pPr>
             <a:r>
@@ -15276,7 +15502,7 @@
           <a:bodyPr wrap="square" lIns="0" tIns="114300" rIns="114300" bIns="0" rtlCol="0" anchor="ctr"/>
           <a:lstStyle/>
           <a:p>
-            <a:pPr marL="0" indent="0" algn="r">
+            <a:pPr algn="r" indent="0" marL="0">
               <a:buNone/>
             </a:pPr>
             <a:r>
@@ -15302,7 +15528,7 @@
         </p:nvSpPr>
         <p:spPr>
           <a:xfrm>
-            <a:off x="9775533" y="2639169"/>
+            <a:off x="9832683" y="2696319"/>
             <a:ext cx="837878" cy="114300"/>
           </a:xfrm>
           <a:prstGeom prst="rect">
@@ -15315,7 +15541,7 @@
           <a:bodyPr wrap="square" lIns="0" tIns="114300" rIns="114300" bIns="0" rtlCol="0" anchor="ctr"/>
           <a:lstStyle/>
           <a:p>
-            <a:pPr marL="0" indent="0" algn="r">
+            <a:pPr algn="r" indent="0" marL="0">
               <a:buNone/>
             </a:pPr>
             <a:r>
@@ -15354,7 +15580,7 @@
           <a:bodyPr wrap="square" lIns="0" tIns="114300" rIns="114300" bIns="0" rtlCol="0" anchor="ctr"/>
           <a:lstStyle/>
           <a:p>
-            <a:pPr marL="0" indent="0" algn="r">
+            <a:pPr algn="r" indent="0" marL="0">
               <a:buNone/>
             </a:pPr>
             <a:r>
@@ -15393,7 +15619,7 @@
           <a:bodyPr wrap="square" lIns="0" tIns="114300" rIns="114300" bIns="0" rtlCol="0" anchor="ctr"/>
           <a:lstStyle/>
           <a:p>
-            <a:pPr marL="0" indent="0" algn="r">
+            <a:pPr algn="r" indent="0" marL="0">
               <a:buNone/>
             </a:pPr>
             <a:r>
@@ -15419,7 +15645,7 @@
         </p:nvSpPr>
         <p:spPr>
           <a:xfrm>
-            <a:off x="9775533" y="3012132"/>
+            <a:off x="9832683" y="3069282"/>
             <a:ext cx="837878" cy="114300"/>
           </a:xfrm>
           <a:prstGeom prst="rect">
@@ -15432,7 +15658,7 @@
           <a:bodyPr wrap="square" lIns="0" tIns="114300" rIns="114300" bIns="0" rtlCol="0" anchor="ctr"/>
           <a:lstStyle/>
           <a:p>
-            <a:pPr marL="0" indent="0" algn="r">
+            <a:pPr algn="r" indent="0" marL="0">
               <a:buNone/>
             </a:pPr>
             <a:r>
@@ -15471,7 +15697,7 @@
           <a:bodyPr wrap="square" lIns="0" tIns="114300" rIns="114300" bIns="0" rtlCol="0" anchor="ctr"/>
           <a:lstStyle/>
           <a:p>
-            <a:pPr marL="0" indent="0" algn="r">
+            <a:pPr algn="r" indent="0" marL="0">
               <a:buNone/>
             </a:pPr>
             <a:r>
@@ -15510,7 +15736,7 @@
           <a:bodyPr wrap="square" lIns="0" tIns="114300" rIns="114300" bIns="0" rtlCol="0" anchor="ctr"/>
           <a:lstStyle/>
           <a:p>
-            <a:pPr marL="0" indent="0" algn="r">
+            <a:pPr algn="r" indent="0" marL="0">
               <a:buNone/>
             </a:pPr>
             <a:r>
@@ -15536,7 +15762,7 @@
         </p:nvSpPr>
         <p:spPr>
           <a:xfrm>
-            <a:off x="9775533" y="3385096"/>
+            <a:off x="9832683" y="3442246"/>
             <a:ext cx="837878" cy="114300"/>
           </a:xfrm>
           <a:prstGeom prst="rect">
@@ -15549,7 +15775,7 @@
           <a:bodyPr wrap="square" lIns="0" tIns="114300" rIns="114300" bIns="0" rtlCol="0" anchor="ctr"/>
           <a:lstStyle/>
           <a:p>
-            <a:pPr marL="0" indent="0" algn="r">
+            <a:pPr algn="r" indent="0" marL="0">
               <a:buNone/>
             </a:pPr>
             <a:r>
@@ -15588,7 +15814,7 @@
           <a:bodyPr wrap="square" lIns="0" tIns="114300" rIns="114300" bIns="0" rtlCol="0" anchor="ctr"/>
           <a:lstStyle/>
           <a:p>
-            <a:pPr marL="0" indent="0" algn="r">
+            <a:pPr algn="r" indent="0" marL="0">
               <a:buNone/>
             </a:pPr>
             <a:r>
@@ -15627,7 +15853,7 @@
           <a:bodyPr wrap="square" lIns="0" tIns="114300" rIns="114300" bIns="0" rtlCol="0" anchor="ctr"/>
           <a:lstStyle/>
           <a:p>
-            <a:pPr marL="0" indent="0" algn="r">
+            <a:pPr algn="r" indent="0" marL="0">
               <a:buNone/>
             </a:pPr>
             <a:r>
@@ -15653,7 +15879,7 @@
         </p:nvSpPr>
         <p:spPr>
           <a:xfrm>
-            <a:off x="9775533" y="3758059"/>
+            <a:off x="9832683" y="3815209"/>
             <a:ext cx="837878" cy="114300"/>
           </a:xfrm>
           <a:prstGeom prst="rect">
@@ -15666,7 +15892,7 @@
           <a:bodyPr wrap="square" lIns="0" tIns="114300" rIns="114300" bIns="0" rtlCol="0" anchor="ctr"/>
           <a:lstStyle/>
           <a:p>
-            <a:pPr marL="0" indent="0" algn="r">
+            <a:pPr algn="r" indent="0" marL="0">
               <a:buNone/>
             </a:pPr>
             <a:r>
@@ -15705,7 +15931,7 @@
           <a:bodyPr wrap="square" lIns="0" tIns="114300" rIns="114300" bIns="0" rtlCol="0" anchor="ctr"/>
           <a:lstStyle/>
           <a:p>
-            <a:pPr marL="0" indent="0" algn="r">
+            <a:pPr algn="r" indent="0" marL="0">
               <a:buNone/>
             </a:pPr>
             <a:r>
@@ -15744,7 +15970,7 @@
           <a:bodyPr wrap="square" lIns="0" tIns="114300" rIns="114300" bIns="0" rtlCol="0" anchor="ctr"/>
           <a:lstStyle/>
           <a:p>
-            <a:pPr marL="0" indent="0" algn="r">
+            <a:pPr algn="r" indent="0" marL="0">
               <a:buNone/>
             </a:pPr>
             <a:r>
@@ -15783,7 +16009,7 @@
           <a:bodyPr wrap="square" lIns="0" tIns="114300" rIns="114300" bIns="0" rtlCol="0" anchor="ctr"/>
           <a:lstStyle/>
           <a:p>
-            <a:pPr marL="0" indent="0" algn="r">
+            <a:pPr algn="r" indent="0" marL="0">
               <a:buNone/>
             </a:pPr>
             <a:r>
@@ -15809,7 +16035,7 @@
         </p:nvSpPr>
         <p:spPr>
           <a:xfrm>
-            <a:off x="9775533" y="4131022"/>
+            <a:off x="9832683" y="4188172"/>
             <a:ext cx="837878" cy="114300"/>
           </a:xfrm>
           <a:prstGeom prst="rect">
@@ -15822,7 +16048,7 @@
           <a:bodyPr wrap="square" lIns="0" tIns="114300" rIns="114300" bIns="0" rtlCol="0" anchor="ctr"/>
           <a:lstStyle/>
           <a:p>
-            <a:pPr marL="0" indent="0" algn="r">
+            <a:pPr algn="r" indent="0" marL="0">
               <a:buNone/>
             </a:pPr>
             <a:r>
@@ -15861,7 +16087,7 @@
           <a:bodyPr wrap="square" lIns="0" tIns="114300" rIns="114300" bIns="0" rtlCol="0" anchor="ctr"/>
           <a:lstStyle/>
           <a:p>
-            <a:pPr marL="0" indent="0" algn="r">
+            <a:pPr algn="r" indent="0" marL="0">
               <a:buNone/>
             </a:pPr>
             <a:r>
@@ -15900,7 +16126,7 @@
           <a:bodyPr wrap="square" lIns="0" tIns="114300" rIns="114300" bIns="0" rtlCol="0" anchor="ctr"/>
           <a:lstStyle/>
           <a:p>
-            <a:pPr marL="0" indent="0" algn="r">
+            <a:pPr algn="r" indent="0" marL="0">
               <a:buNone/>
             </a:pPr>
             <a:r>
@@ -15939,7 +16165,7 @@
           <a:bodyPr wrap="square" lIns="0" tIns="114300" rIns="114300" bIns="0" rtlCol="0" anchor="ctr"/>
           <a:lstStyle/>
           <a:p>
-            <a:pPr marL="0" indent="0" algn="r">
+            <a:pPr algn="r" indent="0" marL="0">
               <a:buNone/>
             </a:pPr>
             <a:r>
@@ -15965,7 +16191,7 @@
         </p:nvSpPr>
         <p:spPr>
           <a:xfrm>
-            <a:off x="9775533" y="4503986"/>
+            <a:off x="9832683" y="4561136"/>
             <a:ext cx="837878" cy="114300"/>
           </a:xfrm>
           <a:prstGeom prst="rect">
@@ -15978,7 +16204,7 @@
           <a:bodyPr wrap="square" lIns="0" tIns="114300" rIns="114300" bIns="0" rtlCol="0" anchor="ctr"/>
           <a:lstStyle/>
           <a:p>
-            <a:pPr marL="0" indent="0" algn="r">
+            <a:pPr algn="r" indent="0" marL="0">
               <a:buNone/>
             </a:pPr>
             <a:r>
@@ -16017,7 +16243,7 @@
           <a:bodyPr wrap="square" lIns="0" tIns="114300" rIns="114300" bIns="0" rtlCol="0" anchor="ctr"/>
           <a:lstStyle/>
           <a:p>
-            <a:pPr marL="0" indent="0" algn="r">
+            <a:pPr algn="r" indent="0" marL="0">
               <a:buNone/>
             </a:pPr>
             <a:r>
@@ -16056,7 +16282,7 @@
           <a:bodyPr wrap="square" lIns="0" tIns="114300" rIns="114300" bIns="0" rtlCol="0" anchor="ctr"/>
           <a:lstStyle/>
           <a:p>
-            <a:pPr marL="0" indent="0" algn="r">
+            <a:pPr algn="r" indent="0" marL="0">
               <a:buNone/>
             </a:pPr>
             <a:r>
@@ -16095,7 +16321,7 @@
           <a:bodyPr wrap="square" lIns="0" tIns="114300" rIns="114300" bIns="0" rtlCol="0" anchor="ctr"/>
           <a:lstStyle/>
           <a:p>
-            <a:pPr marL="0" indent="0" algn="r">
+            <a:pPr algn="r" indent="0" marL="0">
               <a:buNone/>
             </a:pPr>
             <a:r>
@@ -16134,7 +16360,7 @@
           <a:bodyPr wrap="square" lIns="0" tIns="114300" rIns="114300" bIns="0" rtlCol="0" anchor="ctr"/>
           <a:lstStyle/>
           <a:p>
-            <a:pPr marL="0" indent="0" algn="r">
+            <a:pPr algn="r" indent="0" marL="0">
               <a:buNone/>
             </a:pPr>
             <a:r>
@@ -16173,7 +16399,7 @@
           <a:bodyPr wrap="square" lIns="0" tIns="114300" rIns="114300" bIns="0" rtlCol="0" anchor="ctr"/>
           <a:lstStyle/>
           <a:p>
-            <a:pPr marL="0" indent="0" algn="r">
+            <a:pPr algn="r" indent="0" marL="0">
               <a:buNone/>
             </a:pPr>
             <a:r>
@@ -16212,7 +16438,7 @@
           <a:bodyPr wrap="square" lIns="0" tIns="114300" rIns="114300" bIns="0" rtlCol="0" anchor="ctr"/>
           <a:lstStyle/>
           <a:p>
-            <a:pPr marL="0" indent="0" algn="r">
+            <a:pPr algn="r" indent="0" marL="0">
               <a:buNone/>
             </a:pPr>
             <a:r>
@@ -16251,7 +16477,7 @@
           <a:bodyPr wrap="square" lIns="0" tIns="114300" rIns="114300" bIns="0" rtlCol="0" anchor="ctr"/>
           <a:lstStyle/>
           <a:p>
-            <a:pPr marL="0" indent="0" algn="r">
+            <a:pPr algn="r" indent="0" marL="0">
               <a:buNone/>
             </a:pPr>
             <a:r>
@@ -16277,7 +16503,7 @@
         </p:nvSpPr>
         <p:spPr>
           <a:xfrm>
-            <a:off x="4203547" y="4876949"/>
+            <a:off x="4260697" y="4934099"/>
             <a:ext cx="837878" cy="114300"/>
           </a:xfrm>
           <a:prstGeom prst="rect">
@@ -16290,7 +16516,7 @@
           <a:bodyPr wrap="square" lIns="0" tIns="114300" rIns="114300" bIns="0" rtlCol="0" anchor="ctr"/>
           <a:lstStyle/>
           <a:p>
-            <a:pPr marL="0" indent="0" algn="r">
+            <a:pPr algn="r" indent="0" marL="0">
               <a:buNone/>
             </a:pPr>
             <a:r>
@@ -16329,7 +16555,7 @@
           <a:bodyPr wrap="square" lIns="0" tIns="114300" rIns="114300" bIns="0" rtlCol="0" anchor="ctr"/>
           <a:lstStyle/>
           <a:p>
-            <a:pPr marL="0" indent="0" algn="r">
+            <a:pPr algn="r" indent="0" marL="0">
               <a:buNone/>
             </a:pPr>
             <a:r>
@@ -16368,7 +16594,7 @@
           <a:bodyPr wrap="square" lIns="0" tIns="114300" rIns="114300" bIns="0" rtlCol="0" anchor="ctr"/>
           <a:lstStyle/>
           <a:p>
-            <a:pPr marL="0" indent="0" algn="r">
+            <a:pPr algn="r" indent="0" marL="0">
               <a:buNone/>
             </a:pPr>
             <a:r>
@@ -16407,7 +16633,7 @@
           <a:bodyPr wrap="square" lIns="0" tIns="114300" rIns="114300" bIns="0" rtlCol="0" anchor="ctr"/>
           <a:lstStyle/>
           <a:p>
-            <a:pPr marL="0" indent="0" algn="r">
+            <a:pPr algn="r" indent="0" marL="0">
               <a:buNone/>
             </a:pPr>
             <a:r>
@@ -16446,7 +16672,7 @@
           <a:bodyPr wrap="square" lIns="0" tIns="114300" rIns="114300" bIns="0" rtlCol="0" anchor="ctr"/>
           <a:lstStyle/>
           <a:p>
-            <a:pPr marL="0" indent="0" algn="r">
+            <a:pPr algn="r" indent="0" marL="0">
               <a:buNone/>
             </a:pPr>
             <a:r>
@@ -16485,7 +16711,7 @@
           <a:bodyPr wrap="square" lIns="0" tIns="114300" rIns="114300" bIns="0" rtlCol="0" anchor="ctr"/>
           <a:lstStyle/>
           <a:p>
-            <a:pPr marL="0" indent="0" algn="r">
+            <a:pPr algn="r" indent="0" marL="0">
               <a:buNone/>
             </a:pPr>
             <a:r>
@@ -16524,7 +16750,7 @@
           <a:bodyPr wrap="square" lIns="0" tIns="114300" rIns="114300" bIns="0" rtlCol="0" anchor="ctr"/>
           <a:lstStyle/>
           <a:p>
-            <a:pPr marL="0" indent="0" algn="r">
+            <a:pPr algn="r" indent="0" marL="0">
               <a:buNone/>
             </a:pPr>
             <a:r>
@@ -16563,7 +16789,7 @@
           <a:bodyPr wrap="square" lIns="0" tIns="114300" rIns="114300" bIns="0" rtlCol="0" anchor="ctr"/>
           <a:lstStyle/>
           <a:p>
-            <a:pPr marL="0" indent="0" algn="r">
+            <a:pPr algn="r" indent="0" marL="0">
               <a:buNone/>
             </a:pPr>
             <a:r>
@@ -16589,7 +16815,7 @@
         </p:nvSpPr>
         <p:spPr>
           <a:xfrm>
-            <a:off x="9775533" y="4876949"/>
+            <a:off x="9832683" y="4934099"/>
             <a:ext cx="837878" cy="114300"/>
           </a:xfrm>
           <a:prstGeom prst="rect">
@@ -16602,7 +16828,7 @@
           <a:bodyPr wrap="square" lIns="0" tIns="114300" rIns="114300" bIns="0" rtlCol="0" anchor="ctr"/>
           <a:lstStyle/>
           <a:p>
-            <a:pPr marL="0" indent="0" algn="r">
+            <a:pPr algn="r" indent="0" marL="0">
               <a:buNone/>
             </a:pPr>
             <a:r>
@@ -16921,319 +17147,4 @@
     </a:ext>
   </a:extLst>
 </a:theme>
-</file>
-
-<file path=ppt/theme/theme2.xml><?xml version="1.0" encoding="utf-8"?>
-<a:theme xmlns:a="http://schemas.openxmlformats.org/drawingml/2006/main" name="Office Theme">
-  <a:themeElements>
-    <a:clrScheme name="Office">
-      <a:dk1>
-        <a:sysClr val="windowText" lastClr="000000"/>
-      </a:dk1>
-      <a:lt1>
-        <a:sysClr val="window" lastClr="FFFFFF"/>
-      </a:lt1>
-      <a:dk2>
-        <a:srgbClr val="0E2841"/>
-      </a:dk2>
-      <a:lt2>
-        <a:srgbClr val="E8E8E8"/>
-      </a:lt2>
-      <a:accent1>
-        <a:srgbClr val="156082"/>
-      </a:accent1>
-      <a:accent2>
-        <a:srgbClr val="E97132"/>
-      </a:accent2>
-      <a:accent3>
-        <a:srgbClr val="196B24"/>
-      </a:accent3>
-      <a:accent4>
-        <a:srgbClr val="0F9ED5"/>
-      </a:accent4>
-      <a:accent5>
-        <a:srgbClr val="A02B93"/>
-      </a:accent5>
-      <a:accent6>
-        <a:srgbClr val="4EA72E"/>
-      </a:accent6>
-      <a:hlink>
-        <a:srgbClr val="467886"/>
-      </a:hlink>
-      <a:folHlink>
-        <a:srgbClr val="96607D"/>
-      </a:folHlink>
-    </a:clrScheme>
-    <a:fontScheme name="Office">
-      <a:majorFont>
-        <a:latin typeface="Aptos Display" panose="02110004020202020204"/>
-        <a:ea typeface=""/>
-        <a:cs typeface=""/>
-        <a:font script="Jpan" typeface="游ゴシック Light"/>
-        <a:font script="Hang" typeface="맑은 고딕"/>
-        <a:font script="Hans" typeface="等线 Light"/>
-        <a:font script="Hant" typeface="新細明體"/>
-        <a:font script="Arab" typeface="Times New Roman"/>
-        <a:font script="Hebr" typeface="Times New Roman"/>
-        <a:font script="Thai" typeface="Angsana New"/>
-        <a:font script="Ethi" typeface="Nyala"/>
-        <a:font script="Beng" typeface="Vrinda"/>
-        <a:font script="Gujr" typeface="Shruti"/>
-        <a:font script="Khmr" typeface="MoolBoran"/>
-        <a:font script="Knda" typeface="Tunga"/>
-        <a:font script="Guru" typeface="Raavi"/>
-        <a:font script="Cans" typeface="Euphemia"/>
-        <a:font script="Cher" typeface="Plantagenet Cherokee"/>
-        <a:font script="Yiii" typeface="Microsoft Yi Baiti"/>
-        <a:font script="Tibt" typeface="Microsoft Himalaya"/>
-        <a:font script="Thaa" typeface="MV Boli"/>
-        <a:font script="Deva" typeface="Mangal"/>
-        <a:font script="Telu" typeface="Gautami"/>
-        <a:font script="Taml" typeface="Latha"/>
-        <a:font script="Syrc" typeface="Estrangelo Edessa"/>
-        <a:font script="Orya" typeface="Kalinga"/>
-        <a:font script="Mlym" typeface="Kartika"/>
-        <a:font script="Laoo" typeface="DokChampa"/>
-        <a:font script="Sinh" typeface="Iskoola Pota"/>
-        <a:font script="Mong" typeface="Mongolian Baiti"/>
-        <a:font script="Viet" typeface="Times New Roman"/>
-        <a:font script="Uigh" typeface="Microsoft Uighur"/>
-        <a:font script="Geor" typeface="Sylfaen"/>
-        <a:font script="Armn" typeface="Arial"/>
-        <a:font script="Bugi" typeface="Leelawadee UI"/>
-        <a:font script="Bopo" typeface="Microsoft JhengHei"/>
-        <a:font script="Java" typeface="Javanese Text"/>
-        <a:font script="Lisu" typeface="Segoe UI"/>
-        <a:font script="Mymr" typeface="Myanmar Text"/>
-        <a:font script="Nkoo" typeface="Ebrima"/>
-        <a:font script="Olck" typeface="Nirmala UI"/>
-        <a:font script="Osma" typeface="Ebrima"/>
-        <a:font script="Phag" typeface="Phagspa"/>
-        <a:font script="Syrn" typeface="Estrangelo Edessa"/>
-        <a:font script="Syrj" typeface="Estrangelo Edessa"/>
-        <a:font script="Syre" typeface="Estrangelo Edessa"/>
-        <a:font script="Sora" typeface="Nirmala UI"/>
-        <a:font script="Tale" typeface="Microsoft Tai Le"/>
-        <a:font script="Talu" typeface="Microsoft New Tai Lue"/>
-        <a:font script="Tfng" typeface="Ebrima"/>
-      </a:majorFont>
-      <a:minorFont>
-        <a:latin typeface="Aptos" panose="02110004020202020204"/>
-        <a:ea typeface=""/>
-        <a:cs typeface=""/>
-        <a:font script="Jpan" typeface="游ゴシック"/>
-        <a:font script="Hang" typeface="맑은 고딕"/>
-        <a:font script="Hans" typeface="等线"/>
-        <a:font script="Hant" typeface="新細明體"/>
-        <a:font script="Arab" typeface="Arial"/>
-        <a:font script="Hebr" typeface="Arial"/>
-        <a:font script="Thai" typeface="Cordia New"/>
-        <a:font script="Ethi" typeface="Nyala"/>
-        <a:font script="Beng" typeface="Vrinda"/>
-        <a:font script="Gujr" typeface="Shruti"/>
-        <a:font script="Khmr" typeface="DaunPenh"/>
-        <a:font script="Knda" typeface="Tunga"/>
-        <a:font script="Guru" typeface="Raavi"/>
-        <a:font script="Cans" typeface="Euphemia"/>
-        <a:font script="Cher" typeface="Plantagenet Cherokee"/>
-        <a:font script="Yiii" typeface="Microsoft Yi Baiti"/>
-        <a:font script="Tibt" typeface="Microsoft Himalaya"/>
-        <a:font script="Thaa" typeface="MV Boli"/>
-        <a:font script="Deva" typeface="Mangal"/>
-        <a:font script="Telu" typeface="Gautami"/>
-        <a:font script="Taml" typeface="Latha"/>
-        <a:font script="Syrc" typeface="Estrangelo Edessa"/>
-        <a:font script="Orya" typeface="Kalinga"/>
-        <a:font script="Mlym" typeface="Kartika"/>
-        <a:font script="Laoo" typeface="DokChampa"/>
-        <a:font script="Sinh" typeface="Iskoola Pota"/>
-        <a:font script="Mong" typeface="Mongolian Baiti"/>
-        <a:font script="Viet" typeface="Arial"/>
-        <a:font script="Uigh" typeface="Microsoft Uighur"/>
-        <a:font script="Geor" typeface="Sylfaen"/>
-        <a:font script="Armn" typeface="Arial"/>
-        <a:font script="Bugi" typeface="Leelawadee UI"/>
-        <a:font script="Bopo" typeface="Microsoft JhengHei"/>
-        <a:font script="Java" typeface="Javanese Text"/>
-        <a:font script="Lisu" typeface="Segoe UI"/>
-        <a:font script="Mymr" typeface="Myanmar Text"/>
-        <a:font script="Nkoo" typeface="Ebrima"/>
-        <a:font script="Olck" typeface="Nirmala UI"/>
-        <a:font script="Osma" typeface="Ebrima"/>
-        <a:font script="Phag" typeface="Phagspa"/>
-        <a:font script="Syrn" typeface="Estrangelo Edessa"/>
-        <a:font script="Syrj" typeface="Estrangelo Edessa"/>
-        <a:font script="Syre" typeface="Estrangelo Edessa"/>
-        <a:font script="Sora" typeface="Nirmala UI"/>
-        <a:font script="Tale" typeface="Microsoft Tai Le"/>
-        <a:font script="Talu" typeface="Microsoft New Tai Lue"/>
-        <a:font script="Tfng" typeface="Ebrima"/>
-      </a:minorFont>
-    </a:fontScheme>
-    <a:fmtScheme name="Office">
-      <a:fillStyleLst>
-        <a:solidFill>
-          <a:schemeClr val="phClr"/>
-        </a:solidFill>
-        <a:gradFill rotWithShape="1">
-          <a:gsLst>
-            <a:gs pos="0">
-              <a:schemeClr val="phClr">
-                <a:lumMod val="110000"/>
-                <a:satMod val="105000"/>
-                <a:tint val="67000"/>
-              </a:schemeClr>
-            </a:gs>
-            <a:gs pos="50000">
-              <a:schemeClr val="phClr">
-                <a:lumMod val="105000"/>
-                <a:satMod val="103000"/>
-                <a:tint val="73000"/>
-              </a:schemeClr>
-            </a:gs>
-            <a:gs pos="100000">
-              <a:schemeClr val="phClr">
-                <a:lumMod val="105000"/>
-                <a:satMod val="109000"/>
-                <a:tint val="81000"/>
-              </a:schemeClr>
-            </a:gs>
-          </a:gsLst>
-          <a:lin ang="5400000" scaled="0"/>
-        </a:gradFill>
-        <a:gradFill rotWithShape="1">
-          <a:gsLst>
-            <a:gs pos="0">
-              <a:schemeClr val="phClr">
-                <a:satMod val="103000"/>
-                <a:lumMod val="102000"/>
-                <a:tint val="94000"/>
-              </a:schemeClr>
-            </a:gs>
-            <a:gs pos="50000">
-              <a:schemeClr val="phClr">
-                <a:satMod val="110000"/>
-                <a:lumMod val="100000"/>
-                <a:shade val="100000"/>
-              </a:schemeClr>
-            </a:gs>
-            <a:gs pos="100000">
-              <a:schemeClr val="phClr">
-                <a:lumMod val="99000"/>
-                <a:satMod val="120000"/>
-                <a:shade val="78000"/>
-              </a:schemeClr>
-            </a:gs>
-          </a:gsLst>
-          <a:lin ang="5400000" scaled="0"/>
-        </a:gradFill>
-      </a:fillStyleLst>
-      <a:lnStyleLst>
-        <a:ln w="12700" cap="flat" cmpd="sng" algn="ctr">
-          <a:solidFill>
-            <a:schemeClr val="phClr"/>
-          </a:solidFill>
-          <a:prstDash val="solid"/>
-          <a:miter lim="800000"/>
-        </a:ln>
-        <a:ln w="19050" cap="flat" cmpd="sng" algn="ctr">
-          <a:solidFill>
-            <a:schemeClr val="phClr"/>
-          </a:solidFill>
-          <a:prstDash val="solid"/>
-          <a:miter lim="800000"/>
-        </a:ln>
-        <a:ln w="25400" cap="flat" cmpd="sng" algn="ctr">
-          <a:solidFill>
-            <a:schemeClr val="phClr"/>
-          </a:solidFill>
-          <a:prstDash val="solid"/>
-          <a:miter lim="800000"/>
-        </a:ln>
-      </a:lnStyleLst>
-      <a:effectStyleLst>
-        <a:effectStyle>
-          <a:effectLst/>
-        </a:effectStyle>
-        <a:effectStyle>
-          <a:effectLst/>
-        </a:effectStyle>
-        <a:effectStyle>
-          <a:effectLst>
-            <a:outerShdw blurRad="57150" dist="19050" dir="5400000" algn="ctr" rotWithShape="0">
-              <a:srgbClr val="000000">
-                <a:alpha val="63000"/>
-              </a:srgbClr>
-            </a:outerShdw>
-          </a:effectLst>
-        </a:effectStyle>
-      </a:effectStyleLst>
-      <a:bgFillStyleLst>
-        <a:solidFill>
-          <a:schemeClr val="phClr"/>
-        </a:solidFill>
-        <a:solidFill>
-          <a:schemeClr val="phClr">
-            <a:tint val="95000"/>
-            <a:satMod val="170000"/>
-          </a:schemeClr>
-        </a:solidFill>
-        <a:gradFill rotWithShape="1">
-          <a:gsLst>
-            <a:gs pos="0">
-              <a:schemeClr val="phClr">
-                <a:tint val="93000"/>
-                <a:satMod val="150000"/>
-                <a:shade val="98000"/>
-                <a:lumMod val="102000"/>
-              </a:schemeClr>
-            </a:gs>
-            <a:gs pos="50000">
-              <a:schemeClr val="phClr">
-                <a:tint val="98000"/>
-                <a:satMod val="130000"/>
-                <a:shade val="90000"/>
-                <a:lumMod val="103000"/>
-              </a:schemeClr>
-            </a:gs>
-            <a:gs pos="100000">
-              <a:schemeClr val="phClr">
-                <a:shade val="63000"/>
-                <a:satMod val="120000"/>
-              </a:schemeClr>
-            </a:gs>
-          </a:gsLst>
-          <a:lin ang="5400000" scaled="0"/>
-        </a:gradFill>
-      </a:bgFillStyleLst>
-    </a:fmtScheme>
-  </a:themeElements>
-  <a:objectDefaults>
-    <a:lnDef>
-      <a:spPr/>
-      <a:bodyPr/>
-      <a:lstStyle/>
-      <a:style>
-        <a:lnRef idx="2">
-          <a:schemeClr val="accent1"/>
-        </a:lnRef>
-        <a:fillRef idx="0">
-          <a:schemeClr val="accent1"/>
-        </a:fillRef>
-        <a:effectRef idx="1">
-          <a:schemeClr val="accent1"/>
-        </a:effectRef>
-        <a:fontRef idx="minor">
-          <a:schemeClr val="tx1"/>
-        </a:fontRef>
-      </a:style>
-    </a:lnDef>
-  </a:objectDefaults>
-  <a:extraClrSchemeLst/>
-  <a:extLst>
-    <a:ext uri="{05A4C25C-085E-4340-85A3-A5531E510DB2}">
-      <thm15:themeFamily xmlns:thm15="http://schemas.microsoft.com/office/thememl/2012/main" name="Office Theme" id="{2E142A2C-CD16-42D6-873A-C26D2A0506FA}" vid="{1BDDFF52-6CD6-40A5-AB3C-68EB2F1E4D0A}"/>
-    </a:ext>
-  </a:extLst>
-</a:theme>
 </file>